--- a/decks/06-hybrid-retrieval.pptx
+++ b/decks/06-hybrid-retrieval.pptx
@@ -2,19 +2,19 @@
 <file path=ppt/presentation.xml><?xml version="1.0" encoding="utf-8"?>
 <p:presentation xmlns:p="http://schemas.openxmlformats.org/presentationml/2006/main">
   <p:sldMasterIdLst>
-    <p:sldMasterId xmlns:r="http://schemas.openxmlformats.org/officeDocument/2006/relationships" id="2147483648" r:id="R7a3590ff5edd4568"/>
+    <p:sldMasterId xmlns:r="http://schemas.openxmlformats.org/officeDocument/2006/relationships" id="2147483648" r:id="Rff2a6bd326ba4500"/>
   </p:sldMasterIdLst>
   <p:notesMasterIdLst>
-    <p:notesMasterId xmlns:r="http://schemas.openxmlformats.org/officeDocument/2006/relationships" r:id="R3229cb831de24874"/>
+    <p:notesMasterId xmlns:r="http://schemas.openxmlformats.org/officeDocument/2006/relationships" r:id="R2d124c29d7c847f7"/>
   </p:notesMasterIdLst>
   <p:sldIdLst>
-    <p:sldId xmlns:r="http://schemas.openxmlformats.org/officeDocument/2006/relationships" id="256" r:id="Ra17d1ba37f8349c9"/>
-    <p:sldId xmlns:r="http://schemas.openxmlformats.org/officeDocument/2006/relationships" id="257" r:id="R77e5b8d4e9fc4269"/>
-    <p:sldId xmlns:r="http://schemas.openxmlformats.org/officeDocument/2006/relationships" id="258" r:id="R87965c9f0fd74b91"/>
-    <p:sldId xmlns:r="http://schemas.openxmlformats.org/officeDocument/2006/relationships" id="259" r:id="Rf390063c12ca482e"/>
-    <p:sldId xmlns:r="http://schemas.openxmlformats.org/officeDocument/2006/relationships" id="260" r:id="R4032437350f54019"/>
-    <p:sldId xmlns:r="http://schemas.openxmlformats.org/officeDocument/2006/relationships" id="261" r:id="Ra66a7cae931a408d"/>
-    <p:sldId xmlns:r="http://schemas.openxmlformats.org/officeDocument/2006/relationships" id="262" r:id="Rca7c2c90f2e0491d"/>
+    <p:sldId xmlns:r="http://schemas.openxmlformats.org/officeDocument/2006/relationships" id="256" r:id="Rb89dd0c19e57470d"/>
+    <p:sldId xmlns:r="http://schemas.openxmlformats.org/officeDocument/2006/relationships" id="257" r:id="R2136b62ef76d4267"/>
+    <p:sldId xmlns:r="http://schemas.openxmlformats.org/officeDocument/2006/relationships" id="258" r:id="Rc088ebefff85449b"/>
+    <p:sldId xmlns:r="http://schemas.openxmlformats.org/officeDocument/2006/relationships" id="259" r:id="R220e4196087a4e81"/>
+    <p:sldId xmlns:r="http://schemas.openxmlformats.org/officeDocument/2006/relationships" id="260" r:id="R04b7aede4f354d2c"/>
+    <p:sldId xmlns:r="http://schemas.openxmlformats.org/officeDocument/2006/relationships" id="261" r:id="Re353eb7811e940c2"/>
+    <p:sldId xmlns:r="http://schemas.openxmlformats.org/officeDocument/2006/relationships" id="262" r:id="Rd10b2f14c8ff49e9"/>
   </p:sldIdLst>
   <p:sldSz cx="15240000" cy="8572500"/>
   <p:notesSz cx="6858000" cy="9144000"/>
@@ -1091,7 +1091,7 @@
   </p:cSld>
   <p:clrMap bg1="lt1" tx1="dk1" bg2="lt2" tx2="dk2" accent1="accent1" accent2="accent2" accent3="accent3" accent4="accent4" accent5="accent5" accent6="accent6" hlink="hlink" folHlink="folHlink"/>
   <p:sldLayoutIdLst>
-    <p:sldLayoutId xmlns:r="http://schemas.openxmlformats.org/officeDocument/2006/relationships" id="2147483649" r:id="Rb3aa1bdeb21b432f"/>
+    <p:sldLayoutId xmlns:r="http://schemas.openxmlformats.org/officeDocument/2006/relationships" id="2147483649" r:id="R48334c3f187d4adf"/>
   </p:sldLayoutIdLst>
   <p:txStyles>
     <p:titleStyle>
@@ -2039,7 +2039,7 @@
         </p:spPr>
         <p:txBody>
           <a:bodyPr xmlns:a="http://schemas.openxmlformats.org/drawingml/2006/main" wrap="square" lIns="0" tIns="0" rIns="0" bIns="0" anchor="ctr">
-            <a:normAutofit fontScale="100000"/>
+            <a:noAutofit/>
           </a:bodyPr>
           <a:lstStyle xmlns:a="http://schemas.openxmlformats.org/drawingml/2006/main"/>
           <a:p xmlns:a="http://schemas.openxmlformats.org/drawingml/2006/main">
@@ -2058,7 +2058,7 @@
               </a:defRPr>
             </a:pPr>
             <a:r>
-              <a:rPr sz="1425" b="1">
+              <a:rPr sz="1800" b="1">
                 <a:solidFill>
                   <a:srgbClr val="1F40CB"/>
                 </a:solidFill>
@@ -2163,7 +2163,7 @@
         </p:spPr>
         <p:txBody>
           <a:bodyPr xmlns:a="http://schemas.openxmlformats.org/drawingml/2006/main" wrap="square" lIns="0" tIns="0" rIns="0" bIns="0" anchor="ctr">
-            <a:normAutofit fontScale="100000"/>
+            <a:noAutofit/>
           </a:bodyPr>
           <a:lstStyle xmlns:a="http://schemas.openxmlformats.org/drawingml/2006/main"/>
           <a:p xmlns:a="http://schemas.openxmlformats.org/drawingml/2006/main">
@@ -2182,7 +2182,7 @@
               </a:defRPr>
             </a:pPr>
             <a:r>
-              <a:rPr sz="1275" b="1">
+              <a:rPr sz="1800" b="1">
                 <a:solidFill>
                   <a:srgbClr val="1F40CB"/>
                 </a:solidFill>
@@ -2551,7 +2551,7 @@
         </p:spPr>
         <p:txBody>
           <a:bodyPr xmlns:a="http://schemas.openxmlformats.org/drawingml/2006/main" wrap="square" lIns="0" tIns="0" rIns="0" bIns="0" anchor="ctr">
-            <a:normAutofit fontScale="100000"/>
+            <a:noAutofit/>
           </a:bodyPr>
           <a:lstStyle xmlns:a="http://schemas.openxmlformats.org/drawingml/2006/main"/>
           <a:p xmlns:a="http://schemas.openxmlformats.org/drawingml/2006/main">
@@ -2570,7 +2570,7 @@
               </a:defRPr>
             </a:pPr>
             <a:r>
-              <a:rPr sz="1275" b="1">
+              <a:rPr sz="1800" b="1">
                 <a:solidFill>
                   <a:srgbClr val="1F40CB"/>
                 </a:solidFill>
@@ -2973,7 +2973,7 @@
       </p:sp>
       <p:cxnSp>
         <p:nvCxnSpPr>
-          <p:cNvPr id="110" name=""/>
+          <p:cNvPr id="230" name=""/>
           <p:cNvCxnSpPr>
             <a:stCxn xmlns:a="http://schemas.openxmlformats.org/drawingml/2006/main" id="14" idx="2"/>
             <a:endCxn xmlns:a="http://schemas.openxmlformats.org/drawingml/2006/main" id="16" idx="0"/>
@@ -2999,7 +2999,7 @@
       </p:cxnSp>
       <p:cxnSp>
         <p:nvCxnSpPr>
-          <p:cNvPr id="111" name=""/>
+          <p:cNvPr id="231" name=""/>
           <p:cNvCxnSpPr>
             <a:stCxn xmlns:a="http://schemas.openxmlformats.org/drawingml/2006/main" id="14" idx="2"/>
             <a:endCxn xmlns:a="http://schemas.openxmlformats.org/drawingml/2006/main" id="18" idx="0"/>
@@ -3025,7 +3025,7 @@
       </p:cxnSp>
       <p:cxnSp>
         <p:nvCxnSpPr>
-          <p:cNvPr id="112" name=""/>
+          <p:cNvPr id="232" name=""/>
           <p:cNvCxnSpPr>
             <a:stCxn xmlns:a="http://schemas.openxmlformats.org/drawingml/2006/main" id="14" idx="2"/>
             <a:endCxn xmlns:a="http://schemas.openxmlformats.org/drawingml/2006/main" id="20" idx="0"/>
@@ -3141,7 +3141,7 @@
         </p:spPr>
         <p:txBody>
           <a:bodyPr xmlns:a="http://schemas.openxmlformats.org/drawingml/2006/main" wrap="square" lIns="0" tIns="0" rIns="0" bIns="0" anchor="ctr">
-            <a:normAutofit fontScale="100000"/>
+            <a:noAutofit/>
           </a:bodyPr>
           <a:lstStyle xmlns:a="http://schemas.openxmlformats.org/drawingml/2006/main"/>
           <a:p xmlns:a="http://schemas.openxmlformats.org/drawingml/2006/main">
@@ -3160,7 +3160,7 @@
               </a:defRPr>
             </a:pPr>
             <a:r>
-              <a:rPr sz="1275" b="1">
+              <a:rPr sz="1800" b="1">
                 <a:solidFill>
                   <a:srgbClr val="1F40CB"/>
                 </a:solidFill>
@@ -3238,7 +3238,7 @@
         </p:spPr>
         <p:txBody>
           <a:bodyPr xmlns:a="http://schemas.openxmlformats.org/drawingml/2006/main" wrap="square" lIns="0" tIns="0" rIns="0" bIns="0" anchor="ctr">
-            <a:normAutofit fontScale="100000"/>
+            <a:noAutofit/>
           </a:bodyPr>
           <a:lstStyle xmlns:a="http://schemas.openxmlformats.org/drawingml/2006/main"/>
           <a:p xmlns:a="http://schemas.openxmlformats.org/drawingml/2006/main">
@@ -3257,7 +3257,7 @@
               </a:defRPr>
             </a:pPr>
             <a:r>
-              <a:rPr sz="1350" b="1">
+              <a:rPr sz="1800" b="1">
                 <a:solidFill>
                   <a:srgbClr val="1F40CB"/>
                 </a:solidFill>
@@ -3383,8 +3383,8 @@
         </p:nvSpPr>
         <p:spPr>
           <a:xfrm xmlns:a="http://schemas.openxmlformats.org/drawingml/2006/main">
-            <a:off x="10953750" y="4476750"/>
-            <a:ext cx="2952750" cy="266700"/>
+            <a:off x="10953750" y="4457700"/>
+            <a:ext cx="2952750" cy="304800"/>
           </a:xfrm>
           <a:prstGeom xmlns:a="http://schemas.openxmlformats.org/drawingml/2006/main" prst="rect">
             <a:avLst/>
@@ -3397,7 +3397,7 @@
         </p:spPr>
         <p:txBody>
           <a:bodyPr xmlns:a="http://schemas.openxmlformats.org/drawingml/2006/main" wrap="square" lIns="0" tIns="0" rIns="0" bIns="0" anchor="ctr">
-            <a:normAutofit fontScale="100000"/>
+            <a:noAutofit/>
           </a:bodyPr>
           <a:lstStyle xmlns:a="http://schemas.openxmlformats.org/drawingml/2006/main"/>
           <a:p xmlns:a="http://schemas.openxmlformats.org/drawingml/2006/main">
@@ -3416,7 +3416,7 @@
               </a:defRPr>
             </a:pPr>
             <a:r>
-              <a:rPr sz="1200" b="1">
+              <a:rPr sz="1800" b="1">
                 <a:solidFill>
                   <a:srgbClr val="F07D00"/>
                 </a:solidFill>
@@ -3988,7 +3988,7 @@
         </p:spPr>
         <p:txBody>
           <a:bodyPr xmlns:a="http://schemas.openxmlformats.org/drawingml/2006/main" wrap="square" lIns="0" tIns="0" rIns="0" bIns="0" anchor="ctr">
-            <a:normAutofit fontScale="100000"/>
+            <a:noAutofit/>
           </a:bodyPr>
           <a:lstStyle xmlns:a="http://schemas.openxmlformats.org/drawingml/2006/main"/>
           <a:p xmlns:a="http://schemas.openxmlformats.org/drawingml/2006/main">
@@ -4007,7 +4007,7 @@
               </a:defRPr>
             </a:pPr>
             <a:r>
-              <a:rPr sz="1425" b="1">
+              <a:rPr sz="1800" b="1">
                 <a:solidFill>
                   <a:srgbClr val="1F40CB"/>
                 </a:solidFill>
@@ -4112,7 +4112,7 @@
         </p:spPr>
         <p:txBody>
           <a:bodyPr xmlns:a="http://schemas.openxmlformats.org/drawingml/2006/main" wrap="square" lIns="0" tIns="0" rIns="0" bIns="0" anchor="ctr">
-            <a:normAutofit fontScale="100000"/>
+            <a:noAutofit/>
           </a:bodyPr>
           <a:lstStyle xmlns:a="http://schemas.openxmlformats.org/drawingml/2006/main"/>
           <a:p xmlns:a="http://schemas.openxmlformats.org/drawingml/2006/main">
@@ -4131,7 +4131,7 @@
               </a:defRPr>
             </a:pPr>
             <a:r>
-              <a:rPr sz="1350" b="1">
+              <a:rPr sz="1800" b="1">
                 <a:solidFill>
                   <a:srgbClr val="F07D00"/>
                 </a:solidFill>
@@ -4139,7 +4139,7 @@
                 <a:ea typeface="Calibri"/>
                 <a:cs typeface="Calibri"/>
               </a:rPr>
-              <a:t>KEYWORD · EXACT TERMS</a:t>
+              <a:t>KEYWORD · EXACT</a:t>
             </a:r>
           </a:p>
         </p:txBody>
@@ -4236,7 +4236,7 @@
                 <a:ea typeface="Courier New"/>
                 <a:cs typeface="Courier New"/>
               </a:rPr>
-              <a:t>R1  SU-MARGIN  18.7%</a:t>
+              <a:t>R1  SU-TABLE  18.7%</a:t>
             </a:r>
           </a:p>
           <a:p xmlns:a="http://schemas.openxmlformats.org/drawingml/2006/main">
@@ -4395,7 +4395,7 @@
         </p:spPr>
         <p:txBody>
           <a:bodyPr xmlns:a="http://schemas.openxmlformats.org/drawingml/2006/main" wrap="square" lIns="0" tIns="0" rIns="0" bIns="0" anchor="ctr">
-            <a:normAutofit fontScale="100000"/>
+            <a:noAutofit/>
           </a:bodyPr>
           <a:lstStyle xmlns:a="http://schemas.openxmlformats.org/drawingml/2006/main"/>
           <a:p xmlns:a="http://schemas.openxmlformats.org/drawingml/2006/main">
@@ -4414,7 +4414,7 @@
               </a:defRPr>
             </a:pPr>
             <a:r>
-              <a:rPr sz="1575" b="1">
+              <a:rPr sz="1800" b="1">
                 <a:solidFill>
                   <a:srgbClr val="F07D00"/>
                 </a:solidFill>
@@ -4457,7 +4457,7 @@
         </p:spPr>
         <p:txBody>
           <a:bodyPr xmlns:a="http://schemas.openxmlformats.org/drawingml/2006/main" wrap="square" lIns="0" tIns="0" rIns="0" bIns="0" anchor="ctr">
-            <a:normAutofit fontScale="100000"/>
+            <a:noAutofit/>
           </a:bodyPr>
           <a:lstStyle xmlns:a="http://schemas.openxmlformats.org/drawingml/2006/main"/>
           <a:p xmlns:a="http://schemas.openxmlformats.org/drawingml/2006/main">
@@ -4476,7 +4476,7 @@
               </a:defRPr>
             </a:pPr>
             <a:r>
-              <a:rPr sz="1350" b="1">
+              <a:rPr sz="1800" b="1">
                 <a:solidFill>
                   <a:srgbClr val="2E8B57"/>
                 </a:solidFill>
@@ -4554,7 +4554,7 @@
         </p:spPr>
         <p:txBody>
           <a:bodyPr xmlns:a="http://schemas.openxmlformats.org/drawingml/2006/main" wrap="square" lIns="0" tIns="0" rIns="0" bIns="0" anchor="ctr">
-            <a:normAutofit fontScale="100000"/>
+            <a:noAutofit/>
           </a:bodyPr>
           <a:lstStyle xmlns:a="http://schemas.openxmlformats.org/drawingml/2006/main"/>
           <a:p xmlns:a="http://schemas.openxmlformats.org/drawingml/2006/main">
@@ -4573,7 +4573,7 @@
               </a:defRPr>
             </a:pPr>
             <a:r>
-              <a:rPr sz="1350" b="1">
+              <a:rPr sz="1800" b="1">
                 <a:solidFill>
                   <a:srgbClr val="051C2A"/>
                 </a:solidFill>
@@ -4651,7 +4651,7 @@
         </p:spPr>
         <p:txBody>
           <a:bodyPr xmlns:a="http://schemas.openxmlformats.org/drawingml/2006/main" wrap="square" lIns="0" tIns="0" rIns="0" bIns="0" anchor="ctr">
-            <a:normAutofit fontScale="100000"/>
+            <a:noAutofit/>
           </a:bodyPr>
           <a:lstStyle xmlns:a="http://schemas.openxmlformats.org/drawingml/2006/main"/>
           <a:p xmlns:a="http://schemas.openxmlformats.org/drawingml/2006/main">
@@ -4670,7 +4670,7 @@
               </a:defRPr>
             </a:pPr>
             <a:r>
-              <a:rPr sz="1350" b="1">
+              <a:rPr sz="1800" b="1">
                 <a:solidFill>
                   <a:srgbClr val="051C2A"/>
                 </a:solidFill>
@@ -4748,7 +4748,7 @@
         </p:spPr>
         <p:txBody>
           <a:bodyPr xmlns:a="http://schemas.openxmlformats.org/drawingml/2006/main" wrap="square" lIns="0" tIns="0" rIns="0" bIns="0" anchor="ctr">
-            <a:normAutofit fontScale="100000"/>
+            <a:noAutofit/>
           </a:bodyPr>
           <a:lstStyle xmlns:a="http://schemas.openxmlformats.org/drawingml/2006/main"/>
           <a:p xmlns:a="http://schemas.openxmlformats.org/drawingml/2006/main">
@@ -4767,7 +4767,7 @@
               </a:defRPr>
             </a:pPr>
             <a:r>
-              <a:rPr sz="1350" b="1">
+              <a:rPr sz="1800" b="1">
                 <a:solidFill>
                   <a:srgbClr val="051C2A"/>
                 </a:solidFill>
@@ -5419,7 +5419,7 @@
         </p:spPr>
         <p:txBody>
           <a:bodyPr xmlns:a="http://schemas.openxmlformats.org/drawingml/2006/main" wrap="square" lIns="0" tIns="0" rIns="0" bIns="0" anchor="ctr">
-            <a:normAutofit fontScale="100000"/>
+            <a:noAutofit/>
           </a:bodyPr>
           <a:lstStyle xmlns:a="http://schemas.openxmlformats.org/drawingml/2006/main"/>
           <a:p xmlns:a="http://schemas.openxmlformats.org/drawingml/2006/main">
@@ -5438,7 +5438,7 @@
               </a:defRPr>
             </a:pPr>
             <a:r>
-              <a:rPr sz="1575" b="1">
+              <a:rPr sz="1800" b="1">
                 <a:solidFill>
                   <a:srgbClr val="2E8B57"/>
                 </a:solidFill>
@@ -5514,7 +5514,7 @@
         </p:spPr>
         <p:txBody>
           <a:bodyPr xmlns:a="http://schemas.openxmlformats.org/drawingml/2006/main" wrap="square" lIns="0" tIns="0" rIns="0" bIns="0" anchor="ctr">
-            <a:normAutofit fontScale="100000"/>
+            <a:noAutofit/>
           </a:bodyPr>
           <a:lstStyle xmlns:a="http://schemas.openxmlformats.org/drawingml/2006/main"/>
           <a:p xmlns:a="http://schemas.openxmlformats.org/drawingml/2006/main">
@@ -5533,7 +5533,7 @@
               </a:defRPr>
             </a:pPr>
             <a:r>
-              <a:rPr sz="1275" b="1">
+              <a:rPr sz="1800" b="1">
                 <a:solidFill>
                   <a:srgbClr val="1F40CB"/>
                 </a:solidFill>
@@ -5576,7 +5576,7 @@
         </p:spPr>
         <p:txBody>
           <a:bodyPr xmlns:a="http://schemas.openxmlformats.org/drawingml/2006/main" wrap="square" lIns="0" tIns="0" rIns="0" bIns="0" anchor="ctr">
-            <a:normAutofit fontScale="100000"/>
+            <a:noAutofit/>
           </a:bodyPr>
           <a:lstStyle xmlns:a="http://schemas.openxmlformats.org/drawingml/2006/main"/>
           <a:p xmlns:a="http://schemas.openxmlformats.org/drawingml/2006/main">
@@ -5595,7 +5595,7 @@
               </a:defRPr>
             </a:pPr>
             <a:r>
-              <a:rPr sz="1275" b="0">
+              <a:rPr sz="1800" b="0">
                 <a:solidFill>
                   <a:srgbClr val="64748B"/>
                 </a:solidFill>
@@ -5700,7 +5700,7 @@
         </p:spPr>
         <p:txBody>
           <a:bodyPr xmlns:a="http://schemas.openxmlformats.org/drawingml/2006/main" wrap="square" lIns="0" tIns="0" rIns="0" bIns="0" anchor="ctr">
-            <a:normAutofit fontScale="100000"/>
+            <a:noAutofit/>
           </a:bodyPr>
           <a:lstStyle xmlns:a="http://schemas.openxmlformats.org/drawingml/2006/main"/>
           <a:p xmlns:a="http://schemas.openxmlformats.org/drawingml/2006/main">
@@ -5719,7 +5719,7 @@
               </a:defRPr>
             </a:pPr>
             <a:r>
-              <a:rPr sz="1275" b="0">
+              <a:rPr sz="1800" b="0">
                 <a:solidFill>
                   <a:srgbClr val="64748B"/>
                 </a:solidFill>
@@ -5824,7 +5824,7 @@
         </p:spPr>
         <p:txBody>
           <a:bodyPr xmlns:a="http://schemas.openxmlformats.org/drawingml/2006/main" wrap="square" lIns="0" tIns="0" rIns="0" bIns="0" anchor="ctr">
-            <a:normAutofit fontScale="100000"/>
+            <a:noAutofit/>
           </a:bodyPr>
           <a:lstStyle xmlns:a="http://schemas.openxmlformats.org/drawingml/2006/main"/>
           <a:p xmlns:a="http://schemas.openxmlformats.org/drawingml/2006/main">
@@ -5843,7 +5843,7 @@
               </a:defRPr>
             </a:pPr>
             <a:r>
-              <a:rPr sz="1275" b="0">
+              <a:rPr sz="1800" b="0">
                 <a:solidFill>
                   <a:srgbClr val="64748B"/>
                 </a:solidFill>
@@ -5948,7 +5948,7 @@
         </p:spPr>
         <p:txBody>
           <a:bodyPr xmlns:a="http://schemas.openxmlformats.org/drawingml/2006/main" wrap="square" lIns="0" tIns="0" rIns="0" bIns="0" anchor="ctr">
-            <a:normAutofit fontScale="100000"/>
+            <a:noAutofit/>
           </a:bodyPr>
           <a:lstStyle xmlns:a="http://schemas.openxmlformats.org/drawingml/2006/main"/>
           <a:p xmlns:a="http://schemas.openxmlformats.org/drawingml/2006/main">
@@ -5967,7 +5967,7 @@
               </a:defRPr>
             </a:pPr>
             <a:r>
-              <a:rPr sz="1275" b="0">
+              <a:rPr sz="1800" b="0">
                 <a:solidFill>
                   <a:srgbClr val="64748B"/>
                 </a:solidFill>
@@ -6353,7 +6353,7 @@
         </p:spPr>
         <p:txBody>
           <a:bodyPr xmlns:a="http://schemas.openxmlformats.org/drawingml/2006/main" wrap="square" lIns="0" tIns="0" rIns="0" bIns="0" anchor="ctr">
-            <a:normAutofit fontScale="100000"/>
+            <a:noAutofit/>
           </a:bodyPr>
           <a:lstStyle xmlns:a="http://schemas.openxmlformats.org/drawingml/2006/main"/>
           <a:p xmlns:a="http://schemas.openxmlformats.org/drawingml/2006/main">
@@ -6372,7 +6372,7 @@
               </a:defRPr>
             </a:pPr>
             <a:r>
-              <a:rPr sz="1425" b="1">
+              <a:rPr sz="1800" b="1">
                 <a:solidFill>
                   <a:srgbClr val="1F40CB"/>
                 </a:solidFill>
@@ -6779,8 +6779,8 @@
         </p:nvSpPr>
         <p:spPr>
           <a:xfrm xmlns:a="http://schemas.openxmlformats.org/drawingml/2006/main">
-            <a:off x="1257300" y="2838450"/>
-            <a:ext cx="2781300" cy="266700"/>
+            <a:off x="1257300" y="2819400"/>
+            <a:ext cx="2781300" cy="304800"/>
           </a:xfrm>
           <a:prstGeom xmlns:a="http://schemas.openxmlformats.org/drawingml/2006/main" prst="rect">
             <a:avLst/>
@@ -6793,7 +6793,7 @@
         </p:spPr>
         <p:txBody>
           <a:bodyPr xmlns:a="http://schemas.openxmlformats.org/drawingml/2006/main" wrap="square" lIns="0" tIns="0" rIns="0" bIns="0" anchor="ctr">
-            <a:normAutofit fontScale="100000"/>
+            <a:noAutofit/>
           </a:bodyPr>
           <a:lstStyle xmlns:a="http://schemas.openxmlformats.org/drawingml/2006/main"/>
           <a:p xmlns:a="http://schemas.openxmlformats.org/drawingml/2006/main">
@@ -6812,7 +6812,7 @@
               </a:defRPr>
             </a:pPr>
             <a:r>
-              <a:rPr sz="1200" b="1">
+              <a:rPr sz="1800" b="1">
                 <a:solidFill>
                   <a:srgbClr val="1F40CB"/>
                 </a:solidFill>
@@ -6938,8 +6938,8 @@
         </p:nvSpPr>
         <p:spPr>
           <a:xfrm xmlns:a="http://schemas.openxmlformats.org/drawingml/2006/main">
-            <a:off x="1257300" y="4038600"/>
-            <a:ext cx="2781300" cy="266700"/>
+            <a:off x="1257300" y="4019550"/>
+            <a:ext cx="2781300" cy="304800"/>
           </a:xfrm>
           <a:prstGeom xmlns:a="http://schemas.openxmlformats.org/drawingml/2006/main" prst="rect">
             <a:avLst/>
@@ -6952,7 +6952,7 @@
         </p:spPr>
         <p:txBody>
           <a:bodyPr xmlns:a="http://schemas.openxmlformats.org/drawingml/2006/main" wrap="square" lIns="0" tIns="0" rIns="0" bIns="0" anchor="ctr">
-            <a:normAutofit fontScale="100000"/>
+            <a:noAutofit/>
           </a:bodyPr>
           <a:lstStyle xmlns:a="http://schemas.openxmlformats.org/drawingml/2006/main"/>
           <a:p xmlns:a="http://schemas.openxmlformats.org/drawingml/2006/main">
@@ -6971,7 +6971,7 @@
               </a:defRPr>
             </a:pPr>
             <a:r>
-              <a:rPr sz="1200" b="1">
+              <a:rPr sz="1800" b="1">
                 <a:solidFill>
                   <a:srgbClr val="1F40CB"/>
                 </a:solidFill>
@@ -7097,8 +7097,8 @@
         </p:nvSpPr>
         <p:spPr>
           <a:xfrm xmlns:a="http://schemas.openxmlformats.org/drawingml/2006/main">
-            <a:off x="1257300" y="5238750"/>
-            <a:ext cx="2781300" cy="266700"/>
+            <a:off x="1257300" y="5219700"/>
+            <a:ext cx="2781300" cy="304800"/>
           </a:xfrm>
           <a:prstGeom xmlns:a="http://schemas.openxmlformats.org/drawingml/2006/main" prst="rect">
             <a:avLst/>
@@ -7111,7 +7111,7 @@
         </p:spPr>
         <p:txBody>
           <a:bodyPr xmlns:a="http://schemas.openxmlformats.org/drawingml/2006/main" wrap="square" lIns="0" tIns="0" rIns="0" bIns="0" anchor="ctr">
-            <a:normAutofit fontScale="100000"/>
+            <a:noAutofit/>
           </a:bodyPr>
           <a:lstStyle xmlns:a="http://schemas.openxmlformats.org/drawingml/2006/main"/>
           <a:p xmlns:a="http://schemas.openxmlformats.org/drawingml/2006/main">
@@ -7130,7 +7130,7 @@
               </a:defRPr>
             </a:pPr>
             <a:r>
-              <a:rPr sz="1200" b="1">
+              <a:rPr sz="1800" b="1">
                 <a:solidFill>
                   <a:srgbClr val="1F40CB"/>
                 </a:solidFill>
@@ -7256,8 +7256,8 @@
         </p:nvSpPr>
         <p:spPr>
           <a:xfrm xmlns:a="http://schemas.openxmlformats.org/drawingml/2006/main">
-            <a:off x="11201400" y="2838450"/>
-            <a:ext cx="2781300" cy="266700"/>
+            <a:off x="11201400" y="2819400"/>
+            <a:ext cx="2781300" cy="304800"/>
           </a:xfrm>
           <a:prstGeom xmlns:a="http://schemas.openxmlformats.org/drawingml/2006/main" prst="rect">
             <a:avLst/>
@@ -7270,7 +7270,7 @@
         </p:spPr>
         <p:txBody>
           <a:bodyPr xmlns:a="http://schemas.openxmlformats.org/drawingml/2006/main" wrap="square" lIns="0" tIns="0" rIns="0" bIns="0" anchor="ctr">
-            <a:normAutofit fontScale="100000"/>
+            <a:noAutofit/>
           </a:bodyPr>
           <a:lstStyle xmlns:a="http://schemas.openxmlformats.org/drawingml/2006/main"/>
           <a:p xmlns:a="http://schemas.openxmlformats.org/drawingml/2006/main">
@@ -7289,7 +7289,7 @@
               </a:defRPr>
             </a:pPr>
             <a:r>
-              <a:rPr sz="1200" b="1">
+              <a:rPr sz="1800" b="1">
                 <a:solidFill>
                   <a:srgbClr val="1F40CB"/>
                 </a:solidFill>
@@ -7415,8 +7415,8 @@
         </p:nvSpPr>
         <p:spPr>
           <a:xfrm xmlns:a="http://schemas.openxmlformats.org/drawingml/2006/main">
-            <a:off x="11201400" y="4038600"/>
-            <a:ext cx="2781300" cy="266700"/>
+            <a:off x="11201400" y="4019550"/>
+            <a:ext cx="2781300" cy="304800"/>
           </a:xfrm>
           <a:prstGeom xmlns:a="http://schemas.openxmlformats.org/drawingml/2006/main" prst="rect">
             <a:avLst/>
@@ -7429,7 +7429,7 @@
         </p:spPr>
         <p:txBody>
           <a:bodyPr xmlns:a="http://schemas.openxmlformats.org/drawingml/2006/main" wrap="square" lIns="0" tIns="0" rIns="0" bIns="0" anchor="ctr">
-            <a:normAutofit fontScale="100000"/>
+            <a:noAutofit/>
           </a:bodyPr>
           <a:lstStyle xmlns:a="http://schemas.openxmlformats.org/drawingml/2006/main"/>
           <a:p xmlns:a="http://schemas.openxmlformats.org/drawingml/2006/main">
@@ -7448,7 +7448,7 @@
               </a:defRPr>
             </a:pPr>
             <a:r>
-              <a:rPr sz="1200" b="1">
+              <a:rPr sz="1800" b="1">
                 <a:solidFill>
                   <a:srgbClr val="1F40CB"/>
                 </a:solidFill>
@@ -7574,8 +7574,70 @@
         </p:nvSpPr>
         <p:spPr>
           <a:xfrm xmlns:a="http://schemas.openxmlformats.org/drawingml/2006/main">
-            <a:off x="11201400" y="5238750"/>
-            <a:ext cx="2781300" cy="266700"/>
+            <a:off x="11201400" y="5219700"/>
+            <a:ext cx="2781300" cy="304800"/>
+          </a:xfrm>
+          <a:prstGeom xmlns:a="http://schemas.openxmlformats.org/drawingml/2006/main" prst="rect">
+            <a:avLst/>
+          </a:prstGeom>
+          <a:noFill xmlns:a="http://schemas.openxmlformats.org/drawingml/2006/main"/>
+          <a:ln xmlns:a="http://schemas.openxmlformats.org/drawingml/2006/main" w="0">
+            <a:noFill/>
+            <a:prstDash val="solid"/>
+          </a:ln>
+        </p:spPr>
+        <p:txBody>
+          <a:bodyPr xmlns:a="http://schemas.openxmlformats.org/drawingml/2006/main" wrap="square" lIns="0" tIns="0" rIns="0" bIns="0" anchor="ctr">
+            <a:noAutofit/>
+          </a:bodyPr>
+          <a:lstStyle xmlns:a="http://schemas.openxmlformats.org/drawingml/2006/main"/>
+          <a:p xmlns:a="http://schemas.openxmlformats.org/drawingml/2006/main">
+            <a:pPr algn="l">
+              <a:lnSpc>
+                <a:spcPct val="100000"/>
+              </a:lnSpc>
+              <a:buNone/>
+              <a:defRPr sz="1200" b="1">
+                <a:solidFill>
+                  <a:srgbClr val="1F40CB"/>
+                </a:solidFill>
+                <a:latin typeface="Calibri"/>
+                <a:ea typeface="Calibri"/>
+                <a:cs typeface="Calibri"/>
+              </a:defRPr>
+            </a:pPr>
+            <a:r>
+              <a:rPr sz="1800" b="1">
+                <a:solidFill>
+                  <a:srgbClr val="1F40CB"/>
+                </a:solidFill>
+                <a:latin typeface="Calibri"/>
+                <a:ea typeface="Calibri"/>
+                <a:cs typeface="Calibri"/>
+              </a:rPr>
+              <a:t>ABSTAIN</a:t>
+            </a:r>
+          </a:p>
+        </p:txBody>
+      </p:sp>
+      <p:sp>
+        <p:nvSpPr>
+          <p:cNvPr id="25" name="">
+            <a:extLst xmlns:a="http://schemas.openxmlformats.org/drawingml/2006/main">
+              <a:ext uri="{FF2B5EF4-FFF2-40B4-BE49-F238E27FC236}">
+                <a16:creationId xmlns:a16="http://schemas.microsoft.com/office/drawing/2014/main" id="{4B137DBE-0373-4B7D-89B2-62CEDDD2AF0A}"/>
+              </a:ext>
+            </a:extLst>
+          </p:cNvPr>
+          <p:cNvSpPr>
+            <a:spLocks xmlns:a="http://schemas.openxmlformats.org/drawingml/2006/main" noGrp="1"/>
+          </p:cNvSpPr>
+          <p:nvPr/>
+        </p:nvSpPr>
+        <p:spPr>
+          <a:xfrm xmlns:a="http://schemas.openxmlformats.org/drawingml/2006/main">
+            <a:off x="11201400" y="5524500"/>
+            <a:ext cx="2781300" cy="361950"/>
           </a:xfrm>
           <a:prstGeom xmlns:a="http://schemas.openxmlformats.org/drawingml/2006/main" prst="rect">
             <a:avLst/>
@@ -7597,68 +7659,6 @@
                 <a:spcPct val="100000"/>
               </a:lnSpc>
               <a:buNone/>
-              <a:defRPr sz="1200" b="1">
-                <a:solidFill>
-                  <a:srgbClr val="1F40CB"/>
-                </a:solidFill>
-                <a:latin typeface="Calibri"/>
-                <a:ea typeface="Calibri"/>
-                <a:cs typeface="Calibri"/>
-              </a:defRPr>
-            </a:pPr>
-            <a:r>
-              <a:rPr sz="1200" b="1">
-                <a:solidFill>
-                  <a:srgbClr val="1F40CB"/>
-                </a:solidFill>
-                <a:latin typeface="Calibri"/>
-                <a:ea typeface="Calibri"/>
-                <a:cs typeface="Calibri"/>
-              </a:rPr>
-              <a:t>ABSTAIN</a:t>
-            </a:r>
-          </a:p>
-        </p:txBody>
-      </p:sp>
-      <p:sp>
-        <p:nvSpPr>
-          <p:cNvPr id="25" name="">
-            <a:extLst xmlns:a="http://schemas.openxmlformats.org/drawingml/2006/main">
-              <a:ext uri="{FF2B5EF4-FFF2-40B4-BE49-F238E27FC236}">
-                <a16:creationId xmlns:a16="http://schemas.microsoft.com/office/drawing/2014/main" id="{4B137DBE-0373-4B7D-89B2-62CEDDD2AF0A}"/>
-              </a:ext>
-            </a:extLst>
-          </p:cNvPr>
-          <p:cNvSpPr>
-            <a:spLocks xmlns:a="http://schemas.openxmlformats.org/drawingml/2006/main" noGrp="1"/>
-          </p:cNvSpPr>
-          <p:nvPr/>
-        </p:nvSpPr>
-        <p:spPr>
-          <a:xfrm xmlns:a="http://schemas.openxmlformats.org/drawingml/2006/main">
-            <a:off x="11201400" y="5524500"/>
-            <a:ext cx="2781300" cy="361950"/>
-          </a:xfrm>
-          <a:prstGeom xmlns:a="http://schemas.openxmlformats.org/drawingml/2006/main" prst="rect">
-            <a:avLst/>
-          </a:prstGeom>
-          <a:noFill xmlns:a="http://schemas.openxmlformats.org/drawingml/2006/main"/>
-          <a:ln xmlns:a="http://schemas.openxmlformats.org/drawingml/2006/main" w="0">
-            <a:noFill/>
-            <a:prstDash val="solid"/>
-          </a:ln>
-        </p:spPr>
-        <p:txBody>
-          <a:bodyPr xmlns:a="http://schemas.openxmlformats.org/drawingml/2006/main" wrap="square" lIns="0" tIns="0" rIns="0" bIns="0" anchor="ctr">
-            <a:normAutofit fontScale="100000"/>
-          </a:bodyPr>
-          <a:lstStyle xmlns:a="http://schemas.openxmlformats.org/drawingml/2006/main"/>
-          <a:p xmlns:a="http://schemas.openxmlformats.org/drawingml/2006/main">
-            <a:pPr algn="l">
-              <a:lnSpc>
-                <a:spcPct val="100000"/>
-              </a:lnSpc>
-              <a:buNone/>
               <a:defRPr sz="1500" b="1">
                 <a:solidFill>
                   <a:srgbClr val="051C2A"/>
@@ -7684,7 +7684,7 @@
       </p:sp>
       <p:cxnSp>
         <p:nvCxnSpPr>
-          <p:cNvPr id="125" name=""/>
+          <p:cNvPr id="280" name=""/>
           <p:cNvCxnSpPr>
             <a:stCxn xmlns:a="http://schemas.openxmlformats.org/drawingml/2006/main" id="8" idx="3"/>
             <a:endCxn xmlns:a="http://schemas.openxmlformats.org/drawingml/2006/main" id="3" idx="1"/>
@@ -7710,7 +7710,7 @@
       </p:cxnSp>
       <p:cxnSp>
         <p:nvCxnSpPr>
-          <p:cNvPr id="126" name=""/>
+          <p:cNvPr id="281" name=""/>
           <p:cNvCxnSpPr>
             <a:stCxn xmlns:a="http://schemas.openxmlformats.org/drawingml/2006/main" id="11" idx="3"/>
             <a:endCxn xmlns:a="http://schemas.openxmlformats.org/drawingml/2006/main" id="3" idx="1"/>
@@ -7736,7 +7736,7 @@
       </p:cxnSp>
       <p:cxnSp>
         <p:nvCxnSpPr>
-          <p:cNvPr id="127" name=""/>
+          <p:cNvPr id="282" name=""/>
           <p:cNvCxnSpPr>
             <a:stCxn xmlns:a="http://schemas.openxmlformats.org/drawingml/2006/main" id="14" idx="3"/>
             <a:endCxn xmlns:a="http://schemas.openxmlformats.org/drawingml/2006/main" id="3" idx="1"/>
@@ -7762,7 +7762,7 @@
       </p:cxnSp>
       <p:cxnSp>
         <p:nvCxnSpPr>
-          <p:cNvPr id="128" name=""/>
+          <p:cNvPr id="283" name=""/>
           <p:cNvCxnSpPr>
             <a:stCxn xmlns:a="http://schemas.openxmlformats.org/drawingml/2006/main" id="3" idx="3"/>
             <a:endCxn xmlns:a="http://schemas.openxmlformats.org/drawingml/2006/main" id="17" idx="1"/>
@@ -7788,7 +7788,7 @@
       </p:cxnSp>
       <p:cxnSp>
         <p:nvCxnSpPr>
-          <p:cNvPr id="129" name=""/>
+          <p:cNvPr id="284" name=""/>
           <p:cNvCxnSpPr>
             <a:stCxn xmlns:a="http://schemas.openxmlformats.org/drawingml/2006/main" id="3" idx="3"/>
             <a:endCxn xmlns:a="http://schemas.openxmlformats.org/drawingml/2006/main" id="20" idx="1"/>
@@ -7814,7 +7814,7 @@
       </p:cxnSp>
       <p:cxnSp>
         <p:nvCxnSpPr>
-          <p:cNvPr id="130" name=""/>
+          <p:cNvPr id="285" name=""/>
           <p:cNvCxnSpPr>
             <a:stCxn xmlns:a="http://schemas.openxmlformats.org/drawingml/2006/main" id="3" idx="3"/>
             <a:endCxn xmlns:a="http://schemas.openxmlformats.org/drawingml/2006/main" id="23" idx="1"/>
@@ -8211,7 +8211,7 @@
         </p:spPr>
         <p:txBody>
           <a:bodyPr xmlns:a="http://schemas.openxmlformats.org/drawingml/2006/main" wrap="square" lIns="0" tIns="0" rIns="0" bIns="0" anchor="ctr">
-            <a:normAutofit fontScale="100000"/>
+            <a:noAutofit/>
           </a:bodyPr>
           <a:lstStyle xmlns:a="http://schemas.openxmlformats.org/drawingml/2006/main"/>
           <a:p xmlns:a="http://schemas.openxmlformats.org/drawingml/2006/main">
@@ -8230,7 +8230,7 @@
               </a:defRPr>
             </a:pPr>
             <a:r>
-              <a:rPr sz="1425" b="1">
+              <a:rPr sz="1800" b="1">
                 <a:solidFill>
                   <a:srgbClr val="1F40CB"/>
                 </a:solidFill>
@@ -8335,7 +8335,7 @@
         </p:spPr>
         <p:txBody>
           <a:bodyPr xmlns:a="http://schemas.openxmlformats.org/drawingml/2006/main" wrap="square" lIns="0" tIns="0" rIns="0" bIns="0" anchor="ctr">
-            <a:normAutofit fontScale="100000"/>
+            <a:noAutofit/>
           </a:bodyPr>
           <a:lstStyle xmlns:a="http://schemas.openxmlformats.org/drawingml/2006/main"/>
           <a:p xmlns:a="http://schemas.openxmlformats.org/drawingml/2006/main">
@@ -8354,7 +8354,7 @@
               </a:defRPr>
             </a:pPr>
             <a:r>
-              <a:rPr sz="1350" b="1">
+              <a:rPr sz="1800" b="1">
                 <a:solidFill>
                   <a:srgbClr val="F07D00"/>
                 </a:solidFill>
@@ -8362,7 +8362,7 @@
                 <a:ea typeface="Calibri"/>
                 <a:cs typeface="Calibri"/>
               </a:rPr>
-              <a:t>KEYWORD RANKS · w=1</a:t>
+              <a:t>KEYWORD · w=1</a:t>
             </a:r>
           </a:p>
         </p:txBody>
@@ -8432,7 +8432,7 @@
         </p:spPr>
         <p:txBody>
           <a:bodyPr xmlns:a="http://schemas.openxmlformats.org/drawingml/2006/main" wrap="square" lIns="0" tIns="0" rIns="0" bIns="0" anchor="ctr">
-            <a:normAutofit fontScale="100000"/>
+            <a:noAutofit/>
           </a:bodyPr>
           <a:lstStyle xmlns:a="http://schemas.openxmlformats.org/drawingml/2006/main"/>
           <a:p xmlns:a="http://schemas.openxmlformats.org/drawingml/2006/main">
@@ -8451,7 +8451,7 @@
               </a:defRPr>
             </a:pPr>
             <a:r>
-              <a:rPr sz="1275" b="1">
+              <a:rPr sz="1800" b="1">
                 <a:solidFill>
                   <a:srgbClr val="FFFFFF"/>
                 </a:solidFill>
@@ -8529,7 +8529,7 @@
         </p:spPr>
         <p:txBody>
           <a:bodyPr xmlns:a="http://schemas.openxmlformats.org/drawingml/2006/main" wrap="square" lIns="0" tIns="0" rIns="0" bIns="0" anchor="ctr">
-            <a:normAutofit fontScale="100000"/>
+            <a:noAutofit/>
           </a:bodyPr>
           <a:lstStyle xmlns:a="http://schemas.openxmlformats.org/drawingml/2006/main"/>
           <a:p xmlns:a="http://schemas.openxmlformats.org/drawingml/2006/main">
@@ -8548,7 +8548,7 @@
               </a:defRPr>
             </a:pPr>
             <a:r>
-              <a:rPr sz="1275" b="1">
+              <a:rPr sz="1800" b="1">
                 <a:solidFill>
                   <a:srgbClr val="FFFFFF"/>
                 </a:solidFill>
@@ -8626,7 +8626,7 @@
         </p:spPr>
         <p:txBody>
           <a:bodyPr xmlns:a="http://schemas.openxmlformats.org/drawingml/2006/main" wrap="square" lIns="0" tIns="0" rIns="0" bIns="0" anchor="ctr">
-            <a:normAutofit fontScale="100000"/>
+            <a:noAutofit/>
           </a:bodyPr>
           <a:lstStyle xmlns:a="http://schemas.openxmlformats.org/drawingml/2006/main"/>
           <a:p xmlns:a="http://schemas.openxmlformats.org/drawingml/2006/main">
@@ -8645,7 +8645,7 @@
               </a:defRPr>
             </a:pPr>
             <a:r>
-              <a:rPr sz="1275" b="1">
+              <a:rPr sz="1800" b="1">
                 <a:solidFill>
                   <a:srgbClr val="FFFFFF"/>
                 </a:solidFill>
@@ -8723,7 +8723,7 @@
         </p:spPr>
         <p:txBody>
           <a:bodyPr xmlns:a="http://schemas.openxmlformats.org/drawingml/2006/main" wrap="square" lIns="0" tIns="0" rIns="0" bIns="0" anchor="ctr">
-            <a:normAutofit fontScale="100000"/>
+            <a:noAutofit/>
           </a:bodyPr>
           <a:lstStyle xmlns:a="http://schemas.openxmlformats.org/drawingml/2006/main"/>
           <a:p xmlns:a="http://schemas.openxmlformats.org/drawingml/2006/main">
@@ -8742,7 +8742,7 @@
               </a:defRPr>
             </a:pPr>
             <a:r>
-              <a:rPr sz="1275" b="1">
+              <a:rPr sz="1800" b="1">
                 <a:solidFill>
                   <a:srgbClr val="FFFFFF"/>
                 </a:solidFill>
@@ -8785,7 +8785,7 @@
         </p:spPr>
         <p:txBody>
           <a:bodyPr xmlns:a="http://schemas.openxmlformats.org/drawingml/2006/main" wrap="square" lIns="0" tIns="0" rIns="0" bIns="0" anchor="ctr">
-            <a:normAutofit fontScale="100000"/>
+            <a:noAutofit/>
           </a:bodyPr>
           <a:lstStyle xmlns:a="http://schemas.openxmlformats.org/drawingml/2006/main"/>
           <a:p xmlns:a="http://schemas.openxmlformats.org/drawingml/2006/main">
@@ -8804,7 +8804,7 @@
               </a:defRPr>
             </a:pPr>
             <a:r>
-              <a:rPr sz="1350" b="1">
+              <a:rPr sz="1800" b="1">
                 <a:solidFill>
                   <a:srgbClr val="F07D00"/>
                 </a:solidFill>
@@ -8812,7 +8812,7 @@
                 <a:ea typeface="Calibri"/>
                 <a:cs typeface="Calibri"/>
               </a:rPr>
-              <a:t>exact-term order</a:t>
+              <a:t>B = .03252</a:t>
             </a:r>
           </a:p>
         </p:txBody>
@@ -8847,7 +8847,7 @@
         </p:spPr>
         <p:txBody>
           <a:bodyPr xmlns:a="http://schemas.openxmlformats.org/drawingml/2006/main" wrap="square" lIns="0" tIns="0" rIns="0" bIns="0" anchor="ctr">
-            <a:normAutofit fontScale="100000"/>
+            <a:noAutofit/>
           </a:bodyPr>
           <a:lstStyle xmlns:a="http://schemas.openxmlformats.org/drawingml/2006/main"/>
           <a:p xmlns:a="http://schemas.openxmlformats.org/drawingml/2006/main">
@@ -8866,7 +8866,7 @@
               </a:defRPr>
             </a:pPr>
             <a:r>
-              <a:rPr sz="1350" b="1">
+              <a:rPr sz="1800" b="1">
                 <a:solidFill>
                   <a:srgbClr val="00A2EB"/>
                 </a:solidFill>
@@ -8944,7 +8944,7 @@
         </p:spPr>
         <p:txBody>
           <a:bodyPr xmlns:a="http://schemas.openxmlformats.org/drawingml/2006/main" wrap="square" lIns="0" tIns="0" rIns="0" bIns="0" anchor="ctr">
-            <a:normAutofit fontScale="100000"/>
+            <a:noAutofit/>
           </a:bodyPr>
           <a:lstStyle xmlns:a="http://schemas.openxmlformats.org/drawingml/2006/main"/>
           <a:p xmlns:a="http://schemas.openxmlformats.org/drawingml/2006/main">
@@ -8963,7 +8963,7 @@
               </a:defRPr>
             </a:pPr>
             <a:r>
-              <a:rPr sz="1275" b="1">
+              <a:rPr sz="1800" b="1">
                 <a:solidFill>
                   <a:srgbClr val="FFFFFF"/>
                 </a:solidFill>
@@ -9041,7 +9041,7 @@
         </p:spPr>
         <p:txBody>
           <a:bodyPr xmlns:a="http://schemas.openxmlformats.org/drawingml/2006/main" wrap="square" lIns="0" tIns="0" rIns="0" bIns="0" anchor="ctr">
-            <a:normAutofit fontScale="100000"/>
+            <a:noAutofit/>
           </a:bodyPr>
           <a:lstStyle xmlns:a="http://schemas.openxmlformats.org/drawingml/2006/main"/>
           <a:p xmlns:a="http://schemas.openxmlformats.org/drawingml/2006/main">
@@ -9060,7 +9060,7 @@
               </a:defRPr>
             </a:pPr>
             <a:r>
-              <a:rPr sz="1275" b="1">
+              <a:rPr sz="1800" b="1">
                 <a:solidFill>
                   <a:srgbClr val="FFFFFF"/>
                 </a:solidFill>
@@ -9138,7 +9138,7 @@
         </p:spPr>
         <p:txBody>
           <a:bodyPr xmlns:a="http://schemas.openxmlformats.org/drawingml/2006/main" wrap="square" lIns="0" tIns="0" rIns="0" bIns="0" anchor="ctr">
-            <a:normAutofit fontScale="100000"/>
+            <a:noAutofit/>
           </a:bodyPr>
           <a:lstStyle xmlns:a="http://schemas.openxmlformats.org/drawingml/2006/main"/>
           <a:p xmlns:a="http://schemas.openxmlformats.org/drawingml/2006/main">
@@ -9157,7 +9157,7 @@
               </a:defRPr>
             </a:pPr>
             <a:r>
-              <a:rPr sz="1275" b="1">
+              <a:rPr sz="1800" b="1">
                 <a:solidFill>
                   <a:srgbClr val="FFFFFF"/>
                 </a:solidFill>
@@ -9200,7 +9200,7 @@
         </p:spPr>
         <p:txBody>
           <a:bodyPr xmlns:a="http://schemas.openxmlformats.org/drawingml/2006/main" wrap="square" lIns="0" tIns="0" rIns="0" bIns="0" anchor="ctr">
-            <a:normAutofit fontScale="100000"/>
+            <a:noAutofit/>
           </a:bodyPr>
           <a:lstStyle xmlns:a="http://schemas.openxmlformats.org/drawingml/2006/main"/>
           <a:p xmlns:a="http://schemas.openxmlformats.org/drawingml/2006/main">
@@ -9219,7 +9219,7 @@
               </a:defRPr>
             </a:pPr>
             <a:r>
-              <a:rPr sz="1350" b="1">
+              <a:rPr sz="1800" b="1">
                 <a:solidFill>
                   <a:srgbClr val="00A2EB"/>
                 </a:solidFill>
@@ -9227,7 +9227,7 @@
                 <a:ea typeface="Calibri"/>
                 <a:cs typeface="Calibri"/>
               </a:rPr>
-              <a:t>semantic order</a:t>
+              <a:t>A = .03227</a:t>
             </a:r>
           </a:p>
         </p:txBody>
@@ -9262,7 +9262,7 @@
         </p:spPr>
         <p:txBody>
           <a:bodyPr xmlns:a="http://schemas.openxmlformats.org/drawingml/2006/main" wrap="square" lIns="0" tIns="0" rIns="0" bIns="0" anchor="ctr">
-            <a:normAutofit fontScale="100000"/>
+            <a:noAutofit/>
           </a:bodyPr>
           <a:lstStyle xmlns:a="http://schemas.openxmlformats.org/drawingml/2006/main"/>
           <a:p xmlns:a="http://schemas.openxmlformats.org/drawingml/2006/main">
@@ -9281,7 +9281,7 @@
               </a:defRPr>
             </a:pPr>
             <a:r>
-              <a:rPr sz="1350" b="1">
+              <a:rPr sz="1800" b="1">
                 <a:solidFill>
                   <a:srgbClr val="2E8B57"/>
                 </a:solidFill>
@@ -9359,7 +9359,7 @@
         </p:spPr>
         <p:txBody>
           <a:bodyPr xmlns:a="http://schemas.openxmlformats.org/drawingml/2006/main" wrap="square" lIns="0" tIns="0" rIns="0" bIns="0" anchor="ctr">
-            <a:normAutofit fontScale="100000"/>
+            <a:noAutofit/>
           </a:bodyPr>
           <a:lstStyle xmlns:a="http://schemas.openxmlformats.org/drawingml/2006/main"/>
           <a:p xmlns:a="http://schemas.openxmlformats.org/drawingml/2006/main">
@@ -9378,7 +9378,7 @@
               </a:defRPr>
             </a:pPr>
             <a:r>
-              <a:rPr sz="1275" b="1">
+              <a:rPr sz="1800" b="1">
                 <a:solidFill>
                   <a:srgbClr val="FFFFFF"/>
                 </a:solidFill>
@@ -9456,7 +9456,7 @@
         </p:spPr>
         <p:txBody>
           <a:bodyPr xmlns:a="http://schemas.openxmlformats.org/drawingml/2006/main" wrap="square" lIns="0" tIns="0" rIns="0" bIns="0" anchor="ctr">
-            <a:normAutofit fontScale="100000"/>
+            <a:noAutofit/>
           </a:bodyPr>
           <a:lstStyle xmlns:a="http://schemas.openxmlformats.org/drawingml/2006/main"/>
           <a:p xmlns:a="http://schemas.openxmlformats.org/drawingml/2006/main">
@@ -9475,7 +9475,7 @@
               </a:defRPr>
             </a:pPr>
             <a:r>
-              <a:rPr sz="1275" b="1">
+              <a:rPr sz="1800" b="1">
                 <a:solidFill>
                   <a:srgbClr val="FFFFFF"/>
                 </a:solidFill>
@@ -9518,7 +9518,7 @@
         </p:spPr>
         <p:txBody>
           <a:bodyPr xmlns:a="http://schemas.openxmlformats.org/drawingml/2006/main" wrap="square" lIns="0" tIns="0" rIns="0" bIns="0" anchor="ctr">
-            <a:normAutofit fontScale="100000"/>
+            <a:noAutofit/>
           </a:bodyPr>
           <a:lstStyle xmlns:a="http://schemas.openxmlformats.org/drawingml/2006/main"/>
           <a:p xmlns:a="http://schemas.openxmlformats.org/drawingml/2006/main">
@@ -9537,7 +9537,7 @@
               </a:defRPr>
             </a:pPr>
             <a:r>
-              <a:rPr sz="1350" b="1">
+              <a:rPr sz="1800" b="1">
                 <a:solidFill>
                   <a:srgbClr val="2E8B57"/>
                 </a:solidFill>
@@ -9991,7 +9991,7 @@
         </p:spPr>
         <p:txBody>
           <a:bodyPr xmlns:a="http://schemas.openxmlformats.org/drawingml/2006/main" wrap="square" lIns="0" tIns="0" rIns="0" bIns="0" anchor="ctr">
-            <a:normAutofit fontScale="100000"/>
+            <a:noAutofit/>
           </a:bodyPr>
           <a:lstStyle xmlns:a="http://schemas.openxmlformats.org/drawingml/2006/main"/>
           <a:p xmlns:a="http://schemas.openxmlformats.org/drawingml/2006/main">
@@ -10010,7 +10010,7 @@
               </a:defRPr>
             </a:pPr>
             <a:r>
-              <a:rPr sz="1425" b="1">
+              <a:rPr sz="1800" b="1">
                 <a:solidFill>
                   <a:srgbClr val="1F40CB"/>
                 </a:solidFill>
@@ -10150,7 +10150,7 @@
         </p:spPr>
         <p:txBody>
           <a:bodyPr xmlns:a="http://schemas.openxmlformats.org/drawingml/2006/main" wrap="square" lIns="0" tIns="0" rIns="0" bIns="0" anchor="ctr">
-            <a:normAutofit fontScale="100000"/>
+            <a:noAutofit/>
           </a:bodyPr>
           <a:lstStyle xmlns:a="http://schemas.openxmlformats.org/drawingml/2006/main"/>
           <a:p xmlns:a="http://schemas.openxmlformats.org/drawingml/2006/main">
@@ -10169,7 +10169,7 @@
               </a:defRPr>
             </a:pPr>
             <a:r>
-              <a:rPr sz="1350" b="1">
+              <a:rPr sz="1800" b="1">
                 <a:solidFill>
                   <a:srgbClr val="1F40CB"/>
                 </a:solidFill>
@@ -10177,7 +10177,7 @@
                 <a:ea typeface="Calibri"/>
                 <a:cs typeface="Calibri"/>
               </a:rPr>
-              <a:t>FUSED CANDIDATES</a:t>
+              <a:t>FUSED SET</a:t>
             </a:r>
           </a:p>
         </p:txBody>
@@ -10239,7 +10239,7 @@
                 <a:ea typeface="Calibri"/>
                 <a:cs typeface="Calibri"/>
               </a:rPr>
-              <a:t>candidate_k = 8</a:t>
+              <a:t>candidate_k = 4</a:t>
             </a:r>
           </a:p>
           <a:p xmlns:a="http://schemas.openxmlformats.org/drawingml/2006/main">
@@ -10322,8 +10322,8 @@
         </p:nvSpPr>
         <p:spPr>
           <a:xfrm xmlns:a="http://schemas.openxmlformats.org/drawingml/2006/main">
-            <a:off x="5467350" y="3067050"/>
-            <a:ext cx="2647950" cy="285750"/>
+            <a:off x="5467350" y="2914650"/>
+            <a:ext cx="2647950" cy="476250"/>
           </a:xfrm>
           <a:prstGeom xmlns:a="http://schemas.openxmlformats.org/drawingml/2006/main" prst="rect">
             <a:avLst/>
@@ -10336,7 +10336,7 @@
         </p:spPr>
         <p:txBody>
           <a:bodyPr xmlns:a="http://schemas.openxmlformats.org/drawingml/2006/main" wrap="square" lIns="0" tIns="0" rIns="0" bIns="0" anchor="ctr">
-            <a:normAutofit fontScale="100000"/>
+            <a:noAutofit/>
           </a:bodyPr>
           <a:lstStyle xmlns:a="http://schemas.openxmlformats.org/drawingml/2006/main"/>
           <a:p xmlns:a="http://schemas.openxmlformats.org/drawingml/2006/main">
@@ -10355,7 +10355,7 @@
               </a:defRPr>
             </a:pPr>
             <a:r>
-              <a:rPr sz="1275" b="1">
+              <a:rPr sz="1800" b="1">
                 <a:solidFill>
                   <a:srgbClr val="00A2EB"/>
                 </a:solidFill>
@@ -10384,8 +10384,8 @@
         </p:nvSpPr>
         <p:spPr>
           <a:xfrm xmlns:a="http://schemas.openxmlformats.org/drawingml/2006/main">
-            <a:off x="5467350" y="3486150"/>
-            <a:ext cx="2647950" cy="723900"/>
+            <a:off x="5467350" y="3390900"/>
+            <a:ext cx="2647950" cy="800100"/>
           </a:xfrm>
           <a:prstGeom xmlns:a="http://schemas.openxmlformats.org/drawingml/2006/main" prst="rect">
             <a:avLst/>
@@ -10398,13 +10398,13 @@
         </p:spPr>
         <p:txBody>
           <a:bodyPr xmlns:a="http://schemas.openxmlformats.org/drawingml/2006/main" wrap="square" lIns="0" tIns="0" rIns="0" bIns="0" anchor="ctr">
-            <a:normAutofit fontScale="100000"/>
+            <a:noAutofit/>
           </a:bodyPr>
           <a:lstStyle xmlns:a="http://schemas.openxmlformats.org/drawingml/2006/main"/>
           <a:p xmlns:a="http://schemas.openxmlformats.org/drawingml/2006/main">
             <a:pPr algn="ctr">
               <a:lnSpc>
-                <a:spcPct val="100000"/>
+                <a:spcPct val="80000"/>
               </a:lnSpc>
               <a:buNone/>
               <a:defRPr sz="2175" b="1">
@@ -10417,7 +10417,7 @@
               </a:defRPr>
             </a:pPr>
             <a:r>
-              <a:rPr sz="2175" b="1">
+              <a:rPr sz="1800" b="1">
                 <a:solidFill>
                   <a:srgbClr val="051C2A"/>
                 </a:solidFill>
@@ -10425,13 +10425,13 @@
                 <a:ea typeface="Calibri"/>
                 <a:cs typeface="Calibri"/>
               </a:rPr>
-              <a:t>Five normalized</a:t>
+              <a:t>lexical coverage=.25</a:t>
             </a:r>
           </a:p>
           <a:p xmlns:a="http://schemas.openxmlformats.org/drawingml/2006/main">
             <a:pPr algn="ctr">
               <a:lnSpc>
-                <a:spcPct val="100000"/>
+                <a:spcPct val="80000"/>
               </a:lnSpc>
               <a:buNone/>
               <a:defRPr sz="2175" b="1">
@@ -10444,7 +10444,7 @@
               </a:defRPr>
             </a:pPr>
             <a:r>
-              <a:rPr sz="2175" b="1">
+              <a:rPr sz="1800" b="1">
                 <a:solidFill>
                   <a:srgbClr val="051C2A"/>
                 </a:solidFill>
@@ -10452,7 +10452,34 @@
                 <a:ea typeface="Calibri"/>
                 <a:cs typeface="Calibri"/>
               </a:rPr>
-              <a:t>features</a:t>
+              <a:t>numeric coverage=.45</a:t>
+            </a:r>
+          </a:p>
+          <a:p xmlns:a="http://schemas.openxmlformats.org/drawingml/2006/main">
+            <a:pPr algn="ctr">
+              <a:lnSpc>
+                <a:spcPct val="80000"/>
+              </a:lnSpc>
+              <a:buNone/>
+              <a:defRPr sz="2175" b="1">
+                <a:solidFill>
+                  <a:srgbClr val="051C2A"/>
+                </a:solidFill>
+                <a:latin typeface="Calibri"/>
+                <a:ea typeface="Calibri"/>
+                <a:cs typeface="Calibri"/>
+              </a:defRPr>
+            </a:pPr>
+            <a:r>
+              <a:rPr sz="1800" b="1">
+                <a:solidFill>
+                  <a:srgbClr val="051C2A"/>
+                </a:solidFill>
+                <a:latin typeface="Calibri"/>
+                <a:ea typeface="Calibri"/>
+                <a:cs typeface="Calibri"/>
+              </a:rPr>
+              <a:t>section overlap=.10</a:t>
             </a:r>
           </a:p>
         </p:txBody>
@@ -10473,8 +10500,8 @@
         </p:nvSpPr>
         <p:spPr>
           <a:xfrm xmlns:a="http://schemas.openxmlformats.org/drawingml/2006/main">
-            <a:off x="5467350" y="4267200"/>
-            <a:ext cx="2647950" cy="266700"/>
+            <a:off x="5467350" y="4191000"/>
+            <a:ext cx="2647950" cy="476250"/>
           </a:xfrm>
           <a:prstGeom xmlns:a="http://schemas.openxmlformats.org/drawingml/2006/main" prst="rect">
             <a:avLst/>
@@ -10487,13 +10514,13 @@
         </p:spPr>
         <p:txBody>
           <a:bodyPr xmlns:a="http://schemas.openxmlformats.org/drawingml/2006/main" wrap="square" lIns="0" tIns="0" rIns="0" bIns="0" anchor="ctr">
-            <a:normAutofit fontScale="100000"/>
+            <a:noAutofit/>
           </a:bodyPr>
           <a:lstStyle xmlns:a="http://schemas.openxmlformats.org/drawingml/2006/main"/>
           <a:p xmlns:a="http://schemas.openxmlformats.org/drawingml/2006/main">
             <a:pPr algn="ctr">
               <a:lnSpc>
-                <a:spcPct val="100000"/>
+                <a:spcPct val="70000"/>
               </a:lnSpc>
               <a:buNone/>
               <a:defRPr sz="1275" b="0">
@@ -10506,7 +10533,7 @@
               </a:defRPr>
             </a:pPr>
             <a:r>
-              <a:rPr sz="1275" b="0">
+              <a:rPr sz="1800" b="0">
                 <a:solidFill>
                   <a:srgbClr val="1F40CB"/>
                 </a:solidFill>
@@ -10514,7 +10541,34 @@
                 <a:ea typeface="Calibri"/>
                 <a:cs typeface="Calibri"/>
               </a:rPr>
-              <a:t>0.25 · 0.45 · 0.10 · 0.10 · 0.10</a:t>
+              <a:t>metadata eligibility=.10</a:t>
+            </a:r>
+          </a:p>
+          <a:p xmlns:a="http://schemas.openxmlformats.org/drawingml/2006/main">
+            <a:pPr algn="ctr">
+              <a:lnSpc>
+                <a:spcPct val="70000"/>
+              </a:lnSpc>
+              <a:buNone/>
+              <a:defRPr sz="1275" b="0">
+                <a:solidFill>
+                  <a:srgbClr val="1F40CB"/>
+                </a:solidFill>
+                <a:latin typeface="Calibri"/>
+                <a:ea typeface="Calibri"/>
+                <a:cs typeface="Calibri"/>
+              </a:defRPr>
+            </a:pPr>
+            <a:r>
+              <a:rPr sz="1800" b="0">
+                <a:solidFill>
+                  <a:srgbClr val="1F40CB"/>
+                </a:solidFill>
+                <a:latin typeface="Calibri"/>
+                <a:ea typeface="Calibri"/>
+                <a:cs typeface="Calibri"/>
+              </a:rPr>
+              <a:t>fusion signal=.10</a:t>
             </a:r>
           </a:p>
         </p:txBody>
@@ -10584,7 +10638,7 @@
         </p:spPr>
         <p:txBody>
           <a:bodyPr xmlns:a="http://schemas.openxmlformats.org/drawingml/2006/main" wrap="square" lIns="0" tIns="0" rIns="0" bIns="0" anchor="ctr">
-            <a:normAutofit fontScale="100000"/>
+            <a:noAutofit/>
           </a:bodyPr>
           <a:lstStyle xmlns:a="http://schemas.openxmlformats.org/drawingml/2006/main"/>
           <a:p xmlns:a="http://schemas.openxmlformats.org/drawingml/2006/main">
@@ -10603,7 +10657,7 @@
               </a:defRPr>
             </a:pPr>
             <a:r>
-              <a:rPr sz="1350" b="1">
+              <a:rPr sz="1800" b="1">
                 <a:solidFill>
                   <a:srgbClr val="00A2EB"/>
                 </a:solidFill>
@@ -10673,7 +10727,7 @@
                 <a:ea typeface="Calibri"/>
                 <a:cs typeface="Calibri"/>
               </a:rPr>
-              <a:t>final_k = 3</a:t>
+              <a:t>final_k = 2</a:t>
             </a:r>
           </a:p>
           <a:p xmlns:a="http://schemas.openxmlformats.org/drawingml/2006/main">
@@ -10707,7 +10761,7 @@
       </p:sp>
       <p:cxnSp>
         <p:nvCxnSpPr>
-          <p:cNvPr id="68" name=""/>
+          <p:cNvPr id="138" name=""/>
           <p:cNvCxnSpPr>
             <a:stCxn xmlns:a="http://schemas.openxmlformats.org/drawingml/2006/main" id="3" idx="3"/>
             <a:endCxn xmlns:a="http://schemas.openxmlformats.org/drawingml/2006/main" id="6" idx="1"/>
@@ -10733,7 +10787,7 @@
       </p:cxnSp>
       <p:cxnSp>
         <p:nvCxnSpPr>
-          <p:cNvPr id="69" name=""/>
+          <p:cNvPr id="139" name=""/>
           <p:cNvCxnSpPr>
             <a:stCxn xmlns:a="http://schemas.openxmlformats.org/drawingml/2006/main" id="6" idx="3"/>
             <a:endCxn xmlns:a="http://schemas.openxmlformats.org/drawingml/2006/main" id="10" idx="1"/>
@@ -10741,7 +10795,7 @@
           <p:nvPr/>
         </p:nvCxnSpPr>
         <p:spPr>
-          <a:xfrm xmlns:a="http://schemas.openxmlformats.org/drawingml/2006/main">
+          <a:xfrm xmlns:a="http://schemas.openxmlformats.org/drawingml/2006/main" flipV="0">
             <a:off x="8420100" y="3771900"/>
             <a:ext cx="1409700" cy="0"/>
           </a:xfrm>
@@ -10822,7 +10876,7 @@
         </p:spPr>
         <p:txBody>
           <a:bodyPr xmlns:a="http://schemas.openxmlformats.org/drawingml/2006/main" wrap="square" lIns="0" tIns="0" rIns="0" bIns="0" anchor="ctr">
-            <a:normAutofit fontScale="100000"/>
+            <a:noAutofit/>
           </a:bodyPr>
           <a:lstStyle xmlns:a="http://schemas.openxmlformats.org/drawingml/2006/main"/>
           <a:p xmlns:a="http://schemas.openxmlformats.org/drawingml/2006/main">
@@ -10841,7 +10895,7 @@
               </a:defRPr>
             </a:pPr>
             <a:r>
-              <a:rPr sz="1275" b="1">
+              <a:rPr sz="1800" b="1">
                 <a:solidFill>
                   <a:srgbClr val="F07D00"/>
                 </a:solidFill>
@@ -10979,7 +11033,7 @@
         </p:spPr>
         <p:txBody>
           <a:bodyPr xmlns:a="http://schemas.openxmlformats.org/drawingml/2006/main" wrap="square" lIns="0" tIns="0" rIns="0" bIns="0" anchor="ctr">
-            <a:normAutofit fontScale="100000"/>
+            <a:noAutofit/>
           </a:bodyPr>
           <a:lstStyle xmlns:a="http://schemas.openxmlformats.org/drawingml/2006/main"/>
           <a:p xmlns:a="http://schemas.openxmlformats.org/drawingml/2006/main">
@@ -10998,7 +11052,7 @@
               </a:defRPr>
             </a:pPr>
             <a:r>
-              <a:rPr sz="1275" b="1">
+              <a:rPr sz="1800" b="1">
                 <a:solidFill>
                   <a:srgbClr val="00A2EB"/>
                 </a:solidFill>
@@ -11103,7 +11157,7 @@
         </p:spPr>
         <p:txBody>
           <a:bodyPr xmlns:a="http://schemas.openxmlformats.org/drawingml/2006/main" wrap="square" lIns="0" tIns="0" rIns="0" bIns="0" anchor="ctr">
-            <a:normAutofit fontScale="100000"/>
+            <a:noAutofit/>
           </a:bodyPr>
           <a:lstStyle xmlns:a="http://schemas.openxmlformats.org/drawingml/2006/main"/>
           <a:p xmlns:a="http://schemas.openxmlformats.org/drawingml/2006/main">
@@ -11122,7 +11176,7 @@
               </a:defRPr>
             </a:pPr>
             <a:r>
-              <a:rPr sz="1350" b="1">
+              <a:rPr sz="1800" b="1">
                 <a:solidFill>
                   <a:srgbClr val="F07D00"/>
                 </a:solidFill>
@@ -11130,7 +11184,7 @@
                 <a:ea typeface="Calibri"/>
                 <a:cs typeface="Calibri"/>
               </a:rPr>
-              <a:t>DECISION RULE</a:t>
+              <a:t>DECISION</a:t>
             </a:r>
           </a:p>
         </p:txBody>
@@ -11508,7 +11562,7 @@
         </p:spPr>
         <p:txBody>
           <a:bodyPr xmlns:a="http://schemas.openxmlformats.org/drawingml/2006/main" wrap="square" lIns="0" tIns="0" rIns="0" bIns="0" anchor="ctr">
-            <a:normAutofit fontScale="100000"/>
+            <a:noAutofit/>
           </a:bodyPr>
           <a:lstStyle xmlns:a="http://schemas.openxmlformats.org/drawingml/2006/main"/>
           <a:p xmlns:a="http://schemas.openxmlformats.org/drawingml/2006/main">
@@ -11527,7 +11581,7 @@
               </a:defRPr>
             </a:pPr>
             <a:r>
-              <a:rPr sz="1425" b="1">
+              <a:rPr sz="1800" b="1">
                 <a:solidFill>
                   <a:srgbClr val="1F40CB"/>
                 </a:solidFill>
@@ -11667,7 +11721,7 @@
         </p:spPr>
         <p:txBody>
           <a:bodyPr xmlns:a="http://schemas.openxmlformats.org/drawingml/2006/main" wrap="square" lIns="0" tIns="0" rIns="0" bIns="0" anchor="ctr">
-            <a:normAutofit fontScale="100000"/>
+            <a:noAutofit/>
           </a:bodyPr>
           <a:lstStyle xmlns:a="http://schemas.openxmlformats.org/drawingml/2006/main"/>
           <a:p xmlns:a="http://schemas.openxmlformats.org/drawingml/2006/main">
@@ -11686,7 +11740,7 @@
               </a:defRPr>
             </a:pPr>
             <a:r>
-              <a:rPr sz="1350" b="1">
+              <a:rPr sz="1800" b="1">
                 <a:solidFill>
                   <a:srgbClr val="00A2EB"/>
                 </a:solidFill>
@@ -11888,7 +11942,7 @@
         </p:spPr>
         <p:txBody>
           <a:bodyPr xmlns:a="http://schemas.openxmlformats.org/drawingml/2006/main" wrap="square" lIns="0" tIns="0" rIns="0" bIns="0" anchor="ctr">
-            <a:normAutofit fontScale="100000"/>
+            <a:noAutofit/>
           </a:bodyPr>
           <a:lstStyle xmlns:a="http://schemas.openxmlformats.org/drawingml/2006/main"/>
           <a:p xmlns:a="http://schemas.openxmlformats.org/drawingml/2006/main">
@@ -11907,7 +11961,7 @@
               </a:defRPr>
             </a:pPr>
             <a:r>
-              <a:rPr sz="1350" b="1">
+              <a:rPr sz="1800" b="1">
                 <a:solidFill>
                   <a:srgbClr val="00A2EB"/>
                 </a:solidFill>
@@ -12109,7 +12163,7 @@
         </p:spPr>
         <p:txBody>
           <a:bodyPr xmlns:a="http://schemas.openxmlformats.org/drawingml/2006/main" wrap="square" lIns="0" tIns="0" rIns="0" bIns="0" anchor="ctr">
-            <a:normAutofit fontScale="100000"/>
+            <a:noAutofit/>
           </a:bodyPr>
           <a:lstStyle xmlns:a="http://schemas.openxmlformats.org/drawingml/2006/main"/>
           <a:p xmlns:a="http://schemas.openxmlformats.org/drawingml/2006/main">
@@ -12128,7 +12182,7 @@
               </a:defRPr>
             </a:pPr>
             <a:r>
-              <a:rPr sz="1350" b="1">
+              <a:rPr sz="1800" b="1">
                 <a:solidFill>
                   <a:srgbClr val="00A2EB"/>
                 </a:solidFill>
@@ -12171,7 +12225,7 @@
         </p:spPr>
         <p:txBody>
           <a:bodyPr xmlns:a="http://schemas.openxmlformats.org/drawingml/2006/main" wrap="square" lIns="0" tIns="0" rIns="0" bIns="0" anchor="ctr">
-            <a:normAutofit fontScale="100000"/>
+            <a:noAutofit/>
           </a:bodyPr>
           <a:lstStyle xmlns:a="http://schemas.openxmlformats.org/drawingml/2006/main"/>
           <a:p xmlns:a="http://schemas.openxmlformats.org/drawingml/2006/main">
@@ -12190,7 +12244,7 @@
               </a:defRPr>
             </a:pPr>
             <a:r>
-              <a:rPr sz="1650" b="1">
+              <a:rPr sz="1800" b="1">
                 <a:solidFill>
                   <a:srgbClr val="FFFFFF"/>
                 </a:solidFill>
@@ -12330,7 +12384,7 @@
         </p:spPr>
         <p:txBody>
           <a:bodyPr xmlns:a="http://schemas.openxmlformats.org/drawingml/2006/main" wrap="square" lIns="0" tIns="0" rIns="0" bIns="0" anchor="ctr">
-            <a:normAutofit fontScale="100000"/>
+            <a:noAutofit/>
           </a:bodyPr>
           <a:lstStyle xmlns:a="http://schemas.openxmlformats.org/drawingml/2006/main"/>
           <a:p xmlns:a="http://schemas.openxmlformats.org/drawingml/2006/main">
@@ -12349,7 +12403,7 @@
               </a:defRPr>
             </a:pPr>
             <a:r>
-              <a:rPr sz="1350" b="1">
+              <a:rPr sz="1800" b="1">
                 <a:solidFill>
                   <a:srgbClr val="00A2EB"/>
                 </a:solidFill>
@@ -12551,7 +12605,7 @@
         </p:spPr>
         <p:txBody>
           <a:bodyPr xmlns:a="http://schemas.openxmlformats.org/drawingml/2006/main" wrap="square" lIns="0" tIns="0" rIns="0" bIns="0" anchor="ctr">
-            <a:normAutofit fontScale="100000"/>
+            <a:noAutofit/>
           </a:bodyPr>
           <a:lstStyle xmlns:a="http://schemas.openxmlformats.org/drawingml/2006/main"/>
           <a:p xmlns:a="http://schemas.openxmlformats.org/drawingml/2006/main">
@@ -12570,7 +12624,7 @@
               </a:defRPr>
             </a:pPr>
             <a:r>
-              <a:rPr sz="1350" b="1">
+              <a:rPr sz="1800" b="1">
                 <a:solidFill>
                   <a:srgbClr val="00A2EB"/>
                 </a:solidFill>
@@ -12709,7 +12763,7 @@
       </p:sp>
       <p:cxnSp>
         <p:nvCxnSpPr>
-          <p:cNvPr id="109" name=""/>
+          <p:cNvPr id="239" name=""/>
           <p:cNvCxnSpPr>
             <a:stCxn xmlns:a="http://schemas.openxmlformats.org/drawingml/2006/main" id="3" idx="3"/>
             <a:endCxn xmlns:a="http://schemas.openxmlformats.org/drawingml/2006/main" id="7" idx="1"/>
@@ -12735,7 +12789,7 @@
       </p:cxnSp>
       <p:cxnSp>
         <p:nvCxnSpPr>
-          <p:cNvPr id="110" name=""/>
+          <p:cNvPr id="240" name=""/>
           <p:cNvCxnSpPr>
             <a:stCxn xmlns:a="http://schemas.openxmlformats.org/drawingml/2006/main" id="7" idx="3"/>
             <a:endCxn xmlns:a="http://schemas.openxmlformats.org/drawingml/2006/main" id="11" idx="1"/>
@@ -12761,7 +12815,7 @@
       </p:cxnSp>
       <p:cxnSp>
         <p:nvCxnSpPr>
-          <p:cNvPr id="111" name=""/>
+          <p:cNvPr id="241" name=""/>
           <p:cNvCxnSpPr>
             <a:stCxn xmlns:a="http://schemas.openxmlformats.org/drawingml/2006/main" id="11" idx="3"/>
             <a:endCxn xmlns:a="http://schemas.openxmlformats.org/drawingml/2006/main" id="15" idx="1"/>
@@ -12787,7 +12841,7 @@
       </p:cxnSp>
       <p:cxnSp>
         <p:nvCxnSpPr>
-          <p:cNvPr id="112" name=""/>
+          <p:cNvPr id="242" name=""/>
           <p:cNvCxnSpPr>
             <a:stCxn xmlns:a="http://schemas.openxmlformats.org/drawingml/2006/main" id="15" idx="3"/>
             <a:endCxn xmlns:a="http://schemas.openxmlformats.org/drawingml/2006/main" id="19" idx="1"/>

--- a/decks/06-hybrid-retrieval.pptx
+++ b/decks/06-hybrid-retrieval.pptx
@@ -2,19 +2,19 @@
 <file path=ppt/presentation.xml><?xml version="1.0" encoding="utf-8"?>
 <p:presentation xmlns:p="http://schemas.openxmlformats.org/presentationml/2006/main">
   <p:sldMasterIdLst>
-    <p:sldMasterId xmlns:r="http://schemas.openxmlformats.org/officeDocument/2006/relationships" id="2147483648" r:id="Rff2a6bd326ba4500"/>
+    <p:sldMasterId xmlns:r="http://schemas.openxmlformats.org/officeDocument/2006/relationships" id="2147483648" r:id="R320efd7718684912"/>
   </p:sldMasterIdLst>
   <p:notesMasterIdLst>
-    <p:notesMasterId xmlns:r="http://schemas.openxmlformats.org/officeDocument/2006/relationships" r:id="R2d124c29d7c847f7"/>
+    <p:notesMasterId xmlns:r="http://schemas.openxmlformats.org/officeDocument/2006/relationships" r:id="R6093a144a2564219"/>
   </p:notesMasterIdLst>
   <p:sldIdLst>
-    <p:sldId xmlns:r="http://schemas.openxmlformats.org/officeDocument/2006/relationships" id="256" r:id="Rb89dd0c19e57470d"/>
-    <p:sldId xmlns:r="http://schemas.openxmlformats.org/officeDocument/2006/relationships" id="257" r:id="R2136b62ef76d4267"/>
-    <p:sldId xmlns:r="http://schemas.openxmlformats.org/officeDocument/2006/relationships" id="258" r:id="Rc088ebefff85449b"/>
-    <p:sldId xmlns:r="http://schemas.openxmlformats.org/officeDocument/2006/relationships" id="259" r:id="R220e4196087a4e81"/>
-    <p:sldId xmlns:r="http://schemas.openxmlformats.org/officeDocument/2006/relationships" id="260" r:id="R04b7aede4f354d2c"/>
-    <p:sldId xmlns:r="http://schemas.openxmlformats.org/officeDocument/2006/relationships" id="261" r:id="Re353eb7811e940c2"/>
-    <p:sldId xmlns:r="http://schemas.openxmlformats.org/officeDocument/2006/relationships" id="262" r:id="Rd10b2f14c8ff49e9"/>
+    <p:sldId xmlns:r="http://schemas.openxmlformats.org/officeDocument/2006/relationships" id="256" r:id="Rf430708f3f0c4e70"/>
+    <p:sldId xmlns:r="http://schemas.openxmlformats.org/officeDocument/2006/relationships" id="257" r:id="R08cc39a7479b4f63"/>
+    <p:sldId xmlns:r="http://schemas.openxmlformats.org/officeDocument/2006/relationships" id="258" r:id="Rf57b274e2c854a57"/>
+    <p:sldId xmlns:r="http://schemas.openxmlformats.org/officeDocument/2006/relationships" id="259" r:id="Rdec7b3af8b3f4432"/>
+    <p:sldId xmlns:r="http://schemas.openxmlformats.org/officeDocument/2006/relationships" id="260" r:id="R66f52d64c23746c8"/>
+    <p:sldId xmlns:r="http://schemas.openxmlformats.org/officeDocument/2006/relationships" id="261" r:id="R07e81728b69244ea"/>
+    <p:sldId xmlns:r="http://schemas.openxmlformats.org/officeDocument/2006/relationships" id="262" r:id="R87e60cf488d741ff"/>
   </p:sldIdLst>
   <p:sldSz cx="15240000" cy="8572500"/>
   <p:notesSz cx="6858000" cy="9144000"/>
@@ -628,12 +628,27 @@
           <a:lstStyle xmlns:a="http://schemas.openxmlformats.org/drawingml/2006/main"/>
           <a:p xmlns:a="http://schemas.openxmlformats.org/drawingml/2006/main">
             <a:r>
-              <a:t>Keyword retrieval protects exact numbers, tickers, and accounting labels. Dense retrieval protects conceptual matches with limited literal overlap.</a:t>
-            </a:r>
-          </a:p>
-          <a:p xmlns:a="http://schemas.openxmlformats.org/drawingml/2006/main">
-            <a:r>
-              <a:t>Do not compare TF-IDF cosine and embedding cosine as if they were one calibrated score scale.</a:t>
+              <a:t>Maintained query: Which NVIDIA business generated $193.7 billion?</a:t>
+            </a:r>
+          </a:p>
+          <a:p xmlns:a="http://schemas.openxmlformats.org/drawingml/2006/main">
+            <a:r>
+              <a:t>Filter: company=NVIDIA and period=FY2026. Values below are from the deterministic offline execution of notebooks/06_hybrid_retrieval.ipynb.</a:t>
+            </a:r>
+          </a:p>
+          <a:p xmlns:a="http://schemas.openxmlformats.org/drawingml/2006/main">
+            <a:r>
+              <a:t>Keyword rank 1: NVDA-2026-10K-EXCERPT-CONTEXTUAL-003 (TF-IDF cosine 0.591); rank 2: NVDA-2026-10K-EXCERPT-CONTEXTUAL-001 (0.357); rank 3: NVDA-2026-10K-EXCERPT-CONTEXTUAL-002 (0.209); rank 4: NVDA-2026-10K-EXCERPT-CONTEXTUAL-004 (0.118).</a:t>
+            </a:r>
+          </a:p>
+          <a:p xmlns:a="http://schemas.openxmlformats.org/drawingml/2006/main">
+            <a:r>
+              <a:t>Dense rank 1: NVDA-2026-10K-EXCERPT-CONTEXTUAL-001 (raw cosine 0.577); rank 2: NVDA-2026-10K-EXCERPT-CONTEXTUAL-002 (0.577); rank 3: NVDA-2026-10K-EXCERPT-CONTEXTUAL-004 (0.447); dense rank 4: NVDA-2026-10K-EXCERPT-CONTEXTUAL-003 (0.408).</a:t>
+            </a:r>
+          </a:p>
+          <a:p xmlns:a="http://schemas.openxmlformats.org/drawingml/2006/main">
+            <a:r>
+              <a:t>Visible IDs use the collision-safe NVDA…NNN abbreviation; the full stable manifest IDs appear above. Raw embedding cosine is a ranking signal, not confidence.</a:t>
             </a:r>
           </a:p>
           <a:p xmlns:a="http://schemas.openxmlformats.org/drawingml/2006/main">
@@ -643,17 +658,17 @@
           </a:p>
           <a:p xmlns:a="http://schemas.openxmlformats.org/drawingml/2006/main">
             <a:r>
-              <a:t>- Executable comparison: notebooks/06_hybrid_retrieval.ipynb</a:t>
+              <a:t>- Executable maintained run: notebooks/06_hybrid_retrieval.ipynb</a:t>
+            </a:r>
+          </a:p>
+          <a:p xmlns:a="http://schemas.openxmlformats.org/drawingml/2006/main">
+            <a:r>
+              <a:t>- Course explanation and score contracts: chapters/06-hybrid-retrieval.md</a:t>
             </a:r>
           </a:p>
           <a:p xmlns:a="http://schemas.openxmlformats.org/drawingml/2006/main">
             <a:r>
               <a:t>- NVIDIA fiscal 2026 Form 10-K: https://www.sec.gov/Archives/edgar/data/1045810/000104581026000021/nvda-20260125.htm</a:t>
-            </a:r>
-          </a:p>
-          <a:p xmlns:a="http://schemas.openxmlformats.org/drawingml/2006/main">
-            <a:r>
-              <a:t>- Schneider Electric FY2025 results: https://www.se.com/ww/en/assets/564/document/528237/release-fy-results-2025.pdf</a:t>
             </a:r>
           </a:p>
         </p:txBody>
@@ -1091,7 +1106,7 @@
   </p:cSld>
   <p:clrMap bg1="lt1" tx1="dk1" bg2="lt2" tx2="dk2" accent1="accent1" accent2="accent2" accent3="accent3" accent4="accent4" accent5="accent5" accent6="accent6" hlink="hlink" folHlink="folHlink"/>
   <p:sldLayoutIdLst>
-    <p:sldLayoutId xmlns:r="http://schemas.openxmlformats.org/officeDocument/2006/relationships" id="2147483649" r:id="R48334c3f187d4adf"/>
+    <p:sldLayoutId xmlns:r="http://schemas.openxmlformats.org/officeDocument/2006/relationships" id="2147483649" r:id="R82517f2991814dd5"/>
   </p:sldLayoutIdLst>
   <p:txStyles>
     <p:titleStyle>
@@ -2973,7 +2988,7 @@
       </p:sp>
       <p:cxnSp>
         <p:nvCxnSpPr>
-          <p:cNvPr id="230" name=""/>
+          <p:cNvPr id="254" name=""/>
           <p:cNvCxnSpPr>
             <a:stCxn xmlns:a="http://schemas.openxmlformats.org/drawingml/2006/main" id="14" idx="2"/>
             <a:endCxn xmlns:a="http://schemas.openxmlformats.org/drawingml/2006/main" id="16" idx="0"/>
@@ -2999,7 +3014,7 @@
       </p:cxnSp>
       <p:cxnSp>
         <p:nvCxnSpPr>
-          <p:cNvPr id="231" name=""/>
+          <p:cNvPr id="255" name=""/>
           <p:cNvCxnSpPr>
             <a:stCxn xmlns:a="http://schemas.openxmlformats.org/drawingml/2006/main" id="14" idx="2"/>
             <a:endCxn xmlns:a="http://schemas.openxmlformats.org/drawingml/2006/main" id="18" idx="0"/>
@@ -3025,7 +3040,7 @@
       </p:cxnSp>
       <p:cxnSp>
         <p:nvCxnSpPr>
-          <p:cNvPr id="232" name=""/>
+          <p:cNvPr id="256" name=""/>
           <p:cNvCxnSpPr>
             <a:stCxn xmlns:a="http://schemas.openxmlformats.org/drawingml/2006/main" id="14" idx="2"/>
             <a:endCxn xmlns:a="http://schemas.openxmlformats.org/drawingml/2006/main" id="20" idx="0"/>
@@ -4015,7 +4030,7 @@
                 <a:ea typeface="Calibri"/>
                 <a:cs typeface="Calibri"/>
               </a:rPr>
-              <a:t>COMPLEMENTARY CHANNELS</a:t>
+              <a:t>MAINTAINED QUERY · OFFLINE</a:t>
             </a:r>
           </a:p>
         </p:txBody>
@@ -4077,7 +4092,7 @@
                 <a:ea typeface="Calibri"/>
                 <a:cs typeface="Calibri"/>
               </a:rPr>
-              <a:t>Keyword and dense lists fail differently—and together</a:t>
+              <a:t>Which NVIDIA business generated $193.7 billion?</a:t>
             </a:r>
           </a:p>
         </p:txBody>
@@ -4139,7 +4154,7 @@
                 <a:ea typeface="Calibri"/>
                 <a:cs typeface="Calibri"/>
               </a:rPr>
-              <a:t>KEYWORD · EXACT</a:t>
+              <a:t>KEYWORD · TF-IDF</a:t>
             </a:r>
           </a:p>
         </p:txBody>
@@ -4236,7 +4251,7 @@
                 <a:ea typeface="Courier New"/>
                 <a:cs typeface="Courier New"/>
               </a:rPr>
-              <a:t>R1  SU-TABLE  18.7%</a:t>
+              <a:t>R1  NVDA…003  .591</a:t>
             </a:r>
           </a:p>
           <a:p xmlns:a="http://schemas.openxmlformats.org/drawingml/2006/main">
@@ -4263,7 +4278,7 @@
                 <a:ea typeface="Courier New"/>
                 <a:cs typeface="Courier New"/>
               </a:rPr>
-              <a:t>exact literal</a:t>
+              <a:t>$193.7bn exact match</a:t>
             </a:r>
           </a:p>
         </p:txBody>
@@ -4333,7 +4348,7 @@
         </p:spPr>
         <p:txBody>
           <a:bodyPr xmlns:a="http://schemas.openxmlformats.org/drawingml/2006/main" wrap="square" lIns="0" tIns="0" rIns="0" bIns="0" anchor="ctr">
-            <a:normAutofit fontScale="95833"/>
+            <a:normAutofit fontScale="100000"/>
           </a:bodyPr>
           <a:lstStyle xmlns:a="http://schemas.openxmlformats.org/drawingml/2006/main"/>
           <a:p xmlns:a="http://schemas.openxmlformats.org/drawingml/2006/main">
@@ -4360,7 +4375,7 @@
                 <a:ea typeface="Courier New"/>
                 <a:cs typeface="Courier New"/>
               </a:rPr>
-              <a:t>R2  NVDA-TABLE  $193.7bn</a:t>
+              <a:t>R2  NVDA…001  .357</a:t>
             </a:r>
           </a:p>
         </p:txBody>
@@ -4422,7 +4437,7 @@
                 <a:ea typeface="Calibri"/>
                 <a:cs typeface="Calibri"/>
               </a:rPr>
-              <a:t>TF-IDF cosine score</a:t>
+              <a:t>Filter · NVIDIA · FY2026</a:t>
             </a:r>
           </a:p>
         </p:txBody>
@@ -4484,7 +4499,7 @@
                 <a:ea typeface="Calibri"/>
                 <a:cs typeface="Calibri"/>
               </a:rPr>
-              <a:t>DENSE · CONCEPTS</a:t>
+              <a:t>DENSE · OFFLINE</a:t>
             </a:r>
           </a:p>
         </p:txBody>
@@ -4942,7 +4957,7 @@
         </p:spPr>
         <p:txBody>
           <a:bodyPr xmlns:a="http://schemas.openxmlformats.org/drawingml/2006/main" wrap="square" lIns="0" tIns="0" rIns="0" bIns="0" anchor="ctr">
-            <a:normAutofit fontScale="96491"/>
+            <a:normAutofit fontScale="100000"/>
           </a:bodyPr>
           <a:lstStyle xmlns:a="http://schemas.openxmlformats.org/drawingml/2006/main"/>
           <a:p xmlns:a="http://schemas.openxmlformats.org/drawingml/2006/main">
@@ -4969,34 +4984,7 @@
                 <a:ea typeface="Calibri"/>
                 <a:cs typeface="Calibri"/>
               </a:rPr>
-              <a:t>NVDA-</a:t>
-            </a:r>
-          </a:p>
-          <a:p xmlns:a="http://schemas.openxmlformats.org/drawingml/2006/main">
-            <a:pPr algn="l">
-              <a:lnSpc>
-                <a:spcPct val="100000"/>
-              </a:lnSpc>
-              <a:buNone/>
-              <a:defRPr sz="1425" b="0">
-                <a:solidFill>
-                  <a:srgbClr val="051C2A"/>
-                </a:solidFill>
-                <a:latin typeface="Calibri"/>
-                <a:ea typeface="Calibri"/>
-                <a:cs typeface="Calibri"/>
-              </a:defRPr>
-            </a:pPr>
-            <a:r>
-              <a:rPr sz="1425" b="0">
-                <a:solidFill>
-                  <a:srgbClr val="051C2A"/>
-                </a:solidFill>
-                <a:latin typeface="Calibri"/>
-                <a:ea typeface="Calibri"/>
-                <a:cs typeface="Calibri"/>
-              </a:rPr>
-              <a:t>CONCENTRATION</a:t>
+              <a:t>NVDA…001</a:t>
             </a:r>
           </a:p>
         </p:txBody>
@@ -5093,7 +5081,7 @@
                 <a:ea typeface="Calibri"/>
                 <a:cs typeface="Calibri"/>
               </a:rPr>
-              <a:t>concept alignment</a:t>
+              <a:t>raw cosine .577</a:t>
             </a:r>
           </a:p>
         </p:txBody>
@@ -5287,7 +5275,7 @@
                 <a:ea typeface="Calibri"/>
                 <a:cs typeface="Calibri"/>
               </a:rPr>
-              <a:t>NVDA-TABLE</a:t>
+              <a:t>NVDA…002</a:t>
             </a:r>
           </a:p>
         </p:txBody>
@@ -5384,7 +5372,7 @@
                 <a:ea typeface="Calibri"/>
                 <a:cs typeface="Calibri"/>
               </a:rPr>
-              <a:t>business semantics</a:t>
+              <a:t>raw cosine .577</a:t>
             </a:r>
           </a:p>
         </p:txBody>
@@ -5446,7 +5434,7 @@
                 <a:ea typeface="Calibri"/>
                 <a:cs typeface="Calibri"/>
               </a:rPr>
-              <a:t>Raw embedding cosine similarity</a:t>
+              <a:t>Evidence at dense R4 · NVDA…003 · raw cosine .408</a:t>
             </a:r>
           </a:p>
         </p:txBody>
@@ -6037,7 +6025,7 @@
                 <a:ea typeface="Calibri"/>
                 <a:cs typeface="Calibri"/>
               </a:rPr>
-              <a:t>passage ID</a:t>
+              <a:t>manifest ID</a:t>
             </a:r>
           </a:p>
         </p:txBody>
@@ -7684,7 +7672,7 @@
       </p:sp>
       <p:cxnSp>
         <p:nvCxnSpPr>
-          <p:cNvPr id="280" name=""/>
+          <p:cNvPr id="311" name=""/>
           <p:cNvCxnSpPr>
             <a:stCxn xmlns:a="http://schemas.openxmlformats.org/drawingml/2006/main" id="8" idx="3"/>
             <a:endCxn xmlns:a="http://schemas.openxmlformats.org/drawingml/2006/main" id="3" idx="1"/>
@@ -7710,7 +7698,7 @@
       </p:cxnSp>
       <p:cxnSp>
         <p:nvCxnSpPr>
-          <p:cNvPr id="281" name=""/>
+          <p:cNvPr id="312" name=""/>
           <p:cNvCxnSpPr>
             <a:stCxn xmlns:a="http://schemas.openxmlformats.org/drawingml/2006/main" id="11" idx="3"/>
             <a:endCxn xmlns:a="http://schemas.openxmlformats.org/drawingml/2006/main" id="3" idx="1"/>
@@ -7736,7 +7724,7 @@
       </p:cxnSp>
       <p:cxnSp>
         <p:nvCxnSpPr>
-          <p:cNvPr id="282" name=""/>
+          <p:cNvPr id="313" name=""/>
           <p:cNvCxnSpPr>
             <a:stCxn xmlns:a="http://schemas.openxmlformats.org/drawingml/2006/main" id="14" idx="3"/>
             <a:endCxn xmlns:a="http://schemas.openxmlformats.org/drawingml/2006/main" id="3" idx="1"/>
@@ -7762,7 +7750,7 @@
       </p:cxnSp>
       <p:cxnSp>
         <p:nvCxnSpPr>
-          <p:cNvPr id="283" name=""/>
+          <p:cNvPr id="314" name=""/>
           <p:cNvCxnSpPr>
             <a:stCxn xmlns:a="http://schemas.openxmlformats.org/drawingml/2006/main" id="3" idx="3"/>
             <a:endCxn xmlns:a="http://schemas.openxmlformats.org/drawingml/2006/main" id="17" idx="1"/>
@@ -7788,7 +7776,7 @@
       </p:cxnSp>
       <p:cxnSp>
         <p:nvCxnSpPr>
-          <p:cNvPr id="284" name=""/>
+          <p:cNvPr id="315" name=""/>
           <p:cNvCxnSpPr>
             <a:stCxn xmlns:a="http://schemas.openxmlformats.org/drawingml/2006/main" id="3" idx="3"/>
             <a:endCxn xmlns:a="http://schemas.openxmlformats.org/drawingml/2006/main" id="20" idx="1"/>
@@ -7814,7 +7802,7 @@
       </p:cxnSp>
       <p:cxnSp>
         <p:nvCxnSpPr>
-          <p:cNvPr id="285" name=""/>
+          <p:cNvPr id="316" name=""/>
           <p:cNvCxnSpPr>
             <a:stCxn xmlns:a="http://schemas.openxmlformats.org/drawingml/2006/main" id="3" idx="3"/>
             <a:endCxn xmlns:a="http://schemas.openxmlformats.org/drawingml/2006/main" id="23" idx="1"/>
@@ -10761,7 +10749,7 @@
       </p:sp>
       <p:cxnSp>
         <p:nvCxnSpPr>
-          <p:cNvPr id="138" name=""/>
+          <p:cNvPr id="152" name=""/>
           <p:cNvCxnSpPr>
             <a:stCxn xmlns:a="http://schemas.openxmlformats.org/drawingml/2006/main" id="3" idx="3"/>
             <a:endCxn xmlns:a="http://schemas.openxmlformats.org/drawingml/2006/main" id="6" idx="1"/>
@@ -10787,7 +10775,7 @@
       </p:cxnSp>
       <p:cxnSp>
         <p:nvCxnSpPr>
-          <p:cNvPr id="139" name=""/>
+          <p:cNvPr id="153" name=""/>
           <p:cNvCxnSpPr>
             <a:stCxn xmlns:a="http://schemas.openxmlformats.org/drawingml/2006/main" id="6" idx="3"/>
             <a:endCxn xmlns:a="http://schemas.openxmlformats.org/drawingml/2006/main" id="10" idx="1"/>
@@ -12763,7 +12751,7 @@
       </p:sp>
       <p:cxnSp>
         <p:nvCxnSpPr>
-          <p:cNvPr id="239" name=""/>
+          <p:cNvPr id="265" name=""/>
           <p:cNvCxnSpPr>
             <a:stCxn xmlns:a="http://schemas.openxmlformats.org/drawingml/2006/main" id="3" idx="3"/>
             <a:endCxn xmlns:a="http://schemas.openxmlformats.org/drawingml/2006/main" id="7" idx="1"/>
@@ -12789,7 +12777,7 @@
       </p:cxnSp>
       <p:cxnSp>
         <p:nvCxnSpPr>
-          <p:cNvPr id="240" name=""/>
+          <p:cNvPr id="266" name=""/>
           <p:cNvCxnSpPr>
             <a:stCxn xmlns:a="http://schemas.openxmlformats.org/drawingml/2006/main" id="7" idx="3"/>
             <a:endCxn xmlns:a="http://schemas.openxmlformats.org/drawingml/2006/main" id="11" idx="1"/>
@@ -12815,7 +12803,7 @@
       </p:cxnSp>
       <p:cxnSp>
         <p:nvCxnSpPr>
-          <p:cNvPr id="241" name=""/>
+          <p:cNvPr id="267" name=""/>
           <p:cNvCxnSpPr>
             <a:stCxn xmlns:a="http://schemas.openxmlformats.org/drawingml/2006/main" id="11" idx="3"/>
             <a:endCxn xmlns:a="http://schemas.openxmlformats.org/drawingml/2006/main" id="15" idx="1"/>
@@ -12841,7 +12829,7 @@
       </p:cxnSp>
       <p:cxnSp>
         <p:nvCxnSpPr>
-          <p:cNvPr id="242" name=""/>
+          <p:cNvPr id="268" name=""/>
           <p:cNvCxnSpPr>
             <a:stCxn xmlns:a="http://schemas.openxmlformats.org/drawingml/2006/main" id="15" idx="3"/>
             <a:endCxn xmlns:a="http://schemas.openxmlformats.org/drawingml/2006/main" id="19" idx="1"/>

--- a/decks/06-hybrid-retrieval.pptx
+++ b/decks/06-hybrid-retrieval.pptx
@@ -2,19 +2,21 @@
 <file path=ppt/presentation.xml><?xml version="1.0" encoding="utf-8"?>
 <p:presentation xmlns:p="http://schemas.openxmlformats.org/presentationml/2006/main">
   <p:sldMasterIdLst>
-    <p:sldMasterId xmlns:r="http://schemas.openxmlformats.org/officeDocument/2006/relationships" id="2147483648" r:id="R320efd7718684912"/>
+    <p:sldMasterId xmlns:r="http://schemas.openxmlformats.org/officeDocument/2006/relationships" id="2147483648" r:id="R76ffad91c86941ed"/>
   </p:sldMasterIdLst>
   <p:notesMasterIdLst>
-    <p:notesMasterId xmlns:r="http://schemas.openxmlformats.org/officeDocument/2006/relationships" r:id="R6093a144a2564219"/>
+    <p:notesMasterId xmlns:r="http://schemas.openxmlformats.org/officeDocument/2006/relationships" r:id="Rda639c644672469f"/>
   </p:notesMasterIdLst>
   <p:sldIdLst>
-    <p:sldId xmlns:r="http://schemas.openxmlformats.org/officeDocument/2006/relationships" id="256" r:id="Rf430708f3f0c4e70"/>
-    <p:sldId xmlns:r="http://schemas.openxmlformats.org/officeDocument/2006/relationships" id="257" r:id="R08cc39a7479b4f63"/>
-    <p:sldId xmlns:r="http://schemas.openxmlformats.org/officeDocument/2006/relationships" id="258" r:id="Rf57b274e2c854a57"/>
-    <p:sldId xmlns:r="http://schemas.openxmlformats.org/officeDocument/2006/relationships" id="259" r:id="Rdec7b3af8b3f4432"/>
-    <p:sldId xmlns:r="http://schemas.openxmlformats.org/officeDocument/2006/relationships" id="260" r:id="R66f52d64c23746c8"/>
-    <p:sldId xmlns:r="http://schemas.openxmlformats.org/officeDocument/2006/relationships" id="261" r:id="R07e81728b69244ea"/>
-    <p:sldId xmlns:r="http://schemas.openxmlformats.org/officeDocument/2006/relationships" id="262" r:id="R87e60cf488d741ff"/>
+    <p:sldId xmlns:r="http://schemas.openxmlformats.org/officeDocument/2006/relationships" id="256" r:id="R44300816dc0b40e0"/>
+    <p:sldId xmlns:r="http://schemas.openxmlformats.org/officeDocument/2006/relationships" id="257" r:id="Raf41ec16d827427c"/>
+    <p:sldId xmlns:r="http://schemas.openxmlformats.org/officeDocument/2006/relationships" id="258" r:id="R106309892fed41b3"/>
+    <p:sldId xmlns:r="http://schemas.openxmlformats.org/officeDocument/2006/relationships" id="259" r:id="Rc93eba2f62c14934"/>
+    <p:sldId xmlns:r="http://schemas.openxmlformats.org/officeDocument/2006/relationships" id="260" r:id="R3f584037283e4f2a"/>
+    <p:sldId xmlns:r="http://schemas.openxmlformats.org/officeDocument/2006/relationships" id="261" r:id="Rf3bc47d996b84019"/>
+    <p:sldId xmlns:r="http://schemas.openxmlformats.org/officeDocument/2006/relationships" id="262" r:id="Rfb73c04c25f3404e"/>
+    <p:sldId xmlns:r="http://schemas.openxmlformats.org/officeDocument/2006/relationships" id="263" r:id="Rd759ec8ce98946d2"/>
+    <p:sldId xmlns:r="http://schemas.openxmlformats.org/officeDocument/2006/relationships" id="264" r:id="Rce7b27bfedee4598"/>
   </p:sldIdLst>
   <p:sldSz cx="15240000" cy="8572500"/>
   <p:notesSz cx="6858000" cy="9144000"/>
@@ -1068,6 +1070,196 @@
 </p:notes>
 </file>
 
+<file path=ppt/notesSlides/notesSlide8.xml><?xml version="1.0" encoding="utf-8"?>
+<p:notes xmlns:p="http://schemas.openxmlformats.org/presentationml/2006/main">
+  <p:cSld>
+    <p:spTree>
+      <p:nvGrpSpPr>
+        <p:cNvPr id="1" name=""/>
+        <p:cNvGrpSpPr/>
+        <p:nvPr/>
+      </p:nvGrpSpPr>
+      <p:grpSpPr>
+        <a:xfrm xmlns:a="http://schemas.openxmlformats.org/drawingml/2006/main"/>
+      </p:grpSpPr>
+      <p:sp>
+        <p:nvSpPr>
+          <p:cNvPr id="2" name="Slide Image Placeholder 1"/>
+          <p:cNvSpPr>
+            <a:spLocks xmlns:a="http://schemas.openxmlformats.org/drawingml/2006/main" noGrp="1"/>
+          </p:cNvSpPr>
+          <p:nvPr>
+            <p:ph type="sldImg" idx="0"/>
+          </p:nvPr>
+        </p:nvSpPr>
+        <p:spPr/>
+      </p:sp>
+      <p:sp>
+        <p:nvSpPr>
+          <p:cNvPr id="3" name="Notes Placeholder 2"/>
+          <p:cNvSpPr>
+            <a:spLocks xmlns:a="http://schemas.openxmlformats.org/drawingml/2006/main" noGrp="1"/>
+          </p:cNvSpPr>
+          <p:nvPr>
+            <p:ph type="body" idx="1"/>
+          </p:nvPr>
+        </p:nvSpPr>
+        <p:spPr/>
+        <p:txBody>
+          <a:bodyPr xmlns:a="http://schemas.openxmlformats.org/drawingml/2006/main"/>
+          <a:lstStyle xmlns:a="http://schemas.openxmlformats.org/drawingml/2006/main"/>
+          <a:p xmlns:a="http://schemas.openxmlformats.org/drawingml/2006/main">
+            <a:r>
+              <a:t>Keep documents, chunks and embeddings as explicit logical records. The teaching index uses exact local search so students can inspect every row. Production may replace only the storage/query engine with pgvector and an HNSW index while preserving stable IDs, metadata filters and evaluation contracts.</a:t>
+            </a:r>
+          </a:p>
+          <a:p xmlns:a="http://schemas.openxmlformats.org/drawingml/2006/main">
+            <a:r>
+              <a:t/>
+            </a:r>
+          </a:p>
+          <a:p xmlns:a="http://schemas.openxmlformats.org/drawingml/2006/main">
+            <a:r>
+              <a:t>[Sources]</a:t>
+            </a:r>
+          </a:p>
+          <a:p xmlns:a="http://schemas.openxmlformats.org/drawingml/2006/main">
+            <a:r>
+              <a:t>- https://github.com/pgvector/pgvector</a:t>
+            </a:r>
+          </a:p>
+          <a:p xmlns:a="http://schemas.openxmlformats.org/drawingml/2006/main">
+            <a:r>
+              <a:t>- Course Notebook 06 architecture bridge</a:t>
+            </a:r>
+          </a:p>
+          <a:p xmlns:a="http://schemas.openxmlformats.org/drawingml/2006/main">
+            <a:r>
+              <a:t>[/Sources]</a:t>
+            </a:r>
+          </a:p>
+        </p:txBody>
+      </p:sp>
+      <p:sp>
+        <p:nvSpPr>
+          <p:cNvPr id="4" name="Slide Number Placeholder 3"/>
+          <p:cNvSpPr>
+            <a:spLocks xmlns:a="http://schemas.openxmlformats.org/drawingml/2006/main" noGrp="1"/>
+          </p:cNvSpPr>
+          <p:nvPr>
+            <p:ph type="sldNum" idx="5"/>
+          </p:nvPr>
+        </p:nvSpPr>
+        <p:spPr/>
+        <p:txBody>
+          <a:bodyPr xmlns:a="http://schemas.openxmlformats.org/drawingml/2006/main"/>
+          <a:lstStyle xmlns:a="http://schemas.openxmlformats.org/drawingml/2006/main"/>
+          <a:p xmlns:a="http://schemas.openxmlformats.org/drawingml/2006/main"/>
+        </p:txBody>
+      </p:sp>
+    </p:spTree>
+  </p:cSld>
+  <p:clrMapOvr>
+    <a:masterClrMapping xmlns:a="http://schemas.openxmlformats.org/drawingml/2006/main"/>
+  </p:clrMapOvr>
+</p:notes>
+</file>
+
+<file path=ppt/notesSlides/notesSlide9.xml><?xml version="1.0" encoding="utf-8"?>
+<p:notes xmlns:p="http://schemas.openxmlformats.org/presentationml/2006/main">
+  <p:cSld>
+    <p:spTree>
+      <p:nvGrpSpPr>
+        <p:cNvPr id="1" name=""/>
+        <p:cNvGrpSpPr/>
+        <p:nvPr/>
+      </p:nvGrpSpPr>
+      <p:grpSpPr>
+        <a:xfrm xmlns:a="http://schemas.openxmlformats.org/drawingml/2006/main"/>
+      </p:grpSpPr>
+      <p:sp>
+        <p:nvSpPr>
+          <p:cNvPr id="2" name="Slide Image Placeholder 1"/>
+          <p:cNvSpPr>
+            <a:spLocks xmlns:a="http://schemas.openxmlformats.org/drawingml/2006/main" noGrp="1"/>
+          </p:cNvSpPr>
+          <p:nvPr>
+            <p:ph type="sldImg" idx="0"/>
+          </p:nvPr>
+        </p:nvSpPr>
+        <p:spPr/>
+      </p:sp>
+      <p:sp>
+        <p:nvSpPr>
+          <p:cNvPr id="3" name="Notes Placeholder 2"/>
+          <p:cNvSpPr>
+            <a:spLocks xmlns:a="http://schemas.openxmlformats.org/drawingml/2006/main" noGrp="1"/>
+          </p:cNvSpPr>
+          <p:nvPr>
+            <p:ph type="body" idx="1"/>
+          </p:nvPr>
+        </p:nvSpPr>
+        <p:spPr/>
+        <p:txBody>
+          <a:bodyPr xmlns:a="http://schemas.openxmlformats.org/drawingml/2006/main"/>
+          <a:lstStyle xmlns:a="http://schemas.openxmlformats.org/drawingml/2006/main"/>
+          <a:p xmlns:a="http://schemas.openxmlformats.org/drawingml/2006/main">
+            <a:r>
+              <a:t>These values are one deterministic offline execution on the instructor machine: eligibility 0.00 ms, keyword 1.04 ms, dense 0.03 ms, fusion 0.01 ms and rerank 0.06 ms. Hardware-dependent timings are observations, not correctness thresholds. Lesson 07 wraps the same stage boundaries as MLflow spans.</a:t>
+            </a:r>
+          </a:p>
+          <a:p xmlns:a="http://schemas.openxmlformats.org/drawingml/2006/main">
+            <a:r>
+              <a:t/>
+            </a:r>
+          </a:p>
+          <a:p xmlns:a="http://schemas.openxmlformats.org/drawingml/2006/main">
+            <a:r>
+              <a:t>[Sources]</a:t>
+            </a:r>
+          </a:p>
+          <a:p xmlns:a="http://schemas.openxmlformats.org/drawingml/2006/main">
+            <a:r>
+              <a:t>- Course Notebook 06 offline execution, Figure 5</a:t>
+            </a:r>
+          </a:p>
+          <a:p xmlns:a="http://schemas.openxmlformats.org/drawingml/2006/main">
+            <a:r>
+              <a:t>- https://mlflow.org/docs/latest/genai/tracing/</a:t>
+            </a:r>
+          </a:p>
+          <a:p xmlns:a="http://schemas.openxmlformats.org/drawingml/2006/main">
+            <a:r>
+              <a:t>[/Sources]</a:t>
+            </a:r>
+          </a:p>
+        </p:txBody>
+      </p:sp>
+      <p:sp>
+        <p:nvSpPr>
+          <p:cNvPr id="4" name="Slide Number Placeholder 3"/>
+          <p:cNvSpPr>
+            <a:spLocks xmlns:a="http://schemas.openxmlformats.org/drawingml/2006/main" noGrp="1"/>
+          </p:cNvSpPr>
+          <p:nvPr>
+            <p:ph type="sldNum" idx="5"/>
+          </p:nvPr>
+        </p:nvSpPr>
+        <p:spPr/>
+        <p:txBody>
+          <a:bodyPr xmlns:a="http://schemas.openxmlformats.org/drawingml/2006/main"/>
+          <a:lstStyle xmlns:a="http://schemas.openxmlformats.org/drawingml/2006/main"/>
+          <a:p xmlns:a="http://schemas.openxmlformats.org/drawingml/2006/main"/>
+        </p:txBody>
+      </p:sp>
+    </p:spTree>
+  </p:cSld>
+  <p:clrMapOvr>
+    <a:masterClrMapping xmlns:a="http://schemas.openxmlformats.org/drawingml/2006/main"/>
+  </p:clrMapOvr>
+</p:notes>
+</file>
+
 <file path=ppt/slideLayouts/slideLayout1.xml><?xml version="1.0" encoding="utf-8"?>
 <p:sldLayout xmlns:p="http://schemas.openxmlformats.org/presentationml/2006/main" type="title">
   <p:cSld name="Title Slide">
@@ -1106,7 +1298,7 @@
   </p:cSld>
   <p:clrMap bg1="lt1" tx1="dk1" bg2="lt2" tx2="dk2" accent1="accent1" accent2="accent2" accent3="accent3" accent4="accent4" accent5="accent5" accent6="accent6" hlink="hlink" folHlink="folHlink"/>
   <p:sldLayoutIdLst>
-    <p:sldLayoutId xmlns:r="http://schemas.openxmlformats.org/officeDocument/2006/relationships" id="2147483649" r:id="R82517f2991814dd5"/>
+    <p:sldLayoutId xmlns:r="http://schemas.openxmlformats.org/officeDocument/2006/relationships" id="2147483649" r:id="Rbbba126d082d454c"/>
   </p:sldLayoutIdLst>
   <p:txStyles>
     <p:titleStyle>
@@ -2988,7 +3180,7 @@
       </p:sp>
       <p:cxnSp>
         <p:nvCxnSpPr>
-          <p:cNvPr id="254" name=""/>
+          <p:cNvPr id="302" name=""/>
           <p:cNvCxnSpPr>
             <a:stCxn xmlns:a="http://schemas.openxmlformats.org/drawingml/2006/main" id="14" idx="2"/>
             <a:endCxn xmlns:a="http://schemas.openxmlformats.org/drawingml/2006/main" id="16" idx="0"/>
@@ -3014,7 +3206,7 @@
       </p:cxnSp>
       <p:cxnSp>
         <p:nvCxnSpPr>
-          <p:cNvPr id="255" name=""/>
+          <p:cNvPr id="303" name=""/>
           <p:cNvCxnSpPr>
             <a:stCxn xmlns:a="http://schemas.openxmlformats.org/drawingml/2006/main" id="14" idx="2"/>
             <a:endCxn xmlns:a="http://schemas.openxmlformats.org/drawingml/2006/main" id="18" idx="0"/>
@@ -3040,7 +3232,7 @@
       </p:cxnSp>
       <p:cxnSp>
         <p:nvCxnSpPr>
-          <p:cNvPr id="256" name=""/>
+          <p:cNvPr id="304" name=""/>
           <p:cNvCxnSpPr>
             <a:stCxn xmlns:a="http://schemas.openxmlformats.org/drawingml/2006/main" id="14" idx="2"/>
             <a:endCxn xmlns:a="http://schemas.openxmlformats.org/drawingml/2006/main" id="20" idx="0"/>
@@ -7672,7 +7864,7 @@
       </p:sp>
       <p:cxnSp>
         <p:nvCxnSpPr>
-          <p:cNvPr id="311" name=""/>
+          <p:cNvPr id="373" name=""/>
           <p:cNvCxnSpPr>
             <a:stCxn xmlns:a="http://schemas.openxmlformats.org/drawingml/2006/main" id="8" idx="3"/>
             <a:endCxn xmlns:a="http://schemas.openxmlformats.org/drawingml/2006/main" id="3" idx="1"/>
@@ -7698,7 +7890,7 @@
       </p:cxnSp>
       <p:cxnSp>
         <p:nvCxnSpPr>
-          <p:cNvPr id="312" name=""/>
+          <p:cNvPr id="374" name=""/>
           <p:cNvCxnSpPr>
             <a:stCxn xmlns:a="http://schemas.openxmlformats.org/drawingml/2006/main" id="11" idx="3"/>
             <a:endCxn xmlns:a="http://schemas.openxmlformats.org/drawingml/2006/main" id="3" idx="1"/>
@@ -7724,7 +7916,7 @@
       </p:cxnSp>
       <p:cxnSp>
         <p:nvCxnSpPr>
-          <p:cNvPr id="313" name=""/>
+          <p:cNvPr id="375" name=""/>
           <p:cNvCxnSpPr>
             <a:stCxn xmlns:a="http://schemas.openxmlformats.org/drawingml/2006/main" id="14" idx="3"/>
             <a:endCxn xmlns:a="http://schemas.openxmlformats.org/drawingml/2006/main" id="3" idx="1"/>
@@ -7750,7 +7942,7 @@
       </p:cxnSp>
       <p:cxnSp>
         <p:nvCxnSpPr>
-          <p:cNvPr id="314" name=""/>
+          <p:cNvPr id="376" name=""/>
           <p:cNvCxnSpPr>
             <a:stCxn xmlns:a="http://schemas.openxmlformats.org/drawingml/2006/main" id="3" idx="3"/>
             <a:endCxn xmlns:a="http://schemas.openxmlformats.org/drawingml/2006/main" id="17" idx="1"/>
@@ -7776,7 +7968,7 @@
       </p:cxnSp>
       <p:cxnSp>
         <p:nvCxnSpPr>
-          <p:cNvPr id="315" name=""/>
+          <p:cNvPr id="377" name=""/>
           <p:cNvCxnSpPr>
             <a:stCxn xmlns:a="http://schemas.openxmlformats.org/drawingml/2006/main" id="3" idx="3"/>
             <a:endCxn xmlns:a="http://schemas.openxmlformats.org/drawingml/2006/main" id="20" idx="1"/>
@@ -7802,7 +7994,7 @@
       </p:cxnSp>
       <p:cxnSp>
         <p:nvCxnSpPr>
-          <p:cNvPr id="316" name=""/>
+          <p:cNvPr id="378" name=""/>
           <p:cNvCxnSpPr>
             <a:stCxn xmlns:a="http://schemas.openxmlformats.org/drawingml/2006/main" id="3" idx="3"/>
             <a:endCxn xmlns:a="http://schemas.openxmlformats.org/drawingml/2006/main" id="23" idx="1"/>
@@ -10749,7 +10941,7 @@
       </p:sp>
       <p:cxnSp>
         <p:nvCxnSpPr>
-          <p:cNvPr id="152" name=""/>
+          <p:cNvPr id="180" name=""/>
           <p:cNvCxnSpPr>
             <a:stCxn xmlns:a="http://schemas.openxmlformats.org/drawingml/2006/main" id="3" idx="3"/>
             <a:endCxn xmlns:a="http://schemas.openxmlformats.org/drawingml/2006/main" id="6" idx="1"/>
@@ -10775,7 +10967,7 @@
       </p:cxnSp>
       <p:cxnSp>
         <p:nvCxnSpPr>
-          <p:cNvPr id="153" name=""/>
+          <p:cNvPr id="181" name=""/>
           <p:cNvCxnSpPr>
             <a:stCxn xmlns:a="http://schemas.openxmlformats.org/drawingml/2006/main" id="6" idx="3"/>
             <a:endCxn xmlns:a="http://schemas.openxmlformats.org/drawingml/2006/main" id="10" idx="1"/>
@@ -12751,7 +12943,7 @@
       </p:sp>
       <p:cxnSp>
         <p:nvCxnSpPr>
-          <p:cNvPr id="265" name=""/>
+          <p:cNvPr id="317" name=""/>
           <p:cNvCxnSpPr>
             <a:stCxn xmlns:a="http://schemas.openxmlformats.org/drawingml/2006/main" id="3" idx="3"/>
             <a:endCxn xmlns:a="http://schemas.openxmlformats.org/drawingml/2006/main" id="7" idx="1"/>
@@ -12777,7 +12969,7 @@
       </p:cxnSp>
       <p:cxnSp>
         <p:nvCxnSpPr>
-          <p:cNvPr id="266" name=""/>
+          <p:cNvPr id="318" name=""/>
           <p:cNvCxnSpPr>
             <a:stCxn xmlns:a="http://schemas.openxmlformats.org/drawingml/2006/main" id="7" idx="3"/>
             <a:endCxn xmlns:a="http://schemas.openxmlformats.org/drawingml/2006/main" id="11" idx="1"/>
@@ -12803,7 +12995,7 @@
       </p:cxnSp>
       <p:cxnSp>
         <p:nvCxnSpPr>
-          <p:cNvPr id="267" name=""/>
+          <p:cNvPr id="319" name=""/>
           <p:cNvCxnSpPr>
             <a:stCxn xmlns:a="http://schemas.openxmlformats.org/drawingml/2006/main" id="11" idx="3"/>
             <a:endCxn xmlns:a="http://schemas.openxmlformats.org/drawingml/2006/main" id="15" idx="1"/>
@@ -12829,7 +13021,7 @@
       </p:cxnSp>
       <p:cxnSp>
         <p:nvCxnSpPr>
-          <p:cNvPr id="268" name=""/>
+          <p:cNvPr id="320" name=""/>
           <p:cNvCxnSpPr>
             <a:stCxn xmlns:a="http://schemas.openxmlformats.org/drawingml/2006/main" id="15" idx="3"/>
             <a:endCxn xmlns:a="http://schemas.openxmlformats.org/drawingml/2006/main" id="19" idx="1"/>
@@ -13287,6 +13479,3606 @@
                 <a:cs typeface="Calibri"/>
               </a:rPr>
               <a:t>07</a:t>
+            </a:r>
+          </a:p>
+        </p:txBody>
+      </p:sp>
+    </p:spTree>
+    <p:extLst>
+      <p:ext uri="{BB962C8B-B14F-4D97-AF65-F5344CB8AC3E}">
+        <p14:creationId xmlns:p14="http://schemas.microsoft.com/office/powerpoint/2010/main" val="1169510731"/>
+      </p:ext>
+    </p:extLst>
+  </p:cSld>
+</p:sld>
+</file>
+
+<file path=ppt/slides/slide8.xml><?xml version="1.0" encoding="utf-8"?>
+<p:sld xmlns:p="http://schemas.openxmlformats.org/presentationml/2006/main">
+  <p:cSld>
+    <p:bg>
+      <p:bgPr>
+        <a:solidFill xmlns:a="http://schemas.openxmlformats.org/drawingml/2006/main">
+          <a:srgbClr val="F5F5F5"/>
+        </a:solidFill>
+      </p:bgPr>
+    </p:bg>
+    <p:spTree>
+      <p:nvGrpSpPr>
+        <p:cNvPr id="1" name=""/>
+        <p:cNvGrpSpPr/>
+        <p:nvPr/>
+      </p:nvGrpSpPr>
+      <p:grpSpPr>
+        <a:xfrm xmlns:a="http://schemas.openxmlformats.org/drawingml/2006/main"/>
+      </p:grpSpPr>
+      <p:sp>
+        <p:nvSpPr>
+          <p:cNvPr id="35" name="">
+            <a:extLst xmlns:a="http://schemas.openxmlformats.org/drawingml/2006/main">
+              <a:ext uri="{FF2B5EF4-FFF2-40B4-BE49-F238E27FC236}">
+                <a16:creationId xmlns:a16="http://schemas.microsoft.com/office/drawing/2014/main" id="{45EAFBC5-0120-406B-9113-A189734D7D27}"/>
+              </a:ext>
+            </a:extLst>
+          </p:cNvPr>
+          <p:cNvSpPr>
+            <a:spLocks xmlns:a="http://schemas.openxmlformats.org/drawingml/2006/main" noGrp="1"/>
+          </p:cNvSpPr>
+          <p:nvPr/>
+        </p:nvSpPr>
+        <p:spPr>
+          <a:xfrm xmlns:a="http://schemas.openxmlformats.org/drawingml/2006/main">
+            <a:off x="971550" y="666750"/>
+            <a:ext cx="4762500" cy="342900"/>
+          </a:xfrm>
+          <a:prstGeom xmlns:a="http://schemas.openxmlformats.org/drawingml/2006/main" prst="rect">
+            <a:avLst/>
+          </a:prstGeom>
+          <a:noFill xmlns:a="http://schemas.openxmlformats.org/drawingml/2006/main"/>
+          <a:ln xmlns:a="http://schemas.openxmlformats.org/drawingml/2006/main" w="0">
+            <a:noFill/>
+            <a:prstDash val="solid"/>
+          </a:ln>
+        </p:spPr>
+        <p:txBody>
+          <a:bodyPr xmlns:a="http://schemas.openxmlformats.org/drawingml/2006/main" wrap="square" lIns="0" tIns="0" rIns="0" bIns="0" anchor="ctr">
+            <a:noAutofit/>
+          </a:bodyPr>
+          <a:lstStyle xmlns:a="http://schemas.openxmlformats.org/drawingml/2006/main"/>
+          <a:p xmlns:a="http://schemas.openxmlformats.org/drawingml/2006/main">
+            <a:pPr algn="l">
+              <a:lnSpc>
+                <a:spcPct val="100000"/>
+              </a:lnSpc>
+              <a:buNone/>
+              <a:defRPr sz="1425" b="1">
+                <a:solidFill>
+                  <a:srgbClr val="1F40CB"/>
+                </a:solidFill>
+                <a:latin typeface="Calibri"/>
+                <a:ea typeface="Calibri"/>
+                <a:cs typeface="Calibri"/>
+              </a:defRPr>
+            </a:pPr>
+            <a:r>
+              <a:rPr sz="1800" b="1">
+                <a:solidFill>
+                  <a:srgbClr val="1F40CB"/>
+                </a:solidFill>
+                <a:latin typeface="Calibri"/>
+                <a:ea typeface="Calibri"/>
+                <a:cs typeface="Calibri"/>
+              </a:rPr>
+              <a:t>STORAGE CONTRACT</a:t>
+            </a:r>
+          </a:p>
+        </p:txBody>
+      </p:sp>
+      <p:sp>
+        <p:nvSpPr>
+          <p:cNvPr id="2" name="">
+            <a:extLst xmlns:a="http://schemas.openxmlformats.org/drawingml/2006/main">
+              <a:ext uri="{FF2B5EF4-FFF2-40B4-BE49-F238E27FC236}">
+                <a16:creationId xmlns:a16="http://schemas.microsoft.com/office/drawing/2014/main" id="{E788E1BA-062C-4D13-89C4-9762E55DD5F6}"/>
+              </a:ext>
+            </a:extLst>
+          </p:cNvPr>
+          <p:cNvSpPr>
+            <a:spLocks xmlns:a="http://schemas.openxmlformats.org/drawingml/2006/main" noGrp="1"/>
+          </p:cNvSpPr>
+          <p:nvPr/>
+        </p:nvSpPr>
+        <p:spPr>
+          <a:xfrm xmlns:a="http://schemas.openxmlformats.org/drawingml/2006/main">
+            <a:off x="971550" y="1181100"/>
+            <a:ext cx="13296900" cy="781050"/>
+          </a:xfrm>
+          <a:prstGeom xmlns:a="http://schemas.openxmlformats.org/drawingml/2006/main" prst="rect">
+            <a:avLst/>
+          </a:prstGeom>
+          <a:noFill xmlns:a="http://schemas.openxmlformats.org/drawingml/2006/main"/>
+          <a:ln xmlns:a="http://schemas.openxmlformats.org/drawingml/2006/main" w="0">
+            <a:noFill/>
+            <a:prstDash val="solid"/>
+          </a:ln>
+        </p:spPr>
+        <p:txBody>
+          <a:bodyPr xmlns:a="http://schemas.openxmlformats.org/drawingml/2006/main" wrap="none" lIns="0" tIns="0" rIns="0" bIns="0" anchor="ctr">
+            <a:normAutofit fontScale="100000"/>
+          </a:bodyPr>
+          <a:lstStyle xmlns:a="http://schemas.openxmlformats.org/drawingml/2006/main"/>
+          <a:p xmlns:a="http://schemas.openxmlformats.org/drawingml/2006/main">
+            <a:pPr algn="l">
+              <a:lnSpc>
+                <a:spcPct val="100000"/>
+              </a:lnSpc>
+              <a:buNone/>
+              <a:defRPr sz="3600" b="1">
+                <a:solidFill>
+                  <a:srgbClr val="051C2A"/>
+                </a:solidFill>
+                <a:latin typeface="Calibri"/>
+                <a:ea typeface="Calibri"/>
+                <a:cs typeface="Calibri"/>
+              </a:defRPr>
+            </a:pPr>
+            <a:r>
+              <a:rPr sz="3600" b="1">
+                <a:solidFill>
+                  <a:srgbClr val="051C2A"/>
+                </a:solidFill>
+                <a:latin typeface="Calibri"/>
+                <a:ea typeface="Calibri"/>
+                <a:cs typeface="Calibri"/>
+              </a:rPr>
+              <a:t>Keep one logical schema when the vector engine changes</a:t>
+            </a:r>
+          </a:p>
+        </p:txBody>
+      </p:sp>
+      <p:sp>
+        <p:nvSpPr>
+          <p:cNvPr id="3" name="ingestion-1">
+            <a:extLst xmlns:a="http://schemas.openxmlformats.org/drawingml/2006/main">
+              <a:ext uri="{FF2B5EF4-FFF2-40B4-BE49-F238E27FC236}">
+                <a16:creationId xmlns:a16="http://schemas.microsoft.com/office/drawing/2014/main" id="{EF5CEA91-0836-4E99-95C1-43A271A11FFF}"/>
+              </a:ext>
+            </a:extLst>
+          </p:cNvPr>
+          <p:cNvSpPr>
+            <a:spLocks xmlns:a="http://schemas.openxmlformats.org/drawingml/2006/main" noGrp="1"/>
+          </p:cNvSpPr>
+          <p:nvPr/>
+        </p:nvSpPr>
+        <p:spPr>
+          <a:xfrm xmlns:a="http://schemas.openxmlformats.org/drawingml/2006/main">
+            <a:off x="990600" y="3086100"/>
+            <a:ext cx="2247900" cy="2266950"/>
+          </a:xfrm>
+          <a:prstGeom xmlns:a="http://schemas.openxmlformats.org/drawingml/2006/main" prst="roundRect">
+            <a:avLst>
+              <a:gd name="adj" fmla="val 5085"/>
+            </a:avLst>
+          </a:prstGeom>
+          <a:solidFill xmlns:a="http://schemas.openxmlformats.org/drawingml/2006/main">
+            <a:srgbClr val="FFFFFF"/>
+          </a:solidFill>
+          <a:ln xmlns:a="http://schemas.openxmlformats.org/drawingml/2006/main" w="9525">
+            <a:solidFill>
+              <a:srgbClr val="E4E7E9"/>
+            </a:solidFill>
+            <a:prstDash val="solid"/>
+          </a:ln>
+        </p:spPr>
+      </p:sp>
+      <p:sp>
+        <p:nvSpPr>
+          <p:cNvPr id="4" name="">
+            <a:extLst xmlns:a="http://schemas.openxmlformats.org/drawingml/2006/main">
+              <a:ext uri="{FF2B5EF4-FFF2-40B4-BE49-F238E27FC236}">
+                <a16:creationId xmlns:a16="http://schemas.microsoft.com/office/drawing/2014/main" id="{4A163ADC-FDBA-49AB-AB53-62FA29104479}"/>
+              </a:ext>
+            </a:extLst>
+          </p:cNvPr>
+          <p:cNvSpPr>
+            <a:spLocks xmlns:a="http://schemas.openxmlformats.org/drawingml/2006/main" noGrp="1"/>
+          </p:cNvSpPr>
+          <p:nvPr/>
+        </p:nvSpPr>
+        <p:spPr>
+          <a:xfrm xmlns:a="http://schemas.openxmlformats.org/drawingml/2006/main">
+            <a:off x="1181100" y="3295650"/>
+            <a:ext cx="514350" cy="285750"/>
+          </a:xfrm>
+          <a:prstGeom xmlns:a="http://schemas.openxmlformats.org/drawingml/2006/main" prst="rect">
+            <a:avLst/>
+          </a:prstGeom>
+          <a:noFill xmlns:a="http://schemas.openxmlformats.org/drawingml/2006/main"/>
+          <a:ln xmlns:a="http://schemas.openxmlformats.org/drawingml/2006/main" w="0">
+            <a:noFill/>
+            <a:prstDash val="solid"/>
+          </a:ln>
+        </p:spPr>
+        <p:txBody>
+          <a:bodyPr xmlns:a="http://schemas.openxmlformats.org/drawingml/2006/main" wrap="square" lIns="0" tIns="0" rIns="0" bIns="0" anchor="ctr">
+            <a:noAutofit/>
+          </a:bodyPr>
+          <a:lstStyle xmlns:a="http://schemas.openxmlformats.org/drawingml/2006/main"/>
+          <a:p xmlns:a="http://schemas.openxmlformats.org/drawingml/2006/main">
+            <a:pPr algn="l">
+              <a:lnSpc>
+                <a:spcPct val="100000"/>
+              </a:lnSpc>
+              <a:buNone/>
+              <a:defRPr sz="1350" b="1">
+                <a:solidFill>
+                  <a:srgbClr val="00A2EB"/>
+                </a:solidFill>
+                <a:latin typeface="Calibri"/>
+                <a:ea typeface="Calibri"/>
+                <a:cs typeface="Calibri"/>
+              </a:defRPr>
+            </a:pPr>
+            <a:r>
+              <a:rPr sz="1800" b="1">
+                <a:solidFill>
+                  <a:srgbClr val="00A2EB"/>
+                </a:solidFill>
+                <a:latin typeface="Calibri"/>
+                <a:ea typeface="Calibri"/>
+                <a:cs typeface="Calibri"/>
+              </a:rPr>
+              <a:t>01</a:t>
+            </a:r>
+          </a:p>
+        </p:txBody>
+      </p:sp>
+      <p:sp>
+        <p:nvSpPr>
+          <p:cNvPr id="5" name="">
+            <a:extLst xmlns:a="http://schemas.openxmlformats.org/drawingml/2006/main">
+              <a:ext uri="{FF2B5EF4-FFF2-40B4-BE49-F238E27FC236}">
+                <a16:creationId xmlns:a16="http://schemas.microsoft.com/office/drawing/2014/main" id="{26D1AD73-F995-4369-A266-8FA41354CE3D}"/>
+              </a:ext>
+            </a:extLst>
+          </p:cNvPr>
+          <p:cNvSpPr>
+            <a:spLocks xmlns:a="http://schemas.openxmlformats.org/drawingml/2006/main" noGrp="1"/>
+          </p:cNvSpPr>
+          <p:nvPr/>
+        </p:nvSpPr>
+        <p:spPr>
+          <a:xfrm xmlns:a="http://schemas.openxmlformats.org/drawingml/2006/main">
+            <a:off x="1104900" y="3752850"/>
+            <a:ext cx="2019300" cy="685800"/>
+          </a:xfrm>
+          <a:prstGeom xmlns:a="http://schemas.openxmlformats.org/drawingml/2006/main" prst="rect">
+            <a:avLst/>
+          </a:prstGeom>
+          <a:noFill xmlns:a="http://schemas.openxmlformats.org/drawingml/2006/main"/>
+          <a:ln xmlns:a="http://schemas.openxmlformats.org/drawingml/2006/main" w="0">
+            <a:noFill/>
+            <a:prstDash val="solid"/>
+          </a:ln>
+        </p:spPr>
+        <p:txBody>
+          <a:bodyPr xmlns:a="http://schemas.openxmlformats.org/drawingml/2006/main" wrap="square" lIns="0" tIns="0" rIns="0" bIns="0" anchor="ctr">
+            <a:normAutofit fontScale="100000"/>
+          </a:bodyPr>
+          <a:lstStyle xmlns:a="http://schemas.openxmlformats.org/drawingml/2006/main"/>
+          <a:p xmlns:a="http://schemas.openxmlformats.org/drawingml/2006/main">
+            <a:pPr algn="l">
+              <a:lnSpc>
+                <a:spcPct val="100000"/>
+              </a:lnSpc>
+              <a:buNone/>
+              <a:defRPr sz="1950" b="1">
+                <a:solidFill>
+                  <a:srgbClr val="051C2A"/>
+                </a:solidFill>
+                <a:latin typeface="Calibri"/>
+                <a:ea typeface="Calibri"/>
+                <a:cs typeface="Calibri"/>
+              </a:defRPr>
+            </a:pPr>
+            <a:r>
+              <a:rPr sz="1950" b="1">
+                <a:solidFill>
+                  <a:srgbClr val="051C2A"/>
+                </a:solidFill>
+                <a:latin typeface="Calibri"/>
+                <a:ea typeface="Calibri"/>
+                <a:cs typeface="Calibri"/>
+              </a:rPr>
+              <a:t>Documents</a:t>
+            </a:r>
+          </a:p>
+        </p:txBody>
+      </p:sp>
+      <p:sp>
+        <p:nvSpPr>
+          <p:cNvPr id="6" name="">
+            <a:extLst xmlns:a="http://schemas.openxmlformats.org/drawingml/2006/main">
+              <a:ext uri="{FF2B5EF4-FFF2-40B4-BE49-F238E27FC236}">
+                <a16:creationId xmlns:a16="http://schemas.microsoft.com/office/drawing/2014/main" id="{4CA7F72B-07B6-4BF4-A3F9-5860F8AC7245}"/>
+              </a:ext>
+            </a:extLst>
+          </p:cNvPr>
+          <p:cNvSpPr>
+            <a:spLocks xmlns:a="http://schemas.openxmlformats.org/drawingml/2006/main" noGrp="1"/>
+          </p:cNvSpPr>
+          <p:nvPr/>
+        </p:nvSpPr>
+        <p:spPr>
+          <a:xfrm xmlns:a="http://schemas.openxmlformats.org/drawingml/2006/main">
+            <a:off x="1181100" y="4610100"/>
+            <a:ext cx="1866900" cy="514350"/>
+          </a:xfrm>
+          <a:prstGeom xmlns:a="http://schemas.openxmlformats.org/drawingml/2006/main" prst="rect">
+            <a:avLst/>
+          </a:prstGeom>
+          <a:noFill xmlns:a="http://schemas.openxmlformats.org/drawingml/2006/main"/>
+          <a:ln xmlns:a="http://schemas.openxmlformats.org/drawingml/2006/main" w="0">
+            <a:noFill/>
+            <a:prstDash val="solid"/>
+          </a:ln>
+        </p:spPr>
+        <p:txBody>
+          <a:bodyPr xmlns:a="http://schemas.openxmlformats.org/drawingml/2006/main" wrap="square" lIns="0" tIns="0" rIns="0" bIns="0" anchor="ctr">
+            <a:normAutofit fontScale="100000"/>
+          </a:bodyPr>
+          <a:lstStyle xmlns:a="http://schemas.openxmlformats.org/drawingml/2006/main"/>
+          <a:p xmlns:a="http://schemas.openxmlformats.org/drawingml/2006/main">
+            <a:pPr algn="l">
+              <a:lnSpc>
+                <a:spcPct val="100000"/>
+              </a:lnSpc>
+              <a:buNone/>
+              <a:defRPr sz="1200" b="0">
+                <a:solidFill>
+                  <a:srgbClr val="1F40CB"/>
+                </a:solidFill>
+                <a:latin typeface="Calibri"/>
+                <a:ea typeface="Calibri"/>
+                <a:cs typeface="Calibri"/>
+              </a:defRPr>
+            </a:pPr>
+            <a:r>
+              <a:rPr sz="1200" b="0">
+                <a:solidFill>
+                  <a:srgbClr val="1F40CB"/>
+                </a:solidFill>
+                <a:latin typeface="Calibri"/>
+                <a:ea typeface="Calibri"/>
+                <a:cs typeface="Calibri"/>
+              </a:rPr>
+              <a:t>source · company · period</a:t>
+            </a:r>
+          </a:p>
+        </p:txBody>
+      </p:sp>
+      <p:sp>
+        <p:nvSpPr>
+          <p:cNvPr id="7" name="ingestion-2">
+            <a:extLst xmlns:a="http://schemas.openxmlformats.org/drawingml/2006/main">
+              <a:ext uri="{FF2B5EF4-FFF2-40B4-BE49-F238E27FC236}">
+                <a16:creationId xmlns:a16="http://schemas.microsoft.com/office/drawing/2014/main" id="{B39DEECB-E0D1-415A-8F2A-C8075A6D97BA}"/>
+              </a:ext>
+            </a:extLst>
+          </p:cNvPr>
+          <p:cNvSpPr>
+            <a:spLocks xmlns:a="http://schemas.openxmlformats.org/drawingml/2006/main" noGrp="1"/>
+          </p:cNvSpPr>
+          <p:nvPr/>
+        </p:nvSpPr>
+        <p:spPr>
+          <a:xfrm xmlns:a="http://schemas.openxmlformats.org/drawingml/2006/main">
+            <a:off x="3810000" y="3086100"/>
+            <a:ext cx="2247900" cy="2266950"/>
+          </a:xfrm>
+          <a:prstGeom xmlns:a="http://schemas.openxmlformats.org/drawingml/2006/main" prst="roundRect">
+            <a:avLst>
+              <a:gd name="adj" fmla="val 5085"/>
+            </a:avLst>
+          </a:prstGeom>
+          <a:solidFill xmlns:a="http://schemas.openxmlformats.org/drawingml/2006/main">
+            <a:srgbClr val="FFFFFF"/>
+          </a:solidFill>
+          <a:ln xmlns:a="http://schemas.openxmlformats.org/drawingml/2006/main" w="9525">
+            <a:solidFill>
+              <a:srgbClr val="E4E7E9"/>
+            </a:solidFill>
+            <a:prstDash val="solid"/>
+          </a:ln>
+        </p:spPr>
+      </p:sp>
+      <p:sp>
+        <p:nvSpPr>
+          <p:cNvPr id="8" name="">
+            <a:extLst xmlns:a="http://schemas.openxmlformats.org/drawingml/2006/main">
+              <a:ext uri="{FF2B5EF4-FFF2-40B4-BE49-F238E27FC236}">
+                <a16:creationId xmlns:a16="http://schemas.microsoft.com/office/drawing/2014/main" id="{18679081-8A68-4B7E-9199-340CF95714DE}"/>
+              </a:ext>
+            </a:extLst>
+          </p:cNvPr>
+          <p:cNvSpPr>
+            <a:spLocks xmlns:a="http://schemas.openxmlformats.org/drawingml/2006/main" noGrp="1"/>
+          </p:cNvSpPr>
+          <p:nvPr/>
+        </p:nvSpPr>
+        <p:spPr>
+          <a:xfrm xmlns:a="http://schemas.openxmlformats.org/drawingml/2006/main">
+            <a:off x="4000500" y="3295650"/>
+            <a:ext cx="514350" cy="285750"/>
+          </a:xfrm>
+          <a:prstGeom xmlns:a="http://schemas.openxmlformats.org/drawingml/2006/main" prst="rect">
+            <a:avLst/>
+          </a:prstGeom>
+          <a:noFill xmlns:a="http://schemas.openxmlformats.org/drawingml/2006/main"/>
+          <a:ln xmlns:a="http://schemas.openxmlformats.org/drawingml/2006/main" w="0">
+            <a:noFill/>
+            <a:prstDash val="solid"/>
+          </a:ln>
+        </p:spPr>
+        <p:txBody>
+          <a:bodyPr xmlns:a="http://schemas.openxmlformats.org/drawingml/2006/main" wrap="square" lIns="0" tIns="0" rIns="0" bIns="0" anchor="ctr">
+            <a:noAutofit/>
+          </a:bodyPr>
+          <a:lstStyle xmlns:a="http://schemas.openxmlformats.org/drawingml/2006/main"/>
+          <a:p xmlns:a="http://schemas.openxmlformats.org/drawingml/2006/main">
+            <a:pPr algn="l">
+              <a:lnSpc>
+                <a:spcPct val="100000"/>
+              </a:lnSpc>
+              <a:buNone/>
+              <a:defRPr sz="1350" b="1">
+                <a:solidFill>
+                  <a:srgbClr val="00A2EB"/>
+                </a:solidFill>
+                <a:latin typeface="Calibri"/>
+                <a:ea typeface="Calibri"/>
+                <a:cs typeface="Calibri"/>
+              </a:defRPr>
+            </a:pPr>
+            <a:r>
+              <a:rPr sz="1800" b="1">
+                <a:solidFill>
+                  <a:srgbClr val="00A2EB"/>
+                </a:solidFill>
+                <a:latin typeface="Calibri"/>
+                <a:ea typeface="Calibri"/>
+                <a:cs typeface="Calibri"/>
+              </a:rPr>
+              <a:t>02</a:t>
+            </a:r>
+          </a:p>
+        </p:txBody>
+      </p:sp>
+      <p:sp>
+        <p:nvSpPr>
+          <p:cNvPr id="9" name="">
+            <a:extLst xmlns:a="http://schemas.openxmlformats.org/drawingml/2006/main">
+              <a:ext uri="{FF2B5EF4-FFF2-40B4-BE49-F238E27FC236}">
+                <a16:creationId xmlns:a16="http://schemas.microsoft.com/office/drawing/2014/main" id="{ED095E54-44DC-4092-9EB7-0C81E4B47710}"/>
+              </a:ext>
+            </a:extLst>
+          </p:cNvPr>
+          <p:cNvSpPr>
+            <a:spLocks xmlns:a="http://schemas.openxmlformats.org/drawingml/2006/main" noGrp="1"/>
+          </p:cNvSpPr>
+          <p:nvPr/>
+        </p:nvSpPr>
+        <p:spPr>
+          <a:xfrm xmlns:a="http://schemas.openxmlformats.org/drawingml/2006/main">
+            <a:off x="3924300" y="3752850"/>
+            <a:ext cx="2019300" cy="685800"/>
+          </a:xfrm>
+          <a:prstGeom xmlns:a="http://schemas.openxmlformats.org/drawingml/2006/main" prst="rect">
+            <a:avLst/>
+          </a:prstGeom>
+          <a:noFill xmlns:a="http://schemas.openxmlformats.org/drawingml/2006/main"/>
+          <a:ln xmlns:a="http://schemas.openxmlformats.org/drawingml/2006/main" w="0">
+            <a:noFill/>
+            <a:prstDash val="solid"/>
+          </a:ln>
+        </p:spPr>
+        <p:txBody>
+          <a:bodyPr xmlns:a="http://schemas.openxmlformats.org/drawingml/2006/main" wrap="square" lIns="0" tIns="0" rIns="0" bIns="0" anchor="ctr">
+            <a:normAutofit fontScale="100000"/>
+          </a:bodyPr>
+          <a:lstStyle xmlns:a="http://schemas.openxmlformats.org/drawingml/2006/main"/>
+          <a:p xmlns:a="http://schemas.openxmlformats.org/drawingml/2006/main">
+            <a:pPr algn="l">
+              <a:lnSpc>
+                <a:spcPct val="100000"/>
+              </a:lnSpc>
+              <a:buNone/>
+              <a:defRPr sz="1950" b="1">
+                <a:solidFill>
+                  <a:srgbClr val="051C2A"/>
+                </a:solidFill>
+                <a:latin typeface="Calibri"/>
+                <a:ea typeface="Calibri"/>
+                <a:cs typeface="Calibri"/>
+              </a:defRPr>
+            </a:pPr>
+            <a:r>
+              <a:rPr sz="1950" b="1">
+                <a:solidFill>
+                  <a:srgbClr val="051C2A"/>
+                </a:solidFill>
+                <a:latin typeface="Calibri"/>
+                <a:ea typeface="Calibri"/>
+                <a:cs typeface="Calibri"/>
+              </a:rPr>
+              <a:t>Chunks</a:t>
+            </a:r>
+          </a:p>
+        </p:txBody>
+      </p:sp>
+      <p:sp>
+        <p:nvSpPr>
+          <p:cNvPr id="10" name="">
+            <a:extLst xmlns:a="http://schemas.openxmlformats.org/drawingml/2006/main">
+              <a:ext uri="{FF2B5EF4-FFF2-40B4-BE49-F238E27FC236}">
+                <a16:creationId xmlns:a16="http://schemas.microsoft.com/office/drawing/2014/main" id="{4DB65E8E-6BA9-40DB-99F9-46D3397B13A3}"/>
+              </a:ext>
+            </a:extLst>
+          </p:cNvPr>
+          <p:cNvSpPr>
+            <a:spLocks xmlns:a="http://schemas.openxmlformats.org/drawingml/2006/main" noGrp="1"/>
+          </p:cNvSpPr>
+          <p:nvPr/>
+        </p:nvSpPr>
+        <p:spPr>
+          <a:xfrm xmlns:a="http://schemas.openxmlformats.org/drawingml/2006/main">
+            <a:off x="4000500" y="4610100"/>
+            <a:ext cx="1866900" cy="514350"/>
+          </a:xfrm>
+          <a:prstGeom xmlns:a="http://schemas.openxmlformats.org/drawingml/2006/main" prst="rect">
+            <a:avLst/>
+          </a:prstGeom>
+          <a:noFill xmlns:a="http://schemas.openxmlformats.org/drawingml/2006/main"/>
+          <a:ln xmlns:a="http://schemas.openxmlformats.org/drawingml/2006/main" w="0">
+            <a:noFill/>
+            <a:prstDash val="solid"/>
+          </a:ln>
+        </p:spPr>
+        <p:txBody>
+          <a:bodyPr xmlns:a="http://schemas.openxmlformats.org/drawingml/2006/main" wrap="square" lIns="0" tIns="0" rIns="0" bIns="0" anchor="ctr">
+            <a:normAutofit fontScale="100000"/>
+          </a:bodyPr>
+          <a:lstStyle xmlns:a="http://schemas.openxmlformats.org/drawingml/2006/main"/>
+          <a:p xmlns:a="http://schemas.openxmlformats.org/drawingml/2006/main">
+            <a:pPr algn="l">
+              <a:lnSpc>
+                <a:spcPct val="100000"/>
+              </a:lnSpc>
+              <a:buNone/>
+              <a:defRPr sz="1200" b="0">
+                <a:solidFill>
+                  <a:srgbClr val="1F40CB"/>
+                </a:solidFill>
+                <a:latin typeface="Calibri"/>
+                <a:ea typeface="Calibri"/>
+                <a:cs typeface="Calibri"/>
+              </a:defRPr>
+            </a:pPr>
+            <a:r>
+              <a:rPr sz="1200" b="0">
+                <a:solidFill>
+                  <a:srgbClr val="1F40CB"/>
+                </a:solidFill>
+                <a:latin typeface="Calibri"/>
+                <a:ea typeface="Calibri"/>
+                <a:cs typeface="Calibri"/>
+              </a:rPr>
+              <a:t>stable ID · page · section</a:t>
+            </a:r>
+          </a:p>
+        </p:txBody>
+      </p:sp>
+      <p:sp>
+        <p:nvSpPr>
+          <p:cNvPr id="11" name="ingestion-3">
+            <a:extLst xmlns:a="http://schemas.openxmlformats.org/drawingml/2006/main">
+              <a:ext uri="{FF2B5EF4-FFF2-40B4-BE49-F238E27FC236}">
+                <a16:creationId xmlns:a16="http://schemas.microsoft.com/office/drawing/2014/main" id="{D4342A97-3791-461F-A305-9671DA4948CE}"/>
+              </a:ext>
+            </a:extLst>
+          </p:cNvPr>
+          <p:cNvSpPr>
+            <a:spLocks xmlns:a="http://schemas.openxmlformats.org/drawingml/2006/main" noGrp="1"/>
+          </p:cNvSpPr>
+          <p:nvPr/>
+        </p:nvSpPr>
+        <p:spPr>
+          <a:xfrm xmlns:a="http://schemas.openxmlformats.org/drawingml/2006/main">
+            <a:off x="6629400" y="3086100"/>
+            <a:ext cx="2247900" cy="2266950"/>
+          </a:xfrm>
+          <a:prstGeom xmlns:a="http://schemas.openxmlformats.org/drawingml/2006/main" prst="roundRect">
+            <a:avLst>
+              <a:gd name="adj" fmla="val 5085"/>
+            </a:avLst>
+          </a:prstGeom>
+          <a:solidFill xmlns:a="http://schemas.openxmlformats.org/drawingml/2006/main">
+            <a:srgbClr val="062433"/>
+          </a:solidFill>
+          <a:ln xmlns:a="http://schemas.openxmlformats.org/drawingml/2006/main" w="9525">
+            <a:solidFill>
+              <a:srgbClr val="062433"/>
+            </a:solidFill>
+            <a:prstDash val="solid"/>
+          </a:ln>
+        </p:spPr>
+      </p:sp>
+      <p:sp>
+        <p:nvSpPr>
+          <p:cNvPr id="12" name="">
+            <a:extLst xmlns:a="http://schemas.openxmlformats.org/drawingml/2006/main">
+              <a:ext uri="{FF2B5EF4-FFF2-40B4-BE49-F238E27FC236}">
+                <a16:creationId xmlns:a16="http://schemas.microsoft.com/office/drawing/2014/main" id="{64E49A95-2D88-4387-8BD5-FA749ABD0960}"/>
+              </a:ext>
+            </a:extLst>
+          </p:cNvPr>
+          <p:cNvSpPr>
+            <a:spLocks xmlns:a="http://schemas.openxmlformats.org/drawingml/2006/main" noGrp="1"/>
+          </p:cNvSpPr>
+          <p:nvPr/>
+        </p:nvSpPr>
+        <p:spPr>
+          <a:xfrm xmlns:a="http://schemas.openxmlformats.org/drawingml/2006/main">
+            <a:off x="6819900" y="3295650"/>
+            <a:ext cx="514350" cy="285750"/>
+          </a:xfrm>
+          <a:prstGeom xmlns:a="http://schemas.openxmlformats.org/drawingml/2006/main" prst="rect">
+            <a:avLst/>
+          </a:prstGeom>
+          <a:noFill xmlns:a="http://schemas.openxmlformats.org/drawingml/2006/main"/>
+          <a:ln xmlns:a="http://schemas.openxmlformats.org/drawingml/2006/main" w="0">
+            <a:noFill/>
+            <a:prstDash val="solid"/>
+          </a:ln>
+        </p:spPr>
+        <p:txBody>
+          <a:bodyPr xmlns:a="http://schemas.openxmlformats.org/drawingml/2006/main" wrap="square" lIns="0" tIns="0" rIns="0" bIns="0" anchor="ctr">
+            <a:noAutofit/>
+          </a:bodyPr>
+          <a:lstStyle xmlns:a="http://schemas.openxmlformats.org/drawingml/2006/main"/>
+          <a:p xmlns:a="http://schemas.openxmlformats.org/drawingml/2006/main">
+            <a:pPr algn="l">
+              <a:lnSpc>
+                <a:spcPct val="100000"/>
+              </a:lnSpc>
+              <a:buNone/>
+              <a:defRPr sz="1350" b="1">
+                <a:solidFill>
+                  <a:srgbClr val="00A2EB"/>
+                </a:solidFill>
+                <a:latin typeface="Calibri"/>
+                <a:ea typeface="Calibri"/>
+                <a:cs typeface="Calibri"/>
+              </a:defRPr>
+            </a:pPr>
+            <a:r>
+              <a:rPr sz="1800" b="1">
+                <a:solidFill>
+                  <a:srgbClr val="00A2EB"/>
+                </a:solidFill>
+                <a:latin typeface="Calibri"/>
+                <a:ea typeface="Calibri"/>
+                <a:cs typeface="Calibri"/>
+              </a:rPr>
+              <a:t>03</a:t>
+            </a:r>
+          </a:p>
+        </p:txBody>
+      </p:sp>
+      <p:sp>
+        <p:nvSpPr>
+          <p:cNvPr id="13" name="">
+            <a:extLst xmlns:a="http://schemas.openxmlformats.org/drawingml/2006/main">
+              <a:ext uri="{FF2B5EF4-FFF2-40B4-BE49-F238E27FC236}">
+                <a16:creationId xmlns:a16="http://schemas.microsoft.com/office/drawing/2014/main" id="{572D3874-F985-4CD0-BBFF-D59F5B7B32BE}"/>
+              </a:ext>
+            </a:extLst>
+          </p:cNvPr>
+          <p:cNvSpPr>
+            <a:spLocks xmlns:a="http://schemas.openxmlformats.org/drawingml/2006/main" noGrp="1"/>
+          </p:cNvSpPr>
+          <p:nvPr/>
+        </p:nvSpPr>
+        <p:spPr>
+          <a:xfrm xmlns:a="http://schemas.openxmlformats.org/drawingml/2006/main">
+            <a:off x="6743700" y="3752850"/>
+            <a:ext cx="2019300" cy="685800"/>
+          </a:xfrm>
+          <a:prstGeom xmlns:a="http://schemas.openxmlformats.org/drawingml/2006/main" prst="rect">
+            <a:avLst/>
+          </a:prstGeom>
+          <a:noFill xmlns:a="http://schemas.openxmlformats.org/drawingml/2006/main"/>
+          <a:ln xmlns:a="http://schemas.openxmlformats.org/drawingml/2006/main" w="0">
+            <a:noFill/>
+            <a:prstDash val="solid"/>
+          </a:ln>
+        </p:spPr>
+        <p:txBody>
+          <a:bodyPr xmlns:a="http://schemas.openxmlformats.org/drawingml/2006/main" wrap="square" lIns="0" tIns="0" rIns="0" bIns="0" anchor="ctr">
+            <a:noAutofit/>
+          </a:bodyPr>
+          <a:lstStyle xmlns:a="http://schemas.openxmlformats.org/drawingml/2006/main"/>
+          <a:p xmlns:a="http://schemas.openxmlformats.org/drawingml/2006/main">
+            <a:pPr algn="l">
+              <a:lnSpc>
+                <a:spcPct val="100000"/>
+              </a:lnSpc>
+              <a:buNone/>
+              <a:defRPr sz="1650" b="1">
+                <a:solidFill>
+                  <a:srgbClr val="FFFFFF"/>
+                </a:solidFill>
+                <a:latin typeface="Calibri"/>
+                <a:ea typeface="Calibri"/>
+                <a:cs typeface="Calibri"/>
+              </a:defRPr>
+            </a:pPr>
+            <a:r>
+              <a:rPr sz="1800" b="1">
+                <a:solidFill>
+                  <a:srgbClr val="FFFFFF"/>
+                </a:solidFill>
+                <a:latin typeface="Calibri"/>
+                <a:ea typeface="Calibri"/>
+                <a:cs typeface="Calibri"/>
+              </a:rPr>
+              <a:t>Embeddings</a:t>
+            </a:r>
+          </a:p>
+        </p:txBody>
+      </p:sp>
+      <p:sp>
+        <p:nvSpPr>
+          <p:cNvPr id="14" name="">
+            <a:extLst xmlns:a="http://schemas.openxmlformats.org/drawingml/2006/main">
+              <a:ext uri="{FF2B5EF4-FFF2-40B4-BE49-F238E27FC236}">
+                <a16:creationId xmlns:a16="http://schemas.microsoft.com/office/drawing/2014/main" id="{9599AF29-91DE-47C0-8189-B0778BB52724}"/>
+              </a:ext>
+            </a:extLst>
+          </p:cNvPr>
+          <p:cNvSpPr>
+            <a:spLocks xmlns:a="http://schemas.openxmlformats.org/drawingml/2006/main" noGrp="1"/>
+          </p:cNvSpPr>
+          <p:nvPr/>
+        </p:nvSpPr>
+        <p:spPr>
+          <a:xfrm xmlns:a="http://schemas.openxmlformats.org/drawingml/2006/main">
+            <a:off x="6819900" y="4610100"/>
+            <a:ext cx="1866900" cy="514350"/>
+          </a:xfrm>
+          <a:prstGeom xmlns:a="http://schemas.openxmlformats.org/drawingml/2006/main" prst="rect">
+            <a:avLst/>
+          </a:prstGeom>
+          <a:noFill xmlns:a="http://schemas.openxmlformats.org/drawingml/2006/main"/>
+          <a:ln xmlns:a="http://schemas.openxmlformats.org/drawingml/2006/main" w="0">
+            <a:noFill/>
+            <a:prstDash val="solid"/>
+          </a:ln>
+        </p:spPr>
+        <p:txBody>
+          <a:bodyPr xmlns:a="http://schemas.openxmlformats.org/drawingml/2006/main" wrap="square" lIns="0" tIns="0" rIns="0" bIns="0" anchor="ctr">
+            <a:normAutofit fontScale="100000"/>
+          </a:bodyPr>
+          <a:lstStyle xmlns:a="http://schemas.openxmlformats.org/drawingml/2006/main"/>
+          <a:p xmlns:a="http://schemas.openxmlformats.org/drawingml/2006/main">
+            <a:pPr algn="l">
+              <a:lnSpc>
+                <a:spcPct val="100000"/>
+              </a:lnSpc>
+              <a:buNone/>
+              <a:defRPr sz="1200" b="0">
+                <a:solidFill>
+                  <a:srgbClr val="00A2EB"/>
+                </a:solidFill>
+                <a:latin typeface="Calibri"/>
+                <a:ea typeface="Calibri"/>
+                <a:cs typeface="Calibri"/>
+              </a:defRPr>
+            </a:pPr>
+            <a:r>
+              <a:rPr sz="1200" b="0">
+                <a:solidFill>
+                  <a:srgbClr val="00A2EB"/>
+                </a:solidFill>
+                <a:latin typeface="Calibri"/>
+                <a:ea typeface="Calibri"/>
+                <a:cs typeface="Calibri"/>
+              </a:rPr>
+              <a:t>model · dimensions · vector</a:t>
+            </a:r>
+          </a:p>
+        </p:txBody>
+      </p:sp>
+      <p:sp>
+        <p:nvSpPr>
+          <p:cNvPr id="15" name="ingestion-4">
+            <a:extLst xmlns:a="http://schemas.openxmlformats.org/drawingml/2006/main">
+              <a:ext uri="{FF2B5EF4-FFF2-40B4-BE49-F238E27FC236}">
+                <a16:creationId xmlns:a16="http://schemas.microsoft.com/office/drawing/2014/main" id="{7952DE37-BD86-481C-A575-8709971DD74E}"/>
+              </a:ext>
+            </a:extLst>
+          </p:cNvPr>
+          <p:cNvSpPr>
+            <a:spLocks xmlns:a="http://schemas.openxmlformats.org/drawingml/2006/main" noGrp="1"/>
+          </p:cNvSpPr>
+          <p:nvPr/>
+        </p:nvSpPr>
+        <p:spPr>
+          <a:xfrm xmlns:a="http://schemas.openxmlformats.org/drawingml/2006/main">
+            <a:off x="9448800" y="3086100"/>
+            <a:ext cx="2247900" cy="2266950"/>
+          </a:xfrm>
+          <a:prstGeom xmlns:a="http://schemas.openxmlformats.org/drawingml/2006/main" prst="roundRect">
+            <a:avLst>
+              <a:gd name="adj" fmla="val 5085"/>
+            </a:avLst>
+          </a:prstGeom>
+          <a:solidFill xmlns:a="http://schemas.openxmlformats.org/drawingml/2006/main">
+            <a:srgbClr val="FFFFFF"/>
+          </a:solidFill>
+          <a:ln xmlns:a="http://schemas.openxmlformats.org/drawingml/2006/main" w="9525">
+            <a:solidFill>
+              <a:srgbClr val="E4E7E9"/>
+            </a:solidFill>
+            <a:prstDash val="solid"/>
+          </a:ln>
+        </p:spPr>
+      </p:sp>
+      <p:sp>
+        <p:nvSpPr>
+          <p:cNvPr id="16" name="">
+            <a:extLst xmlns:a="http://schemas.openxmlformats.org/drawingml/2006/main">
+              <a:ext uri="{FF2B5EF4-FFF2-40B4-BE49-F238E27FC236}">
+                <a16:creationId xmlns:a16="http://schemas.microsoft.com/office/drawing/2014/main" id="{62EC2EC9-18A1-4F72-A64D-AF536DDC8F61}"/>
+              </a:ext>
+            </a:extLst>
+          </p:cNvPr>
+          <p:cNvSpPr>
+            <a:spLocks xmlns:a="http://schemas.openxmlformats.org/drawingml/2006/main" noGrp="1"/>
+          </p:cNvSpPr>
+          <p:nvPr/>
+        </p:nvSpPr>
+        <p:spPr>
+          <a:xfrm xmlns:a="http://schemas.openxmlformats.org/drawingml/2006/main">
+            <a:off x="9639300" y="3295650"/>
+            <a:ext cx="514350" cy="285750"/>
+          </a:xfrm>
+          <a:prstGeom xmlns:a="http://schemas.openxmlformats.org/drawingml/2006/main" prst="rect">
+            <a:avLst/>
+          </a:prstGeom>
+          <a:noFill xmlns:a="http://schemas.openxmlformats.org/drawingml/2006/main"/>
+          <a:ln xmlns:a="http://schemas.openxmlformats.org/drawingml/2006/main" w="0">
+            <a:noFill/>
+            <a:prstDash val="solid"/>
+          </a:ln>
+        </p:spPr>
+        <p:txBody>
+          <a:bodyPr xmlns:a="http://schemas.openxmlformats.org/drawingml/2006/main" wrap="square" lIns="0" tIns="0" rIns="0" bIns="0" anchor="ctr">
+            <a:noAutofit/>
+          </a:bodyPr>
+          <a:lstStyle xmlns:a="http://schemas.openxmlformats.org/drawingml/2006/main"/>
+          <a:p xmlns:a="http://schemas.openxmlformats.org/drawingml/2006/main">
+            <a:pPr algn="l">
+              <a:lnSpc>
+                <a:spcPct val="100000"/>
+              </a:lnSpc>
+              <a:buNone/>
+              <a:defRPr sz="1350" b="1">
+                <a:solidFill>
+                  <a:srgbClr val="00A2EB"/>
+                </a:solidFill>
+                <a:latin typeface="Calibri"/>
+                <a:ea typeface="Calibri"/>
+                <a:cs typeface="Calibri"/>
+              </a:defRPr>
+            </a:pPr>
+            <a:r>
+              <a:rPr sz="1800" b="1">
+                <a:solidFill>
+                  <a:srgbClr val="00A2EB"/>
+                </a:solidFill>
+                <a:latin typeface="Calibri"/>
+                <a:ea typeface="Calibri"/>
+                <a:cs typeface="Calibri"/>
+              </a:rPr>
+              <a:t>04</a:t>
+            </a:r>
+          </a:p>
+        </p:txBody>
+      </p:sp>
+      <p:sp>
+        <p:nvSpPr>
+          <p:cNvPr id="17" name="">
+            <a:extLst xmlns:a="http://schemas.openxmlformats.org/drawingml/2006/main">
+              <a:ext uri="{FF2B5EF4-FFF2-40B4-BE49-F238E27FC236}">
+                <a16:creationId xmlns:a16="http://schemas.microsoft.com/office/drawing/2014/main" id="{8540FD5A-1C0F-4BE1-B862-685F20D0F43C}"/>
+              </a:ext>
+            </a:extLst>
+          </p:cNvPr>
+          <p:cNvSpPr>
+            <a:spLocks xmlns:a="http://schemas.openxmlformats.org/drawingml/2006/main" noGrp="1"/>
+          </p:cNvSpPr>
+          <p:nvPr/>
+        </p:nvSpPr>
+        <p:spPr>
+          <a:xfrm xmlns:a="http://schemas.openxmlformats.org/drawingml/2006/main">
+            <a:off x="9563100" y="3752850"/>
+            <a:ext cx="2019300" cy="685800"/>
+          </a:xfrm>
+          <a:prstGeom xmlns:a="http://schemas.openxmlformats.org/drawingml/2006/main" prst="rect">
+            <a:avLst/>
+          </a:prstGeom>
+          <a:noFill xmlns:a="http://schemas.openxmlformats.org/drawingml/2006/main"/>
+          <a:ln xmlns:a="http://schemas.openxmlformats.org/drawingml/2006/main" w="0">
+            <a:noFill/>
+            <a:prstDash val="solid"/>
+          </a:ln>
+        </p:spPr>
+        <p:txBody>
+          <a:bodyPr xmlns:a="http://schemas.openxmlformats.org/drawingml/2006/main" wrap="square" lIns="0" tIns="0" rIns="0" bIns="0" anchor="ctr">
+            <a:normAutofit fontScale="100000"/>
+          </a:bodyPr>
+          <a:lstStyle xmlns:a="http://schemas.openxmlformats.org/drawingml/2006/main"/>
+          <a:p xmlns:a="http://schemas.openxmlformats.org/drawingml/2006/main">
+            <a:pPr algn="l">
+              <a:lnSpc>
+                <a:spcPct val="100000"/>
+              </a:lnSpc>
+              <a:buNone/>
+              <a:defRPr sz="1950" b="1">
+                <a:solidFill>
+                  <a:srgbClr val="051C2A"/>
+                </a:solidFill>
+                <a:latin typeface="Calibri"/>
+                <a:ea typeface="Calibri"/>
+                <a:cs typeface="Calibri"/>
+              </a:defRPr>
+            </a:pPr>
+            <a:r>
+              <a:rPr sz="1950" b="1">
+                <a:solidFill>
+                  <a:srgbClr val="051C2A"/>
+                </a:solidFill>
+                <a:latin typeface="Calibri"/>
+                <a:ea typeface="Calibri"/>
+                <a:cs typeface="Calibri"/>
+              </a:rPr>
+              <a:t>Local index</a:t>
+            </a:r>
+          </a:p>
+        </p:txBody>
+      </p:sp>
+      <p:sp>
+        <p:nvSpPr>
+          <p:cNvPr id="18" name="">
+            <a:extLst xmlns:a="http://schemas.openxmlformats.org/drawingml/2006/main">
+              <a:ext uri="{FF2B5EF4-FFF2-40B4-BE49-F238E27FC236}">
+                <a16:creationId xmlns:a16="http://schemas.microsoft.com/office/drawing/2014/main" id="{67E52B70-645C-40F7-B0DE-1D1D177875CC}"/>
+              </a:ext>
+            </a:extLst>
+          </p:cNvPr>
+          <p:cNvSpPr>
+            <a:spLocks xmlns:a="http://schemas.openxmlformats.org/drawingml/2006/main" noGrp="1"/>
+          </p:cNvSpPr>
+          <p:nvPr/>
+        </p:nvSpPr>
+        <p:spPr>
+          <a:xfrm xmlns:a="http://schemas.openxmlformats.org/drawingml/2006/main">
+            <a:off x="9639300" y="4610100"/>
+            <a:ext cx="1866900" cy="514350"/>
+          </a:xfrm>
+          <a:prstGeom xmlns:a="http://schemas.openxmlformats.org/drawingml/2006/main" prst="rect">
+            <a:avLst/>
+          </a:prstGeom>
+          <a:noFill xmlns:a="http://schemas.openxmlformats.org/drawingml/2006/main"/>
+          <a:ln xmlns:a="http://schemas.openxmlformats.org/drawingml/2006/main" w="0">
+            <a:noFill/>
+            <a:prstDash val="solid"/>
+          </a:ln>
+        </p:spPr>
+        <p:txBody>
+          <a:bodyPr xmlns:a="http://schemas.openxmlformats.org/drawingml/2006/main" wrap="square" lIns="0" tIns="0" rIns="0" bIns="0" anchor="ctr">
+            <a:normAutofit fontScale="100000"/>
+          </a:bodyPr>
+          <a:lstStyle xmlns:a="http://schemas.openxmlformats.org/drawingml/2006/main"/>
+          <a:p xmlns:a="http://schemas.openxmlformats.org/drawingml/2006/main">
+            <a:pPr algn="l">
+              <a:lnSpc>
+                <a:spcPct val="100000"/>
+              </a:lnSpc>
+              <a:buNone/>
+              <a:defRPr sz="1200" b="0">
+                <a:solidFill>
+                  <a:srgbClr val="1F40CB"/>
+                </a:solidFill>
+                <a:latin typeface="Calibri"/>
+                <a:ea typeface="Calibri"/>
+                <a:cs typeface="Calibri"/>
+              </a:defRPr>
+            </a:pPr>
+            <a:r>
+              <a:rPr sz="1200" b="0">
+                <a:solidFill>
+                  <a:srgbClr val="1F40CB"/>
+                </a:solidFill>
+                <a:latin typeface="Calibri"/>
+                <a:ea typeface="Calibri"/>
+                <a:cs typeface="Calibri"/>
+              </a:rPr>
+              <a:t>NumPy · exact search</a:t>
+            </a:r>
+          </a:p>
+        </p:txBody>
+      </p:sp>
+      <p:sp>
+        <p:nvSpPr>
+          <p:cNvPr id="19" name="ingestion-5">
+            <a:extLst xmlns:a="http://schemas.openxmlformats.org/drawingml/2006/main">
+              <a:ext uri="{FF2B5EF4-FFF2-40B4-BE49-F238E27FC236}">
+                <a16:creationId xmlns:a16="http://schemas.microsoft.com/office/drawing/2014/main" id="{43F7E1B1-E237-4A79-B0C4-38965CF32D74}"/>
+              </a:ext>
+            </a:extLst>
+          </p:cNvPr>
+          <p:cNvSpPr>
+            <a:spLocks xmlns:a="http://schemas.openxmlformats.org/drawingml/2006/main" noGrp="1"/>
+          </p:cNvSpPr>
+          <p:nvPr/>
+        </p:nvSpPr>
+        <p:spPr>
+          <a:xfrm xmlns:a="http://schemas.openxmlformats.org/drawingml/2006/main">
+            <a:off x="12268200" y="3086100"/>
+            <a:ext cx="2247900" cy="2266950"/>
+          </a:xfrm>
+          <a:prstGeom xmlns:a="http://schemas.openxmlformats.org/drawingml/2006/main" prst="roundRect">
+            <a:avLst>
+              <a:gd name="adj" fmla="val 5085"/>
+            </a:avLst>
+          </a:prstGeom>
+          <a:solidFill xmlns:a="http://schemas.openxmlformats.org/drawingml/2006/main">
+            <a:srgbClr val="FFFFFF"/>
+          </a:solidFill>
+          <a:ln xmlns:a="http://schemas.openxmlformats.org/drawingml/2006/main" w="19050">
+            <a:solidFill>
+              <a:srgbClr val="F07D00"/>
+            </a:solidFill>
+            <a:prstDash val="solid"/>
+          </a:ln>
+        </p:spPr>
+      </p:sp>
+      <p:sp>
+        <p:nvSpPr>
+          <p:cNvPr id="20" name="">
+            <a:extLst xmlns:a="http://schemas.openxmlformats.org/drawingml/2006/main">
+              <a:ext uri="{FF2B5EF4-FFF2-40B4-BE49-F238E27FC236}">
+                <a16:creationId xmlns:a16="http://schemas.microsoft.com/office/drawing/2014/main" id="{51764D39-05B0-4F08-BC2B-2221BE2F38D6}"/>
+              </a:ext>
+            </a:extLst>
+          </p:cNvPr>
+          <p:cNvSpPr>
+            <a:spLocks xmlns:a="http://schemas.openxmlformats.org/drawingml/2006/main" noGrp="1"/>
+          </p:cNvSpPr>
+          <p:nvPr/>
+        </p:nvSpPr>
+        <p:spPr>
+          <a:xfrm xmlns:a="http://schemas.openxmlformats.org/drawingml/2006/main">
+            <a:off x="12458700" y="3295650"/>
+            <a:ext cx="514350" cy="285750"/>
+          </a:xfrm>
+          <a:prstGeom xmlns:a="http://schemas.openxmlformats.org/drawingml/2006/main" prst="rect">
+            <a:avLst/>
+          </a:prstGeom>
+          <a:noFill xmlns:a="http://schemas.openxmlformats.org/drawingml/2006/main"/>
+          <a:ln xmlns:a="http://schemas.openxmlformats.org/drawingml/2006/main" w="0">
+            <a:noFill/>
+            <a:prstDash val="solid"/>
+          </a:ln>
+        </p:spPr>
+        <p:txBody>
+          <a:bodyPr xmlns:a="http://schemas.openxmlformats.org/drawingml/2006/main" wrap="square" lIns="0" tIns="0" rIns="0" bIns="0" anchor="ctr">
+            <a:noAutofit/>
+          </a:bodyPr>
+          <a:lstStyle xmlns:a="http://schemas.openxmlformats.org/drawingml/2006/main"/>
+          <a:p xmlns:a="http://schemas.openxmlformats.org/drawingml/2006/main">
+            <a:pPr algn="l">
+              <a:lnSpc>
+                <a:spcPct val="100000"/>
+              </a:lnSpc>
+              <a:buNone/>
+              <a:defRPr sz="1350" b="1">
+                <a:solidFill>
+                  <a:srgbClr val="00A2EB"/>
+                </a:solidFill>
+                <a:latin typeface="Calibri"/>
+                <a:ea typeface="Calibri"/>
+                <a:cs typeface="Calibri"/>
+              </a:defRPr>
+            </a:pPr>
+            <a:r>
+              <a:rPr sz="1800" b="1">
+                <a:solidFill>
+                  <a:srgbClr val="00A2EB"/>
+                </a:solidFill>
+                <a:latin typeface="Calibri"/>
+                <a:ea typeface="Calibri"/>
+                <a:cs typeface="Calibri"/>
+              </a:rPr>
+              <a:t>05</a:t>
+            </a:r>
+          </a:p>
+        </p:txBody>
+      </p:sp>
+      <p:sp>
+        <p:nvSpPr>
+          <p:cNvPr id="21" name="">
+            <a:extLst xmlns:a="http://schemas.openxmlformats.org/drawingml/2006/main">
+              <a:ext uri="{FF2B5EF4-FFF2-40B4-BE49-F238E27FC236}">
+                <a16:creationId xmlns:a16="http://schemas.microsoft.com/office/drawing/2014/main" id="{C0F4CBB5-9FF7-4C7B-8D8C-5AA3541DD5E4}"/>
+              </a:ext>
+            </a:extLst>
+          </p:cNvPr>
+          <p:cNvSpPr>
+            <a:spLocks xmlns:a="http://schemas.openxmlformats.org/drawingml/2006/main" noGrp="1"/>
+          </p:cNvSpPr>
+          <p:nvPr/>
+        </p:nvSpPr>
+        <p:spPr>
+          <a:xfrm xmlns:a="http://schemas.openxmlformats.org/drawingml/2006/main">
+            <a:off x="12382500" y="3752850"/>
+            <a:ext cx="2019300" cy="685800"/>
+          </a:xfrm>
+          <a:prstGeom xmlns:a="http://schemas.openxmlformats.org/drawingml/2006/main" prst="rect">
+            <a:avLst/>
+          </a:prstGeom>
+          <a:noFill xmlns:a="http://schemas.openxmlformats.org/drawingml/2006/main"/>
+          <a:ln xmlns:a="http://schemas.openxmlformats.org/drawingml/2006/main" w="0">
+            <a:noFill/>
+            <a:prstDash val="solid"/>
+          </a:ln>
+        </p:spPr>
+        <p:txBody>
+          <a:bodyPr xmlns:a="http://schemas.openxmlformats.org/drawingml/2006/main" wrap="square" lIns="0" tIns="0" rIns="0" bIns="0" anchor="ctr">
+            <a:normAutofit fontScale="100000"/>
+          </a:bodyPr>
+          <a:lstStyle xmlns:a="http://schemas.openxmlformats.org/drawingml/2006/main"/>
+          <a:p xmlns:a="http://schemas.openxmlformats.org/drawingml/2006/main">
+            <a:pPr algn="l">
+              <a:lnSpc>
+                <a:spcPct val="100000"/>
+              </a:lnSpc>
+              <a:buNone/>
+              <a:defRPr sz="1950" b="1">
+                <a:solidFill>
+                  <a:srgbClr val="051C2A"/>
+                </a:solidFill>
+                <a:latin typeface="Calibri"/>
+                <a:ea typeface="Calibri"/>
+                <a:cs typeface="Calibri"/>
+              </a:defRPr>
+            </a:pPr>
+            <a:r>
+              <a:rPr sz="1950" b="1">
+                <a:solidFill>
+                  <a:srgbClr val="051C2A"/>
+                </a:solidFill>
+                <a:latin typeface="Calibri"/>
+                <a:ea typeface="Calibri"/>
+                <a:cs typeface="Calibri"/>
+              </a:rPr>
+              <a:t>pgvector / HNSW</a:t>
+            </a:r>
+          </a:p>
+        </p:txBody>
+      </p:sp>
+      <p:sp>
+        <p:nvSpPr>
+          <p:cNvPr id="22" name="">
+            <a:extLst xmlns:a="http://schemas.openxmlformats.org/drawingml/2006/main">
+              <a:ext uri="{FF2B5EF4-FFF2-40B4-BE49-F238E27FC236}">
+                <a16:creationId xmlns:a16="http://schemas.microsoft.com/office/drawing/2014/main" id="{8856B515-B8BF-4B9C-8D6B-EC909D2B3B4E}"/>
+              </a:ext>
+            </a:extLst>
+          </p:cNvPr>
+          <p:cNvSpPr>
+            <a:spLocks xmlns:a="http://schemas.openxmlformats.org/drawingml/2006/main" noGrp="1"/>
+          </p:cNvSpPr>
+          <p:nvPr/>
+        </p:nvSpPr>
+        <p:spPr>
+          <a:xfrm xmlns:a="http://schemas.openxmlformats.org/drawingml/2006/main">
+            <a:off x="12458700" y="4610100"/>
+            <a:ext cx="1866900" cy="514350"/>
+          </a:xfrm>
+          <a:prstGeom xmlns:a="http://schemas.openxmlformats.org/drawingml/2006/main" prst="rect">
+            <a:avLst/>
+          </a:prstGeom>
+          <a:noFill xmlns:a="http://schemas.openxmlformats.org/drawingml/2006/main"/>
+          <a:ln xmlns:a="http://schemas.openxmlformats.org/drawingml/2006/main" w="0">
+            <a:noFill/>
+            <a:prstDash val="solid"/>
+          </a:ln>
+        </p:spPr>
+        <p:txBody>
+          <a:bodyPr xmlns:a="http://schemas.openxmlformats.org/drawingml/2006/main" wrap="square" lIns="0" tIns="0" rIns="0" bIns="0" anchor="ctr">
+            <a:normAutofit fontScale="100000"/>
+          </a:bodyPr>
+          <a:lstStyle xmlns:a="http://schemas.openxmlformats.org/drawingml/2006/main"/>
+          <a:p xmlns:a="http://schemas.openxmlformats.org/drawingml/2006/main">
+            <a:pPr algn="l">
+              <a:lnSpc>
+                <a:spcPct val="100000"/>
+              </a:lnSpc>
+              <a:buNone/>
+              <a:defRPr sz="1200" b="0">
+                <a:solidFill>
+                  <a:srgbClr val="1F40CB"/>
+                </a:solidFill>
+                <a:latin typeface="Calibri"/>
+                <a:ea typeface="Calibri"/>
+                <a:cs typeface="Calibri"/>
+              </a:defRPr>
+            </a:pPr>
+            <a:r>
+              <a:rPr sz="1200" b="0">
+                <a:solidFill>
+                  <a:srgbClr val="1F40CB"/>
+                </a:solidFill>
+                <a:latin typeface="Calibri"/>
+                <a:ea typeface="Calibri"/>
+                <a:cs typeface="Calibri"/>
+              </a:rPr>
+              <a:t>persistent · approximate search</a:t>
+            </a:r>
+          </a:p>
+        </p:txBody>
+      </p:sp>
+      <p:cxnSp>
+        <p:nvCxnSpPr>
+          <p:cNvPr id="317" name=""/>
+          <p:cNvCxnSpPr>
+            <a:stCxn xmlns:a="http://schemas.openxmlformats.org/drawingml/2006/main" id="3" idx="3"/>
+            <a:endCxn xmlns:a="http://schemas.openxmlformats.org/drawingml/2006/main" id="7" idx="1"/>
+          </p:cNvCxnSpPr>
+          <p:nvPr/>
+        </p:nvCxnSpPr>
+        <p:spPr>
+          <a:xfrm xmlns:a="http://schemas.openxmlformats.org/drawingml/2006/main">
+            <a:off x="3238500" y="4219575"/>
+            <a:ext cx="571500" cy="0"/>
+          </a:xfrm>
+          <a:prstGeom xmlns:a="http://schemas.openxmlformats.org/drawingml/2006/main" prst="straightConnector1">
+            <a:avLst/>
+          </a:prstGeom>
+          <a:ln xmlns:a="http://schemas.openxmlformats.org/drawingml/2006/main" w="28575">
+            <a:solidFill>
+              <a:srgbClr val="9A9A9F"/>
+            </a:solidFill>
+            <a:prstDash val="solid"/>
+            <a:tailEnd type="triangle" w="med" len="med"/>
+          </a:ln>
+        </p:spPr>
+      </p:cxnSp>
+      <p:cxnSp>
+        <p:nvCxnSpPr>
+          <p:cNvPr id="318" name=""/>
+          <p:cNvCxnSpPr>
+            <a:stCxn xmlns:a="http://schemas.openxmlformats.org/drawingml/2006/main" id="7" idx="3"/>
+            <a:endCxn xmlns:a="http://schemas.openxmlformats.org/drawingml/2006/main" id="11" idx="1"/>
+          </p:cNvCxnSpPr>
+          <p:nvPr/>
+        </p:nvCxnSpPr>
+        <p:spPr>
+          <a:xfrm xmlns:a="http://schemas.openxmlformats.org/drawingml/2006/main">
+            <a:off x="6057900" y="4219575"/>
+            <a:ext cx="571500" cy="0"/>
+          </a:xfrm>
+          <a:prstGeom xmlns:a="http://schemas.openxmlformats.org/drawingml/2006/main" prst="straightConnector1">
+            <a:avLst/>
+          </a:prstGeom>
+          <a:ln xmlns:a="http://schemas.openxmlformats.org/drawingml/2006/main" w="28575">
+            <a:solidFill>
+              <a:srgbClr val="9A9A9F"/>
+            </a:solidFill>
+            <a:prstDash val="solid"/>
+            <a:tailEnd type="triangle" w="med" len="med"/>
+          </a:ln>
+        </p:spPr>
+      </p:cxnSp>
+      <p:cxnSp>
+        <p:nvCxnSpPr>
+          <p:cNvPr id="319" name=""/>
+          <p:cNvCxnSpPr>
+            <a:stCxn xmlns:a="http://schemas.openxmlformats.org/drawingml/2006/main" id="11" idx="3"/>
+            <a:endCxn xmlns:a="http://schemas.openxmlformats.org/drawingml/2006/main" id="15" idx="1"/>
+          </p:cNvCxnSpPr>
+          <p:nvPr/>
+        </p:nvCxnSpPr>
+        <p:spPr>
+          <a:xfrm xmlns:a="http://schemas.openxmlformats.org/drawingml/2006/main">
+            <a:off x="8877300" y="4219575"/>
+            <a:ext cx="571500" cy="0"/>
+          </a:xfrm>
+          <a:prstGeom xmlns:a="http://schemas.openxmlformats.org/drawingml/2006/main" prst="straightConnector1">
+            <a:avLst/>
+          </a:prstGeom>
+          <a:ln xmlns:a="http://schemas.openxmlformats.org/drawingml/2006/main" w="28575">
+            <a:solidFill>
+              <a:srgbClr val="9A9A9F"/>
+            </a:solidFill>
+            <a:prstDash val="solid"/>
+            <a:tailEnd type="triangle" w="med" len="med"/>
+          </a:ln>
+        </p:spPr>
+      </p:cxnSp>
+      <p:cxnSp>
+        <p:nvCxnSpPr>
+          <p:cNvPr id="320" name=""/>
+          <p:cNvCxnSpPr>
+            <a:stCxn xmlns:a="http://schemas.openxmlformats.org/drawingml/2006/main" id="15" idx="3"/>
+            <a:endCxn xmlns:a="http://schemas.openxmlformats.org/drawingml/2006/main" id="19" idx="1"/>
+          </p:cNvCxnSpPr>
+          <p:nvPr/>
+        </p:nvCxnSpPr>
+        <p:spPr>
+          <a:xfrm xmlns:a="http://schemas.openxmlformats.org/drawingml/2006/main">
+            <a:off x="11696700" y="4219575"/>
+            <a:ext cx="571500" cy="0"/>
+          </a:xfrm>
+          <a:prstGeom xmlns:a="http://schemas.openxmlformats.org/drawingml/2006/main" prst="straightConnector1">
+            <a:avLst/>
+          </a:prstGeom>
+          <a:ln xmlns:a="http://schemas.openxmlformats.org/drawingml/2006/main" w="28575">
+            <a:solidFill>
+              <a:srgbClr val="9A9A9F"/>
+            </a:solidFill>
+            <a:prstDash val="solid"/>
+            <a:tailEnd type="triangle" w="med" len="med"/>
+          </a:ln>
+        </p:spPr>
+      </p:cxnSp>
+      <p:sp>
+        <p:nvSpPr>
+          <p:cNvPr id="27" name="">
+            <a:extLst xmlns:a="http://schemas.openxmlformats.org/drawingml/2006/main">
+              <a:ext uri="{FF2B5EF4-FFF2-40B4-BE49-F238E27FC236}">
+                <a16:creationId xmlns:a16="http://schemas.microsoft.com/office/drawing/2014/main" id="{79128475-820B-447C-A724-7D8A31328FFE}"/>
+              </a:ext>
+            </a:extLst>
+          </p:cNvPr>
+          <p:cNvSpPr>
+            <a:spLocks xmlns:a="http://schemas.openxmlformats.org/drawingml/2006/main" noGrp="1"/>
+          </p:cNvSpPr>
+          <p:nvPr/>
+        </p:nvSpPr>
+        <p:spPr>
+          <a:xfrm xmlns:a="http://schemas.openxmlformats.org/drawingml/2006/main">
+            <a:off x="2381250" y="6210300"/>
+            <a:ext cx="10477500" cy="457200"/>
+          </a:xfrm>
+          <a:prstGeom xmlns:a="http://schemas.openxmlformats.org/drawingml/2006/main" prst="rect">
+            <a:avLst/>
+          </a:prstGeom>
+          <a:noFill xmlns:a="http://schemas.openxmlformats.org/drawingml/2006/main"/>
+          <a:ln xmlns:a="http://schemas.openxmlformats.org/drawingml/2006/main" w="0">
+            <a:noFill/>
+            <a:prstDash val="solid"/>
+          </a:ln>
+        </p:spPr>
+        <p:txBody>
+          <a:bodyPr xmlns:a="http://schemas.openxmlformats.org/drawingml/2006/main" wrap="square" lIns="0" tIns="0" rIns="0" bIns="0" anchor="ctr">
+            <a:normAutofit fontScale="100000"/>
+          </a:bodyPr>
+          <a:lstStyle xmlns:a="http://schemas.openxmlformats.org/drawingml/2006/main"/>
+          <a:p xmlns:a="http://schemas.openxmlformats.org/drawingml/2006/main">
+            <a:pPr algn="ctr">
+              <a:lnSpc>
+                <a:spcPct val="100000"/>
+              </a:lnSpc>
+              <a:buNone/>
+              <a:defRPr sz="2100" b="1">
+                <a:solidFill>
+                  <a:srgbClr val="051C2A"/>
+                </a:solidFill>
+                <a:latin typeface="Calibri"/>
+                <a:ea typeface="Calibri"/>
+                <a:cs typeface="Calibri"/>
+              </a:defRPr>
+            </a:pPr>
+            <a:r>
+              <a:rPr sz="2100" b="1">
+                <a:solidFill>
+                  <a:srgbClr val="051C2A"/>
+                </a:solidFill>
+                <a:latin typeface="Calibri"/>
+                <a:ea typeface="Calibri"/>
+                <a:cs typeface="Calibri"/>
+              </a:rPr>
+              <a:t>IDs, filters and evaluation contracts stay unchanged.</a:t>
+            </a:r>
+          </a:p>
+        </p:txBody>
+      </p:sp>
+      <p:sp>
+        <p:nvSpPr>
+          <p:cNvPr id="28" name="">
+            <a:extLst xmlns:a="http://schemas.openxmlformats.org/drawingml/2006/main">
+              <a:ext uri="{FF2B5EF4-FFF2-40B4-BE49-F238E27FC236}">
+                <a16:creationId xmlns:a16="http://schemas.microsoft.com/office/drawing/2014/main" id="{685F2AAD-81FC-436A-88F7-89F49C9F1671}"/>
+              </a:ext>
+            </a:extLst>
+          </p:cNvPr>
+          <p:cNvSpPr>
+            <a:spLocks xmlns:a="http://schemas.openxmlformats.org/drawingml/2006/main" noGrp="1"/>
+          </p:cNvSpPr>
+          <p:nvPr/>
+        </p:nvSpPr>
+        <p:spPr>
+          <a:xfrm xmlns:a="http://schemas.openxmlformats.org/drawingml/2006/main">
+            <a:off x="1885950" y="6838950"/>
+            <a:ext cx="4476750" cy="323850"/>
+          </a:xfrm>
+          <a:prstGeom xmlns:a="http://schemas.openxmlformats.org/drawingml/2006/main" prst="rect">
+            <a:avLst/>
+          </a:prstGeom>
+          <a:noFill xmlns:a="http://schemas.openxmlformats.org/drawingml/2006/main"/>
+          <a:ln xmlns:a="http://schemas.openxmlformats.org/drawingml/2006/main" w="0">
+            <a:noFill/>
+            <a:prstDash val="solid"/>
+          </a:ln>
+        </p:spPr>
+        <p:txBody>
+          <a:bodyPr xmlns:a="http://schemas.openxmlformats.org/drawingml/2006/main" wrap="square" lIns="0" tIns="0" rIns="0" bIns="0" anchor="ctr">
+            <a:normAutofit fontScale="100000"/>
+          </a:bodyPr>
+          <a:lstStyle xmlns:a="http://schemas.openxmlformats.org/drawingml/2006/main"/>
+          <a:p xmlns:a="http://schemas.openxmlformats.org/drawingml/2006/main">
+            <a:pPr algn="ctr">
+              <a:lnSpc>
+                <a:spcPct val="100000"/>
+              </a:lnSpc>
+              <a:buNone/>
+              <a:defRPr sz="1500" b="0">
+                <a:solidFill>
+                  <a:srgbClr val="64748B"/>
+                </a:solidFill>
+                <a:latin typeface="Calibri"/>
+                <a:ea typeface="Calibri"/>
+                <a:cs typeface="Calibri"/>
+              </a:defRPr>
+            </a:pPr>
+            <a:r>
+              <a:rPr sz="1500" b="0">
+                <a:solidFill>
+                  <a:srgbClr val="64748B"/>
+                </a:solidFill>
+                <a:latin typeface="Calibri"/>
+                <a:ea typeface="Calibri"/>
+                <a:cs typeface="Calibri"/>
+              </a:rPr>
+              <a:t>prototype · simple + inspectable</a:t>
+            </a:r>
+          </a:p>
+        </p:txBody>
+      </p:sp>
+      <p:sp>
+        <p:nvSpPr>
+          <p:cNvPr id="29" name="">
+            <a:extLst xmlns:a="http://schemas.openxmlformats.org/drawingml/2006/main">
+              <a:ext uri="{FF2B5EF4-FFF2-40B4-BE49-F238E27FC236}">
+                <a16:creationId xmlns:a16="http://schemas.microsoft.com/office/drawing/2014/main" id="{CDE04AD7-6CBE-4792-B549-765578FB3E1E}"/>
+              </a:ext>
+            </a:extLst>
+          </p:cNvPr>
+          <p:cNvSpPr>
+            <a:spLocks xmlns:a="http://schemas.openxmlformats.org/drawingml/2006/main" noGrp="1"/>
+          </p:cNvSpPr>
+          <p:nvPr/>
+        </p:nvSpPr>
+        <p:spPr>
+          <a:xfrm xmlns:a="http://schemas.openxmlformats.org/drawingml/2006/main">
+            <a:off x="8801100" y="6838950"/>
+            <a:ext cx="4762500" cy="323850"/>
+          </a:xfrm>
+          <a:prstGeom xmlns:a="http://schemas.openxmlformats.org/drawingml/2006/main" prst="rect">
+            <a:avLst/>
+          </a:prstGeom>
+          <a:noFill xmlns:a="http://schemas.openxmlformats.org/drawingml/2006/main"/>
+          <a:ln xmlns:a="http://schemas.openxmlformats.org/drawingml/2006/main" w="0">
+            <a:noFill/>
+            <a:prstDash val="solid"/>
+          </a:ln>
+        </p:spPr>
+        <p:txBody>
+          <a:bodyPr xmlns:a="http://schemas.openxmlformats.org/drawingml/2006/main" wrap="square" lIns="0" tIns="0" rIns="0" bIns="0" anchor="ctr">
+            <a:normAutofit fontScale="100000"/>
+          </a:bodyPr>
+          <a:lstStyle xmlns:a="http://schemas.openxmlformats.org/drawingml/2006/main"/>
+          <a:p xmlns:a="http://schemas.openxmlformats.org/drawingml/2006/main">
+            <a:pPr algn="ctr">
+              <a:lnSpc>
+                <a:spcPct val="100000"/>
+              </a:lnSpc>
+              <a:buNone/>
+              <a:defRPr sz="1500" b="0">
+                <a:solidFill>
+                  <a:srgbClr val="64748B"/>
+                </a:solidFill>
+                <a:latin typeface="Calibri"/>
+                <a:ea typeface="Calibri"/>
+                <a:cs typeface="Calibri"/>
+              </a:defRPr>
+            </a:pPr>
+            <a:r>
+              <a:rPr sz="1500" b="0">
+                <a:solidFill>
+                  <a:srgbClr val="64748B"/>
+                </a:solidFill>
+                <a:latin typeface="Calibri"/>
+                <a:ea typeface="Calibri"/>
+                <a:cs typeface="Calibri"/>
+              </a:rPr>
+              <a:t>production · persistence + scale</a:t>
+            </a:r>
+          </a:p>
+        </p:txBody>
+      </p:sp>
+      <p:sp>
+        <p:nvSpPr>
+          <p:cNvPr id="30" name="">
+            <a:extLst xmlns:a="http://schemas.openxmlformats.org/drawingml/2006/main">
+              <a:ext uri="{FF2B5EF4-FFF2-40B4-BE49-F238E27FC236}">
+                <a16:creationId xmlns:a16="http://schemas.microsoft.com/office/drawing/2014/main" id="{28CBA7AE-993C-4F84-A696-8D1323AC4E80}"/>
+              </a:ext>
+            </a:extLst>
+          </p:cNvPr>
+          <p:cNvSpPr>
+            <a:spLocks xmlns:a="http://schemas.openxmlformats.org/drawingml/2006/main" noGrp="1"/>
+          </p:cNvSpPr>
+          <p:nvPr/>
+        </p:nvSpPr>
+        <p:spPr>
+          <a:xfrm xmlns:a="http://schemas.openxmlformats.org/drawingml/2006/main">
+            <a:off x="857250" y="7896225"/>
+            <a:ext cx="13525500" cy="28575"/>
+          </a:xfrm>
+          <a:prstGeom xmlns:a="http://schemas.openxmlformats.org/drawingml/2006/main" prst="rect">
+            <a:avLst/>
+          </a:prstGeom>
+          <a:solidFill xmlns:a="http://schemas.openxmlformats.org/drawingml/2006/main">
+            <a:srgbClr val="E4E7E9"/>
+          </a:solidFill>
+          <a:ln xmlns:a="http://schemas.openxmlformats.org/drawingml/2006/main" w="0">
+            <a:solidFill>
+              <a:srgbClr val="E4E7E9"/>
+            </a:solidFill>
+            <a:prstDash val="solid"/>
+          </a:ln>
+        </p:spPr>
+      </p:sp>
+      <p:sp>
+        <p:nvSpPr>
+          <p:cNvPr id="31" name="">
+            <a:extLst xmlns:a="http://schemas.openxmlformats.org/drawingml/2006/main">
+              <a:ext uri="{FF2B5EF4-FFF2-40B4-BE49-F238E27FC236}">
+                <a16:creationId xmlns:a16="http://schemas.microsoft.com/office/drawing/2014/main" id="{DE97BF4D-EDBC-4480-A82B-512A72221950}"/>
+              </a:ext>
+            </a:extLst>
+          </p:cNvPr>
+          <p:cNvSpPr>
+            <a:spLocks xmlns:a="http://schemas.openxmlformats.org/drawingml/2006/main" noGrp="1"/>
+          </p:cNvSpPr>
+          <p:nvPr/>
+        </p:nvSpPr>
+        <p:spPr>
+          <a:xfrm xmlns:a="http://schemas.openxmlformats.org/drawingml/2006/main">
+            <a:off x="857250" y="7896225"/>
+            <a:ext cx="8001000" cy="38100"/>
+          </a:xfrm>
+          <a:prstGeom xmlns:a="http://schemas.openxmlformats.org/drawingml/2006/main" prst="rect">
+            <a:avLst/>
+          </a:prstGeom>
+          <a:solidFill xmlns:a="http://schemas.openxmlformats.org/drawingml/2006/main">
+            <a:srgbClr val="00A2EB"/>
+          </a:solidFill>
+          <a:ln xmlns:a="http://schemas.openxmlformats.org/drawingml/2006/main" w="0">
+            <a:solidFill>
+              <a:srgbClr val="00A2EB"/>
+            </a:solidFill>
+            <a:prstDash val="solid"/>
+          </a:ln>
+        </p:spPr>
+      </p:sp>
+      <p:sp>
+        <p:nvSpPr>
+          <p:cNvPr id="32" name="">
+            <a:extLst xmlns:a="http://schemas.openxmlformats.org/drawingml/2006/main">
+              <a:ext uri="{FF2B5EF4-FFF2-40B4-BE49-F238E27FC236}">
+                <a16:creationId xmlns:a16="http://schemas.microsoft.com/office/drawing/2014/main" id="{49281B64-2F0F-4357-A085-C65451F28236}"/>
+              </a:ext>
+            </a:extLst>
+          </p:cNvPr>
+          <p:cNvSpPr>
+            <a:spLocks xmlns:a="http://schemas.openxmlformats.org/drawingml/2006/main" noGrp="1"/>
+          </p:cNvSpPr>
+          <p:nvPr/>
+        </p:nvSpPr>
+        <p:spPr>
+          <a:xfrm xmlns:a="http://schemas.openxmlformats.org/drawingml/2006/main">
+            <a:off x="971550" y="8058150"/>
+            <a:ext cx="3714750" cy="323850"/>
+          </a:xfrm>
+          <a:prstGeom xmlns:a="http://schemas.openxmlformats.org/drawingml/2006/main" prst="rect">
+            <a:avLst/>
+          </a:prstGeom>
+          <a:noFill xmlns:a="http://schemas.openxmlformats.org/drawingml/2006/main"/>
+          <a:ln xmlns:a="http://schemas.openxmlformats.org/drawingml/2006/main" w="0">
+            <a:noFill/>
+            <a:prstDash val="solid"/>
+          </a:ln>
+        </p:spPr>
+        <p:txBody>
+          <a:bodyPr xmlns:a="http://schemas.openxmlformats.org/drawingml/2006/main" wrap="square" lIns="0" tIns="0" rIns="0" bIns="0" anchor="ctr">
+            <a:normAutofit fontScale="100000"/>
+          </a:bodyPr>
+          <a:lstStyle xmlns:a="http://schemas.openxmlformats.org/drawingml/2006/main"/>
+          <a:p xmlns:a="http://schemas.openxmlformats.org/drawingml/2006/main">
+            <a:pPr algn="l">
+              <a:lnSpc>
+                <a:spcPct val="100000"/>
+              </a:lnSpc>
+              <a:buNone/>
+              <a:defRPr sz="1200" b="0">
+                <a:solidFill>
+                  <a:srgbClr val="9A9A9F"/>
+                </a:solidFill>
+                <a:latin typeface="Calibri"/>
+                <a:ea typeface="Calibri"/>
+                <a:cs typeface="Calibri"/>
+              </a:defRPr>
+            </a:pPr>
+            <a:r>
+              <a:rPr sz="1200" b="0">
+                <a:solidFill>
+                  <a:srgbClr val="9A9A9F"/>
+                </a:solidFill>
+                <a:latin typeface="Calibri"/>
+                <a:ea typeface="Calibri"/>
+                <a:cs typeface="Calibri"/>
+              </a:rPr>
+              <a:t>First Finance - Arnaud Demes</a:t>
+            </a:r>
+          </a:p>
+        </p:txBody>
+      </p:sp>
+      <p:sp>
+        <p:nvSpPr>
+          <p:cNvPr id="33" name="">
+            <a:extLst xmlns:a="http://schemas.openxmlformats.org/drawingml/2006/main">
+              <a:ext uri="{FF2B5EF4-FFF2-40B4-BE49-F238E27FC236}">
+                <a16:creationId xmlns:a16="http://schemas.microsoft.com/office/drawing/2014/main" id="{EAA325A4-7EC6-42CE-A13A-4B38A32DE7F2}"/>
+              </a:ext>
+            </a:extLst>
+          </p:cNvPr>
+          <p:cNvSpPr>
+            <a:spLocks xmlns:a="http://schemas.openxmlformats.org/drawingml/2006/main" noGrp="1"/>
+          </p:cNvSpPr>
+          <p:nvPr/>
+        </p:nvSpPr>
+        <p:spPr>
+          <a:xfrm xmlns:a="http://schemas.openxmlformats.org/drawingml/2006/main">
+            <a:off x="12192000" y="8058150"/>
+            <a:ext cx="1809750" cy="323850"/>
+          </a:xfrm>
+          <a:prstGeom xmlns:a="http://schemas.openxmlformats.org/drawingml/2006/main" prst="rect">
+            <a:avLst/>
+          </a:prstGeom>
+          <a:noFill xmlns:a="http://schemas.openxmlformats.org/drawingml/2006/main"/>
+          <a:ln xmlns:a="http://schemas.openxmlformats.org/drawingml/2006/main" w="0">
+            <a:noFill/>
+            <a:prstDash val="solid"/>
+          </a:ln>
+        </p:spPr>
+        <p:txBody>
+          <a:bodyPr xmlns:a="http://schemas.openxmlformats.org/drawingml/2006/main" wrap="square" lIns="0" tIns="0" rIns="0" bIns="0" anchor="ctr">
+            <a:normAutofit fontScale="100000"/>
+          </a:bodyPr>
+          <a:lstStyle xmlns:a="http://schemas.openxmlformats.org/drawingml/2006/main"/>
+          <a:p xmlns:a="http://schemas.openxmlformats.org/drawingml/2006/main">
+            <a:pPr algn="r">
+              <a:lnSpc>
+                <a:spcPct val="100000"/>
+              </a:lnSpc>
+              <a:buNone/>
+              <a:defRPr sz="1200" b="1">
+                <a:solidFill>
+                  <a:srgbClr val="9A9A9F"/>
+                </a:solidFill>
+                <a:latin typeface="Calibri"/>
+                <a:ea typeface="Calibri"/>
+                <a:cs typeface="Calibri"/>
+              </a:defRPr>
+            </a:pPr>
+            <a:r>
+              <a:rPr sz="1200" b="1">
+                <a:solidFill>
+                  <a:srgbClr val="9A9A9F"/>
+                </a:solidFill>
+                <a:latin typeface="Calibri"/>
+                <a:ea typeface="Calibri"/>
+                <a:cs typeface="Calibri"/>
+              </a:rPr>
+              <a:t>STORAGE</a:t>
+            </a:r>
+          </a:p>
+        </p:txBody>
+      </p:sp>
+      <p:sp>
+        <p:nvSpPr>
+          <p:cNvPr id="34" name="">
+            <a:extLst xmlns:a="http://schemas.openxmlformats.org/drawingml/2006/main">
+              <a:ext uri="{FF2B5EF4-FFF2-40B4-BE49-F238E27FC236}">
+                <a16:creationId xmlns:a16="http://schemas.microsoft.com/office/drawing/2014/main" id="{5F7FB65A-4A0D-4595-92F4-FD9B71638842}"/>
+              </a:ext>
+            </a:extLst>
+          </p:cNvPr>
+          <p:cNvSpPr>
+            <a:spLocks xmlns:a="http://schemas.openxmlformats.org/drawingml/2006/main" noGrp="1"/>
+          </p:cNvSpPr>
+          <p:nvPr/>
+        </p:nvSpPr>
+        <p:spPr>
+          <a:xfrm xmlns:a="http://schemas.openxmlformats.org/drawingml/2006/main">
+            <a:off x="14135100" y="8058150"/>
+            <a:ext cx="266700" cy="323850"/>
+          </a:xfrm>
+          <a:prstGeom xmlns:a="http://schemas.openxmlformats.org/drawingml/2006/main" prst="rect">
+            <a:avLst/>
+          </a:prstGeom>
+          <a:noFill xmlns:a="http://schemas.openxmlformats.org/drawingml/2006/main"/>
+          <a:ln xmlns:a="http://schemas.openxmlformats.org/drawingml/2006/main" w="0">
+            <a:noFill/>
+            <a:prstDash val="solid"/>
+          </a:ln>
+        </p:spPr>
+        <p:txBody>
+          <a:bodyPr xmlns:a="http://schemas.openxmlformats.org/drawingml/2006/main" wrap="square" lIns="0" tIns="0" rIns="0" bIns="0" anchor="ctr">
+            <a:normAutofit fontScale="100000"/>
+          </a:bodyPr>
+          <a:lstStyle xmlns:a="http://schemas.openxmlformats.org/drawingml/2006/main"/>
+          <a:p xmlns:a="http://schemas.openxmlformats.org/drawingml/2006/main">
+            <a:pPr algn="r">
+              <a:lnSpc>
+                <a:spcPct val="100000"/>
+              </a:lnSpc>
+              <a:buNone/>
+              <a:defRPr sz="1200" b="1">
+                <a:solidFill>
+                  <a:srgbClr val="9A9A9F"/>
+                </a:solidFill>
+                <a:latin typeface="Calibri"/>
+                <a:ea typeface="Calibri"/>
+                <a:cs typeface="Calibri"/>
+              </a:defRPr>
+            </a:pPr>
+            <a:r>
+              <a:rPr sz="1200" b="1">
+                <a:solidFill>
+                  <a:srgbClr val="9A9A9F"/>
+                </a:solidFill>
+                <a:latin typeface="Calibri"/>
+                <a:ea typeface="Calibri"/>
+                <a:cs typeface="Calibri"/>
+              </a:rPr>
+              <a:t>08</a:t>
+            </a:r>
+          </a:p>
+        </p:txBody>
+      </p:sp>
+    </p:spTree>
+    <p:extLst>
+      <p:ext uri="{BB962C8B-B14F-4D97-AF65-F5344CB8AC3E}">
+        <p14:creationId xmlns:p14="http://schemas.microsoft.com/office/powerpoint/2010/main" val="1169510731"/>
+      </p:ext>
+    </p:extLst>
+  </p:cSld>
+</p:sld>
+</file>
+
+<file path=ppt/slides/slide9.xml><?xml version="1.0" encoding="utf-8"?>
+<p:sld xmlns:p="http://schemas.openxmlformats.org/presentationml/2006/main">
+  <p:cSld>
+    <p:bg>
+      <p:bgPr>
+        <a:solidFill xmlns:a="http://schemas.openxmlformats.org/drawingml/2006/main">
+          <a:srgbClr val="F5F5F5"/>
+        </a:solidFill>
+      </p:bgPr>
+    </p:bg>
+    <p:spTree>
+      <p:nvGrpSpPr>
+        <p:cNvPr id="1" name=""/>
+        <p:cNvGrpSpPr/>
+        <p:nvPr/>
+      </p:nvGrpSpPr>
+      <p:grpSpPr>
+        <a:xfrm xmlns:a="http://schemas.openxmlformats.org/drawingml/2006/main"/>
+      </p:grpSpPr>
+      <p:sp>
+        <p:nvSpPr>
+          <p:cNvPr id="35" name="">
+            <a:extLst xmlns:a="http://schemas.openxmlformats.org/drawingml/2006/main">
+              <a:ext uri="{FF2B5EF4-FFF2-40B4-BE49-F238E27FC236}">
+                <a16:creationId xmlns:a16="http://schemas.microsoft.com/office/drawing/2014/main" id="{45EAFBC5-0120-406B-9113-A189734D7D27}"/>
+              </a:ext>
+            </a:extLst>
+          </p:cNvPr>
+          <p:cNvSpPr>
+            <a:spLocks xmlns:a="http://schemas.openxmlformats.org/drawingml/2006/main" noGrp="1"/>
+          </p:cNvSpPr>
+          <p:nvPr/>
+        </p:nvSpPr>
+        <p:spPr>
+          <a:xfrm xmlns:a="http://schemas.openxmlformats.org/drawingml/2006/main">
+            <a:off x="971550" y="666750"/>
+            <a:ext cx="4762500" cy="342900"/>
+          </a:xfrm>
+          <a:prstGeom xmlns:a="http://schemas.openxmlformats.org/drawingml/2006/main" prst="rect">
+            <a:avLst/>
+          </a:prstGeom>
+          <a:noFill xmlns:a="http://schemas.openxmlformats.org/drawingml/2006/main"/>
+          <a:ln xmlns:a="http://schemas.openxmlformats.org/drawingml/2006/main" w="0">
+            <a:noFill/>
+            <a:prstDash val="solid"/>
+          </a:ln>
+        </p:spPr>
+        <p:txBody>
+          <a:bodyPr xmlns:a="http://schemas.openxmlformats.org/drawingml/2006/main" wrap="square" lIns="0" tIns="0" rIns="0" bIns="0" anchor="ctr">
+            <a:noAutofit/>
+          </a:bodyPr>
+          <a:lstStyle xmlns:a="http://schemas.openxmlformats.org/drawingml/2006/main"/>
+          <a:p xmlns:a="http://schemas.openxmlformats.org/drawingml/2006/main">
+            <a:pPr algn="l">
+              <a:lnSpc>
+                <a:spcPct val="100000"/>
+              </a:lnSpc>
+              <a:buNone/>
+              <a:defRPr sz="1425" b="1">
+                <a:solidFill>
+                  <a:srgbClr val="1F40CB"/>
+                </a:solidFill>
+                <a:latin typeface="Calibri"/>
+                <a:ea typeface="Calibri"/>
+                <a:cs typeface="Calibri"/>
+              </a:defRPr>
+            </a:pPr>
+            <a:r>
+              <a:rPr sz="1800" b="1">
+                <a:solidFill>
+                  <a:srgbClr val="1F40CB"/>
+                </a:solidFill>
+                <a:latin typeface="Calibri"/>
+                <a:ea typeface="Calibri"/>
+                <a:cs typeface="Calibri"/>
+              </a:rPr>
+              <a:t>MEASUREMENT HANDOFF</a:t>
+            </a:r>
+          </a:p>
+        </p:txBody>
+      </p:sp>
+      <p:sp>
+        <p:nvSpPr>
+          <p:cNvPr id="2" name="">
+            <a:extLst xmlns:a="http://schemas.openxmlformats.org/drawingml/2006/main">
+              <a:ext uri="{FF2B5EF4-FFF2-40B4-BE49-F238E27FC236}">
+                <a16:creationId xmlns:a16="http://schemas.microsoft.com/office/drawing/2014/main" id="{E788E1BA-062C-4D13-89C4-9762E55DD5F6}"/>
+              </a:ext>
+            </a:extLst>
+          </p:cNvPr>
+          <p:cNvSpPr>
+            <a:spLocks xmlns:a="http://schemas.openxmlformats.org/drawingml/2006/main" noGrp="1"/>
+          </p:cNvSpPr>
+          <p:nvPr/>
+        </p:nvSpPr>
+        <p:spPr>
+          <a:xfrm xmlns:a="http://schemas.openxmlformats.org/drawingml/2006/main">
+            <a:off x="971550" y="1181100"/>
+            <a:ext cx="13296900" cy="781050"/>
+          </a:xfrm>
+          <a:prstGeom xmlns:a="http://schemas.openxmlformats.org/drawingml/2006/main" prst="rect">
+            <a:avLst/>
+          </a:prstGeom>
+          <a:noFill xmlns:a="http://schemas.openxmlformats.org/drawingml/2006/main"/>
+          <a:ln xmlns:a="http://schemas.openxmlformats.org/drawingml/2006/main" w="0">
+            <a:noFill/>
+            <a:prstDash val="solid"/>
+          </a:ln>
+        </p:spPr>
+        <p:txBody>
+          <a:bodyPr xmlns:a="http://schemas.openxmlformats.org/drawingml/2006/main" wrap="none" lIns="0" tIns="0" rIns="0" bIns="0" anchor="ctr">
+            <a:normAutofit fontScale="100000"/>
+          </a:bodyPr>
+          <a:lstStyle xmlns:a="http://schemas.openxmlformats.org/drawingml/2006/main"/>
+          <a:p xmlns:a="http://schemas.openxmlformats.org/drawingml/2006/main">
+            <a:pPr algn="l">
+              <a:lnSpc>
+                <a:spcPct val="100000"/>
+              </a:lnSpc>
+              <a:buNone/>
+              <a:defRPr sz="3600" b="1">
+                <a:solidFill>
+                  <a:srgbClr val="051C2A"/>
+                </a:solidFill>
+                <a:latin typeface="Calibri"/>
+                <a:ea typeface="Calibri"/>
+                <a:cs typeface="Calibri"/>
+              </a:defRPr>
+            </a:pPr>
+            <a:r>
+              <a:rPr sz="3600" b="1">
+                <a:solidFill>
+                  <a:srgbClr val="051C2A"/>
+                </a:solidFill>
+                <a:latin typeface="Calibri"/>
+                <a:ea typeface="Calibri"/>
+                <a:cs typeface="Calibri"/>
+              </a:rPr>
+              <a:t>Measure each retrieval stage before adding MLflow</a:t>
+            </a:r>
+          </a:p>
+        </p:txBody>
+      </p:sp>
+      <p:sp>
+        <p:nvSpPr>
+          <p:cNvPr id="3" name="ingestion-1">
+            <a:extLst xmlns:a="http://schemas.openxmlformats.org/drawingml/2006/main">
+              <a:ext uri="{FF2B5EF4-FFF2-40B4-BE49-F238E27FC236}">
+                <a16:creationId xmlns:a16="http://schemas.microsoft.com/office/drawing/2014/main" id="{EF5CEA91-0836-4E99-95C1-43A271A11FFF}"/>
+              </a:ext>
+            </a:extLst>
+          </p:cNvPr>
+          <p:cNvSpPr>
+            <a:spLocks xmlns:a="http://schemas.openxmlformats.org/drawingml/2006/main" noGrp="1"/>
+          </p:cNvSpPr>
+          <p:nvPr/>
+        </p:nvSpPr>
+        <p:spPr>
+          <a:xfrm xmlns:a="http://schemas.openxmlformats.org/drawingml/2006/main">
+            <a:off x="990600" y="3086100"/>
+            <a:ext cx="2247900" cy="2266950"/>
+          </a:xfrm>
+          <a:prstGeom xmlns:a="http://schemas.openxmlformats.org/drawingml/2006/main" prst="roundRect">
+            <a:avLst>
+              <a:gd name="adj" fmla="val 5085"/>
+            </a:avLst>
+          </a:prstGeom>
+          <a:solidFill xmlns:a="http://schemas.openxmlformats.org/drawingml/2006/main">
+            <a:srgbClr val="FFFFFF"/>
+          </a:solidFill>
+          <a:ln xmlns:a="http://schemas.openxmlformats.org/drawingml/2006/main" w="9525">
+            <a:solidFill>
+              <a:srgbClr val="E4E7E9"/>
+            </a:solidFill>
+            <a:prstDash val="solid"/>
+          </a:ln>
+        </p:spPr>
+      </p:sp>
+      <p:sp>
+        <p:nvSpPr>
+          <p:cNvPr id="4" name="">
+            <a:extLst xmlns:a="http://schemas.openxmlformats.org/drawingml/2006/main">
+              <a:ext uri="{FF2B5EF4-FFF2-40B4-BE49-F238E27FC236}">
+                <a16:creationId xmlns:a16="http://schemas.microsoft.com/office/drawing/2014/main" id="{4A163ADC-FDBA-49AB-AB53-62FA29104479}"/>
+              </a:ext>
+            </a:extLst>
+          </p:cNvPr>
+          <p:cNvSpPr>
+            <a:spLocks xmlns:a="http://schemas.openxmlformats.org/drawingml/2006/main" noGrp="1"/>
+          </p:cNvSpPr>
+          <p:nvPr/>
+        </p:nvSpPr>
+        <p:spPr>
+          <a:xfrm xmlns:a="http://schemas.openxmlformats.org/drawingml/2006/main">
+            <a:off x="1181100" y="3295650"/>
+            <a:ext cx="514350" cy="285750"/>
+          </a:xfrm>
+          <a:prstGeom xmlns:a="http://schemas.openxmlformats.org/drawingml/2006/main" prst="rect">
+            <a:avLst/>
+          </a:prstGeom>
+          <a:noFill xmlns:a="http://schemas.openxmlformats.org/drawingml/2006/main"/>
+          <a:ln xmlns:a="http://schemas.openxmlformats.org/drawingml/2006/main" w="0">
+            <a:noFill/>
+            <a:prstDash val="solid"/>
+          </a:ln>
+        </p:spPr>
+        <p:txBody>
+          <a:bodyPr xmlns:a="http://schemas.openxmlformats.org/drawingml/2006/main" wrap="square" lIns="0" tIns="0" rIns="0" bIns="0" anchor="ctr">
+            <a:noAutofit/>
+          </a:bodyPr>
+          <a:lstStyle xmlns:a="http://schemas.openxmlformats.org/drawingml/2006/main"/>
+          <a:p xmlns:a="http://schemas.openxmlformats.org/drawingml/2006/main">
+            <a:pPr algn="l">
+              <a:lnSpc>
+                <a:spcPct val="100000"/>
+              </a:lnSpc>
+              <a:buNone/>
+              <a:defRPr sz="1350" b="1">
+                <a:solidFill>
+                  <a:srgbClr val="00A2EB"/>
+                </a:solidFill>
+                <a:latin typeface="Calibri"/>
+                <a:ea typeface="Calibri"/>
+                <a:cs typeface="Calibri"/>
+              </a:defRPr>
+            </a:pPr>
+            <a:r>
+              <a:rPr sz="1800" b="1">
+                <a:solidFill>
+                  <a:srgbClr val="00A2EB"/>
+                </a:solidFill>
+                <a:latin typeface="Calibri"/>
+                <a:ea typeface="Calibri"/>
+                <a:cs typeface="Calibri"/>
+              </a:rPr>
+              <a:t>01</a:t>
+            </a:r>
+          </a:p>
+        </p:txBody>
+      </p:sp>
+      <p:sp>
+        <p:nvSpPr>
+          <p:cNvPr id="5" name="">
+            <a:extLst xmlns:a="http://schemas.openxmlformats.org/drawingml/2006/main">
+              <a:ext uri="{FF2B5EF4-FFF2-40B4-BE49-F238E27FC236}">
+                <a16:creationId xmlns:a16="http://schemas.microsoft.com/office/drawing/2014/main" id="{26D1AD73-F995-4369-A266-8FA41354CE3D}"/>
+              </a:ext>
+            </a:extLst>
+          </p:cNvPr>
+          <p:cNvSpPr>
+            <a:spLocks xmlns:a="http://schemas.openxmlformats.org/drawingml/2006/main" noGrp="1"/>
+          </p:cNvSpPr>
+          <p:nvPr/>
+        </p:nvSpPr>
+        <p:spPr>
+          <a:xfrm xmlns:a="http://schemas.openxmlformats.org/drawingml/2006/main">
+            <a:off x="1104900" y="3752850"/>
+            <a:ext cx="2019300" cy="685800"/>
+          </a:xfrm>
+          <a:prstGeom xmlns:a="http://schemas.openxmlformats.org/drawingml/2006/main" prst="rect">
+            <a:avLst/>
+          </a:prstGeom>
+          <a:noFill xmlns:a="http://schemas.openxmlformats.org/drawingml/2006/main"/>
+          <a:ln xmlns:a="http://schemas.openxmlformats.org/drawingml/2006/main" w="0">
+            <a:noFill/>
+            <a:prstDash val="solid"/>
+          </a:ln>
+        </p:spPr>
+        <p:txBody>
+          <a:bodyPr xmlns:a="http://schemas.openxmlformats.org/drawingml/2006/main" wrap="square" lIns="0" tIns="0" rIns="0" bIns="0" anchor="ctr">
+            <a:normAutofit fontScale="100000"/>
+          </a:bodyPr>
+          <a:lstStyle xmlns:a="http://schemas.openxmlformats.org/drawingml/2006/main"/>
+          <a:p xmlns:a="http://schemas.openxmlformats.org/drawingml/2006/main">
+            <a:pPr algn="l">
+              <a:lnSpc>
+                <a:spcPct val="100000"/>
+              </a:lnSpc>
+              <a:buNone/>
+              <a:defRPr sz="1950" b="1">
+                <a:solidFill>
+                  <a:srgbClr val="051C2A"/>
+                </a:solidFill>
+                <a:latin typeface="Calibri"/>
+                <a:ea typeface="Calibri"/>
+                <a:cs typeface="Calibri"/>
+              </a:defRPr>
+            </a:pPr>
+            <a:r>
+              <a:rPr sz="1950" b="1">
+                <a:solidFill>
+                  <a:srgbClr val="051C2A"/>
+                </a:solidFill>
+                <a:latin typeface="Calibri"/>
+                <a:ea typeface="Calibri"/>
+                <a:cs typeface="Calibri"/>
+              </a:rPr>
+              <a:t>Eligibility</a:t>
+            </a:r>
+          </a:p>
+        </p:txBody>
+      </p:sp>
+      <p:sp>
+        <p:nvSpPr>
+          <p:cNvPr id="6" name="">
+            <a:extLst xmlns:a="http://schemas.openxmlformats.org/drawingml/2006/main">
+              <a:ext uri="{FF2B5EF4-FFF2-40B4-BE49-F238E27FC236}">
+                <a16:creationId xmlns:a16="http://schemas.microsoft.com/office/drawing/2014/main" id="{4CA7F72B-07B6-4BF4-A3F9-5860F8AC7245}"/>
+              </a:ext>
+            </a:extLst>
+          </p:cNvPr>
+          <p:cNvSpPr>
+            <a:spLocks xmlns:a="http://schemas.openxmlformats.org/drawingml/2006/main" noGrp="1"/>
+          </p:cNvSpPr>
+          <p:nvPr/>
+        </p:nvSpPr>
+        <p:spPr>
+          <a:xfrm xmlns:a="http://schemas.openxmlformats.org/drawingml/2006/main">
+            <a:off x="1181100" y="4610100"/>
+            <a:ext cx="1866900" cy="514350"/>
+          </a:xfrm>
+          <a:prstGeom xmlns:a="http://schemas.openxmlformats.org/drawingml/2006/main" prst="rect">
+            <a:avLst/>
+          </a:prstGeom>
+          <a:noFill xmlns:a="http://schemas.openxmlformats.org/drawingml/2006/main"/>
+          <a:ln xmlns:a="http://schemas.openxmlformats.org/drawingml/2006/main" w="0">
+            <a:noFill/>
+            <a:prstDash val="solid"/>
+          </a:ln>
+        </p:spPr>
+        <p:txBody>
+          <a:bodyPr xmlns:a="http://schemas.openxmlformats.org/drawingml/2006/main" wrap="square" lIns="0" tIns="0" rIns="0" bIns="0" anchor="ctr">
+            <a:normAutofit fontScale="100000"/>
+          </a:bodyPr>
+          <a:lstStyle xmlns:a="http://schemas.openxmlformats.org/drawingml/2006/main"/>
+          <a:p xmlns:a="http://schemas.openxmlformats.org/drawingml/2006/main">
+            <a:pPr algn="l">
+              <a:lnSpc>
+                <a:spcPct val="100000"/>
+              </a:lnSpc>
+              <a:buNone/>
+              <a:defRPr sz="1200" b="0">
+                <a:solidFill>
+                  <a:srgbClr val="1F40CB"/>
+                </a:solidFill>
+                <a:latin typeface="Calibri"/>
+                <a:ea typeface="Calibri"/>
+                <a:cs typeface="Calibri"/>
+              </a:defRPr>
+            </a:pPr>
+            <a:r>
+              <a:rPr sz="1200" b="0">
+                <a:solidFill>
+                  <a:srgbClr val="1F40CB"/>
+                </a:solidFill>
+                <a:latin typeface="Calibri"/>
+                <a:ea typeface="Calibri"/>
+                <a:cs typeface="Calibri"/>
+              </a:rPr>
+              <a:t>0.00 ms · complete</a:t>
+            </a:r>
+          </a:p>
+        </p:txBody>
+      </p:sp>
+      <p:sp>
+        <p:nvSpPr>
+          <p:cNvPr id="7" name="ingestion-2">
+            <a:extLst xmlns:a="http://schemas.openxmlformats.org/drawingml/2006/main">
+              <a:ext uri="{FF2B5EF4-FFF2-40B4-BE49-F238E27FC236}">
+                <a16:creationId xmlns:a16="http://schemas.microsoft.com/office/drawing/2014/main" id="{B39DEECB-E0D1-415A-8F2A-C8075A6D97BA}"/>
+              </a:ext>
+            </a:extLst>
+          </p:cNvPr>
+          <p:cNvSpPr>
+            <a:spLocks xmlns:a="http://schemas.openxmlformats.org/drawingml/2006/main" noGrp="1"/>
+          </p:cNvSpPr>
+          <p:nvPr/>
+        </p:nvSpPr>
+        <p:spPr>
+          <a:xfrm xmlns:a="http://schemas.openxmlformats.org/drawingml/2006/main">
+            <a:off x="3810000" y="3086100"/>
+            <a:ext cx="2247900" cy="2266950"/>
+          </a:xfrm>
+          <a:prstGeom xmlns:a="http://schemas.openxmlformats.org/drawingml/2006/main" prst="roundRect">
+            <a:avLst>
+              <a:gd name="adj" fmla="val 5085"/>
+            </a:avLst>
+          </a:prstGeom>
+          <a:solidFill xmlns:a="http://schemas.openxmlformats.org/drawingml/2006/main">
+            <a:srgbClr val="FFFFFF"/>
+          </a:solidFill>
+          <a:ln xmlns:a="http://schemas.openxmlformats.org/drawingml/2006/main" w="9525">
+            <a:solidFill>
+              <a:srgbClr val="E4E7E9"/>
+            </a:solidFill>
+            <a:prstDash val="solid"/>
+          </a:ln>
+        </p:spPr>
+      </p:sp>
+      <p:sp>
+        <p:nvSpPr>
+          <p:cNvPr id="8" name="">
+            <a:extLst xmlns:a="http://schemas.openxmlformats.org/drawingml/2006/main">
+              <a:ext uri="{FF2B5EF4-FFF2-40B4-BE49-F238E27FC236}">
+                <a16:creationId xmlns:a16="http://schemas.microsoft.com/office/drawing/2014/main" id="{18679081-8A68-4B7E-9199-340CF95714DE}"/>
+              </a:ext>
+            </a:extLst>
+          </p:cNvPr>
+          <p:cNvSpPr>
+            <a:spLocks xmlns:a="http://schemas.openxmlformats.org/drawingml/2006/main" noGrp="1"/>
+          </p:cNvSpPr>
+          <p:nvPr/>
+        </p:nvSpPr>
+        <p:spPr>
+          <a:xfrm xmlns:a="http://schemas.openxmlformats.org/drawingml/2006/main">
+            <a:off x="4000500" y="3295650"/>
+            <a:ext cx="514350" cy="285750"/>
+          </a:xfrm>
+          <a:prstGeom xmlns:a="http://schemas.openxmlformats.org/drawingml/2006/main" prst="rect">
+            <a:avLst/>
+          </a:prstGeom>
+          <a:noFill xmlns:a="http://schemas.openxmlformats.org/drawingml/2006/main"/>
+          <a:ln xmlns:a="http://schemas.openxmlformats.org/drawingml/2006/main" w="0">
+            <a:noFill/>
+            <a:prstDash val="solid"/>
+          </a:ln>
+        </p:spPr>
+        <p:txBody>
+          <a:bodyPr xmlns:a="http://schemas.openxmlformats.org/drawingml/2006/main" wrap="square" lIns="0" tIns="0" rIns="0" bIns="0" anchor="ctr">
+            <a:noAutofit/>
+          </a:bodyPr>
+          <a:lstStyle xmlns:a="http://schemas.openxmlformats.org/drawingml/2006/main"/>
+          <a:p xmlns:a="http://schemas.openxmlformats.org/drawingml/2006/main">
+            <a:pPr algn="l">
+              <a:lnSpc>
+                <a:spcPct val="100000"/>
+              </a:lnSpc>
+              <a:buNone/>
+              <a:defRPr sz="1350" b="1">
+                <a:solidFill>
+                  <a:srgbClr val="00A2EB"/>
+                </a:solidFill>
+                <a:latin typeface="Calibri"/>
+                <a:ea typeface="Calibri"/>
+                <a:cs typeface="Calibri"/>
+              </a:defRPr>
+            </a:pPr>
+            <a:r>
+              <a:rPr sz="1800" b="1">
+                <a:solidFill>
+                  <a:srgbClr val="00A2EB"/>
+                </a:solidFill>
+                <a:latin typeface="Calibri"/>
+                <a:ea typeface="Calibri"/>
+                <a:cs typeface="Calibri"/>
+              </a:rPr>
+              <a:t>02</a:t>
+            </a:r>
+          </a:p>
+        </p:txBody>
+      </p:sp>
+      <p:sp>
+        <p:nvSpPr>
+          <p:cNvPr id="9" name="">
+            <a:extLst xmlns:a="http://schemas.openxmlformats.org/drawingml/2006/main">
+              <a:ext uri="{FF2B5EF4-FFF2-40B4-BE49-F238E27FC236}">
+                <a16:creationId xmlns:a16="http://schemas.microsoft.com/office/drawing/2014/main" id="{ED095E54-44DC-4092-9EB7-0C81E4B47710}"/>
+              </a:ext>
+            </a:extLst>
+          </p:cNvPr>
+          <p:cNvSpPr>
+            <a:spLocks xmlns:a="http://schemas.openxmlformats.org/drawingml/2006/main" noGrp="1"/>
+          </p:cNvSpPr>
+          <p:nvPr/>
+        </p:nvSpPr>
+        <p:spPr>
+          <a:xfrm xmlns:a="http://schemas.openxmlformats.org/drawingml/2006/main">
+            <a:off x="3924300" y="3752850"/>
+            <a:ext cx="2019300" cy="685800"/>
+          </a:xfrm>
+          <a:prstGeom xmlns:a="http://schemas.openxmlformats.org/drawingml/2006/main" prst="rect">
+            <a:avLst/>
+          </a:prstGeom>
+          <a:noFill xmlns:a="http://schemas.openxmlformats.org/drawingml/2006/main"/>
+          <a:ln xmlns:a="http://schemas.openxmlformats.org/drawingml/2006/main" w="0">
+            <a:noFill/>
+            <a:prstDash val="solid"/>
+          </a:ln>
+        </p:spPr>
+        <p:txBody>
+          <a:bodyPr xmlns:a="http://schemas.openxmlformats.org/drawingml/2006/main" wrap="square" lIns="0" tIns="0" rIns="0" bIns="0" anchor="ctr">
+            <a:normAutofit fontScale="100000"/>
+          </a:bodyPr>
+          <a:lstStyle xmlns:a="http://schemas.openxmlformats.org/drawingml/2006/main"/>
+          <a:p xmlns:a="http://schemas.openxmlformats.org/drawingml/2006/main">
+            <a:pPr algn="l">
+              <a:lnSpc>
+                <a:spcPct val="100000"/>
+              </a:lnSpc>
+              <a:buNone/>
+              <a:defRPr sz="1950" b="1">
+                <a:solidFill>
+                  <a:srgbClr val="051C2A"/>
+                </a:solidFill>
+                <a:latin typeface="Calibri"/>
+                <a:ea typeface="Calibri"/>
+                <a:cs typeface="Calibri"/>
+              </a:defRPr>
+            </a:pPr>
+            <a:r>
+              <a:rPr sz="1950" b="1">
+                <a:solidFill>
+                  <a:srgbClr val="051C2A"/>
+                </a:solidFill>
+                <a:latin typeface="Calibri"/>
+                <a:ea typeface="Calibri"/>
+                <a:cs typeface="Calibri"/>
+              </a:rPr>
+              <a:t>Keyword</a:t>
+            </a:r>
+          </a:p>
+        </p:txBody>
+      </p:sp>
+      <p:sp>
+        <p:nvSpPr>
+          <p:cNvPr id="10" name="">
+            <a:extLst xmlns:a="http://schemas.openxmlformats.org/drawingml/2006/main">
+              <a:ext uri="{FF2B5EF4-FFF2-40B4-BE49-F238E27FC236}">
+                <a16:creationId xmlns:a16="http://schemas.microsoft.com/office/drawing/2014/main" id="{4DB65E8E-6BA9-40DB-99F9-46D3397B13A3}"/>
+              </a:ext>
+            </a:extLst>
+          </p:cNvPr>
+          <p:cNvSpPr>
+            <a:spLocks xmlns:a="http://schemas.openxmlformats.org/drawingml/2006/main" noGrp="1"/>
+          </p:cNvSpPr>
+          <p:nvPr/>
+        </p:nvSpPr>
+        <p:spPr>
+          <a:xfrm xmlns:a="http://schemas.openxmlformats.org/drawingml/2006/main">
+            <a:off x="4000500" y="4610100"/>
+            <a:ext cx="1866900" cy="514350"/>
+          </a:xfrm>
+          <a:prstGeom xmlns:a="http://schemas.openxmlformats.org/drawingml/2006/main" prst="rect">
+            <a:avLst/>
+          </a:prstGeom>
+          <a:noFill xmlns:a="http://schemas.openxmlformats.org/drawingml/2006/main"/>
+          <a:ln xmlns:a="http://schemas.openxmlformats.org/drawingml/2006/main" w="0">
+            <a:noFill/>
+            <a:prstDash val="solid"/>
+          </a:ln>
+        </p:spPr>
+        <p:txBody>
+          <a:bodyPr xmlns:a="http://schemas.openxmlformats.org/drawingml/2006/main" wrap="square" lIns="0" tIns="0" rIns="0" bIns="0" anchor="ctr">
+            <a:normAutofit fontScale="100000"/>
+          </a:bodyPr>
+          <a:lstStyle xmlns:a="http://schemas.openxmlformats.org/drawingml/2006/main"/>
+          <a:p xmlns:a="http://schemas.openxmlformats.org/drawingml/2006/main">
+            <a:pPr algn="l">
+              <a:lnSpc>
+                <a:spcPct val="100000"/>
+              </a:lnSpc>
+              <a:buNone/>
+              <a:defRPr sz="1200" b="0">
+                <a:solidFill>
+                  <a:srgbClr val="1F40CB"/>
+                </a:solidFill>
+                <a:latin typeface="Calibri"/>
+                <a:ea typeface="Calibri"/>
+                <a:cs typeface="Calibri"/>
+              </a:defRPr>
+            </a:pPr>
+            <a:r>
+              <a:rPr sz="1200" b="0">
+                <a:solidFill>
+                  <a:srgbClr val="1F40CB"/>
+                </a:solidFill>
+                <a:latin typeface="Calibri"/>
+                <a:ea typeface="Calibri"/>
+                <a:cs typeface="Calibri"/>
+              </a:rPr>
+              <a:t>1.04 ms · complete</a:t>
+            </a:r>
+          </a:p>
+        </p:txBody>
+      </p:sp>
+      <p:sp>
+        <p:nvSpPr>
+          <p:cNvPr id="11" name="ingestion-3">
+            <a:extLst xmlns:a="http://schemas.openxmlformats.org/drawingml/2006/main">
+              <a:ext uri="{FF2B5EF4-FFF2-40B4-BE49-F238E27FC236}">
+                <a16:creationId xmlns:a16="http://schemas.microsoft.com/office/drawing/2014/main" id="{D4342A97-3791-461F-A305-9671DA4948CE}"/>
+              </a:ext>
+            </a:extLst>
+          </p:cNvPr>
+          <p:cNvSpPr>
+            <a:spLocks xmlns:a="http://schemas.openxmlformats.org/drawingml/2006/main" noGrp="1"/>
+          </p:cNvSpPr>
+          <p:nvPr/>
+        </p:nvSpPr>
+        <p:spPr>
+          <a:xfrm xmlns:a="http://schemas.openxmlformats.org/drawingml/2006/main">
+            <a:off x="6629400" y="3086100"/>
+            <a:ext cx="2247900" cy="2266950"/>
+          </a:xfrm>
+          <a:prstGeom xmlns:a="http://schemas.openxmlformats.org/drawingml/2006/main" prst="roundRect">
+            <a:avLst>
+              <a:gd name="adj" fmla="val 5085"/>
+            </a:avLst>
+          </a:prstGeom>
+          <a:solidFill xmlns:a="http://schemas.openxmlformats.org/drawingml/2006/main">
+            <a:srgbClr val="062433"/>
+          </a:solidFill>
+          <a:ln xmlns:a="http://schemas.openxmlformats.org/drawingml/2006/main" w="9525">
+            <a:solidFill>
+              <a:srgbClr val="062433"/>
+            </a:solidFill>
+            <a:prstDash val="solid"/>
+          </a:ln>
+        </p:spPr>
+      </p:sp>
+      <p:sp>
+        <p:nvSpPr>
+          <p:cNvPr id="12" name="">
+            <a:extLst xmlns:a="http://schemas.openxmlformats.org/drawingml/2006/main">
+              <a:ext uri="{FF2B5EF4-FFF2-40B4-BE49-F238E27FC236}">
+                <a16:creationId xmlns:a16="http://schemas.microsoft.com/office/drawing/2014/main" id="{64E49A95-2D88-4387-8BD5-FA749ABD0960}"/>
+              </a:ext>
+            </a:extLst>
+          </p:cNvPr>
+          <p:cNvSpPr>
+            <a:spLocks xmlns:a="http://schemas.openxmlformats.org/drawingml/2006/main" noGrp="1"/>
+          </p:cNvSpPr>
+          <p:nvPr/>
+        </p:nvSpPr>
+        <p:spPr>
+          <a:xfrm xmlns:a="http://schemas.openxmlformats.org/drawingml/2006/main">
+            <a:off x="6819900" y="3295650"/>
+            <a:ext cx="514350" cy="285750"/>
+          </a:xfrm>
+          <a:prstGeom xmlns:a="http://schemas.openxmlformats.org/drawingml/2006/main" prst="rect">
+            <a:avLst/>
+          </a:prstGeom>
+          <a:noFill xmlns:a="http://schemas.openxmlformats.org/drawingml/2006/main"/>
+          <a:ln xmlns:a="http://schemas.openxmlformats.org/drawingml/2006/main" w="0">
+            <a:noFill/>
+            <a:prstDash val="solid"/>
+          </a:ln>
+        </p:spPr>
+        <p:txBody>
+          <a:bodyPr xmlns:a="http://schemas.openxmlformats.org/drawingml/2006/main" wrap="square" lIns="0" tIns="0" rIns="0" bIns="0" anchor="ctr">
+            <a:noAutofit/>
+          </a:bodyPr>
+          <a:lstStyle xmlns:a="http://schemas.openxmlformats.org/drawingml/2006/main"/>
+          <a:p xmlns:a="http://schemas.openxmlformats.org/drawingml/2006/main">
+            <a:pPr algn="l">
+              <a:lnSpc>
+                <a:spcPct val="100000"/>
+              </a:lnSpc>
+              <a:buNone/>
+              <a:defRPr sz="1350" b="1">
+                <a:solidFill>
+                  <a:srgbClr val="00A2EB"/>
+                </a:solidFill>
+                <a:latin typeface="Calibri"/>
+                <a:ea typeface="Calibri"/>
+                <a:cs typeface="Calibri"/>
+              </a:defRPr>
+            </a:pPr>
+            <a:r>
+              <a:rPr sz="1800" b="1">
+                <a:solidFill>
+                  <a:srgbClr val="00A2EB"/>
+                </a:solidFill>
+                <a:latin typeface="Calibri"/>
+                <a:ea typeface="Calibri"/>
+                <a:cs typeface="Calibri"/>
+              </a:rPr>
+              <a:t>03</a:t>
+            </a:r>
+          </a:p>
+        </p:txBody>
+      </p:sp>
+      <p:sp>
+        <p:nvSpPr>
+          <p:cNvPr id="13" name="">
+            <a:extLst xmlns:a="http://schemas.openxmlformats.org/drawingml/2006/main">
+              <a:ext uri="{FF2B5EF4-FFF2-40B4-BE49-F238E27FC236}">
+                <a16:creationId xmlns:a16="http://schemas.microsoft.com/office/drawing/2014/main" id="{572D3874-F985-4CD0-BBFF-D59F5B7B32BE}"/>
+              </a:ext>
+            </a:extLst>
+          </p:cNvPr>
+          <p:cNvSpPr>
+            <a:spLocks xmlns:a="http://schemas.openxmlformats.org/drawingml/2006/main" noGrp="1"/>
+          </p:cNvSpPr>
+          <p:nvPr/>
+        </p:nvSpPr>
+        <p:spPr>
+          <a:xfrm xmlns:a="http://schemas.openxmlformats.org/drawingml/2006/main">
+            <a:off x="6743700" y="3752850"/>
+            <a:ext cx="2019300" cy="685800"/>
+          </a:xfrm>
+          <a:prstGeom xmlns:a="http://schemas.openxmlformats.org/drawingml/2006/main" prst="rect">
+            <a:avLst/>
+          </a:prstGeom>
+          <a:noFill xmlns:a="http://schemas.openxmlformats.org/drawingml/2006/main"/>
+          <a:ln xmlns:a="http://schemas.openxmlformats.org/drawingml/2006/main" w="0">
+            <a:noFill/>
+            <a:prstDash val="solid"/>
+          </a:ln>
+        </p:spPr>
+        <p:txBody>
+          <a:bodyPr xmlns:a="http://schemas.openxmlformats.org/drawingml/2006/main" wrap="square" lIns="0" tIns="0" rIns="0" bIns="0" anchor="ctr">
+            <a:noAutofit/>
+          </a:bodyPr>
+          <a:lstStyle xmlns:a="http://schemas.openxmlformats.org/drawingml/2006/main"/>
+          <a:p xmlns:a="http://schemas.openxmlformats.org/drawingml/2006/main">
+            <a:pPr algn="l">
+              <a:lnSpc>
+                <a:spcPct val="100000"/>
+              </a:lnSpc>
+              <a:buNone/>
+              <a:defRPr sz="1650" b="1">
+                <a:solidFill>
+                  <a:srgbClr val="FFFFFF"/>
+                </a:solidFill>
+                <a:latin typeface="Calibri"/>
+                <a:ea typeface="Calibri"/>
+                <a:cs typeface="Calibri"/>
+              </a:defRPr>
+            </a:pPr>
+            <a:r>
+              <a:rPr sz="1800" b="1">
+                <a:solidFill>
+                  <a:srgbClr val="FFFFFF"/>
+                </a:solidFill>
+                <a:latin typeface="Calibri"/>
+                <a:ea typeface="Calibri"/>
+                <a:cs typeface="Calibri"/>
+              </a:rPr>
+              <a:t>Dense</a:t>
+            </a:r>
+          </a:p>
+        </p:txBody>
+      </p:sp>
+      <p:sp>
+        <p:nvSpPr>
+          <p:cNvPr id="14" name="">
+            <a:extLst xmlns:a="http://schemas.openxmlformats.org/drawingml/2006/main">
+              <a:ext uri="{FF2B5EF4-FFF2-40B4-BE49-F238E27FC236}">
+                <a16:creationId xmlns:a16="http://schemas.microsoft.com/office/drawing/2014/main" id="{9599AF29-91DE-47C0-8189-B0778BB52724}"/>
+              </a:ext>
+            </a:extLst>
+          </p:cNvPr>
+          <p:cNvSpPr>
+            <a:spLocks xmlns:a="http://schemas.openxmlformats.org/drawingml/2006/main" noGrp="1"/>
+          </p:cNvSpPr>
+          <p:nvPr/>
+        </p:nvSpPr>
+        <p:spPr>
+          <a:xfrm xmlns:a="http://schemas.openxmlformats.org/drawingml/2006/main">
+            <a:off x="6819900" y="4610100"/>
+            <a:ext cx="1866900" cy="514350"/>
+          </a:xfrm>
+          <a:prstGeom xmlns:a="http://schemas.openxmlformats.org/drawingml/2006/main" prst="rect">
+            <a:avLst/>
+          </a:prstGeom>
+          <a:noFill xmlns:a="http://schemas.openxmlformats.org/drawingml/2006/main"/>
+          <a:ln xmlns:a="http://schemas.openxmlformats.org/drawingml/2006/main" w="0">
+            <a:noFill/>
+            <a:prstDash val="solid"/>
+          </a:ln>
+        </p:spPr>
+        <p:txBody>
+          <a:bodyPr xmlns:a="http://schemas.openxmlformats.org/drawingml/2006/main" wrap="square" lIns="0" tIns="0" rIns="0" bIns="0" anchor="ctr">
+            <a:normAutofit fontScale="100000"/>
+          </a:bodyPr>
+          <a:lstStyle xmlns:a="http://schemas.openxmlformats.org/drawingml/2006/main"/>
+          <a:p xmlns:a="http://schemas.openxmlformats.org/drawingml/2006/main">
+            <a:pPr algn="l">
+              <a:lnSpc>
+                <a:spcPct val="100000"/>
+              </a:lnSpc>
+              <a:buNone/>
+              <a:defRPr sz="1200" b="0">
+                <a:solidFill>
+                  <a:srgbClr val="00A2EB"/>
+                </a:solidFill>
+                <a:latin typeface="Calibri"/>
+                <a:ea typeface="Calibri"/>
+                <a:cs typeface="Calibri"/>
+              </a:defRPr>
+            </a:pPr>
+            <a:r>
+              <a:rPr sz="1200" b="0">
+                <a:solidFill>
+                  <a:srgbClr val="00A2EB"/>
+                </a:solidFill>
+                <a:latin typeface="Calibri"/>
+                <a:ea typeface="Calibri"/>
+                <a:cs typeface="Calibri"/>
+              </a:rPr>
+              <a:t>0.03 ms · complete</a:t>
+            </a:r>
+          </a:p>
+        </p:txBody>
+      </p:sp>
+      <p:sp>
+        <p:nvSpPr>
+          <p:cNvPr id="15" name="ingestion-4">
+            <a:extLst xmlns:a="http://schemas.openxmlformats.org/drawingml/2006/main">
+              <a:ext uri="{FF2B5EF4-FFF2-40B4-BE49-F238E27FC236}">
+                <a16:creationId xmlns:a16="http://schemas.microsoft.com/office/drawing/2014/main" id="{7952DE37-BD86-481C-A575-8709971DD74E}"/>
+              </a:ext>
+            </a:extLst>
+          </p:cNvPr>
+          <p:cNvSpPr>
+            <a:spLocks xmlns:a="http://schemas.openxmlformats.org/drawingml/2006/main" noGrp="1"/>
+          </p:cNvSpPr>
+          <p:nvPr/>
+        </p:nvSpPr>
+        <p:spPr>
+          <a:xfrm xmlns:a="http://schemas.openxmlformats.org/drawingml/2006/main">
+            <a:off x="9448800" y="3086100"/>
+            <a:ext cx="2247900" cy="2266950"/>
+          </a:xfrm>
+          <a:prstGeom xmlns:a="http://schemas.openxmlformats.org/drawingml/2006/main" prst="roundRect">
+            <a:avLst>
+              <a:gd name="adj" fmla="val 5085"/>
+            </a:avLst>
+          </a:prstGeom>
+          <a:solidFill xmlns:a="http://schemas.openxmlformats.org/drawingml/2006/main">
+            <a:srgbClr val="FFFFFF"/>
+          </a:solidFill>
+          <a:ln xmlns:a="http://schemas.openxmlformats.org/drawingml/2006/main" w="9525">
+            <a:solidFill>
+              <a:srgbClr val="E4E7E9"/>
+            </a:solidFill>
+            <a:prstDash val="solid"/>
+          </a:ln>
+        </p:spPr>
+      </p:sp>
+      <p:sp>
+        <p:nvSpPr>
+          <p:cNvPr id="16" name="">
+            <a:extLst xmlns:a="http://schemas.openxmlformats.org/drawingml/2006/main">
+              <a:ext uri="{FF2B5EF4-FFF2-40B4-BE49-F238E27FC236}">
+                <a16:creationId xmlns:a16="http://schemas.microsoft.com/office/drawing/2014/main" id="{62EC2EC9-18A1-4F72-A64D-AF536DDC8F61}"/>
+              </a:ext>
+            </a:extLst>
+          </p:cNvPr>
+          <p:cNvSpPr>
+            <a:spLocks xmlns:a="http://schemas.openxmlformats.org/drawingml/2006/main" noGrp="1"/>
+          </p:cNvSpPr>
+          <p:nvPr/>
+        </p:nvSpPr>
+        <p:spPr>
+          <a:xfrm xmlns:a="http://schemas.openxmlformats.org/drawingml/2006/main">
+            <a:off x="9639300" y="3295650"/>
+            <a:ext cx="514350" cy="285750"/>
+          </a:xfrm>
+          <a:prstGeom xmlns:a="http://schemas.openxmlformats.org/drawingml/2006/main" prst="rect">
+            <a:avLst/>
+          </a:prstGeom>
+          <a:noFill xmlns:a="http://schemas.openxmlformats.org/drawingml/2006/main"/>
+          <a:ln xmlns:a="http://schemas.openxmlformats.org/drawingml/2006/main" w="0">
+            <a:noFill/>
+            <a:prstDash val="solid"/>
+          </a:ln>
+        </p:spPr>
+        <p:txBody>
+          <a:bodyPr xmlns:a="http://schemas.openxmlformats.org/drawingml/2006/main" wrap="square" lIns="0" tIns="0" rIns="0" bIns="0" anchor="ctr">
+            <a:noAutofit/>
+          </a:bodyPr>
+          <a:lstStyle xmlns:a="http://schemas.openxmlformats.org/drawingml/2006/main"/>
+          <a:p xmlns:a="http://schemas.openxmlformats.org/drawingml/2006/main">
+            <a:pPr algn="l">
+              <a:lnSpc>
+                <a:spcPct val="100000"/>
+              </a:lnSpc>
+              <a:buNone/>
+              <a:defRPr sz="1350" b="1">
+                <a:solidFill>
+                  <a:srgbClr val="00A2EB"/>
+                </a:solidFill>
+                <a:latin typeface="Calibri"/>
+                <a:ea typeface="Calibri"/>
+                <a:cs typeface="Calibri"/>
+              </a:defRPr>
+            </a:pPr>
+            <a:r>
+              <a:rPr sz="1800" b="1">
+                <a:solidFill>
+                  <a:srgbClr val="00A2EB"/>
+                </a:solidFill>
+                <a:latin typeface="Calibri"/>
+                <a:ea typeface="Calibri"/>
+                <a:cs typeface="Calibri"/>
+              </a:rPr>
+              <a:t>04</a:t>
+            </a:r>
+          </a:p>
+        </p:txBody>
+      </p:sp>
+      <p:sp>
+        <p:nvSpPr>
+          <p:cNvPr id="17" name="">
+            <a:extLst xmlns:a="http://schemas.openxmlformats.org/drawingml/2006/main">
+              <a:ext uri="{FF2B5EF4-FFF2-40B4-BE49-F238E27FC236}">
+                <a16:creationId xmlns:a16="http://schemas.microsoft.com/office/drawing/2014/main" id="{8540FD5A-1C0F-4BE1-B862-685F20D0F43C}"/>
+              </a:ext>
+            </a:extLst>
+          </p:cNvPr>
+          <p:cNvSpPr>
+            <a:spLocks xmlns:a="http://schemas.openxmlformats.org/drawingml/2006/main" noGrp="1"/>
+          </p:cNvSpPr>
+          <p:nvPr/>
+        </p:nvSpPr>
+        <p:spPr>
+          <a:xfrm xmlns:a="http://schemas.openxmlformats.org/drawingml/2006/main">
+            <a:off x="9563100" y="3752850"/>
+            <a:ext cx="2019300" cy="685800"/>
+          </a:xfrm>
+          <a:prstGeom xmlns:a="http://schemas.openxmlformats.org/drawingml/2006/main" prst="rect">
+            <a:avLst/>
+          </a:prstGeom>
+          <a:noFill xmlns:a="http://schemas.openxmlformats.org/drawingml/2006/main"/>
+          <a:ln xmlns:a="http://schemas.openxmlformats.org/drawingml/2006/main" w="0">
+            <a:noFill/>
+            <a:prstDash val="solid"/>
+          </a:ln>
+        </p:spPr>
+        <p:txBody>
+          <a:bodyPr xmlns:a="http://schemas.openxmlformats.org/drawingml/2006/main" wrap="square" lIns="0" tIns="0" rIns="0" bIns="0" anchor="ctr">
+            <a:normAutofit fontScale="100000"/>
+          </a:bodyPr>
+          <a:lstStyle xmlns:a="http://schemas.openxmlformats.org/drawingml/2006/main"/>
+          <a:p xmlns:a="http://schemas.openxmlformats.org/drawingml/2006/main">
+            <a:pPr algn="l">
+              <a:lnSpc>
+                <a:spcPct val="100000"/>
+              </a:lnSpc>
+              <a:buNone/>
+              <a:defRPr sz="1950" b="1">
+                <a:solidFill>
+                  <a:srgbClr val="051C2A"/>
+                </a:solidFill>
+                <a:latin typeface="Calibri"/>
+                <a:ea typeface="Calibri"/>
+                <a:cs typeface="Calibri"/>
+              </a:defRPr>
+            </a:pPr>
+            <a:r>
+              <a:rPr sz="1950" b="1">
+                <a:solidFill>
+                  <a:srgbClr val="051C2A"/>
+                </a:solidFill>
+                <a:latin typeface="Calibri"/>
+                <a:ea typeface="Calibri"/>
+                <a:cs typeface="Calibri"/>
+              </a:rPr>
+              <a:t>Fusion</a:t>
+            </a:r>
+          </a:p>
+        </p:txBody>
+      </p:sp>
+      <p:sp>
+        <p:nvSpPr>
+          <p:cNvPr id="18" name="">
+            <a:extLst xmlns:a="http://schemas.openxmlformats.org/drawingml/2006/main">
+              <a:ext uri="{FF2B5EF4-FFF2-40B4-BE49-F238E27FC236}">
+                <a16:creationId xmlns:a16="http://schemas.microsoft.com/office/drawing/2014/main" id="{67E52B70-645C-40F7-B0DE-1D1D177875CC}"/>
+              </a:ext>
+            </a:extLst>
+          </p:cNvPr>
+          <p:cNvSpPr>
+            <a:spLocks xmlns:a="http://schemas.openxmlformats.org/drawingml/2006/main" noGrp="1"/>
+          </p:cNvSpPr>
+          <p:nvPr/>
+        </p:nvSpPr>
+        <p:spPr>
+          <a:xfrm xmlns:a="http://schemas.openxmlformats.org/drawingml/2006/main">
+            <a:off x="9639300" y="4610100"/>
+            <a:ext cx="1866900" cy="514350"/>
+          </a:xfrm>
+          <a:prstGeom xmlns:a="http://schemas.openxmlformats.org/drawingml/2006/main" prst="rect">
+            <a:avLst/>
+          </a:prstGeom>
+          <a:noFill xmlns:a="http://schemas.openxmlformats.org/drawingml/2006/main"/>
+          <a:ln xmlns:a="http://schemas.openxmlformats.org/drawingml/2006/main" w="0">
+            <a:noFill/>
+            <a:prstDash val="solid"/>
+          </a:ln>
+        </p:spPr>
+        <p:txBody>
+          <a:bodyPr xmlns:a="http://schemas.openxmlformats.org/drawingml/2006/main" wrap="square" lIns="0" tIns="0" rIns="0" bIns="0" anchor="ctr">
+            <a:normAutofit fontScale="100000"/>
+          </a:bodyPr>
+          <a:lstStyle xmlns:a="http://schemas.openxmlformats.org/drawingml/2006/main"/>
+          <a:p xmlns:a="http://schemas.openxmlformats.org/drawingml/2006/main">
+            <a:pPr algn="l">
+              <a:lnSpc>
+                <a:spcPct val="100000"/>
+              </a:lnSpc>
+              <a:buNone/>
+              <a:defRPr sz="1200" b="0">
+                <a:solidFill>
+                  <a:srgbClr val="1F40CB"/>
+                </a:solidFill>
+                <a:latin typeface="Calibri"/>
+                <a:ea typeface="Calibri"/>
+                <a:cs typeface="Calibri"/>
+              </a:defRPr>
+            </a:pPr>
+            <a:r>
+              <a:rPr sz="1200" b="0">
+                <a:solidFill>
+                  <a:srgbClr val="1F40CB"/>
+                </a:solidFill>
+                <a:latin typeface="Calibri"/>
+                <a:ea typeface="Calibri"/>
+                <a:cs typeface="Calibri"/>
+              </a:rPr>
+              <a:t>0.01 ms · complete</a:t>
+            </a:r>
+          </a:p>
+        </p:txBody>
+      </p:sp>
+      <p:sp>
+        <p:nvSpPr>
+          <p:cNvPr id="19" name="ingestion-5">
+            <a:extLst xmlns:a="http://schemas.openxmlformats.org/drawingml/2006/main">
+              <a:ext uri="{FF2B5EF4-FFF2-40B4-BE49-F238E27FC236}">
+                <a16:creationId xmlns:a16="http://schemas.microsoft.com/office/drawing/2014/main" id="{43F7E1B1-E237-4A79-B0C4-38965CF32D74}"/>
+              </a:ext>
+            </a:extLst>
+          </p:cNvPr>
+          <p:cNvSpPr>
+            <a:spLocks xmlns:a="http://schemas.openxmlformats.org/drawingml/2006/main" noGrp="1"/>
+          </p:cNvSpPr>
+          <p:nvPr/>
+        </p:nvSpPr>
+        <p:spPr>
+          <a:xfrm xmlns:a="http://schemas.openxmlformats.org/drawingml/2006/main">
+            <a:off x="12268200" y="3086100"/>
+            <a:ext cx="2247900" cy="2266950"/>
+          </a:xfrm>
+          <a:prstGeom xmlns:a="http://schemas.openxmlformats.org/drawingml/2006/main" prst="roundRect">
+            <a:avLst>
+              <a:gd name="adj" fmla="val 5085"/>
+            </a:avLst>
+          </a:prstGeom>
+          <a:solidFill xmlns:a="http://schemas.openxmlformats.org/drawingml/2006/main">
+            <a:srgbClr val="FFFFFF"/>
+          </a:solidFill>
+          <a:ln xmlns:a="http://schemas.openxmlformats.org/drawingml/2006/main" w="19050">
+            <a:solidFill>
+              <a:srgbClr val="F07D00"/>
+            </a:solidFill>
+            <a:prstDash val="solid"/>
+          </a:ln>
+        </p:spPr>
+      </p:sp>
+      <p:sp>
+        <p:nvSpPr>
+          <p:cNvPr id="20" name="">
+            <a:extLst xmlns:a="http://schemas.openxmlformats.org/drawingml/2006/main">
+              <a:ext uri="{FF2B5EF4-FFF2-40B4-BE49-F238E27FC236}">
+                <a16:creationId xmlns:a16="http://schemas.microsoft.com/office/drawing/2014/main" id="{51764D39-05B0-4F08-BC2B-2221BE2F38D6}"/>
+              </a:ext>
+            </a:extLst>
+          </p:cNvPr>
+          <p:cNvSpPr>
+            <a:spLocks xmlns:a="http://schemas.openxmlformats.org/drawingml/2006/main" noGrp="1"/>
+          </p:cNvSpPr>
+          <p:nvPr/>
+        </p:nvSpPr>
+        <p:spPr>
+          <a:xfrm xmlns:a="http://schemas.openxmlformats.org/drawingml/2006/main">
+            <a:off x="12458700" y="3295650"/>
+            <a:ext cx="514350" cy="285750"/>
+          </a:xfrm>
+          <a:prstGeom xmlns:a="http://schemas.openxmlformats.org/drawingml/2006/main" prst="rect">
+            <a:avLst/>
+          </a:prstGeom>
+          <a:noFill xmlns:a="http://schemas.openxmlformats.org/drawingml/2006/main"/>
+          <a:ln xmlns:a="http://schemas.openxmlformats.org/drawingml/2006/main" w="0">
+            <a:noFill/>
+            <a:prstDash val="solid"/>
+          </a:ln>
+        </p:spPr>
+        <p:txBody>
+          <a:bodyPr xmlns:a="http://schemas.openxmlformats.org/drawingml/2006/main" wrap="square" lIns="0" tIns="0" rIns="0" bIns="0" anchor="ctr">
+            <a:noAutofit/>
+          </a:bodyPr>
+          <a:lstStyle xmlns:a="http://schemas.openxmlformats.org/drawingml/2006/main"/>
+          <a:p xmlns:a="http://schemas.openxmlformats.org/drawingml/2006/main">
+            <a:pPr algn="l">
+              <a:lnSpc>
+                <a:spcPct val="100000"/>
+              </a:lnSpc>
+              <a:buNone/>
+              <a:defRPr sz="1350" b="1">
+                <a:solidFill>
+                  <a:srgbClr val="00A2EB"/>
+                </a:solidFill>
+                <a:latin typeface="Calibri"/>
+                <a:ea typeface="Calibri"/>
+                <a:cs typeface="Calibri"/>
+              </a:defRPr>
+            </a:pPr>
+            <a:r>
+              <a:rPr sz="1800" b="1">
+                <a:solidFill>
+                  <a:srgbClr val="00A2EB"/>
+                </a:solidFill>
+                <a:latin typeface="Calibri"/>
+                <a:ea typeface="Calibri"/>
+                <a:cs typeface="Calibri"/>
+              </a:rPr>
+              <a:t>05</a:t>
+            </a:r>
+          </a:p>
+        </p:txBody>
+      </p:sp>
+      <p:sp>
+        <p:nvSpPr>
+          <p:cNvPr id="21" name="">
+            <a:extLst xmlns:a="http://schemas.openxmlformats.org/drawingml/2006/main">
+              <a:ext uri="{FF2B5EF4-FFF2-40B4-BE49-F238E27FC236}">
+                <a16:creationId xmlns:a16="http://schemas.microsoft.com/office/drawing/2014/main" id="{C0F4CBB5-9FF7-4C7B-8D8C-5AA3541DD5E4}"/>
+              </a:ext>
+            </a:extLst>
+          </p:cNvPr>
+          <p:cNvSpPr>
+            <a:spLocks xmlns:a="http://schemas.openxmlformats.org/drawingml/2006/main" noGrp="1"/>
+          </p:cNvSpPr>
+          <p:nvPr/>
+        </p:nvSpPr>
+        <p:spPr>
+          <a:xfrm xmlns:a="http://schemas.openxmlformats.org/drawingml/2006/main">
+            <a:off x="12382500" y="3752850"/>
+            <a:ext cx="2019300" cy="685800"/>
+          </a:xfrm>
+          <a:prstGeom xmlns:a="http://schemas.openxmlformats.org/drawingml/2006/main" prst="rect">
+            <a:avLst/>
+          </a:prstGeom>
+          <a:noFill xmlns:a="http://schemas.openxmlformats.org/drawingml/2006/main"/>
+          <a:ln xmlns:a="http://schemas.openxmlformats.org/drawingml/2006/main" w="0">
+            <a:noFill/>
+            <a:prstDash val="solid"/>
+          </a:ln>
+        </p:spPr>
+        <p:txBody>
+          <a:bodyPr xmlns:a="http://schemas.openxmlformats.org/drawingml/2006/main" wrap="square" lIns="0" tIns="0" rIns="0" bIns="0" anchor="ctr">
+            <a:normAutofit fontScale="100000"/>
+          </a:bodyPr>
+          <a:lstStyle xmlns:a="http://schemas.openxmlformats.org/drawingml/2006/main"/>
+          <a:p xmlns:a="http://schemas.openxmlformats.org/drawingml/2006/main">
+            <a:pPr algn="l">
+              <a:lnSpc>
+                <a:spcPct val="100000"/>
+              </a:lnSpc>
+              <a:buNone/>
+              <a:defRPr sz="1950" b="1">
+                <a:solidFill>
+                  <a:srgbClr val="051C2A"/>
+                </a:solidFill>
+                <a:latin typeface="Calibri"/>
+                <a:ea typeface="Calibri"/>
+                <a:cs typeface="Calibri"/>
+              </a:defRPr>
+            </a:pPr>
+            <a:r>
+              <a:rPr sz="1950" b="1">
+                <a:solidFill>
+                  <a:srgbClr val="051C2A"/>
+                </a:solidFill>
+                <a:latin typeface="Calibri"/>
+                <a:ea typeface="Calibri"/>
+                <a:cs typeface="Calibri"/>
+              </a:rPr>
+              <a:t>Rerank</a:t>
+            </a:r>
+          </a:p>
+        </p:txBody>
+      </p:sp>
+      <p:sp>
+        <p:nvSpPr>
+          <p:cNvPr id="22" name="">
+            <a:extLst xmlns:a="http://schemas.openxmlformats.org/drawingml/2006/main">
+              <a:ext uri="{FF2B5EF4-FFF2-40B4-BE49-F238E27FC236}">
+                <a16:creationId xmlns:a16="http://schemas.microsoft.com/office/drawing/2014/main" id="{8856B515-B8BF-4B9C-8D6B-EC909D2B3B4E}"/>
+              </a:ext>
+            </a:extLst>
+          </p:cNvPr>
+          <p:cNvSpPr>
+            <a:spLocks xmlns:a="http://schemas.openxmlformats.org/drawingml/2006/main" noGrp="1"/>
+          </p:cNvSpPr>
+          <p:nvPr/>
+        </p:nvSpPr>
+        <p:spPr>
+          <a:xfrm xmlns:a="http://schemas.openxmlformats.org/drawingml/2006/main">
+            <a:off x="12458700" y="4610100"/>
+            <a:ext cx="1866900" cy="514350"/>
+          </a:xfrm>
+          <a:prstGeom xmlns:a="http://schemas.openxmlformats.org/drawingml/2006/main" prst="rect">
+            <a:avLst/>
+          </a:prstGeom>
+          <a:noFill xmlns:a="http://schemas.openxmlformats.org/drawingml/2006/main"/>
+          <a:ln xmlns:a="http://schemas.openxmlformats.org/drawingml/2006/main" w="0">
+            <a:noFill/>
+            <a:prstDash val="solid"/>
+          </a:ln>
+        </p:spPr>
+        <p:txBody>
+          <a:bodyPr xmlns:a="http://schemas.openxmlformats.org/drawingml/2006/main" wrap="square" lIns="0" tIns="0" rIns="0" bIns="0" anchor="ctr">
+            <a:normAutofit fontScale="100000"/>
+          </a:bodyPr>
+          <a:lstStyle xmlns:a="http://schemas.openxmlformats.org/drawingml/2006/main"/>
+          <a:p xmlns:a="http://schemas.openxmlformats.org/drawingml/2006/main">
+            <a:pPr algn="l">
+              <a:lnSpc>
+                <a:spcPct val="100000"/>
+              </a:lnSpc>
+              <a:buNone/>
+              <a:defRPr sz="1200" b="0">
+                <a:solidFill>
+                  <a:srgbClr val="1F40CB"/>
+                </a:solidFill>
+                <a:latin typeface="Calibri"/>
+                <a:ea typeface="Calibri"/>
+                <a:cs typeface="Calibri"/>
+              </a:defRPr>
+            </a:pPr>
+            <a:r>
+              <a:rPr sz="1200" b="0">
+                <a:solidFill>
+                  <a:srgbClr val="1F40CB"/>
+                </a:solidFill>
+                <a:latin typeface="Calibri"/>
+                <a:ea typeface="Calibri"/>
+                <a:cs typeface="Calibri"/>
+              </a:rPr>
+              <a:t>0.06 ms · complete</a:t>
+            </a:r>
+          </a:p>
+        </p:txBody>
+      </p:sp>
+      <p:cxnSp>
+        <p:nvCxnSpPr>
+          <p:cNvPr id="317" name=""/>
+          <p:cNvCxnSpPr>
+            <a:stCxn xmlns:a="http://schemas.openxmlformats.org/drawingml/2006/main" id="3" idx="3"/>
+            <a:endCxn xmlns:a="http://schemas.openxmlformats.org/drawingml/2006/main" id="7" idx="1"/>
+          </p:cNvCxnSpPr>
+          <p:nvPr/>
+        </p:nvCxnSpPr>
+        <p:spPr>
+          <a:xfrm xmlns:a="http://schemas.openxmlformats.org/drawingml/2006/main">
+            <a:off x="3238500" y="4219575"/>
+            <a:ext cx="571500" cy="0"/>
+          </a:xfrm>
+          <a:prstGeom xmlns:a="http://schemas.openxmlformats.org/drawingml/2006/main" prst="straightConnector1">
+            <a:avLst/>
+          </a:prstGeom>
+          <a:ln xmlns:a="http://schemas.openxmlformats.org/drawingml/2006/main" w="28575">
+            <a:solidFill>
+              <a:srgbClr val="9A9A9F"/>
+            </a:solidFill>
+            <a:prstDash val="solid"/>
+            <a:tailEnd type="triangle" w="med" len="med"/>
+          </a:ln>
+        </p:spPr>
+      </p:cxnSp>
+      <p:cxnSp>
+        <p:nvCxnSpPr>
+          <p:cNvPr id="318" name=""/>
+          <p:cNvCxnSpPr>
+            <a:stCxn xmlns:a="http://schemas.openxmlformats.org/drawingml/2006/main" id="7" idx="3"/>
+            <a:endCxn xmlns:a="http://schemas.openxmlformats.org/drawingml/2006/main" id="11" idx="1"/>
+          </p:cNvCxnSpPr>
+          <p:nvPr/>
+        </p:nvCxnSpPr>
+        <p:spPr>
+          <a:xfrm xmlns:a="http://schemas.openxmlformats.org/drawingml/2006/main">
+            <a:off x="6057900" y="4219575"/>
+            <a:ext cx="571500" cy="0"/>
+          </a:xfrm>
+          <a:prstGeom xmlns:a="http://schemas.openxmlformats.org/drawingml/2006/main" prst="straightConnector1">
+            <a:avLst/>
+          </a:prstGeom>
+          <a:ln xmlns:a="http://schemas.openxmlformats.org/drawingml/2006/main" w="28575">
+            <a:solidFill>
+              <a:srgbClr val="9A9A9F"/>
+            </a:solidFill>
+            <a:prstDash val="solid"/>
+            <a:tailEnd type="triangle" w="med" len="med"/>
+          </a:ln>
+        </p:spPr>
+      </p:cxnSp>
+      <p:cxnSp>
+        <p:nvCxnSpPr>
+          <p:cNvPr id="319" name=""/>
+          <p:cNvCxnSpPr>
+            <a:stCxn xmlns:a="http://schemas.openxmlformats.org/drawingml/2006/main" id="11" idx="3"/>
+            <a:endCxn xmlns:a="http://schemas.openxmlformats.org/drawingml/2006/main" id="15" idx="1"/>
+          </p:cNvCxnSpPr>
+          <p:nvPr/>
+        </p:nvCxnSpPr>
+        <p:spPr>
+          <a:xfrm xmlns:a="http://schemas.openxmlformats.org/drawingml/2006/main">
+            <a:off x="8877300" y="4219575"/>
+            <a:ext cx="571500" cy="0"/>
+          </a:xfrm>
+          <a:prstGeom xmlns:a="http://schemas.openxmlformats.org/drawingml/2006/main" prst="straightConnector1">
+            <a:avLst/>
+          </a:prstGeom>
+          <a:ln xmlns:a="http://schemas.openxmlformats.org/drawingml/2006/main" w="28575">
+            <a:solidFill>
+              <a:srgbClr val="9A9A9F"/>
+            </a:solidFill>
+            <a:prstDash val="solid"/>
+            <a:tailEnd type="triangle" w="med" len="med"/>
+          </a:ln>
+        </p:spPr>
+      </p:cxnSp>
+      <p:cxnSp>
+        <p:nvCxnSpPr>
+          <p:cNvPr id="320" name=""/>
+          <p:cNvCxnSpPr>
+            <a:stCxn xmlns:a="http://schemas.openxmlformats.org/drawingml/2006/main" id="15" idx="3"/>
+            <a:endCxn xmlns:a="http://schemas.openxmlformats.org/drawingml/2006/main" id="19" idx="1"/>
+          </p:cNvCxnSpPr>
+          <p:nvPr/>
+        </p:nvCxnSpPr>
+        <p:spPr>
+          <a:xfrm xmlns:a="http://schemas.openxmlformats.org/drawingml/2006/main">
+            <a:off x="11696700" y="4219575"/>
+            <a:ext cx="571500" cy="0"/>
+          </a:xfrm>
+          <a:prstGeom xmlns:a="http://schemas.openxmlformats.org/drawingml/2006/main" prst="straightConnector1">
+            <a:avLst/>
+          </a:prstGeom>
+          <a:ln xmlns:a="http://schemas.openxmlformats.org/drawingml/2006/main" w="28575">
+            <a:solidFill>
+              <a:srgbClr val="9A9A9F"/>
+            </a:solidFill>
+            <a:prstDash val="solid"/>
+            <a:tailEnd type="triangle" w="med" len="med"/>
+          </a:ln>
+        </p:spPr>
+      </p:cxnSp>
+      <p:sp>
+        <p:nvSpPr>
+          <p:cNvPr id="27" name="">
+            <a:extLst xmlns:a="http://schemas.openxmlformats.org/drawingml/2006/main">
+              <a:ext uri="{FF2B5EF4-FFF2-40B4-BE49-F238E27FC236}">
+                <a16:creationId xmlns:a16="http://schemas.microsoft.com/office/drawing/2014/main" id="{79128475-820B-447C-A724-7D8A31328FFE}"/>
+              </a:ext>
+            </a:extLst>
+          </p:cNvPr>
+          <p:cNvSpPr>
+            <a:spLocks xmlns:a="http://schemas.openxmlformats.org/drawingml/2006/main" noGrp="1"/>
+          </p:cNvSpPr>
+          <p:nvPr/>
+        </p:nvSpPr>
+        <p:spPr>
+          <a:xfrm xmlns:a="http://schemas.openxmlformats.org/drawingml/2006/main">
+            <a:off x="2381250" y="6210300"/>
+            <a:ext cx="10477500" cy="457200"/>
+          </a:xfrm>
+          <a:prstGeom xmlns:a="http://schemas.openxmlformats.org/drawingml/2006/main" prst="rect">
+            <a:avLst/>
+          </a:prstGeom>
+          <a:noFill xmlns:a="http://schemas.openxmlformats.org/drawingml/2006/main"/>
+          <a:ln xmlns:a="http://schemas.openxmlformats.org/drawingml/2006/main" w="0">
+            <a:noFill/>
+            <a:prstDash val="solid"/>
+          </a:ln>
+        </p:spPr>
+        <p:txBody>
+          <a:bodyPr xmlns:a="http://schemas.openxmlformats.org/drawingml/2006/main" wrap="square" lIns="0" tIns="0" rIns="0" bIns="0" anchor="ctr">
+            <a:normAutofit fontScale="100000"/>
+          </a:bodyPr>
+          <a:lstStyle xmlns:a="http://schemas.openxmlformats.org/drawingml/2006/main"/>
+          <a:p xmlns:a="http://schemas.openxmlformats.org/drawingml/2006/main">
+            <a:pPr algn="ctr">
+              <a:lnSpc>
+                <a:spcPct val="100000"/>
+              </a:lnSpc>
+              <a:buNone/>
+              <a:defRPr sz="2100" b="1">
+                <a:solidFill>
+                  <a:srgbClr val="051C2A"/>
+                </a:solidFill>
+                <a:latin typeface="Calibri"/>
+                <a:ea typeface="Calibri"/>
+                <a:cs typeface="Calibri"/>
+              </a:defRPr>
+            </a:pPr>
+            <a:r>
+              <a:rPr sz="2100" b="1">
+                <a:solidFill>
+                  <a:srgbClr val="051C2A"/>
+                </a:solidFill>
+                <a:latin typeface="Calibri"/>
+                <a:ea typeface="Calibri"/>
+                <a:cs typeface="Calibri"/>
+              </a:rPr>
+              <a:t>Lesson 07 maps these stage objects to trace spans—no pipeline rewrite.</a:t>
+            </a:r>
+          </a:p>
+        </p:txBody>
+      </p:sp>
+      <p:sp>
+        <p:nvSpPr>
+          <p:cNvPr id="28" name="">
+            <a:extLst xmlns:a="http://schemas.openxmlformats.org/drawingml/2006/main">
+              <a:ext uri="{FF2B5EF4-FFF2-40B4-BE49-F238E27FC236}">
+                <a16:creationId xmlns:a16="http://schemas.microsoft.com/office/drawing/2014/main" id="{685F2AAD-81FC-436A-88F7-89F49C9F1671}"/>
+              </a:ext>
+            </a:extLst>
+          </p:cNvPr>
+          <p:cNvSpPr>
+            <a:spLocks xmlns:a="http://schemas.openxmlformats.org/drawingml/2006/main" noGrp="1"/>
+          </p:cNvSpPr>
+          <p:nvPr/>
+        </p:nvSpPr>
+        <p:spPr>
+          <a:xfrm xmlns:a="http://schemas.openxmlformats.org/drawingml/2006/main">
+            <a:off x="1885950" y="6838950"/>
+            <a:ext cx="4476750" cy="323850"/>
+          </a:xfrm>
+          <a:prstGeom xmlns:a="http://schemas.openxmlformats.org/drawingml/2006/main" prst="rect">
+            <a:avLst/>
+          </a:prstGeom>
+          <a:noFill xmlns:a="http://schemas.openxmlformats.org/drawingml/2006/main"/>
+          <a:ln xmlns:a="http://schemas.openxmlformats.org/drawingml/2006/main" w="0">
+            <a:noFill/>
+            <a:prstDash val="solid"/>
+          </a:ln>
+        </p:spPr>
+        <p:txBody>
+          <a:bodyPr xmlns:a="http://schemas.openxmlformats.org/drawingml/2006/main" wrap="square" lIns="0" tIns="0" rIns="0" bIns="0" anchor="ctr">
+            <a:normAutofit fontScale="100000"/>
+          </a:bodyPr>
+          <a:lstStyle xmlns:a="http://schemas.openxmlformats.org/drawingml/2006/main"/>
+          <a:p xmlns:a="http://schemas.openxmlformats.org/drawingml/2006/main">
+            <a:pPr algn="ctr">
+              <a:lnSpc>
+                <a:spcPct val="100000"/>
+              </a:lnSpc>
+              <a:buNone/>
+              <a:defRPr sz="1500" b="0">
+                <a:solidFill>
+                  <a:srgbClr val="64748B"/>
+                </a:solidFill>
+                <a:latin typeface="Calibri"/>
+                <a:ea typeface="Calibri"/>
+                <a:cs typeface="Calibri"/>
+              </a:defRPr>
+            </a:pPr>
+            <a:r>
+              <a:rPr sz="1500" b="0">
+                <a:solidFill>
+                  <a:srgbClr val="64748B"/>
+                </a:solidFill>
+                <a:latin typeface="Calibri"/>
+                <a:ea typeface="Calibri"/>
+                <a:cs typeface="Calibri"/>
+              </a:rPr>
+              <a:t>offline example · timings vary by machine</a:t>
+            </a:r>
+          </a:p>
+        </p:txBody>
+      </p:sp>
+      <p:sp>
+        <p:nvSpPr>
+          <p:cNvPr id="29" name="">
+            <a:extLst xmlns:a="http://schemas.openxmlformats.org/drawingml/2006/main">
+              <a:ext uri="{FF2B5EF4-FFF2-40B4-BE49-F238E27FC236}">
+                <a16:creationId xmlns:a16="http://schemas.microsoft.com/office/drawing/2014/main" id="{CDE04AD7-6CBE-4792-B549-765578FB3E1E}"/>
+              </a:ext>
+            </a:extLst>
+          </p:cNvPr>
+          <p:cNvSpPr>
+            <a:spLocks xmlns:a="http://schemas.openxmlformats.org/drawingml/2006/main" noGrp="1"/>
+          </p:cNvSpPr>
+          <p:nvPr/>
+        </p:nvSpPr>
+        <p:spPr>
+          <a:xfrm xmlns:a="http://schemas.openxmlformats.org/drawingml/2006/main">
+            <a:off x="8801100" y="6838950"/>
+            <a:ext cx="4762500" cy="323850"/>
+          </a:xfrm>
+          <a:prstGeom xmlns:a="http://schemas.openxmlformats.org/drawingml/2006/main" prst="rect">
+            <a:avLst/>
+          </a:prstGeom>
+          <a:noFill xmlns:a="http://schemas.openxmlformats.org/drawingml/2006/main"/>
+          <a:ln xmlns:a="http://schemas.openxmlformats.org/drawingml/2006/main" w="0">
+            <a:noFill/>
+            <a:prstDash val="solid"/>
+          </a:ln>
+        </p:spPr>
+        <p:txBody>
+          <a:bodyPr xmlns:a="http://schemas.openxmlformats.org/drawingml/2006/main" wrap="square" lIns="0" tIns="0" rIns="0" bIns="0" anchor="ctr">
+            <a:normAutofit fontScale="100000"/>
+          </a:bodyPr>
+          <a:lstStyle xmlns:a="http://schemas.openxmlformats.org/drawingml/2006/main"/>
+          <a:p xmlns:a="http://schemas.openxmlformats.org/drawingml/2006/main">
+            <a:pPr algn="ctr">
+              <a:lnSpc>
+                <a:spcPct val="100000"/>
+              </a:lnSpc>
+              <a:buNone/>
+              <a:defRPr sz="1500" b="0">
+                <a:solidFill>
+                  <a:srgbClr val="64748B"/>
+                </a:solidFill>
+                <a:latin typeface="Calibri"/>
+                <a:ea typeface="Calibri"/>
+                <a:cs typeface="Calibri"/>
+              </a:defRPr>
+            </a:pPr>
+            <a:r>
+              <a:rPr sz="1500" b="0">
+                <a:solidFill>
+                  <a:srgbClr val="64748B"/>
+                </a:solidFill>
+                <a:latin typeface="Calibri"/>
+                <a:ea typeface="Calibri"/>
+                <a:cs typeface="Calibri"/>
+              </a:rPr>
+              <a:t>future spans · inputs · outputs · duration</a:t>
+            </a:r>
+          </a:p>
+        </p:txBody>
+      </p:sp>
+      <p:sp>
+        <p:nvSpPr>
+          <p:cNvPr id="30" name="">
+            <a:extLst xmlns:a="http://schemas.openxmlformats.org/drawingml/2006/main">
+              <a:ext uri="{FF2B5EF4-FFF2-40B4-BE49-F238E27FC236}">
+                <a16:creationId xmlns:a16="http://schemas.microsoft.com/office/drawing/2014/main" id="{28CBA7AE-993C-4F84-A696-8D1323AC4E80}"/>
+              </a:ext>
+            </a:extLst>
+          </p:cNvPr>
+          <p:cNvSpPr>
+            <a:spLocks xmlns:a="http://schemas.openxmlformats.org/drawingml/2006/main" noGrp="1"/>
+          </p:cNvSpPr>
+          <p:nvPr/>
+        </p:nvSpPr>
+        <p:spPr>
+          <a:xfrm xmlns:a="http://schemas.openxmlformats.org/drawingml/2006/main">
+            <a:off x="857250" y="7896225"/>
+            <a:ext cx="13525500" cy="28575"/>
+          </a:xfrm>
+          <a:prstGeom xmlns:a="http://schemas.openxmlformats.org/drawingml/2006/main" prst="rect">
+            <a:avLst/>
+          </a:prstGeom>
+          <a:solidFill xmlns:a="http://schemas.openxmlformats.org/drawingml/2006/main">
+            <a:srgbClr val="E4E7E9"/>
+          </a:solidFill>
+          <a:ln xmlns:a="http://schemas.openxmlformats.org/drawingml/2006/main" w="0">
+            <a:solidFill>
+              <a:srgbClr val="E4E7E9"/>
+            </a:solidFill>
+            <a:prstDash val="solid"/>
+          </a:ln>
+        </p:spPr>
+      </p:sp>
+      <p:sp>
+        <p:nvSpPr>
+          <p:cNvPr id="31" name="">
+            <a:extLst xmlns:a="http://schemas.openxmlformats.org/drawingml/2006/main">
+              <a:ext uri="{FF2B5EF4-FFF2-40B4-BE49-F238E27FC236}">
+                <a16:creationId xmlns:a16="http://schemas.microsoft.com/office/drawing/2014/main" id="{DE97BF4D-EDBC-4480-A82B-512A72221950}"/>
+              </a:ext>
+            </a:extLst>
+          </p:cNvPr>
+          <p:cNvSpPr>
+            <a:spLocks xmlns:a="http://schemas.openxmlformats.org/drawingml/2006/main" noGrp="1"/>
+          </p:cNvSpPr>
+          <p:nvPr/>
+        </p:nvSpPr>
+        <p:spPr>
+          <a:xfrm xmlns:a="http://schemas.openxmlformats.org/drawingml/2006/main">
+            <a:off x="857250" y="7896225"/>
+            <a:ext cx="8001000" cy="38100"/>
+          </a:xfrm>
+          <a:prstGeom xmlns:a="http://schemas.openxmlformats.org/drawingml/2006/main" prst="rect">
+            <a:avLst/>
+          </a:prstGeom>
+          <a:solidFill xmlns:a="http://schemas.openxmlformats.org/drawingml/2006/main">
+            <a:srgbClr val="00A2EB"/>
+          </a:solidFill>
+          <a:ln xmlns:a="http://schemas.openxmlformats.org/drawingml/2006/main" w="0">
+            <a:solidFill>
+              <a:srgbClr val="00A2EB"/>
+            </a:solidFill>
+            <a:prstDash val="solid"/>
+          </a:ln>
+        </p:spPr>
+      </p:sp>
+      <p:sp>
+        <p:nvSpPr>
+          <p:cNvPr id="32" name="">
+            <a:extLst xmlns:a="http://schemas.openxmlformats.org/drawingml/2006/main">
+              <a:ext uri="{FF2B5EF4-FFF2-40B4-BE49-F238E27FC236}">
+                <a16:creationId xmlns:a16="http://schemas.microsoft.com/office/drawing/2014/main" id="{49281B64-2F0F-4357-A085-C65451F28236}"/>
+              </a:ext>
+            </a:extLst>
+          </p:cNvPr>
+          <p:cNvSpPr>
+            <a:spLocks xmlns:a="http://schemas.openxmlformats.org/drawingml/2006/main" noGrp="1"/>
+          </p:cNvSpPr>
+          <p:nvPr/>
+        </p:nvSpPr>
+        <p:spPr>
+          <a:xfrm xmlns:a="http://schemas.openxmlformats.org/drawingml/2006/main">
+            <a:off x="971550" y="8058150"/>
+            <a:ext cx="3714750" cy="323850"/>
+          </a:xfrm>
+          <a:prstGeom xmlns:a="http://schemas.openxmlformats.org/drawingml/2006/main" prst="rect">
+            <a:avLst/>
+          </a:prstGeom>
+          <a:noFill xmlns:a="http://schemas.openxmlformats.org/drawingml/2006/main"/>
+          <a:ln xmlns:a="http://schemas.openxmlformats.org/drawingml/2006/main" w="0">
+            <a:noFill/>
+            <a:prstDash val="solid"/>
+          </a:ln>
+        </p:spPr>
+        <p:txBody>
+          <a:bodyPr xmlns:a="http://schemas.openxmlformats.org/drawingml/2006/main" wrap="square" lIns="0" tIns="0" rIns="0" bIns="0" anchor="ctr">
+            <a:normAutofit fontScale="100000"/>
+          </a:bodyPr>
+          <a:lstStyle xmlns:a="http://schemas.openxmlformats.org/drawingml/2006/main"/>
+          <a:p xmlns:a="http://schemas.openxmlformats.org/drawingml/2006/main">
+            <a:pPr algn="l">
+              <a:lnSpc>
+                <a:spcPct val="100000"/>
+              </a:lnSpc>
+              <a:buNone/>
+              <a:defRPr sz="1200" b="0">
+                <a:solidFill>
+                  <a:srgbClr val="9A9A9F"/>
+                </a:solidFill>
+                <a:latin typeface="Calibri"/>
+                <a:ea typeface="Calibri"/>
+                <a:cs typeface="Calibri"/>
+              </a:defRPr>
+            </a:pPr>
+            <a:r>
+              <a:rPr sz="1200" b="0">
+                <a:solidFill>
+                  <a:srgbClr val="9A9A9F"/>
+                </a:solidFill>
+                <a:latin typeface="Calibri"/>
+                <a:ea typeface="Calibri"/>
+                <a:cs typeface="Calibri"/>
+              </a:rPr>
+              <a:t>First Finance - Arnaud Demes</a:t>
+            </a:r>
+          </a:p>
+        </p:txBody>
+      </p:sp>
+      <p:sp>
+        <p:nvSpPr>
+          <p:cNvPr id="33" name="">
+            <a:extLst xmlns:a="http://schemas.openxmlformats.org/drawingml/2006/main">
+              <a:ext uri="{FF2B5EF4-FFF2-40B4-BE49-F238E27FC236}">
+                <a16:creationId xmlns:a16="http://schemas.microsoft.com/office/drawing/2014/main" id="{EAA325A4-7EC6-42CE-A13A-4B38A32DE7F2}"/>
+              </a:ext>
+            </a:extLst>
+          </p:cNvPr>
+          <p:cNvSpPr>
+            <a:spLocks xmlns:a="http://schemas.openxmlformats.org/drawingml/2006/main" noGrp="1"/>
+          </p:cNvSpPr>
+          <p:nvPr/>
+        </p:nvSpPr>
+        <p:spPr>
+          <a:xfrm xmlns:a="http://schemas.openxmlformats.org/drawingml/2006/main">
+            <a:off x="12192000" y="8058150"/>
+            <a:ext cx="1809750" cy="323850"/>
+          </a:xfrm>
+          <a:prstGeom xmlns:a="http://schemas.openxmlformats.org/drawingml/2006/main" prst="rect">
+            <a:avLst/>
+          </a:prstGeom>
+          <a:noFill xmlns:a="http://schemas.openxmlformats.org/drawingml/2006/main"/>
+          <a:ln xmlns:a="http://schemas.openxmlformats.org/drawingml/2006/main" w="0">
+            <a:noFill/>
+            <a:prstDash val="solid"/>
+          </a:ln>
+        </p:spPr>
+        <p:txBody>
+          <a:bodyPr xmlns:a="http://schemas.openxmlformats.org/drawingml/2006/main" wrap="square" lIns="0" tIns="0" rIns="0" bIns="0" anchor="ctr">
+            <a:normAutofit fontScale="100000"/>
+          </a:bodyPr>
+          <a:lstStyle xmlns:a="http://schemas.openxmlformats.org/drawingml/2006/main"/>
+          <a:p xmlns:a="http://schemas.openxmlformats.org/drawingml/2006/main">
+            <a:pPr algn="r">
+              <a:lnSpc>
+                <a:spcPct val="100000"/>
+              </a:lnSpc>
+              <a:buNone/>
+              <a:defRPr sz="1200" b="1">
+                <a:solidFill>
+                  <a:srgbClr val="9A9A9F"/>
+                </a:solidFill>
+                <a:latin typeface="Calibri"/>
+                <a:ea typeface="Calibri"/>
+                <a:cs typeface="Calibri"/>
+              </a:defRPr>
+            </a:pPr>
+            <a:r>
+              <a:rPr sz="1200" b="1">
+                <a:solidFill>
+                  <a:srgbClr val="9A9A9F"/>
+                </a:solidFill>
+                <a:latin typeface="Calibri"/>
+                <a:ea typeface="Calibri"/>
+                <a:cs typeface="Calibri"/>
+              </a:rPr>
+              <a:t>OBSERVE</a:t>
+            </a:r>
+          </a:p>
+        </p:txBody>
+      </p:sp>
+      <p:sp>
+        <p:nvSpPr>
+          <p:cNvPr id="34" name="">
+            <a:extLst xmlns:a="http://schemas.openxmlformats.org/drawingml/2006/main">
+              <a:ext uri="{FF2B5EF4-FFF2-40B4-BE49-F238E27FC236}">
+                <a16:creationId xmlns:a16="http://schemas.microsoft.com/office/drawing/2014/main" id="{5F7FB65A-4A0D-4595-92F4-FD9B71638842}"/>
+              </a:ext>
+            </a:extLst>
+          </p:cNvPr>
+          <p:cNvSpPr>
+            <a:spLocks xmlns:a="http://schemas.openxmlformats.org/drawingml/2006/main" noGrp="1"/>
+          </p:cNvSpPr>
+          <p:nvPr/>
+        </p:nvSpPr>
+        <p:spPr>
+          <a:xfrm xmlns:a="http://schemas.openxmlformats.org/drawingml/2006/main">
+            <a:off x="14135100" y="8058150"/>
+            <a:ext cx="266700" cy="323850"/>
+          </a:xfrm>
+          <a:prstGeom xmlns:a="http://schemas.openxmlformats.org/drawingml/2006/main" prst="rect">
+            <a:avLst/>
+          </a:prstGeom>
+          <a:noFill xmlns:a="http://schemas.openxmlformats.org/drawingml/2006/main"/>
+          <a:ln xmlns:a="http://schemas.openxmlformats.org/drawingml/2006/main" w="0">
+            <a:noFill/>
+            <a:prstDash val="solid"/>
+          </a:ln>
+        </p:spPr>
+        <p:txBody>
+          <a:bodyPr xmlns:a="http://schemas.openxmlformats.org/drawingml/2006/main" wrap="square" lIns="0" tIns="0" rIns="0" bIns="0" anchor="ctr">
+            <a:normAutofit fontScale="100000"/>
+          </a:bodyPr>
+          <a:lstStyle xmlns:a="http://schemas.openxmlformats.org/drawingml/2006/main"/>
+          <a:p xmlns:a="http://schemas.openxmlformats.org/drawingml/2006/main">
+            <a:pPr algn="r">
+              <a:lnSpc>
+                <a:spcPct val="100000"/>
+              </a:lnSpc>
+              <a:buNone/>
+              <a:defRPr sz="1200" b="1">
+                <a:solidFill>
+                  <a:srgbClr val="9A9A9F"/>
+                </a:solidFill>
+                <a:latin typeface="Calibri"/>
+                <a:ea typeface="Calibri"/>
+                <a:cs typeface="Calibri"/>
+              </a:defRPr>
+            </a:pPr>
+            <a:r>
+              <a:rPr sz="1200" b="1">
+                <a:solidFill>
+                  <a:srgbClr val="9A9A9F"/>
+                </a:solidFill>
+                <a:latin typeface="Calibri"/>
+                <a:ea typeface="Calibri"/>
+                <a:cs typeface="Calibri"/>
+              </a:rPr>
+              <a:t>09</a:t>
             </a:r>
           </a:p>
         </p:txBody>

--- a/decks/06-hybrid-retrieval.pptx
+++ b/decks/06-hybrid-retrieval.pptx
@@ -2,21 +2,21 @@
 <file path=ppt/presentation.xml><?xml version="1.0" encoding="utf-8"?>
 <p:presentation xmlns:p="http://schemas.openxmlformats.org/presentationml/2006/main">
   <p:sldMasterIdLst>
-    <p:sldMasterId xmlns:r="http://schemas.openxmlformats.org/officeDocument/2006/relationships" id="2147483648" r:id="R76ffad91c86941ed"/>
+    <p:sldMasterId xmlns:r="http://schemas.openxmlformats.org/officeDocument/2006/relationships" id="2147483648" r:id="Rd1c001c6bc764840"/>
   </p:sldMasterIdLst>
   <p:notesMasterIdLst>
-    <p:notesMasterId xmlns:r="http://schemas.openxmlformats.org/officeDocument/2006/relationships" r:id="Rda639c644672469f"/>
+    <p:notesMasterId xmlns:r="http://schemas.openxmlformats.org/officeDocument/2006/relationships" r:id="R611db923d0ca494b"/>
   </p:notesMasterIdLst>
   <p:sldIdLst>
-    <p:sldId xmlns:r="http://schemas.openxmlformats.org/officeDocument/2006/relationships" id="256" r:id="R44300816dc0b40e0"/>
-    <p:sldId xmlns:r="http://schemas.openxmlformats.org/officeDocument/2006/relationships" id="257" r:id="Raf41ec16d827427c"/>
-    <p:sldId xmlns:r="http://schemas.openxmlformats.org/officeDocument/2006/relationships" id="258" r:id="R106309892fed41b3"/>
-    <p:sldId xmlns:r="http://schemas.openxmlformats.org/officeDocument/2006/relationships" id="259" r:id="Rc93eba2f62c14934"/>
-    <p:sldId xmlns:r="http://schemas.openxmlformats.org/officeDocument/2006/relationships" id="260" r:id="R3f584037283e4f2a"/>
-    <p:sldId xmlns:r="http://schemas.openxmlformats.org/officeDocument/2006/relationships" id="261" r:id="Rf3bc47d996b84019"/>
-    <p:sldId xmlns:r="http://schemas.openxmlformats.org/officeDocument/2006/relationships" id="262" r:id="Rfb73c04c25f3404e"/>
-    <p:sldId xmlns:r="http://schemas.openxmlformats.org/officeDocument/2006/relationships" id="263" r:id="Rd759ec8ce98946d2"/>
-    <p:sldId xmlns:r="http://schemas.openxmlformats.org/officeDocument/2006/relationships" id="264" r:id="Rce7b27bfedee4598"/>
+    <p:sldId xmlns:r="http://schemas.openxmlformats.org/officeDocument/2006/relationships" id="256" r:id="Re02784333e1a45c4"/>
+    <p:sldId xmlns:r="http://schemas.openxmlformats.org/officeDocument/2006/relationships" id="257" r:id="R45a7e35061f344d0"/>
+    <p:sldId xmlns:r="http://schemas.openxmlformats.org/officeDocument/2006/relationships" id="258" r:id="R034a5c3b51984490"/>
+    <p:sldId xmlns:r="http://schemas.openxmlformats.org/officeDocument/2006/relationships" id="259" r:id="R9ac5243ff477445f"/>
+    <p:sldId xmlns:r="http://schemas.openxmlformats.org/officeDocument/2006/relationships" id="260" r:id="R89496fc8947e490c"/>
+    <p:sldId xmlns:r="http://schemas.openxmlformats.org/officeDocument/2006/relationships" id="261" r:id="R9500404f78d6424b"/>
+    <p:sldId xmlns:r="http://schemas.openxmlformats.org/officeDocument/2006/relationships" id="262" r:id="R62105b01bf314d3d"/>
+    <p:sldId xmlns:r="http://schemas.openxmlformats.org/officeDocument/2006/relationships" id="263" r:id="R0dad05f4a30f47e8"/>
+    <p:sldId xmlns:r="http://schemas.openxmlformats.org/officeDocument/2006/relationships" id="264" r:id="R04fbcb9e281e450c"/>
   </p:sldIdLst>
   <p:sldSz cx="15240000" cy="8572500"/>
   <p:notesSz cx="6858000" cy="9144000"/>
@@ -450,12 +450,12 @@
           <a:lstStyle xmlns:a="http://schemas.openxmlformats.org/drawingml/2006/main"/>
           <a:p xmlns:a="http://schemas.openxmlformats.org/drawingml/2006/main">
             <a:r>
-              <a:t>Outcome: explain retrieval as a staged, testable system over the trusted Lesson 05 evidence units.</a:t>
-            </a:r>
-          </a:p>
-          <a:p xmlns:a="http://schemas.openxmlformats.org/drawingml/2006/main">
-            <a:r>
-              <a:t>Use the full 15 minutes for the seven diagrams, then move to the 30-minute executable notebook.</a:t>
+              <a:t>Lesson 06 builds the provider-neutral hybrid retriever used by Lesson 07.</a:t>
+            </a:r>
+          </a:p>
+          <a:p xmlns:a="http://schemas.openxmlformats.org/drawingml/2006/main">
+            <a:r>
+              <a:t/>
             </a:r>
           </a:p>
           <a:p xmlns:a="http://schemas.openxmlformats.org/drawingml/2006/main">
@@ -465,12 +465,17 @@
           </a:p>
           <a:p xmlns:a="http://schemas.openxmlformats.org/drawingml/2006/main">
             <a:r>
-              <a:t>- Course-owned diagrams and claims: chapters/06-hybrid-retrieval.md</a:t>
-            </a:r>
-          </a:p>
-          <a:p xmlns:a="http://schemas.openxmlformats.org/drawingml/2006/main">
-            <a:r>
-              <a:t>- Executable semantics: notebooks/06_hybrid_retrieval.ipynb</a:t>
+              <a:t>- chapters/06-hybrid-retrieval.md</a:t>
+            </a:r>
+          </a:p>
+          <a:p xmlns:a="http://schemas.openxmlformats.org/drawingml/2006/main">
+            <a:r>
+              <a:t>- notebooks/06_hybrid_retrieval.ipynb</a:t>
+            </a:r>
+          </a:p>
+          <a:p xmlns:a="http://schemas.openxmlformats.org/drawingml/2006/main">
+            <a:r>
+              <a:t>[/Sources]</a:t>
             </a:r>
           </a:p>
         </p:txBody>
@@ -540,12 +545,12 @@
           <a:lstStyle xmlns:a="http://schemas.openxmlformats.org/drawingml/2006/main"/>
           <a:p xmlns:a="http://schemas.openxmlformats.org/drawingml/2006/main">
             <a:r>
-              <a:t>For normalized vectors, cosine is the dot product. Use it as a relative ranking signal inside one versioned embedding space.</a:t>
-            </a:r>
-          </a:p>
-          <a:p xmlns:a="http://schemas.openxmlformats.org/drawingml/2006/main">
-            <a:r>
-              <a:t>The two-dimensional picture is intuition only; the notebook's similarity heatmap uses the full embedding dimensions.</a:t>
+              <a:t>Cosine similarity is treated as relative vector alignment, not confidence or truth.</a:t>
+            </a:r>
+          </a:p>
+          <a:p xmlns:a="http://schemas.openxmlformats.org/drawingml/2006/main">
+            <a:r>
+              <a:t/>
             </a:r>
           </a:p>
           <a:p xmlns:a="http://schemas.openxmlformats.org/drawingml/2006/main">
@@ -555,12 +560,17 @@
           </a:p>
           <a:p xmlns:a="http://schemas.openxmlformats.org/drawingml/2006/main">
             <a:r>
-              <a:t>- scikit-learn cosine similarity: https://scikit-learn.org/stable/modules/generated/sklearn.metrics.pairwise.cosine_similarity.html</a:t>
-            </a:r>
-          </a:p>
-          <a:p xmlns:a="http://schemas.openxmlformats.org/drawingml/2006/main">
-            <a:r>
-              <a:t>- Course explanation: chapters/06-hybrid-retrieval.md#cosine-similarity</a:t>
+              <a:t>- notebooks/06_hybrid_retrieval.ipynb, embedding geometry section</a:t>
+            </a:r>
+          </a:p>
+          <a:p xmlns:a="http://schemas.openxmlformats.org/drawingml/2006/main">
+            <a:r>
+              <a:t>- src/finai_academy/hybrid_retrieval.py</a:t>
+            </a:r>
+          </a:p>
+          <a:p xmlns:a="http://schemas.openxmlformats.org/drawingml/2006/main">
+            <a:r>
+              <a:t>[/Sources]</a:t>
             </a:r>
           </a:p>
         </p:txBody>
@@ -630,27 +640,12 @@
           <a:lstStyle xmlns:a="http://schemas.openxmlformats.org/drawingml/2006/main"/>
           <a:p xmlns:a="http://schemas.openxmlformats.org/drawingml/2006/main">
             <a:r>
-              <a:t>Maintained query: Which NVIDIA business generated $193.7 billion?</a:t>
-            </a:r>
-          </a:p>
-          <a:p xmlns:a="http://schemas.openxmlformats.org/drawingml/2006/main">
-            <a:r>
-              <a:t>Filter: company=NVIDIA and period=FY2026. Values below are from the deterministic offline execution of notebooks/06_hybrid_retrieval.ipynb.</a:t>
-            </a:r>
-          </a:p>
-          <a:p xmlns:a="http://schemas.openxmlformats.org/drawingml/2006/main">
-            <a:r>
-              <a:t>Keyword rank 1: NVDA-2026-10K-EXCERPT-CONTEXTUAL-003 (TF-IDF cosine 0.591); rank 2: NVDA-2026-10K-EXCERPT-CONTEXTUAL-001 (0.357); rank 3: NVDA-2026-10K-EXCERPT-CONTEXTUAL-002 (0.209); rank 4: NVDA-2026-10K-EXCERPT-CONTEXTUAL-004 (0.118).</a:t>
-            </a:r>
-          </a:p>
-          <a:p xmlns:a="http://schemas.openxmlformats.org/drawingml/2006/main">
-            <a:r>
-              <a:t>Dense rank 1: NVDA-2026-10K-EXCERPT-CONTEXTUAL-001 (raw cosine 0.577); rank 2: NVDA-2026-10K-EXCERPT-CONTEXTUAL-002 (0.577); rank 3: NVDA-2026-10K-EXCERPT-CONTEXTUAL-004 (0.447); dense rank 4: NVDA-2026-10K-EXCERPT-CONTEXTUAL-003 (0.408).</a:t>
-            </a:r>
-          </a:p>
-          <a:p xmlns:a="http://schemas.openxmlformats.org/drawingml/2006/main">
-            <a:r>
-              <a:t>Visible IDs use the collision-safe NVDA…NNN abbreviation; the full stable manifest IDs appear above. Raw embedding cosine is a ranking signal, not confidence.</a:t>
+              <a:t>Maintained query: Which NVIDIA business generated $193.7 billion? Filter: company=NVIDIA and period=FY2026. Values below are from the deterministic offline execution of notebooks/06_hybrid_retrieval.ipynb. Keyword rank 1: NVDA-2026-10K-EXCERPT-CONTEXTUAL-003 (TF-IDF cosine 0.591); rank 2: NVDA-2026-10K-EXCERPT-CONTEXTUAL-001 (0.357); rank 3: NVDA-2026-10K-EXCERPT-CONTEXTUAL-002 (0.209); rank 4: NVDA-2026-10K-EXCERPT-CONTEXTUAL-004 (0.118). Dense rank 1: NVDA-2026-10K-EXCERPT-CONTEXTUAL-001 (raw cosine 0.577); rank 2: NVDA-2026-10K-EXCERPT-CONTEXTUAL-002 (0.577); rank 3: NVDA-2026-10K-EXCERPT-CONTEXTUAL-004 (0.447); dense rank 4: NVDA-2026-10K-EXCERPT-CONTEXTUAL-003 (0.408). Visible IDs use the collision-safe NVDA…NNN abbreviation; the full stable manifest IDs appear above. Raw embedding cosine is a ranking signal, not confidence.</a:t>
+            </a:r>
+          </a:p>
+          <a:p xmlns:a="http://schemas.openxmlformats.org/drawingml/2006/main">
+            <a:r>
+              <a:t/>
             </a:r>
           </a:p>
           <a:p xmlns:a="http://schemas.openxmlformats.org/drawingml/2006/main">
@@ -671,6 +666,11 @@
           <a:p xmlns:a="http://schemas.openxmlformats.org/drawingml/2006/main">
             <a:r>
               <a:t>- NVIDIA fiscal 2026 Form 10-K: https://www.sec.gov/Archives/edgar/data/1045810/000104581026000021/nvda-20260125.htm</a:t>
+            </a:r>
+          </a:p>
+          <a:p xmlns:a="http://schemas.openxmlformats.org/drawingml/2006/main">
+            <a:r>
+              <a:t>[/Sources]</a:t>
             </a:r>
           </a:p>
         </p:txBody>
@@ -740,12 +740,12 @@
           <a:lstStyle xmlns:a="http://schemas.openxmlformats.org/drawingml/2006/main"/>
           <a:p xmlns:a="http://schemas.openxmlformats.org/drawingml/2006/main">
             <a:r>
-              <a:t>Eligibility uses exact company, period, document type, and section values with logical AND before both keyword and dense scoring.</a:t>
-            </a:r>
-          </a:p>
-          <a:p xmlns:a="http://schemas.openxmlformats.org/drawingml/2006/main">
-            <a:r>
-              <a:t>If no passage is eligible, the production boundary abstains instead of silently broadening the search.</a:t>
+              <a:t>Eligibility filters are applied before either ranking channel scores candidates.</a:t>
+            </a:r>
+          </a:p>
+          <a:p xmlns:a="http://schemas.openxmlformats.org/drawingml/2006/main">
+            <a:r>
+              <a:t/>
             </a:r>
           </a:p>
           <a:p xmlns:a="http://schemas.openxmlformats.org/drawingml/2006/main">
@@ -755,17 +755,17 @@
           </a:p>
           <a:p xmlns:a="http://schemas.openxmlformats.org/drawingml/2006/main">
             <a:r>
-              <a:t>- Retrieval filters: src/finai_academy/hybrid_retrieval.py</a:t>
-            </a:r>
-          </a:p>
-          <a:p xmlns:a="http://schemas.openxmlformats.org/drawingml/2006/main">
-            <a:r>
-              <a:t>- Pipeline abstention and pre-filter order: src/finai_academy/retrieval_pipeline.py</a:t>
-            </a:r>
-          </a:p>
-          <a:p xmlns:a="http://schemas.openxmlformats.org/drawingml/2006/main">
-            <a:r>
-              <a:t>- Course explanation: chapters/06-hybrid-retrieval.md#pre-filtering</a:t>
+              <a:t>- src/finai_academy/retrieval_pipeline.py</a:t>
+            </a:r>
+          </a:p>
+          <a:p xmlns:a="http://schemas.openxmlformats.org/drawingml/2006/main">
+            <a:r>
+              <a:t>- notebooks/06_hybrid_retrieval.ipynb, eligibility gate</a:t>
+            </a:r>
+          </a:p>
+          <a:p xmlns:a="http://schemas.openxmlformats.org/drawingml/2006/main">
+            <a:r>
+              <a:t>[/Sources]</a:t>
             </a:r>
           </a:p>
         </p:txBody>
@@ -835,12 +835,12 @@
           <a:lstStyle xmlns:a="http://schemas.openxmlformats.org/drawingml/2006/main"/>
           <a:p xmlns:a="http://schemas.openxmlformats.org/drawingml/2006/main">
             <a:r>
-              <a:t>Worked example: B receives 1/(60+2) from keyword and 1/(60+1) from dense, totaling 0.03252. A totals 1/61 + 1/63 = 0.03227.</a:t>
-            </a:r>
-          </a:p>
-          <a:p xmlns:a="http://schemas.openxmlformats.org/drawingml/2006/main">
-            <a:r>
-              <a:t>RRF combines one-based rank positions because raw keyword and dense scores are not calibrated to each other. Passage IDs deduplicate the channels.</a:t>
+              <a:t>Reciprocal-rank fusion combines rank contributions while preserving per-channel provenance.</a:t>
+            </a:r>
+          </a:p>
+          <a:p xmlns:a="http://schemas.openxmlformats.org/drawingml/2006/main">
+            <a:r>
+              <a:t/>
             </a:r>
           </a:p>
           <a:p xmlns:a="http://schemas.openxmlformats.org/drawingml/2006/main">
@@ -850,12 +850,17 @@
           </a:p>
           <a:p xmlns:a="http://schemas.openxmlformats.org/drawingml/2006/main">
             <a:r>
-              <a:t>- RRF implementation: src/finai_academy/hybrid_retrieval.py</a:t>
-            </a:r>
-          </a:p>
-          <a:p xmlns:a="http://schemas.openxmlformats.org/drawingml/2006/main">
-            <a:r>
-              <a:t>- Course calculation: notebooks/06_hybrid_retrieval.ipynb, Figure 7</a:t>
+              <a:t>- src/finai_academy/hybrid_retrieval.py</a:t>
+            </a:r>
+          </a:p>
+          <a:p xmlns:a="http://schemas.openxmlformats.org/drawingml/2006/main">
+            <a:r>
+              <a:t>- notebooks/06_hybrid_retrieval.ipynb, RRF section</a:t>
+            </a:r>
+          </a:p>
+          <a:p xmlns:a="http://schemas.openxmlformats.org/drawingml/2006/main">
+            <a:r>
+              <a:t>[/Sources]</a:t>
             </a:r>
           </a:p>
         </p:txBody>
@@ -925,12 +930,12 @@
           <a:lstStyle xmlns:a="http://schemas.openxmlformats.org/drawingml/2006/main"/>
           <a:p xmlns:a="http://schemas.openxmlformats.org/drawingml/2006/main">
             <a:r>
-              <a:t>The production interface is provider-neutral. The deterministic offline reranker is an illustrative, inspectable policy—not a production cross-encoder.</a:t>
-            </a:r>
-          </a:p>
-          <a:p xmlns:a="http://schemas.openxmlformats.org/drawingml/2006/main">
-            <a:r>
-              <a:t>Offline feature weights are lexical coverage 0.25, exact numeric coverage 0.45, section overlap 0.10, metadata eligibility 0.10, and normalized fusion signal 0.10. Their sum is a rerank score, not confidence.</a:t>
+              <a:t>Reranking spends a smaller evidence budget after broad eligible candidate retrieval.</a:t>
+            </a:r>
+          </a:p>
+          <a:p xmlns:a="http://schemas.openxmlformats.org/drawingml/2006/main">
+            <a:r>
+              <a:t/>
             </a:r>
           </a:p>
           <a:p xmlns:a="http://schemas.openxmlformats.org/drawingml/2006/main">
@@ -940,17 +945,17 @@
           </a:p>
           <a:p xmlns:a="http://schemas.openxmlformats.org/drawingml/2006/main">
             <a:r>
-              <a:t>- Feature definitions and weights: src/finai_academy/reranking.py</a:t>
-            </a:r>
-          </a:p>
-          <a:p xmlns:a="http://schemas.openxmlformats.org/drawingml/2006/main">
-            <a:r>
-              <a:t>- Candidate and final budgets: src/finai_academy/retrieval_pipeline.py</a:t>
-            </a:r>
-          </a:p>
-          <a:p xmlns:a="http://schemas.openxmlformats.org/drawingml/2006/main">
-            <a:r>
-              <a:t>- Provider-mode distinction: chapters/06-hybrid-retrieval.md#provider-modes</a:t>
+              <a:t>- src/finai_academy/retrieval_pipeline.py</a:t>
+            </a:r>
+          </a:p>
+          <a:p xmlns:a="http://schemas.openxmlformats.org/drawingml/2006/main">
+            <a:r>
+              <a:t>- notebooks/06_hybrid_retrieval.ipynb, reranking section</a:t>
+            </a:r>
+          </a:p>
+          <a:p xmlns:a="http://schemas.openxmlformats.org/drawingml/2006/main">
+            <a:r>
+              <a:t>[/Sources]</a:t>
             </a:r>
           </a:p>
         </p:txBody>
@@ -1020,12 +1025,12 @@
           <a:lstStyle xmlns:a="http://schemas.openxmlformats.org/drawingml/2006/main"/>
           <a:p xmlns:a="http://schemas.openxmlformats.org/drawingml/2006/main">
             <a:r>
-              <a:t>The capstone increment is filtered lexical+dense retrieval, reciprocal-rank fusion, and transparent reranking over a versioned local index.</a:t>
-            </a:r>
-          </a:p>
-          <a:p xmlns:a="http://schemas.openxmlformats.org/drawingml/2006/main">
-            <a:r>
-              <a:t>Lesson 07 should trace index identity, eligibility, channel ranks, RRF contributions, rerank features, final evidence IDs, and provenance. It evaluates retrieval recall separately from answer groundedness.</a:t>
+              <a:t>The capstone exposes stable index, eligibility, ranking, fusion, reranking and evidence stages.</a:t>
+            </a:r>
+          </a:p>
+          <a:p xmlns:a="http://schemas.openxmlformats.org/drawingml/2006/main">
+            <a:r>
+              <a:t/>
             </a:r>
           </a:p>
           <a:p xmlns:a="http://schemas.openxmlformats.org/drawingml/2006/main">
@@ -1035,12 +1040,17 @@
           </a:p>
           <a:p xmlns:a="http://schemas.openxmlformats.org/drawingml/2006/main">
             <a:r>
-              <a:t>- Course-owned pipeline and transition: chapters/06-hybrid-retrieval.md</a:t>
-            </a:r>
-          </a:p>
-          <a:p xmlns:a="http://schemas.openxmlformats.org/drawingml/2006/main">
-            <a:r>
-              <a:t>- Executable stage outputs: notebooks/06_hybrid_retrieval.ipynb</a:t>
+              <a:t>- chapters/06-hybrid-retrieval.md</a:t>
+            </a:r>
+          </a:p>
+          <a:p xmlns:a="http://schemas.openxmlformats.org/drawingml/2006/main">
+            <a:r>
+              <a:t>- notebooks/06_hybrid_retrieval.ipynb, capstone integration</a:t>
+            </a:r>
+          </a:p>
+          <a:p xmlns:a="http://schemas.openxmlformats.org/drawingml/2006/main">
+            <a:r>
+              <a:t>[/Sources]</a:t>
             </a:r>
           </a:p>
         </p:txBody>
@@ -1298,7 +1308,7 @@
   </p:cSld>
   <p:clrMap bg1="lt1" tx1="dk1" bg2="lt2" tx2="dk2" accent1="accent1" accent2="accent2" accent3="accent3" accent4="accent4" accent5="accent5" accent6="accent6" hlink="hlink" folHlink="folHlink"/>
   <p:sldLayoutIdLst>
-    <p:sldLayoutId xmlns:r="http://schemas.openxmlformats.org/officeDocument/2006/relationships" id="2147483649" r:id="Rbbba126d082d454c"/>
+    <p:sldLayoutId xmlns:r="http://schemas.openxmlformats.org/officeDocument/2006/relationships" id="2147483649" r:id="R6b32388c3e1442c2"/>
   </p:sldLayoutIdLst>
   <p:txStyles>
     <p:titleStyle>
@@ -2182,7 +2192,7 @@
                 <a:ea typeface="Calibri"/>
                 <a:cs typeface="Calibri"/>
               </a:rPr>
-              <a:t>Financial Analyst Copilot</a:t>
+              <a:t>First Finance - Arnaud Demes</a:t>
             </a:r>
           </a:p>
         </p:txBody>
@@ -3180,7 +3190,7 @@
       </p:sp>
       <p:cxnSp>
         <p:nvCxnSpPr>
-          <p:cNvPr id="302" name=""/>
+          <p:cNvPr id="350" name=""/>
           <p:cNvCxnSpPr>
             <a:stCxn xmlns:a="http://schemas.openxmlformats.org/drawingml/2006/main" id="14" idx="2"/>
             <a:endCxn xmlns:a="http://schemas.openxmlformats.org/drawingml/2006/main" id="16" idx="0"/>
@@ -3206,7 +3216,7 @@
       </p:cxnSp>
       <p:cxnSp>
         <p:nvCxnSpPr>
-          <p:cNvPr id="303" name=""/>
+          <p:cNvPr id="351" name=""/>
           <p:cNvCxnSpPr>
             <a:stCxn xmlns:a="http://schemas.openxmlformats.org/drawingml/2006/main" id="14" idx="2"/>
             <a:endCxn xmlns:a="http://schemas.openxmlformats.org/drawingml/2006/main" id="18" idx="0"/>
@@ -3232,7 +3242,7 @@
       </p:cxnSp>
       <p:cxnSp>
         <p:nvCxnSpPr>
-          <p:cNvPr id="304" name=""/>
+          <p:cNvPr id="352" name=""/>
           <p:cNvCxnSpPr>
             <a:stCxn xmlns:a="http://schemas.openxmlformats.org/drawingml/2006/main" id="14" idx="2"/>
             <a:endCxn xmlns:a="http://schemas.openxmlformats.org/drawingml/2006/main" id="20" idx="0"/>
@@ -7864,7 +7874,7 @@
       </p:sp>
       <p:cxnSp>
         <p:nvCxnSpPr>
-          <p:cNvPr id="373" name=""/>
+          <p:cNvPr id="435" name=""/>
           <p:cNvCxnSpPr>
             <a:stCxn xmlns:a="http://schemas.openxmlformats.org/drawingml/2006/main" id="8" idx="3"/>
             <a:endCxn xmlns:a="http://schemas.openxmlformats.org/drawingml/2006/main" id="3" idx="1"/>
@@ -7890,7 +7900,7 @@
       </p:cxnSp>
       <p:cxnSp>
         <p:nvCxnSpPr>
-          <p:cNvPr id="374" name=""/>
+          <p:cNvPr id="436" name=""/>
           <p:cNvCxnSpPr>
             <a:stCxn xmlns:a="http://schemas.openxmlformats.org/drawingml/2006/main" id="11" idx="3"/>
             <a:endCxn xmlns:a="http://schemas.openxmlformats.org/drawingml/2006/main" id="3" idx="1"/>
@@ -7916,7 +7926,7 @@
       </p:cxnSp>
       <p:cxnSp>
         <p:nvCxnSpPr>
-          <p:cNvPr id="375" name=""/>
+          <p:cNvPr id="437" name=""/>
           <p:cNvCxnSpPr>
             <a:stCxn xmlns:a="http://schemas.openxmlformats.org/drawingml/2006/main" id="14" idx="3"/>
             <a:endCxn xmlns:a="http://schemas.openxmlformats.org/drawingml/2006/main" id="3" idx="1"/>
@@ -7942,7 +7952,7 @@
       </p:cxnSp>
       <p:cxnSp>
         <p:nvCxnSpPr>
-          <p:cNvPr id="376" name=""/>
+          <p:cNvPr id="438" name=""/>
           <p:cNvCxnSpPr>
             <a:stCxn xmlns:a="http://schemas.openxmlformats.org/drawingml/2006/main" id="3" idx="3"/>
             <a:endCxn xmlns:a="http://schemas.openxmlformats.org/drawingml/2006/main" id="17" idx="1"/>
@@ -7968,7 +7978,7 @@
       </p:cxnSp>
       <p:cxnSp>
         <p:nvCxnSpPr>
-          <p:cNvPr id="377" name=""/>
+          <p:cNvPr id="439" name=""/>
           <p:cNvCxnSpPr>
             <a:stCxn xmlns:a="http://schemas.openxmlformats.org/drawingml/2006/main" id="3" idx="3"/>
             <a:endCxn xmlns:a="http://schemas.openxmlformats.org/drawingml/2006/main" id="20" idx="1"/>
@@ -7994,7 +8004,7 @@
       </p:cxnSp>
       <p:cxnSp>
         <p:nvCxnSpPr>
-          <p:cNvPr id="378" name=""/>
+          <p:cNvPr id="440" name=""/>
           <p:cNvCxnSpPr>
             <a:stCxn xmlns:a="http://schemas.openxmlformats.org/drawingml/2006/main" id="3" idx="3"/>
             <a:endCxn xmlns:a="http://schemas.openxmlformats.org/drawingml/2006/main" id="23" idx="1"/>
@@ -10941,7 +10951,7 @@
       </p:sp>
       <p:cxnSp>
         <p:nvCxnSpPr>
-          <p:cNvPr id="180" name=""/>
+          <p:cNvPr id="208" name=""/>
           <p:cNvCxnSpPr>
             <a:stCxn xmlns:a="http://schemas.openxmlformats.org/drawingml/2006/main" id="3" idx="3"/>
             <a:endCxn xmlns:a="http://schemas.openxmlformats.org/drawingml/2006/main" id="6" idx="1"/>
@@ -10967,7 +10977,7 @@
       </p:cxnSp>
       <p:cxnSp>
         <p:nvCxnSpPr>
-          <p:cNvPr id="181" name=""/>
+          <p:cNvPr id="209" name=""/>
           <p:cNvCxnSpPr>
             <a:stCxn xmlns:a="http://schemas.openxmlformats.org/drawingml/2006/main" id="6" idx="3"/>
             <a:endCxn xmlns:a="http://schemas.openxmlformats.org/drawingml/2006/main" id="10" idx="1"/>
@@ -12943,7 +12953,7 @@
       </p:sp>
       <p:cxnSp>
         <p:nvCxnSpPr>
-          <p:cNvPr id="317" name=""/>
+          <p:cNvPr id="369" name=""/>
           <p:cNvCxnSpPr>
             <a:stCxn xmlns:a="http://schemas.openxmlformats.org/drawingml/2006/main" id="3" idx="3"/>
             <a:endCxn xmlns:a="http://schemas.openxmlformats.org/drawingml/2006/main" id="7" idx="1"/>
@@ -12969,7 +12979,7 @@
       </p:cxnSp>
       <p:cxnSp>
         <p:nvCxnSpPr>
-          <p:cNvPr id="318" name=""/>
+          <p:cNvPr id="370" name=""/>
           <p:cNvCxnSpPr>
             <a:stCxn xmlns:a="http://schemas.openxmlformats.org/drawingml/2006/main" id="7" idx="3"/>
             <a:endCxn xmlns:a="http://schemas.openxmlformats.org/drawingml/2006/main" id="11" idx="1"/>
@@ -12995,7 +13005,7 @@
       </p:cxnSp>
       <p:cxnSp>
         <p:nvCxnSpPr>
-          <p:cNvPr id="319" name=""/>
+          <p:cNvPr id="371" name=""/>
           <p:cNvCxnSpPr>
             <a:stCxn xmlns:a="http://schemas.openxmlformats.org/drawingml/2006/main" id="11" idx="3"/>
             <a:endCxn xmlns:a="http://schemas.openxmlformats.org/drawingml/2006/main" id="15" idx="1"/>
@@ -13021,7 +13031,7 @@
       </p:cxnSp>
       <p:cxnSp>
         <p:nvCxnSpPr>
-          <p:cNvPr id="320" name=""/>
+          <p:cNvPr id="372" name=""/>
           <p:cNvCxnSpPr>
             <a:stCxn xmlns:a="http://schemas.openxmlformats.org/drawingml/2006/main" id="15" idx="3"/>
             <a:endCxn xmlns:a="http://schemas.openxmlformats.org/drawingml/2006/main" id="19" idx="1"/>
@@ -14743,7 +14753,7 @@
       </p:sp>
       <p:cxnSp>
         <p:nvCxnSpPr>
-          <p:cNvPr id="317" name=""/>
+          <p:cNvPr id="369" name=""/>
           <p:cNvCxnSpPr>
             <a:stCxn xmlns:a="http://schemas.openxmlformats.org/drawingml/2006/main" id="3" idx="3"/>
             <a:endCxn xmlns:a="http://schemas.openxmlformats.org/drawingml/2006/main" id="7" idx="1"/>
@@ -14769,7 +14779,7 @@
       </p:cxnSp>
       <p:cxnSp>
         <p:nvCxnSpPr>
-          <p:cNvPr id="318" name=""/>
+          <p:cNvPr id="370" name=""/>
           <p:cNvCxnSpPr>
             <a:stCxn xmlns:a="http://schemas.openxmlformats.org/drawingml/2006/main" id="7" idx="3"/>
             <a:endCxn xmlns:a="http://schemas.openxmlformats.org/drawingml/2006/main" id="11" idx="1"/>
@@ -14795,7 +14805,7 @@
       </p:cxnSp>
       <p:cxnSp>
         <p:nvCxnSpPr>
-          <p:cNvPr id="319" name=""/>
+          <p:cNvPr id="371" name=""/>
           <p:cNvCxnSpPr>
             <a:stCxn xmlns:a="http://schemas.openxmlformats.org/drawingml/2006/main" id="11" idx="3"/>
             <a:endCxn xmlns:a="http://schemas.openxmlformats.org/drawingml/2006/main" id="15" idx="1"/>
@@ -14821,7 +14831,7 @@
       </p:cxnSp>
       <p:cxnSp>
         <p:nvCxnSpPr>
-          <p:cNvPr id="320" name=""/>
+          <p:cNvPr id="372" name=""/>
           <p:cNvCxnSpPr>
             <a:stCxn xmlns:a="http://schemas.openxmlformats.org/drawingml/2006/main" id="15" idx="3"/>
             <a:endCxn xmlns:a="http://schemas.openxmlformats.org/drawingml/2006/main" id="19" idx="1"/>
@@ -16543,7 +16553,7 @@
       </p:sp>
       <p:cxnSp>
         <p:nvCxnSpPr>
-          <p:cNvPr id="317" name=""/>
+          <p:cNvPr id="369" name=""/>
           <p:cNvCxnSpPr>
             <a:stCxn xmlns:a="http://schemas.openxmlformats.org/drawingml/2006/main" id="3" idx="3"/>
             <a:endCxn xmlns:a="http://schemas.openxmlformats.org/drawingml/2006/main" id="7" idx="1"/>
@@ -16569,7 +16579,7 @@
       </p:cxnSp>
       <p:cxnSp>
         <p:nvCxnSpPr>
-          <p:cNvPr id="318" name=""/>
+          <p:cNvPr id="370" name=""/>
           <p:cNvCxnSpPr>
             <a:stCxn xmlns:a="http://schemas.openxmlformats.org/drawingml/2006/main" id="7" idx="3"/>
             <a:endCxn xmlns:a="http://schemas.openxmlformats.org/drawingml/2006/main" id="11" idx="1"/>
@@ -16595,7 +16605,7 @@
       </p:cxnSp>
       <p:cxnSp>
         <p:nvCxnSpPr>
-          <p:cNvPr id="319" name=""/>
+          <p:cNvPr id="371" name=""/>
           <p:cNvCxnSpPr>
             <a:stCxn xmlns:a="http://schemas.openxmlformats.org/drawingml/2006/main" id="11" idx="3"/>
             <a:endCxn xmlns:a="http://schemas.openxmlformats.org/drawingml/2006/main" id="15" idx="1"/>
@@ -16621,7 +16631,7 @@
       </p:cxnSp>
       <p:cxnSp>
         <p:nvCxnSpPr>
-          <p:cNvPr id="320" name=""/>
+          <p:cNvPr id="372" name=""/>
           <p:cNvCxnSpPr>
             <a:stCxn xmlns:a="http://schemas.openxmlformats.org/drawingml/2006/main" id="15" idx="3"/>
             <a:endCxn xmlns:a="http://schemas.openxmlformats.org/drawingml/2006/main" id="19" idx="1"/>

--- a/decks/06-hybrid-retrieval.pptx
+++ b/decks/06-hybrid-retrieval.pptx
@@ -2,21 +2,23 @@
 <file path=ppt/presentation.xml><?xml version="1.0" encoding="utf-8"?>
 <p:presentation xmlns:p="http://schemas.openxmlformats.org/presentationml/2006/main">
   <p:sldMasterIdLst>
-    <p:sldMasterId xmlns:r="http://schemas.openxmlformats.org/officeDocument/2006/relationships" id="2147483648" r:id="Rd1c001c6bc764840"/>
+    <p:sldMasterId xmlns:r="http://schemas.openxmlformats.org/officeDocument/2006/relationships" id="2147483648" r:id="Rf761c4e0df564bc1"/>
   </p:sldMasterIdLst>
   <p:notesMasterIdLst>
-    <p:notesMasterId xmlns:r="http://schemas.openxmlformats.org/officeDocument/2006/relationships" r:id="R611db923d0ca494b"/>
+    <p:notesMasterId xmlns:r="http://schemas.openxmlformats.org/officeDocument/2006/relationships" r:id="R1b8669439f7c448b"/>
   </p:notesMasterIdLst>
   <p:sldIdLst>
-    <p:sldId xmlns:r="http://schemas.openxmlformats.org/officeDocument/2006/relationships" id="256" r:id="Re02784333e1a45c4"/>
-    <p:sldId xmlns:r="http://schemas.openxmlformats.org/officeDocument/2006/relationships" id="257" r:id="R45a7e35061f344d0"/>
-    <p:sldId xmlns:r="http://schemas.openxmlformats.org/officeDocument/2006/relationships" id="258" r:id="R034a5c3b51984490"/>
-    <p:sldId xmlns:r="http://schemas.openxmlformats.org/officeDocument/2006/relationships" id="259" r:id="R9ac5243ff477445f"/>
-    <p:sldId xmlns:r="http://schemas.openxmlformats.org/officeDocument/2006/relationships" id="260" r:id="R89496fc8947e490c"/>
-    <p:sldId xmlns:r="http://schemas.openxmlformats.org/officeDocument/2006/relationships" id="261" r:id="R9500404f78d6424b"/>
-    <p:sldId xmlns:r="http://schemas.openxmlformats.org/officeDocument/2006/relationships" id="262" r:id="R62105b01bf314d3d"/>
-    <p:sldId xmlns:r="http://schemas.openxmlformats.org/officeDocument/2006/relationships" id="263" r:id="R0dad05f4a30f47e8"/>
-    <p:sldId xmlns:r="http://schemas.openxmlformats.org/officeDocument/2006/relationships" id="264" r:id="R04fbcb9e281e450c"/>
+    <p:sldId xmlns:r="http://schemas.openxmlformats.org/officeDocument/2006/relationships" id="256" r:id="Rcd678ce9c9ae4a78"/>
+    <p:sldId xmlns:r="http://schemas.openxmlformats.org/officeDocument/2006/relationships" id="257" r:id="Red4122d8109a4f39"/>
+    <p:sldId xmlns:r="http://schemas.openxmlformats.org/officeDocument/2006/relationships" id="258" r:id="R8e396fc52d50486c"/>
+    <p:sldId xmlns:r="http://schemas.openxmlformats.org/officeDocument/2006/relationships" id="259" r:id="R56c06d233c98409e"/>
+    <p:sldId xmlns:r="http://schemas.openxmlformats.org/officeDocument/2006/relationships" id="260" r:id="R84eeacb1f8e24d5f"/>
+    <p:sldId xmlns:r="http://schemas.openxmlformats.org/officeDocument/2006/relationships" id="261" r:id="R8304eb47849b4a84"/>
+    <p:sldId xmlns:r="http://schemas.openxmlformats.org/officeDocument/2006/relationships" id="262" r:id="Rb012c6e793c4426c"/>
+    <p:sldId xmlns:r="http://schemas.openxmlformats.org/officeDocument/2006/relationships" id="263" r:id="R254f9492dc3f4e9d"/>
+    <p:sldId xmlns:r="http://schemas.openxmlformats.org/officeDocument/2006/relationships" id="264" r:id="Rbad87b241dde49ee"/>
+    <p:sldId xmlns:r="http://schemas.openxmlformats.org/officeDocument/2006/relationships" id="265" r:id="R9fcf6825514f43ca"/>
+    <p:sldId xmlns:r="http://schemas.openxmlformats.org/officeDocument/2006/relationships" id="266" r:id="R008942d5f2274753"/>
   </p:sldIdLst>
   <p:sldSz cx="15240000" cy="8572500"/>
   <p:notesSz cx="6858000" cy="9144000"/>
@@ -505,6 +507,196 @@
 </p:notes>
 </file>
 
+<file path=ppt/notesSlides/notesSlide10.xml><?xml version="1.0" encoding="utf-8"?>
+<p:notes xmlns:p="http://schemas.openxmlformats.org/presentationml/2006/main">
+  <p:cSld>
+    <p:spTree>
+      <p:nvGrpSpPr>
+        <p:cNvPr id="1" name=""/>
+        <p:cNvGrpSpPr/>
+        <p:nvPr/>
+      </p:nvGrpSpPr>
+      <p:grpSpPr>
+        <a:xfrm xmlns:a="http://schemas.openxmlformats.org/drawingml/2006/main"/>
+      </p:grpSpPr>
+      <p:sp>
+        <p:nvSpPr>
+          <p:cNvPr id="2" name="Slide Image Placeholder 1"/>
+          <p:cNvSpPr>
+            <a:spLocks xmlns:a="http://schemas.openxmlformats.org/drawingml/2006/main" noGrp="1"/>
+          </p:cNvSpPr>
+          <p:nvPr>
+            <p:ph type="sldImg" idx="0"/>
+          </p:nvPr>
+        </p:nvSpPr>
+        <p:spPr/>
+      </p:sp>
+      <p:sp>
+        <p:nvSpPr>
+          <p:cNvPr id="3" name="Notes Placeholder 2"/>
+          <p:cNvSpPr>
+            <a:spLocks xmlns:a="http://schemas.openxmlformats.org/drawingml/2006/main" noGrp="1"/>
+          </p:cNvSpPr>
+          <p:nvPr>
+            <p:ph type="body" idx="1"/>
+          </p:nvPr>
+        </p:nvSpPr>
+        <p:spPr/>
+        <p:txBody>
+          <a:bodyPr xmlns:a="http://schemas.openxmlformats.org/drawingml/2006/main"/>
+          <a:lstStyle xmlns:a="http://schemas.openxmlformats.org/drawingml/2006/main"/>
+          <a:p xmlns:a="http://schemas.openxmlformats.org/drawingml/2006/main">
+            <a:r>
+              <a:t>Instructor purpose: Check the three core decisions before the lesson closes.</a:t>
+            </a:r>
+          </a:p>
+          <a:p xmlns:a="http://schemas.openxmlformats.org/drawingml/2006/main">
+            <a:r>
+              <a:t>Planned timing: 3 minutes.</a:t>
+            </a:r>
+          </a:p>
+          <a:p xmlns:a="http://schemas.openxmlformats.org/drawingml/2006/main">
+            <a:r>
+              <a:t>Facilitation: ask for one letter per question.</a:t>
+            </a:r>
+          </a:p>
+          <a:p xmlns:a="http://schemas.openxmlformats.org/drawingml/2006/main">
+            <a:r>
+              <a:t>[Sources]</a:t>
+            </a:r>
+          </a:p>
+          <a:p xmlns:a="http://schemas.openxmlformats.org/drawingml/2006/main">
+            <a:r>
+              <a:t>- chapters/06-hybrid-retrieval.md</a:t>
+            </a:r>
+          </a:p>
+          <a:p xmlns:a="http://schemas.openxmlformats.org/drawingml/2006/main">
+            <a:r>
+              <a:t>[/Sources]</a:t>
+            </a:r>
+          </a:p>
+        </p:txBody>
+      </p:sp>
+      <p:sp>
+        <p:nvSpPr>
+          <p:cNvPr id="4" name="Slide Number Placeholder 3"/>
+          <p:cNvSpPr>
+            <a:spLocks xmlns:a="http://schemas.openxmlformats.org/drawingml/2006/main" noGrp="1"/>
+          </p:cNvSpPr>
+          <p:nvPr>
+            <p:ph type="sldNum" idx="5"/>
+          </p:nvPr>
+        </p:nvSpPr>
+        <p:spPr/>
+        <p:txBody>
+          <a:bodyPr xmlns:a="http://schemas.openxmlformats.org/drawingml/2006/main"/>
+          <a:lstStyle xmlns:a="http://schemas.openxmlformats.org/drawingml/2006/main"/>
+          <a:p xmlns:a="http://schemas.openxmlformats.org/drawingml/2006/main"/>
+        </p:txBody>
+      </p:sp>
+    </p:spTree>
+  </p:cSld>
+  <p:clrMapOvr>
+    <a:masterClrMapping xmlns:a="http://schemas.openxmlformats.org/drawingml/2006/main"/>
+  </p:clrMapOvr>
+</p:notes>
+</file>
+
+<file path=ppt/notesSlides/notesSlide11.xml><?xml version="1.0" encoding="utf-8"?>
+<p:notes xmlns:p="http://schemas.openxmlformats.org/presentationml/2006/main">
+  <p:cSld>
+    <p:spTree>
+      <p:nvGrpSpPr>
+        <p:cNvPr id="1" name=""/>
+        <p:cNvGrpSpPr/>
+        <p:nvPr/>
+      </p:nvGrpSpPr>
+      <p:grpSpPr>
+        <a:xfrm xmlns:a="http://schemas.openxmlformats.org/drawingml/2006/main"/>
+      </p:grpSpPr>
+      <p:sp>
+        <p:nvSpPr>
+          <p:cNvPr id="2" name="Slide Image Placeholder 1"/>
+          <p:cNvSpPr>
+            <a:spLocks xmlns:a="http://schemas.openxmlformats.org/drawingml/2006/main" noGrp="1"/>
+          </p:cNvSpPr>
+          <p:nvPr>
+            <p:ph type="sldImg" idx="0"/>
+          </p:nvPr>
+        </p:nvSpPr>
+        <p:spPr/>
+      </p:sp>
+      <p:sp>
+        <p:nvSpPr>
+          <p:cNvPr id="3" name="Notes Placeholder 2"/>
+          <p:cNvSpPr>
+            <a:spLocks xmlns:a="http://schemas.openxmlformats.org/drawingml/2006/main" noGrp="1"/>
+          </p:cNvSpPr>
+          <p:nvPr>
+            <p:ph type="body" idx="1"/>
+          </p:nvPr>
+        </p:nvSpPr>
+        <p:spPr/>
+        <p:txBody>
+          <a:bodyPr xmlns:a="http://schemas.openxmlformats.org/drawingml/2006/main"/>
+          <a:lstStyle xmlns:a="http://schemas.openxmlformats.org/drawingml/2006/main"/>
+          <a:p xmlns:a="http://schemas.openxmlformats.org/drawingml/2006/main">
+            <a:r>
+              <a:t>Instructor purpose: Correct the quiz and restate the practical rule behind each answer.</a:t>
+            </a:r>
+          </a:p>
+          <a:p xmlns:a="http://schemas.openxmlformats.org/drawingml/2006/main">
+            <a:r>
+              <a:t>Planned timing: 3 minutes.</a:t>
+            </a:r>
+          </a:p>
+          <a:p xmlns:a="http://schemas.openxmlformats.org/drawingml/2006/main">
+            <a:r>
+              <a:t>Facilitation: ask learners to explain each rule in their own words.</a:t>
+            </a:r>
+          </a:p>
+          <a:p xmlns:a="http://schemas.openxmlformats.org/drawingml/2006/main">
+            <a:r>
+              <a:t>[Sources]</a:t>
+            </a:r>
+          </a:p>
+          <a:p xmlns:a="http://schemas.openxmlformats.org/drawingml/2006/main">
+            <a:r>
+              <a:t>- chapters/06-hybrid-retrieval.md</a:t>
+            </a:r>
+          </a:p>
+          <a:p xmlns:a="http://schemas.openxmlformats.org/drawingml/2006/main">
+            <a:r>
+              <a:t>[/Sources]</a:t>
+            </a:r>
+          </a:p>
+        </p:txBody>
+      </p:sp>
+      <p:sp>
+        <p:nvSpPr>
+          <p:cNvPr id="4" name="Slide Number Placeholder 3"/>
+          <p:cNvSpPr>
+            <a:spLocks xmlns:a="http://schemas.openxmlformats.org/drawingml/2006/main" noGrp="1"/>
+          </p:cNvSpPr>
+          <p:nvPr>
+            <p:ph type="sldNum" idx="5"/>
+          </p:nvPr>
+        </p:nvSpPr>
+        <p:spPr/>
+        <p:txBody>
+          <a:bodyPr xmlns:a="http://schemas.openxmlformats.org/drawingml/2006/main"/>
+          <a:lstStyle xmlns:a="http://schemas.openxmlformats.org/drawingml/2006/main"/>
+          <a:p xmlns:a="http://schemas.openxmlformats.org/drawingml/2006/main"/>
+        </p:txBody>
+      </p:sp>
+    </p:spTree>
+  </p:cSld>
+  <p:clrMapOvr>
+    <a:masterClrMapping xmlns:a="http://schemas.openxmlformats.org/drawingml/2006/main"/>
+  </p:clrMapOvr>
+</p:notes>
+</file>
+
 <file path=ppt/notesSlides/notesSlide2.xml><?xml version="1.0" encoding="utf-8"?>
 <p:notes xmlns:p="http://schemas.openxmlformats.org/presentationml/2006/main">
   <p:cSld>
@@ -1308,7 +1500,7 @@
   </p:cSld>
   <p:clrMap bg1="lt1" tx1="dk1" bg2="lt2" tx2="dk2" accent1="accent1" accent2="accent2" accent3="accent3" accent4="accent4" accent5="accent5" accent6="accent6" hlink="hlink" folHlink="folHlink"/>
   <p:sldLayoutIdLst>
-    <p:sldLayoutId xmlns:r="http://schemas.openxmlformats.org/officeDocument/2006/relationships" id="2147483649" r:id="R6b32388c3e1442c2"/>
+    <p:sldLayoutId xmlns:r="http://schemas.openxmlformats.org/officeDocument/2006/relationships" id="2147483649" r:id="R73a7362e0e3a4fa2"/>
   </p:sldLayoutIdLst>
   <p:txStyles>
     <p:titleStyle>
@@ -2207,6 +2399,1350 @@
 </p:sld>
 </file>
 
+<file path=ppt/slides/slide10.xml><?xml version="1.0" encoding="utf-8"?>
+<p:sld xmlns:p="http://schemas.openxmlformats.org/presentationml/2006/main">
+  <p:cSld>
+    <p:bg>
+      <p:bgPr>
+        <a:solidFill xmlns:a="http://schemas.openxmlformats.org/drawingml/2006/main">
+          <a:srgbClr val="F5F5F5"/>
+        </a:solidFill>
+      </p:bgPr>
+    </p:bg>
+    <p:spTree>
+      <p:nvGrpSpPr>
+        <p:cNvPr id="1" name=""/>
+        <p:cNvGrpSpPr/>
+        <p:nvPr/>
+      </p:nvGrpSpPr>
+      <p:grpSpPr>
+        <a:xfrm xmlns:a="http://schemas.openxmlformats.org/drawingml/2006/main"/>
+      </p:grpSpPr>
+      <p:sp>
+        <p:nvSpPr>
+          <p:cNvPr id="7" name="">
+            <a:extLst xmlns:a="http://schemas.openxmlformats.org/drawingml/2006/main">
+              <a:ext uri="{FF2B5EF4-FFF2-40B4-BE49-F238E27FC236}">
+                <a16:creationId xmlns:a16="http://schemas.microsoft.com/office/drawing/2014/main" id="{2E1E88F9-4976-411E-8732-D45BE311BBD2}"/>
+              </a:ext>
+            </a:extLst>
+          </p:cNvPr>
+          <p:cNvSpPr>
+            <a:spLocks xmlns:a="http://schemas.openxmlformats.org/drawingml/2006/main" noGrp="1"/>
+          </p:cNvSpPr>
+          <p:nvPr/>
+        </p:nvSpPr>
+        <p:spPr>
+          <a:xfrm xmlns:a="http://schemas.openxmlformats.org/drawingml/2006/main">
+            <a:off x="971550" y="781050"/>
+            <a:ext cx="1257300" cy="76200"/>
+          </a:xfrm>
+          <a:prstGeom xmlns:a="http://schemas.openxmlformats.org/drawingml/2006/main" prst="rect">
+            <a:avLst/>
+          </a:prstGeom>
+          <a:solidFill xmlns:a="http://schemas.openxmlformats.org/drawingml/2006/main">
+            <a:srgbClr val="00A2EB"/>
+          </a:solidFill>
+          <a:ln xmlns:a="http://schemas.openxmlformats.org/drawingml/2006/main" w="0">
+            <a:solidFill>
+              <a:srgbClr val="00A2EB"/>
+            </a:solidFill>
+            <a:prstDash val="solid"/>
+          </a:ln>
+        </p:spPr>
+      </p:sp>
+      <p:sp>
+        <p:nvSpPr>
+          <p:cNvPr id="2" name="">
+            <a:extLst xmlns:a="http://schemas.openxmlformats.org/drawingml/2006/main">
+              <a:ext uri="{FF2B5EF4-FFF2-40B4-BE49-F238E27FC236}">
+                <a16:creationId xmlns:a16="http://schemas.microsoft.com/office/drawing/2014/main" id="{35C43047-00B1-4B7A-BB36-D272D2C9B6CA}"/>
+              </a:ext>
+            </a:extLst>
+          </p:cNvPr>
+          <p:cNvSpPr>
+            <a:spLocks xmlns:a="http://schemas.openxmlformats.org/drawingml/2006/main" noGrp="1"/>
+          </p:cNvSpPr>
+          <p:nvPr/>
+        </p:nvSpPr>
+        <p:spPr>
+          <a:xfrm xmlns:a="http://schemas.openxmlformats.org/drawingml/2006/main">
+            <a:off x="971550" y="1066800"/>
+            <a:ext cx="2857500" cy="419100"/>
+          </a:xfrm>
+          <a:prstGeom xmlns:a="http://schemas.openxmlformats.org/drawingml/2006/main" prst="rect">
+            <a:avLst/>
+          </a:prstGeom>
+          <a:noFill xmlns:a="http://schemas.openxmlformats.org/drawingml/2006/main"/>
+          <a:ln xmlns:a="http://schemas.openxmlformats.org/drawingml/2006/main" w="0">
+            <a:noFill/>
+            <a:prstDash val="solid"/>
+          </a:ln>
+        </p:spPr>
+        <p:txBody>
+          <a:bodyPr xmlns:a="http://schemas.openxmlformats.org/drawingml/2006/main" wrap="square" lIns="0" tIns="0" rIns="0" bIns="0" anchor="ctr">
+            <a:normAutofit fontScale="100000"/>
+          </a:bodyPr>
+          <a:lstStyle xmlns:a="http://schemas.openxmlformats.org/drawingml/2006/main"/>
+          <a:p xmlns:a="http://schemas.openxmlformats.org/drawingml/2006/main">
+            <a:pPr algn="l">
+              <a:lnSpc>
+                <a:spcPct val="100000"/>
+              </a:lnSpc>
+              <a:buNone/>
+              <a:defRPr sz="1575" b="1">
+                <a:solidFill>
+                  <a:srgbClr val="1F40CB"/>
+                </a:solidFill>
+                <a:latin typeface="Calibri"/>
+                <a:ea typeface="Calibri"/>
+                <a:cs typeface="Calibri"/>
+              </a:defRPr>
+            </a:pPr>
+            <a:r>
+              <a:rPr sz="1575" b="1">
+                <a:solidFill>
+                  <a:srgbClr val="1F40CB"/>
+                </a:solidFill>
+                <a:latin typeface="Calibri"/>
+                <a:ea typeface="Calibri"/>
+                <a:cs typeface="Calibri"/>
+              </a:rPr>
+              <a:t>FIRST FINANCE</a:t>
+            </a:r>
+          </a:p>
+        </p:txBody>
+      </p:sp>
+      <p:sp>
+        <p:nvSpPr>
+          <p:cNvPr id="3" name="">
+            <a:extLst xmlns:a="http://schemas.openxmlformats.org/drawingml/2006/main">
+              <a:ext uri="{FF2B5EF4-FFF2-40B4-BE49-F238E27FC236}">
+                <a16:creationId xmlns:a16="http://schemas.microsoft.com/office/drawing/2014/main" id="{2EBB9B00-5773-4D90-9774-8BB7FE35221F}"/>
+              </a:ext>
+            </a:extLst>
+          </p:cNvPr>
+          <p:cNvSpPr>
+            <a:spLocks xmlns:a="http://schemas.openxmlformats.org/drawingml/2006/main" noGrp="1"/>
+          </p:cNvSpPr>
+          <p:nvPr/>
+        </p:nvSpPr>
+        <p:spPr>
+          <a:xfrm xmlns:a="http://schemas.openxmlformats.org/drawingml/2006/main">
+            <a:off x="971550" y="2362200"/>
+            <a:ext cx="13296900" cy="895350"/>
+          </a:xfrm>
+          <a:prstGeom xmlns:a="http://schemas.openxmlformats.org/drawingml/2006/main" prst="rect">
+            <a:avLst/>
+          </a:prstGeom>
+          <a:noFill xmlns:a="http://schemas.openxmlformats.org/drawingml/2006/main"/>
+          <a:ln xmlns:a="http://schemas.openxmlformats.org/drawingml/2006/main" w="0">
+            <a:noFill/>
+            <a:prstDash val="solid"/>
+          </a:ln>
+        </p:spPr>
+        <p:txBody>
+          <a:bodyPr xmlns:a="http://schemas.openxmlformats.org/drawingml/2006/main" wrap="none" lIns="0" tIns="0" rIns="0" bIns="0" anchor="ctr">
+            <a:normAutofit fontScale="100000"/>
+          </a:bodyPr>
+          <a:lstStyle xmlns:a="http://schemas.openxmlformats.org/drawingml/2006/main"/>
+          <a:p xmlns:a="http://schemas.openxmlformats.org/drawingml/2006/main">
+            <a:pPr algn="l">
+              <a:lnSpc>
+                <a:spcPct val="100000"/>
+              </a:lnSpc>
+              <a:buNone/>
+              <a:defRPr sz="4800" b="1">
+                <a:solidFill>
+                  <a:srgbClr val="051C2A"/>
+                </a:solidFill>
+                <a:latin typeface="Calibri"/>
+                <a:ea typeface="Calibri"/>
+                <a:cs typeface="Calibri"/>
+              </a:defRPr>
+            </a:pPr>
+            <a:r>
+              <a:rPr sz="4800" b="1">
+                <a:solidFill>
+                  <a:srgbClr val="051C2A"/>
+                </a:solidFill>
+                <a:latin typeface="Calibri"/>
+                <a:ea typeface="Calibri"/>
+                <a:cs typeface="Calibri"/>
+              </a:rPr>
+              <a:t>Quick quiz</a:t>
+            </a:r>
+          </a:p>
+        </p:txBody>
+      </p:sp>
+      <p:sp>
+        <p:nvSpPr>
+          <p:cNvPr id="4" name="">
+            <a:extLst xmlns:a="http://schemas.openxmlformats.org/drawingml/2006/main">
+              <a:ext uri="{FF2B5EF4-FFF2-40B4-BE49-F238E27FC236}">
+                <a16:creationId xmlns:a16="http://schemas.microsoft.com/office/drawing/2014/main" id="{601F96F8-8EA3-4B69-A3AF-EBD5CBCD09C1}"/>
+              </a:ext>
+            </a:extLst>
+          </p:cNvPr>
+          <p:cNvSpPr>
+            <a:spLocks xmlns:a="http://schemas.openxmlformats.org/drawingml/2006/main" noGrp="1"/>
+          </p:cNvSpPr>
+          <p:nvPr/>
+        </p:nvSpPr>
+        <p:spPr>
+          <a:xfrm xmlns:a="http://schemas.openxmlformats.org/drawingml/2006/main">
+            <a:off x="971550" y="3562350"/>
+            <a:ext cx="11239500" cy="514350"/>
+          </a:xfrm>
+          <a:prstGeom xmlns:a="http://schemas.openxmlformats.org/drawingml/2006/main" prst="rect">
+            <a:avLst/>
+          </a:prstGeom>
+          <a:noFill xmlns:a="http://schemas.openxmlformats.org/drawingml/2006/main"/>
+          <a:ln xmlns:a="http://schemas.openxmlformats.org/drawingml/2006/main" w="0">
+            <a:noFill/>
+            <a:prstDash val="solid"/>
+          </a:ln>
+        </p:spPr>
+        <p:txBody>
+          <a:bodyPr xmlns:a="http://schemas.openxmlformats.org/drawingml/2006/main" wrap="square" lIns="0" tIns="0" rIns="0" bIns="0" anchor="ctr">
+            <a:normAutofit fontScale="100000"/>
+          </a:bodyPr>
+          <a:lstStyle xmlns:a="http://schemas.openxmlformats.org/drawingml/2006/main"/>
+          <a:p xmlns:a="http://schemas.openxmlformats.org/drawingml/2006/main">
+            <a:pPr algn="l">
+              <a:lnSpc>
+                <a:spcPct val="100000"/>
+              </a:lnSpc>
+              <a:buNone/>
+              <a:defRPr sz="2400" b="0">
+                <a:solidFill>
+                  <a:srgbClr val="3F3F42"/>
+                </a:solidFill>
+                <a:latin typeface="Calibri"/>
+                <a:ea typeface="Calibri"/>
+                <a:cs typeface="Calibri"/>
+              </a:defRPr>
+            </a:pPr>
+            <a:r>
+              <a:rPr sz="2400" b="0">
+                <a:solidFill>
+                  <a:srgbClr val="3F3F42"/>
+                </a:solidFill>
+                <a:latin typeface="Calibri"/>
+                <a:ea typeface="Calibri"/>
+                <a:cs typeface="Calibri"/>
+              </a:rPr>
+              <a:t>Choose one answer for each question.</a:t>
+            </a:r>
+          </a:p>
+        </p:txBody>
+      </p:sp>
+      <p:sp>
+        <p:nvSpPr>
+          <p:cNvPr id="5" name="">
+            <a:extLst xmlns:a="http://schemas.openxmlformats.org/drawingml/2006/main">
+              <a:ext uri="{FF2B5EF4-FFF2-40B4-BE49-F238E27FC236}">
+                <a16:creationId xmlns:a16="http://schemas.microsoft.com/office/drawing/2014/main" id="{D4A6E89B-2708-4600-B820-727EF660DE6B}"/>
+              </a:ext>
+            </a:extLst>
+          </p:cNvPr>
+          <p:cNvSpPr>
+            <a:spLocks xmlns:a="http://schemas.openxmlformats.org/drawingml/2006/main" noGrp="1"/>
+          </p:cNvSpPr>
+          <p:nvPr/>
+        </p:nvSpPr>
+        <p:spPr>
+          <a:xfrm xmlns:a="http://schemas.openxmlformats.org/drawingml/2006/main">
+            <a:off x="971550" y="6477000"/>
+            <a:ext cx="9525000" cy="400050"/>
+          </a:xfrm>
+          <a:prstGeom xmlns:a="http://schemas.openxmlformats.org/drawingml/2006/main" prst="rect">
+            <a:avLst/>
+          </a:prstGeom>
+          <a:noFill xmlns:a="http://schemas.openxmlformats.org/drawingml/2006/main"/>
+          <a:ln xmlns:a="http://schemas.openxmlformats.org/drawingml/2006/main" w="0">
+            <a:noFill/>
+            <a:prstDash val="solid"/>
+          </a:ln>
+        </p:spPr>
+        <p:txBody>
+          <a:bodyPr xmlns:a="http://schemas.openxmlformats.org/drawingml/2006/main" wrap="square" lIns="0" tIns="0" rIns="0" bIns="0" anchor="ctr">
+            <a:normAutofit fontScale="100000"/>
+          </a:bodyPr>
+          <a:lstStyle xmlns:a="http://schemas.openxmlformats.org/drawingml/2006/main"/>
+          <a:p xmlns:a="http://schemas.openxmlformats.org/drawingml/2006/main">
+            <a:pPr algn="l">
+              <a:lnSpc>
+                <a:spcPct val="100000"/>
+              </a:lnSpc>
+              <a:buNone/>
+              <a:defRPr sz="1350" b="1">
+                <a:solidFill>
+                  <a:srgbClr val="1F40CB"/>
+                </a:solidFill>
+                <a:latin typeface="Calibri"/>
+                <a:ea typeface="Calibri"/>
+                <a:cs typeface="Calibri"/>
+              </a:defRPr>
+            </a:pPr>
+            <a:r>
+              <a:rPr sz="1350" b="1">
+                <a:solidFill>
+                  <a:srgbClr val="1F40CB"/>
+                </a:solidFill>
+                <a:latin typeface="Calibri"/>
+                <a:ea typeface="Calibri"/>
+                <a:cs typeface="Calibri"/>
+              </a:rPr>
+              <a:t>LESSON 06  ·  3 QUESTIONS  ·  3 MINUTES</a:t>
+            </a:r>
+          </a:p>
+        </p:txBody>
+      </p:sp>
+      <p:sp>
+        <p:nvSpPr>
+          <p:cNvPr id="6" name="">
+            <a:extLst xmlns:a="http://schemas.openxmlformats.org/drawingml/2006/main">
+              <a:ext uri="{FF2B5EF4-FFF2-40B4-BE49-F238E27FC236}">
+                <a16:creationId xmlns:a16="http://schemas.microsoft.com/office/drawing/2014/main" id="{053831D6-7D46-4F1A-929F-D2CAD97F1627}"/>
+              </a:ext>
+            </a:extLst>
+          </p:cNvPr>
+          <p:cNvSpPr>
+            <a:spLocks xmlns:a="http://schemas.openxmlformats.org/drawingml/2006/main" noGrp="1"/>
+          </p:cNvSpPr>
+          <p:nvPr/>
+        </p:nvSpPr>
+        <p:spPr>
+          <a:xfrm xmlns:a="http://schemas.openxmlformats.org/drawingml/2006/main">
+            <a:off x="971550" y="7067550"/>
+            <a:ext cx="4762500" cy="381000"/>
+          </a:xfrm>
+          <a:prstGeom xmlns:a="http://schemas.openxmlformats.org/drawingml/2006/main" prst="rect">
+            <a:avLst/>
+          </a:prstGeom>
+          <a:noFill xmlns:a="http://schemas.openxmlformats.org/drawingml/2006/main"/>
+          <a:ln xmlns:a="http://schemas.openxmlformats.org/drawingml/2006/main" w="0">
+            <a:noFill/>
+            <a:prstDash val="solid"/>
+          </a:ln>
+        </p:spPr>
+        <p:txBody>
+          <a:bodyPr xmlns:a="http://schemas.openxmlformats.org/drawingml/2006/main" wrap="square" lIns="0" tIns="0" rIns="0" bIns="0" anchor="ctr">
+            <a:normAutofit fontScale="100000"/>
+          </a:bodyPr>
+          <a:lstStyle xmlns:a="http://schemas.openxmlformats.org/drawingml/2006/main"/>
+          <a:p xmlns:a="http://schemas.openxmlformats.org/drawingml/2006/main">
+            <a:pPr algn="l">
+              <a:lnSpc>
+                <a:spcPct val="100000"/>
+              </a:lnSpc>
+              <a:buNone/>
+              <a:defRPr sz="1725" b="0">
+                <a:solidFill>
+                  <a:srgbClr val="051C2A"/>
+                </a:solidFill>
+                <a:latin typeface="Calibri"/>
+                <a:ea typeface="Calibri"/>
+                <a:cs typeface="Calibri"/>
+              </a:defRPr>
+            </a:pPr>
+            <a:r>
+              <a:rPr sz="1725" b="0">
+                <a:solidFill>
+                  <a:srgbClr val="051C2A"/>
+                </a:solidFill>
+                <a:latin typeface="Calibri"/>
+                <a:ea typeface="Calibri"/>
+                <a:cs typeface="Calibri"/>
+              </a:rPr>
+              <a:t>First Finance - Arnaud Demes</a:t>
+            </a:r>
+          </a:p>
+        </p:txBody>
+      </p:sp>
+      <p:sp>
+        <p:nvSpPr>
+          <p:cNvPr id="8" name="quiz-question-1">
+            <a:extLst xmlns:a="http://schemas.openxmlformats.org/drawingml/2006/main">
+              <a:ext uri="{FF2B5EF4-FFF2-40B4-BE49-F238E27FC236}">
+                <a16:creationId xmlns:a16="http://schemas.microsoft.com/office/drawing/2014/main" id="{D47DE6EE-65D5-448B-956A-74C2A0333745}"/>
+              </a:ext>
+            </a:extLst>
+          </p:cNvPr>
+          <p:cNvSpPr>
+            <a:spLocks xmlns:a="http://schemas.openxmlformats.org/drawingml/2006/main" noGrp="1"/>
+          </p:cNvSpPr>
+          <p:nvPr/>
+        </p:nvSpPr>
+        <p:spPr>
+          <a:xfrm xmlns:a="http://schemas.openxmlformats.org/drawingml/2006/main">
+            <a:off x="971550" y="4400550"/>
+            <a:ext cx="13296900" cy="285750"/>
+          </a:xfrm>
+          <a:prstGeom xmlns:a="http://schemas.openxmlformats.org/drawingml/2006/main" prst="rect">
+            <a:avLst/>
+          </a:prstGeom>
+          <a:noFill xmlns:a="http://schemas.openxmlformats.org/drawingml/2006/main"/>
+          <a:ln xmlns:a="http://schemas.openxmlformats.org/drawingml/2006/main" w="0">
+            <a:noFill/>
+            <a:prstDash val="solid"/>
+          </a:ln>
+        </p:spPr>
+        <p:txBody>
+          <a:bodyPr xmlns:a="http://schemas.openxmlformats.org/drawingml/2006/main"/>
+          <a:lstStyle xmlns:a="http://schemas.openxmlformats.org/drawingml/2006/main"/>
+          <a:p xmlns:a="http://schemas.openxmlformats.org/drawingml/2006/main">
+            <a:pPr>
+              <a:defRPr sz="1500" b="1">
+                <a:solidFill>
+                  <a:srgbClr val="001B2E"/>
+                </a:solidFill>
+              </a:defRPr>
+            </a:pPr>
+            <a:r>
+              <a:rPr sz="1500" b="1">
+                <a:solidFill>
+                  <a:srgbClr val="001B2E"/>
+                </a:solidFill>
+              </a:rPr>
+              <a:t>1. Which two channels does hybrid retrieval combine?</a:t>
+            </a:r>
+          </a:p>
+        </p:txBody>
+      </p:sp>
+      <p:sp>
+        <p:nvSpPr>
+          <p:cNvPr id="9" name="quiz-options-1">
+            <a:extLst xmlns:a="http://schemas.openxmlformats.org/drawingml/2006/main">
+              <a:ext uri="{FF2B5EF4-FFF2-40B4-BE49-F238E27FC236}">
+                <a16:creationId xmlns:a16="http://schemas.microsoft.com/office/drawing/2014/main" id="{CE8F4525-9216-4D17-8F89-0D8835DAF956}"/>
+              </a:ext>
+            </a:extLst>
+          </p:cNvPr>
+          <p:cNvSpPr>
+            <a:spLocks xmlns:a="http://schemas.openxmlformats.org/drawingml/2006/main" noGrp="1"/>
+          </p:cNvSpPr>
+          <p:nvPr/>
+        </p:nvSpPr>
+        <p:spPr>
+          <a:xfrm xmlns:a="http://schemas.openxmlformats.org/drawingml/2006/main">
+            <a:off x="1257300" y="4705350"/>
+            <a:ext cx="13011150" cy="247650"/>
+          </a:xfrm>
+          <a:prstGeom xmlns:a="http://schemas.openxmlformats.org/drawingml/2006/main" prst="rect">
+            <a:avLst/>
+          </a:prstGeom>
+          <a:noFill xmlns:a="http://schemas.openxmlformats.org/drawingml/2006/main"/>
+          <a:ln xmlns:a="http://schemas.openxmlformats.org/drawingml/2006/main" w="0">
+            <a:noFill/>
+            <a:prstDash val="solid"/>
+          </a:ln>
+        </p:spPr>
+        <p:txBody>
+          <a:bodyPr xmlns:a="http://schemas.openxmlformats.org/drawingml/2006/main"/>
+          <a:lstStyle xmlns:a="http://schemas.openxmlformats.org/drawingml/2006/main"/>
+          <a:p xmlns:a="http://schemas.openxmlformats.org/drawingml/2006/main">
+            <a:pPr>
+              <a:defRPr sz="1200" b="0">
+                <a:solidFill>
+                  <a:srgbClr val="334155"/>
+                </a:solidFill>
+              </a:defRPr>
+            </a:pPr>
+            <a:r>
+              <a:rPr sz="1200" b="0">
+                <a:solidFill>
+                  <a:srgbClr val="334155"/>
+                </a:solidFill>
+              </a:rPr>
+              <a:t>A  Keyword and dense     |     B  Cache and memory     |     C  Prompt and agent</a:t>
+            </a:r>
+          </a:p>
+        </p:txBody>
+      </p:sp>
+      <p:sp>
+        <p:nvSpPr>
+          <p:cNvPr id="10" name="quiz-question-2">
+            <a:extLst xmlns:a="http://schemas.openxmlformats.org/drawingml/2006/main">
+              <a:ext uri="{FF2B5EF4-FFF2-40B4-BE49-F238E27FC236}">
+                <a16:creationId xmlns:a16="http://schemas.microsoft.com/office/drawing/2014/main" id="{E657C5AE-B0C8-4BC7-BD56-671F924CB647}"/>
+              </a:ext>
+            </a:extLst>
+          </p:cNvPr>
+          <p:cNvSpPr>
+            <a:spLocks xmlns:a="http://schemas.openxmlformats.org/drawingml/2006/main" noGrp="1"/>
+          </p:cNvSpPr>
+          <p:nvPr/>
+        </p:nvSpPr>
+        <p:spPr>
+          <a:xfrm xmlns:a="http://schemas.openxmlformats.org/drawingml/2006/main">
+            <a:off x="971550" y="5086350"/>
+            <a:ext cx="13296900" cy="285750"/>
+          </a:xfrm>
+          <a:prstGeom xmlns:a="http://schemas.openxmlformats.org/drawingml/2006/main" prst="rect">
+            <a:avLst/>
+          </a:prstGeom>
+          <a:noFill xmlns:a="http://schemas.openxmlformats.org/drawingml/2006/main"/>
+          <a:ln xmlns:a="http://schemas.openxmlformats.org/drawingml/2006/main" w="0">
+            <a:noFill/>
+            <a:prstDash val="solid"/>
+          </a:ln>
+        </p:spPr>
+        <p:txBody>
+          <a:bodyPr xmlns:a="http://schemas.openxmlformats.org/drawingml/2006/main"/>
+          <a:lstStyle xmlns:a="http://schemas.openxmlformats.org/drawingml/2006/main"/>
+          <a:p xmlns:a="http://schemas.openxmlformats.org/drawingml/2006/main">
+            <a:pPr>
+              <a:defRPr sz="1500" b="1">
+                <a:solidFill>
+                  <a:srgbClr val="001B2E"/>
+                </a:solidFill>
+              </a:defRPr>
+            </a:pPr>
+            <a:r>
+              <a:rPr sz="1500" b="1">
+                <a:solidFill>
+                  <a:srgbClr val="001B2E"/>
+                </a:solidFill>
+              </a:rPr>
+              <a:t>2. When should eligibility filters be applied?</a:t>
+            </a:r>
+          </a:p>
+        </p:txBody>
+      </p:sp>
+      <p:sp>
+        <p:nvSpPr>
+          <p:cNvPr id="11" name="quiz-options-2">
+            <a:extLst xmlns:a="http://schemas.openxmlformats.org/drawingml/2006/main">
+              <a:ext uri="{FF2B5EF4-FFF2-40B4-BE49-F238E27FC236}">
+                <a16:creationId xmlns:a16="http://schemas.microsoft.com/office/drawing/2014/main" id="{2616C7EE-7B5D-4E11-AC93-A5B7DE2534A2}"/>
+              </a:ext>
+            </a:extLst>
+          </p:cNvPr>
+          <p:cNvSpPr>
+            <a:spLocks xmlns:a="http://schemas.openxmlformats.org/drawingml/2006/main" noGrp="1"/>
+          </p:cNvSpPr>
+          <p:nvPr/>
+        </p:nvSpPr>
+        <p:spPr>
+          <a:xfrm xmlns:a="http://schemas.openxmlformats.org/drawingml/2006/main">
+            <a:off x="1257300" y="5391150"/>
+            <a:ext cx="13011150" cy="247650"/>
+          </a:xfrm>
+          <a:prstGeom xmlns:a="http://schemas.openxmlformats.org/drawingml/2006/main" prst="rect">
+            <a:avLst/>
+          </a:prstGeom>
+          <a:noFill xmlns:a="http://schemas.openxmlformats.org/drawingml/2006/main"/>
+          <a:ln xmlns:a="http://schemas.openxmlformats.org/drawingml/2006/main" w="0">
+            <a:noFill/>
+            <a:prstDash val="solid"/>
+          </a:ln>
+        </p:spPr>
+        <p:txBody>
+          <a:bodyPr xmlns:a="http://schemas.openxmlformats.org/drawingml/2006/main"/>
+          <a:lstStyle xmlns:a="http://schemas.openxmlformats.org/drawingml/2006/main"/>
+          <a:p xmlns:a="http://schemas.openxmlformats.org/drawingml/2006/main">
+            <a:pPr>
+              <a:defRPr sz="1200" b="0">
+                <a:solidFill>
+                  <a:srgbClr val="334155"/>
+                </a:solidFill>
+              </a:defRPr>
+            </a:pPr>
+            <a:r>
+              <a:rPr sz="1200" b="0">
+                <a:solidFill>
+                  <a:srgbClr val="334155"/>
+                </a:solidFill>
+              </a:rPr>
+              <a:t>A  Before ranking     |     B  After the answer     |     C  Never</a:t>
+            </a:r>
+          </a:p>
+        </p:txBody>
+      </p:sp>
+      <p:sp>
+        <p:nvSpPr>
+          <p:cNvPr id="12" name="quiz-question-3">
+            <a:extLst xmlns:a="http://schemas.openxmlformats.org/drawingml/2006/main">
+              <a:ext uri="{FF2B5EF4-FFF2-40B4-BE49-F238E27FC236}">
+                <a16:creationId xmlns:a16="http://schemas.microsoft.com/office/drawing/2014/main" id="{0617C18F-4AC6-40F1-B874-5E7E07D2B617}"/>
+              </a:ext>
+            </a:extLst>
+          </p:cNvPr>
+          <p:cNvSpPr>
+            <a:spLocks xmlns:a="http://schemas.openxmlformats.org/drawingml/2006/main" noGrp="1"/>
+          </p:cNvSpPr>
+          <p:nvPr/>
+        </p:nvSpPr>
+        <p:spPr>
+          <a:xfrm xmlns:a="http://schemas.openxmlformats.org/drawingml/2006/main">
+            <a:off x="971550" y="5772150"/>
+            <a:ext cx="13296900" cy="285750"/>
+          </a:xfrm>
+          <a:prstGeom xmlns:a="http://schemas.openxmlformats.org/drawingml/2006/main" prst="rect">
+            <a:avLst/>
+          </a:prstGeom>
+          <a:noFill xmlns:a="http://schemas.openxmlformats.org/drawingml/2006/main"/>
+          <a:ln xmlns:a="http://schemas.openxmlformats.org/drawingml/2006/main" w="0">
+            <a:noFill/>
+            <a:prstDash val="solid"/>
+          </a:ln>
+        </p:spPr>
+        <p:txBody>
+          <a:bodyPr xmlns:a="http://schemas.openxmlformats.org/drawingml/2006/main"/>
+          <a:lstStyle xmlns:a="http://schemas.openxmlformats.org/drawingml/2006/main"/>
+          <a:p xmlns:a="http://schemas.openxmlformats.org/drawingml/2006/main">
+            <a:pPr>
+              <a:defRPr sz="1500" b="1">
+                <a:solidFill>
+                  <a:srgbClr val="001B2E"/>
+                </a:solidFill>
+              </a:defRPr>
+            </a:pPr>
+            <a:r>
+              <a:rPr sz="1500" b="1">
+                <a:solidFill>
+                  <a:srgbClr val="001B2E"/>
+                </a:solidFill>
+              </a:rPr>
+              <a:t>3. What does RRF combine?</a:t>
+            </a:r>
+          </a:p>
+        </p:txBody>
+      </p:sp>
+      <p:sp>
+        <p:nvSpPr>
+          <p:cNvPr id="13" name="quiz-options-3">
+            <a:extLst xmlns:a="http://schemas.openxmlformats.org/drawingml/2006/main">
+              <a:ext uri="{FF2B5EF4-FFF2-40B4-BE49-F238E27FC236}">
+                <a16:creationId xmlns:a16="http://schemas.microsoft.com/office/drawing/2014/main" id="{0A358EB0-776D-4242-B0D5-52BCB40AE4D9}"/>
+              </a:ext>
+            </a:extLst>
+          </p:cNvPr>
+          <p:cNvSpPr>
+            <a:spLocks xmlns:a="http://schemas.openxmlformats.org/drawingml/2006/main" noGrp="1"/>
+          </p:cNvSpPr>
+          <p:nvPr/>
+        </p:nvSpPr>
+        <p:spPr>
+          <a:xfrm xmlns:a="http://schemas.openxmlformats.org/drawingml/2006/main">
+            <a:off x="1257300" y="6076950"/>
+            <a:ext cx="13011150" cy="247650"/>
+          </a:xfrm>
+          <a:prstGeom xmlns:a="http://schemas.openxmlformats.org/drawingml/2006/main" prst="rect">
+            <a:avLst/>
+          </a:prstGeom>
+          <a:noFill xmlns:a="http://schemas.openxmlformats.org/drawingml/2006/main"/>
+          <a:ln xmlns:a="http://schemas.openxmlformats.org/drawingml/2006/main" w="0">
+            <a:noFill/>
+            <a:prstDash val="solid"/>
+          </a:ln>
+        </p:spPr>
+        <p:txBody>
+          <a:bodyPr xmlns:a="http://schemas.openxmlformats.org/drawingml/2006/main"/>
+          <a:lstStyle xmlns:a="http://schemas.openxmlformats.org/drawingml/2006/main"/>
+          <a:p xmlns:a="http://schemas.openxmlformats.org/drawingml/2006/main">
+            <a:pPr>
+              <a:defRPr sz="1200" b="0">
+                <a:solidFill>
+                  <a:srgbClr val="334155"/>
+                </a:solidFill>
+              </a:defRPr>
+            </a:pPr>
+            <a:r>
+              <a:rPr sz="1200" b="0">
+                <a:solidFill>
+                  <a:srgbClr val="334155"/>
+                </a:solidFill>
+              </a:rPr>
+              <a:t>A  Rank positions     |     B  Raw score scales     |     C  Token counts</a:t>
+            </a:r>
+          </a:p>
+        </p:txBody>
+      </p:sp>
+    </p:spTree>
+    <p:extLst>
+      <p:ext uri="{BB962C8B-B14F-4D97-AF65-F5344CB8AC3E}">
+        <p14:creationId xmlns:p14="http://schemas.microsoft.com/office/powerpoint/2010/main" val="1316229138"/>
+      </p:ext>
+    </p:extLst>
+  </p:cSld>
+</p:sld>
+</file>
+
+<file path=ppt/slides/slide11.xml><?xml version="1.0" encoding="utf-8"?>
+<p:sld xmlns:p="http://schemas.openxmlformats.org/presentationml/2006/main">
+  <p:cSld>
+    <p:bg>
+      <p:bgPr>
+        <a:solidFill xmlns:a="http://schemas.openxmlformats.org/drawingml/2006/main">
+          <a:srgbClr val="F5F5F5"/>
+        </a:solidFill>
+      </p:bgPr>
+    </p:bg>
+    <p:spTree>
+      <p:nvGrpSpPr>
+        <p:cNvPr id="1" name=""/>
+        <p:cNvGrpSpPr/>
+        <p:nvPr/>
+      </p:nvGrpSpPr>
+      <p:grpSpPr>
+        <a:xfrm xmlns:a="http://schemas.openxmlformats.org/drawingml/2006/main"/>
+      </p:grpSpPr>
+      <p:sp>
+        <p:nvSpPr>
+          <p:cNvPr id="7" name="">
+            <a:extLst xmlns:a="http://schemas.openxmlformats.org/drawingml/2006/main">
+              <a:ext uri="{FF2B5EF4-FFF2-40B4-BE49-F238E27FC236}">
+                <a16:creationId xmlns:a16="http://schemas.microsoft.com/office/drawing/2014/main" id="{2E1E88F9-4976-411E-8732-D45BE311BBD2}"/>
+              </a:ext>
+            </a:extLst>
+          </p:cNvPr>
+          <p:cNvSpPr>
+            <a:spLocks xmlns:a="http://schemas.openxmlformats.org/drawingml/2006/main" noGrp="1"/>
+          </p:cNvSpPr>
+          <p:nvPr/>
+        </p:nvSpPr>
+        <p:spPr>
+          <a:xfrm xmlns:a="http://schemas.openxmlformats.org/drawingml/2006/main">
+            <a:off x="971550" y="781050"/>
+            <a:ext cx="1257300" cy="76200"/>
+          </a:xfrm>
+          <a:prstGeom xmlns:a="http://schemas.openxmlformats.org/drawingml/2006/main" prst="rect">
+            <a:avLst/>
+          </a:prstGeom>
+          <a:solidFill xmlns:a="http://schemas.openxmlformats.org/drawingml/2006/main">
+            <a:srgbClr val="00A2EB"/>
+          </a:solidFill>
+          <a:ln xmlns:a="http://schemas.openxmlformats.org/drawingml/2006/main" w="0">
+            <a:solidFill>
+              <a:srgbClr val="00A2EB"/>
+            </a:solidFill>
+            <a:prstDash val="solid"/>
+          </a:ln>
+        </p:spPr>
+      </p:sp>
+      <p:sp>
+        <p:nvSpPr>
+          <p:cNvPr id="2" name="">
+            <a:extLst xmlns:a="http://schemas.openxmlformats.org/drawingml/2006/main">
+              <a:ext uri="{FF2B5EF4-FFF2-40B4-BE49-F238E27FC236}">
+                <a16:creationId xmlns:a16="http://schemas.microsoft.com/office/drawing/2014/main" id="{35C43047-00B1-4B7A-BB36-D272D2C9B6CA}"/>
+              </a:ext>
+            </a:extLst>
+          </p:cNvPr>
+          <p:cNvSpPr>
+            <a:spLocks xmlns:a="http://schemas.openxmlformats.org/drawingml/2006/main" noGrp="1"/>
+          </p:cNvSpPr>
+          <p:nvPr/>
+        </p:nvSpPr>
+        <p:spPr>
+          <a:xfrm xmlns:a="http://schemas.openxmlformats.org/drawingml/2006/main">
+            <a:off x="971550" y="1066800"/>
+            <a:ext cx="2857500" cy="419100"/>
+          </a:xfrm>
+          <a:prstGeom xmlns:a="http://schemas.openxmlformats.org/drawingml/2006/main" prst="rect">
+            <a:avLst/>
+          </a:prstGeom>
+          <a:noFill xmlns:a="http://schemas.openxmlformats.org/drawingml/2006/main"/>
+          <a:ln xmlns:a="http://schemas.openxmlformats.org/drawingml/2006/main" w="0">
+            <a:noFill/>
+            <a:prstDash val="solid"/>
+          </a:ln>
+        </p:spPr>
+        <p:txBody>
+          <a:bodyPr xmlns:a="http://schemas.openxmlformats.org/drawingml/2006/main" wrap="square" lIns="0" tIns="0" rIns="0" bIns="0" anchor="ctr">
+            <a:normAutofit fontScale="100000"/>
+          </a:bodyPr>
+          <a:lstStyle xmlns:a="http://schemas.openxmlformats.org/drawingml/2006/main"/>
+          <a:p xmlns:a="http://schemas.openxmlformats.org/drawingml/2006/main">
+            <a:pPr algn="l">
+              <a:lnSpc>
+                <a:spcPct val="100000"/>
+              </a:lnSpc>
+              <a:buNone/>
+              <a:defRPr sz="1575" b="1">
+                <a:solidFill>
+                  <a:srgbClr val="1F40CB"/>
+                </a:solidFill>
+                <a:latin typeface="Calibri"/>
+                <a:ea typeface="Calibri"/>
+                <a:cs typeface="Calibri"/>
+              </a:defRPr>
+            </a:pPr>
+            <a:r>
+              <a:rPr sz="1575" b="1">
+                <a:solidFill>
+                  <a:srgbClr val="1F40CB"/>
+                </a:solidFill>
+                <a:latin typeface="Calibri"/>
+                <a:ea typeface="Calibri"/>
+                <a:cs typeface="Calibri"/>
+              </a:rPr>
+              <a:t>FIRST FINANCE</a:t>
+            </a:r>
+          </a:p>
+        </p:txBody>
+      </p:sp>
+      <p:sp>
+        <p:nvSpPr>
+          <p:cNvPr id="3" name="">
+            <a:extLst xmlns:a="http://schemas.openxmlformats.org/drawingml/2006/main">
+              <a:ext uri="{FF2B5EF4-FFF2-40B4-BE49-F238E27FC236}">
+                <a16:creationId xmlns:a16="http://schemas.microsoft.com/office/drawing/2014/main" id="{2EBB9B00-5773-4D90-9774-8BB7FE35221F}"/>
+              </a:ext>
+            </a:extLst>
+          </p:cNvPr>
+          <p:cNvSpPr>
+            <a:spLocks xmlns:a="http://schemas.openxmlformats.org/drawingml/2006/main" noGrp="1"/>
+          </p:cNvSpPr>
+          <p:nvPr/>
+        </p:nvSpPr>
+        <p:spPr>
+          <a:xfrm xmlns:a="http://schemas.openxmlformats.org/drawingml/2006/main">
+            <a:off x="971550" y="2362200"/>
+            <a:ext cx="13296900" cy="895350"/>
+          </a:xfrm>
+          <a:prstGeom xmlns:a="http://schemas.openxmlformats.org/drawingml/2006/main" prst="rect">
+            <a:avLst/>
+          </a:prstGeom>
+          <a:noFill xmlns:a="http://schemas.openxmlformats.org/drawingml/2006/main"/>
+          <a:ln xmlns:a="http://schemas.openxmlformats.org/drawingml/2006/main" w="0">
+            <a:noFill/>
+            <a:prstDash val="solid"/>
+          </a:ln>
+        </p:spPr>
+        <p:txBody>
+          <a:bodyPr xmlns:a="http://schemas.openxmlformats.org/drawingml/2006/main" wrap="none" lIns="0" tIns="0" rIns="0" bIns="0" anchor="ctr">
+            <a:normAutofit fontScale="100000"/>
+          </a:bodyPr>
+          <a:lstStyle xmlns:a="http://schemas.openxmlformats.org/drawingml/2006/main"/>
+          <a:p xmlns:a="http://schemas.openxmlformats.org/drawingml/2006/main">
+            <a:pPr algn="l">
+              <a:lnSpc>
+                <a:spcPct val="100000"/>
+              </a:lnSpc>
+              <a:buNone/>
+              <a:defRPr sz="4800" b="1">
+                <a:solidFill>
+                  <a:srgbClr val="051C2A"/>
+                </a:solidFill>
+                <a:latin typeface="Calibri"/>
+                <a:ea typeface="Calibri"/>
+                <a:cs typeface="Calibri"/>
+              </a:defRPr>
+            </a:pPr>
+            <a:r>
+              <a:rPr sz="4800" b="1">
+                <a:solidFill>
+                  <a:srgbClr val="051C2A"/>
+                </a:solidFill>
+                <a:latin typeface="Calibri"/>
+                <a:ea typeface="Calibri"/>
+                <a:cs typeface="Calibri"/>
+              </a:rPr>
+              <a:t>Answers</a:t>
+            </a:r>
+          </a:p>
+        </p:txBody>
+      </p:sp>
+      <p:sp>
+        <p:nvSpPr>
+          <p:cNvPr id="4" name="">
+            <a:extLst xmlns:a="http://schemas.openxmlformats.org/drawingml/2006/main">
+              <a:ext uri="{FF2B5EF4-FFF2-40B4-BE49-F238E27FC236}">
+                <a16:creationId xmlns:a16="http://schemas.microsoft.com/office/drawing/2014/main" id="{601F96F8-8EA3-4B69-A3AF-EBD5CBCD09C1}"/>
+              </a:ext>
+            </a:extLst>
+          </p:cNvPr>
+          <p:cNvSpPr>
+            <a:spLocks xmlns:a="http://schemas.openxmlformats.org/drawingml/2006/main" noGrp="1"/>
+          </p:cNvSpPr>
+          <p:nvPr/>
+        </p:nvSpPr>
+        <p:spPr>
+          <a:xfrm xmlns:a="http://schemas.openxmlformats.org/drawingml/2006/main">
+            <a:off x="971550" y="3562350"/>
+            <a:ext cx="11239500" cy="514350"/>
+          </a:xfrm>
+          <a:prstGeom xmlns:a="http://schemas.openxmlformats.org/drawingml/2006/main" prst="rect">
+            <a:avLst/>
+          </a:prstGeom>
+          <a:noFill xmlns:a="http://schemas.openxmlformats.org/drawingml/2006/main"/>
+          <a:ln xmlns:a="http://schemas.openxmlformats.org/drawingml/2006/main" w="0">
+            <a:noFill/>
+            <a:prstDash val="solid"/>
+          </a:ln>
+        </p:spPr>
+        <p:txBody>
+          <a:bodyPr xmlns:a="http://schemas.openxmlformats.org/drawingml/2006/main" wrap="square" lIns="0" tIns="0" rIns="0" bIns="0" anchor="ctr">
+            <a:normAutofit fontScale="100000"/>
+          </a:bodyPr>
+          <a:lstStyle xmlns:a="http://schemas.openxmlformats.org/drawingml/2006/main"/>
+          <a:p xmlns:a="http://schemas.openxmlformats.org/drawingml/2006/main">
+            <a:pPr algn="l">
+              <a:lnSpc>
+                <a:spcPct val="100000"/>
+              </a:lnSpc>
+              <a:buNone/>
+              <a:defRPr sz="2400" b="0">
+                <a:solidFill>
+                  <a:srgbClr val="3F3F42"/>
+                </a:solidFill>
+                <a:latin typeface="Calibri"/>
+                <a:ea typeface="Calibri"/>
+                <a:cs typeface="Calibri"/>
+              </a:defRPr>
+            </a:pPr>
+            <a:r>
+              <a:rPr sz="2400" b="0">
+                <a:solidFill>
+                  <a:srgbClr val="3F3F42"/>
+                </a:solidFill>
+                <a:latin typeface="Calibri"/>
+                <a:ea typeface="Calibri"/>
+                <a:cs typeface="Calibri"/>
+              </a:rPr>
+              <a:t>Check the idea, not only the letter.</a:t>
+            </a:r>
+          </a:p>
+        </p:txBody>
+      </p:sp>
+      <p:sp>
+        <p:nvSpPr>
+          <p:cNvPr id="5" name="">
+            <a:extLst xmlns:a="http://schemas.openxmlformats.org/drawingml/2006/main">
+              <a:ext uri="{FF2B5EF4-FFF2-40B4-BE49-F238E27FC236}">
+                <a16:creationId xmlns:a16="http://schemas.microsoft.com/office/drawing/2014/main" id="{D4A6E89B-2708-4600-B820-727EF660DE6B}"/>
+              </a:ext>
+            </a:extLst>
+          </p:cNvPr>
+          <p:cNvSpPr>
+            <a:spLocks xmlns:a="http://schemas.openxmlformats.org/drawingml/2006/main" noGrp="1"/>
+          </p:cNvSpPr>
+          <p:nvPr/>
+        </p:nvSpPr>
+        <p:spPr>
+          <a:xfrm xmlns:a="http://schemas.openxmlformats.org/drawingml/2006/main">
+            <a:off x="971550" y="6477000"/>
+            <a:ext cx="9525000" cy="400050"/>
+          </a:xfrm>
+          <a:prstGeom xmlns:a="http://schemas.openxmlformats.org/drawingml/2006/main" prst="rect">
+            <a:avLst/>
+          </a:prstGeom>
+          <a:noFill xmlns:a="http://schemas.openxmlformats.org/drawingml/2006/main"/>
+          <a:ln xmlns:a="http://schemas.openxmlformats.org/drawingml/2006/main" w="0">
+            <a:noFill/>
+            <a:prstDash val="solid"/>
+          </a:ln>
+        </p:spPr>
+        <p:txBody>
+          <a:bodyPr xmlns:a="http://schemas.openxmlformats.org/drawingml/2006/main" wrap="square" lIns="0" tIns="0" rIns="0" bIns="0" anchor="ctr">
+            <a:normAutofit fontScale="100000"/>
+          </a:bodyPr>
+          <a:lstStyle xmlns:a="http://schemas.openxmlformats.org/drawingml/2006/main"/>
+          <a:p xmlns:a="http://schemas.openxmlformats.org/drawingml/2006/main">
+            <a:pPr algn="l">
+              <a:lnSpc>
+                <a:spcPct val="100000"/>
+              </a:lnSpc>
+              <a:buNone/>
+              <a:defRPr sz="1350" b="1">
+                <a:solidFill>
+                  <a:srgbClr val="1F40CB"/>
+                </a:solidFill>
+                <a:latin typeface="Calibri"/>
+                <a:ea typeface="Calibri"/>
+                <a:cs typeface="Calibri"/>
+              </a:defRPr>
+            </a:pPr>
+            <a:r>
+              <a:rPr sz="1350" b="1">
+                <a:solidFill>
+                  <a:srgbClr val="1F40CB"/>
+                </a:solidFill>
+                <a:latin typeface="Calibri"/>
+                <a:ea typeface="Calibri"/>
+                <a:cs typeface="Calibri"/>
+              </a:rPr>
+              <a:t>LESSON 06  ·  CORRECTION</a:t>
+            </a:r>
+          </a:p>
+        </p:txBody>
+      </p:sp>
+      <p:sp>
+        <p:nvSpPr>
+          <p:cNvPr id="6" name="">
+            <a:extLst xmlns:a="http://schemas.openxmlformats.org/drawingml/2006/main">
+              <a:ext uri="{FF2B5EF4-FFF2-40B4-BE49-F238E27FC236}">
+                <a16:creationId xmlns:a16="http://schemas.microsoft.com/office/drawing/2014/main" id="{053831D6-7D46-4F1A-929F-D2CAD97F1627}"/>
+              </a:ext>
+            </a:extLst>
+          </p:cNvPr>
+          <p:cNvSpPr>
+            <a:spLocks xmlns:a="http://schemas.openxmlformats.org/drawingml/2006/main" noGrp="1"/>
+          </p:cNvSpPr>
+          <p:nvPr/>
+        </p:nvSpPr>
+        <p:spPr>
+          <a:xfrm xmlns:a="http://schemas.openxmlformats.org/drawingml/2006/main">
+            <a:off x="971550" y="7067550"/>
+            <a:ext cx="4762500" cy="381000"/>
+          </a:xfrm>
+          <a:prstGeom xmlns:a="http://schemas.openxmlformats.org/drawingml/2006/main" prst="rect">
+            <a:avLst/>
+          </a:prstGeom>
+          <a:noFill xmlns:a="http://schemas.openxmlformats.org/drawingml/2006/main"/>
+          <a:ln xmlns:a="http://schemas.openxmlformats.org/drawingml/2006/main" w="0">
+            <a:noFill/>
+            <a:prstDash val="solid"/>
+          </a:ln>
+        </p:spPr>
+        <p:txBody>
+          <a:bodyPr xmlns:a="http://schemas.openxmlformats.org/drawingml/2006/main" wrap="square" lIns="0" tIns="0" rIns="0" bIns="0" anchor="ctr">
+            <a:normAutofit fontScale="100000"/>
+          </a:bodyPr>
+          <a:lstStyle xmlns:a="http://schemas.openxmlformats.org/drawingml/2006/main"/>
+          <a:p xmlns:a="http://schemas.openxmlformats.org/drawingml/2006/main">
+            <a:pPr algn="l">
+              <a:lnSpc>
+                <a:spcPct val="100000"/>
+              </a:lnSpc>
+              <a:buNone/>
+              <a:defRPr sz="1725" b="0">
+                <a:solidFill>
+                  <a:srgbClr val="051C2A"/>
+                </a:solidFill>
+                <a:latin typeface="Calibri"/>
+                <a:ea typeface="Calibri"/>
+                <a:cs typeface="Calibri"/>
+              </a:defRPr>
+            </a:pPr>
+            <a:r>
+              <a:rPr sz="1725" b="0">
+                <a:solidFill>
+                  <a:srgbClr val="051C2A"/>
+                </a:solidFill>
+                <a:latin typeface="Calibri"/>
+                <a:ea typeface="Calibri"/>
+                <a:cs typeface="Calibri"/>
+              </a:rPr>
+              <a:t>First Finance - Arnaud Demes</a:t>
+            </a:r>
+          </a:p>
+        </p:txBody>
+      </p:sp>
+      <p:sp>
+        <p:nvSpPr>
+          <p:cNvPr id="8" name="quiz-answer-1">
+            <a:extLst xmlns:a="http://schemas.openxmlformats.org/drawingml/2006/main">
+              <a:ext uri="{FF2B5EF4-FFF2-40B4-BE49-F238E27FC236}">
+                <a16:creationId xmlns:a16="http://schemas.microsoft.com/office/drawing/2014/main" id="{4E744DFB-D16B-4698-8482-269DEBBBBB7A}"/>
+              </a:ext>
+            </a:extLst>
+          </p:cNvPr>
+          <p:cNvSpPr>
+            <a:spLocks xmlns:a="http://schemas.openxmlformats.org/drawingml/2006/main" noGrp="1"/>
+          </p:cNvSpPr>
+          <p:nvPr/>
+        </p:nvSpPr>
+        <p:spPr>
+          <a:xfrm xmlns:a="http://schemas.openxmlformats.org/drawingml/2006/main">
+            <a:off x="971550" y="4400550"/>
+            <a:ext cx="13296900" cy="285750"/>
+          </a:xfrm>
+          <a:prstGeom xmlns:a="http://schemas.openxmlformats.org/drawingml/2006/main" prst="rect">
+            <a:avLst/>
+          </a:prstGeom>
+          <a:noFill xmlns:a="http://schemas.openxmlformats.org/drawingml/2006/main"/>
+          <a:ln xmlns:a="http://schemas.openxmlformats.org/drawingml/2006/main" w="0">
+            <a:noFill/>
+            <a:prstDash val="solid"/>
+          </a:ln>
+        </p:spPr>
+        <p:txBody>
+          <a:bodyPr xmlns:a="http://schemas.openxmlformats.org/drawingml/2006/main"/>
+          <a:lstStyle xmlns:a="http://schemas.openxmlformats.org/drawingml/2006/main"/>
+          <a:p xmlns:a="http://schemas.openxmlformats.org/drawingml/2006/main">
+            <a:pPr>
+              <a:defRPr sz="1500" b="1">
+                <a:solidFill>
+                  <a:srgbClr val="1F40CB"/>
+                </a:solidFill>
+              </a:defRPr>
+            </a:pPr>
+            <a:r>
+              <a:rPr sz="1500" b="1">
+                <a:solidFill>
+                  <a:srgbClr val="1F40CB"/>
+                </a:solidFill>
+              </a:rPr>
+              <a:t>1. A. Keyword and dense</a:t>
+            </a:r>
+          </a:p>
+        </p:txBody>
+      </p:sp>
+      <p:sp>
+        <p:nvSpPr>
+          <p:cNvPr id="9" name="quiz-explanation-1">
+            <a:extLst xmlns:a="http://schemas.openxmlformats.org/drawingml/2006/main">
+              <a:ext uri="{FF2B5EF4-FFF2-40B4-BE49-F238E27FC236}">
+                <a16:creationId xmlns:a16="http://schemas.microsoft.com/office/drawing/2014/main" id="{4C627505-0DE7-4285-A451-136E18BFE613}"/>
+              </a:ext>
+            </a:extLst>
+          </p:cNvPr>
+          <p:cNvSpPr>
+            <a:spLocks xmlns:a="http://schemas.openxmlformats.org/drawingml/2006/main" noGrp="1"/>
+          </p:cNvSpPr>
+          <p:nvPr/>
+        </p:nvSpPr>
+        <p:spPr>
+          <a:xfrm xmlns:a="http://schemas.openxmlformats.org/drawingml/2006/main">
+            <a:off x="1257300" y="4705350"/>
+            <a:ext cx="13011150" cy="247650"/>
+          </a:xfrm>
+          <a:prstGeom xmlns:a="http://schemas.openxmlformats.org/drawingml/2006/main" prst="rect">
+            <a:avLst/>
+          </a:prstGeom>
+          <a:noFill xmlns:a="http://schemas.openxmlformats.org/drawingml/2006/main"/>
+          <a:ln xmlns:a="http://schemas.openxmlformats.org/drawingml/2006/main" w="0">
+            <a:noFill/>
+            <a:prstDash val="solid"/>
+          </a:ln>
+        </p:spPr>
+        <p:txBody>
+          <a:bodyPr xmlns:a="http://schemas.openxmlformats.org/drawingml/2006/main"/>
+          <a:lstStyle xmlns:a="http://schemas.openxmlformats.org/drawingml/2006/main"/>
+          <a:p xmlns:a="http://schemas.openxmlformats.org/drawingml/2006/main">
+            <a:pPr>
+              <a:defRPr sz="1200" b="0">
+                <a:solidFill>
+                  <a:srgbClr val="334155"/>
+                </a:solidFill>
+              </a:defRPr>
+            </a:pPr>
+            <a:r>
+              <a:rPr sz="1200" b="0">
+                <a:solidFill>
+                  <a:srgbClr val="334155"/>
+                </a:solidFill>
+              </a:rPr>
+              <a:t>The channels capture exact terms and semantic similarity.</a:t>
+            </a:r>
+          </a:p>
+        </p:txBody>
+      </p:sp>
+      <p:sp>
+        <p:nvSpPr>
+          <p:cNvPr id="10" name="quiz-answer-2">
+            <a:extLst xmlns:a="http://schemas.openxmlformats.org/drawingml/2006/main">
+              <a:ext uri="{FF2B5EF4-FFF2-40B4-BE49-F238E27FC236}">
+                <a16:creationId xmlns:a16="http://schemas.microsoft.com/office/drawing/2014/main" id="{C1127E6C-29CD-48D8-A463-E078031458D6}"/>
+              </a:ext>
+            </a:extLst>
+          </p:cNvPr>
+          <p:cNvSpPr>
+            <a:spLocks xmlns:a="http://schemas.openxmlformats.org/drawingml/2006/main" noGrp="1"/>
+          </p:cNvSpPr>
+          <p:nvPr/>
+        </p:nvSpPr>
+        <p:spPr>
+          <a:xfrm xmlns:a="http://schemas.openxmlformats.org/drawingml/2006/main">
+            <a:off x="971550" y="5086350"/>
+            <a:ext cx="13296900" cy="285750"/>
+          </a:xfrm>
+          <a:prstGeom xmlns:a="http://schemas.openxmlformats.org/drawingml/2006/main" prst="rect">
+            <a:avLst/>
+          </a:prstGeom>
+          <a:noFill xmlns:a="http://schemas.openxmlformats.org/drawingml/2006/main"/>
+          <a:ln xmlns:a="http://schemas.openxmlformats.org/drawingml/2006/main" w="0">
+            <a:noFill/>
+            <a:prstDash val="solid"/>
+          </a:ln>
+        </p:spPr>
+        <p:txBody>
+          <a:bodyPr xmlns:a="http://schemas.openxmlformats.org/drawingml/2006/main"/>
+          <a:lstStyle xmlns:a="http://schemas.openxmlformats.org/drawingml/2006/main"/>
+          <a:p xmlns:a="http://schemas.openxmlformats.org/drawingml/2006/main">
+            <a:pPr>
+              <a:defRPr sz="1500" b="1">
+                <a:solidFill>
+                  <a:srgbClr val="1F40CB"/>
+                </a:solidFill>
+              </a:defRPr>
+            </a:pPr>
+            <a:r>
+              <a:rPr sz="1500" b="1">
+                <a:solidFill>
+                  <a:srgbClr val="1F40CB"/>
+                </a:solidFill>
+              </a:rPr>
+              <a:t>2. A. Before ranking</a:t>
+            </a:r>
+          </a:p>
+        </p:txBody>
+      </p:sp>
+      <p:sp>
+        <p:nvSpPr>
+          <p:cNvPr id="11" name="quiz-explanation-2">
+            <a:extLst xmlns:a="http://schemas.openxmlformats.org/drawingml/2006/main">
+              <a:ext uri="{FF2B5EF4-FFF2-40B4-BE49-F238E27FC236}">
+                <a16:creationId xmlns:a16="http://schemas.microsoft.com/office/drawing/2014/main" id="{C23AAFEF-CF39-445A-8601-0E3B6B6D3764}"/>
+              </a:ext>
+            </a:extLst>
+          </p:cNvPr>
+          <p:cNvSpPr>
+            <a:spLocks xmlns:a="http://schemas.openxmlformats.org/drawingml/2006/main" noGrp="1"/>
+          </p:cNvSpPr>
+          <p:nvPr/>
+        </p:nvSpPr>
+        <p:spPr>
+          <a:xfrm xmlns:a="http://schemas.openxmlformats.org/drawingml/2006/main">
+            <a:off x="1257300" y="5391150"/>
+            <a:ext cx="13011150" cy="247650"/>
+          </a:xfrm>
+          <a:prstGeom xmlns:a="http://schemas.openxmlformats.org/drawingml/2006/main" prst="rect">
+            <a:avLst/>
+          </a:prstGeom>
+          <a:noFill xmlns:a="http://schemas.openxmlformats.org/drawingml/2006/main"/>
+          <a:ln xmlns:a="http://schemas.openxmlformats.org/drawingml/2006/main" w="0">
+            <a:noFill/>
+            <a:prstDash val="solid"/>
+          </a:ln>
+        </p:spPr>
+        <p:txBody>
+          <a:bodyPr xmlns:a="http://schemas.openxmlformats.org/drawingml/2006/main"/>
+          <a:lstStyle xmlns:a="http://schemas.openxmlformats.org/drawingml/2006/main"/>
+          <a:p xmlns:a="http://schemas.openxmlformats.org/drawingml/2006/main">
+            <a:pPr>
+              <a:defRPr sz="1200" b="0">
+                <a:solidFill>
+                  <a:srgbClr val="334155"/>
+                </a:solidFill>
+              </a:defRPr>
+            </a:pPr>
+            <a:r>
+              <a:rPr sz="1200" b="0">
+                <a:solidFill>
+                  <a:srgbClr val="334155"/>
+                </a:solidFill>
+              </a:rPr>
+              <a:t>Ineligible evidence must never enter either candidate list.</a:t>
+            </a:r>
+          </a:p>
+        </p:txBody>
+      </p:sp>
+      <p:sp>
+        <p:nvSpPr>
+          <p:cNvPr id="12" name="quiz-answer-3">
+            <a:extLst xmlns:a="http://schemas.openxmlformats.org/drawingml/2006/main">
+              <a:ext uri="{FF2B5EF4-FFF2-40B4-BE49-F238E27FC236}">
+                <a16:creationId xmlns:a16="http://schemas.microsoft.com/office/drawing/2014/main" id="{FAB43B1E-5538-4DCC-B7C1-BD0CE331A7B2}"/>
+              </a:ext>
+            </a:extLst>
+          </p:cNvPr>
+          <p:cNvSpPr>
+            <a:spLocks xmlns:a="http://schemas.openxmlformats.org/drawingml/2006/main" noGrp="1"/>
+          </p:cNvSpPr>
+          <p:nvPr/>
+        </p:nvSpPr>
+        <p:spPr>
+          <a:xfrm xmlns:a="http://schemas.openxmlformats.org/drawingml/2006/main">
+            <a:off x="971550" y="5772150"/>
+            <a:ext cx="13296900" cy="285750"/>
+          </a:xfrm>
+          <a:prstGeom xmlns:a="http://schemas.openxmlformats.org/drawingml/2006/main" prst="rect">
+            <a:avLst/>
+          </a:prstGeom>
+          <a:noFill xmlns:a="http://schemas.openxmlformats.org/drawingml/2006/main"/>
+          <a:ln xmlns:a="http://schemas.openxmlformats.org/drawingml/2006/main" w="0">
+            <a:noFill/>
+            <a:prstDash val="solid"/>
+          </a:ln>
+        </p:spPr>
+        <p:txBody>
+          <a:bodyPr xmlns:a="http://schemas.openxmlformats.org/drawingml/2006/main"/>
+          <a:lstStyle xmlns:a="http://schemas.openxmlformats.org/drawingml/2006/main"/>
+          <a:p xmlns:a="http://schemas.openxmlformats.org/drawingml/2006/main">
+            <a:pPr>
+              <a:defRPr sz="1500" b="1">
+                <a:solidFill>
+                  <a:srgbClr val="1F40CB"/>
+                </a:solidFill>
+              </a:defRPr>
+            </a:pPr>
+            <a:r>
+              <a:rPr sz="1500" b="1">
+                <a:solidFill>
+                  <a:srgbClr val="1F40CB"/>
+                </a:solidFill>
+              </a:rPr>
+              <a:t>3. A. Rank positions</a:t>
+            </a:r>
+          </a:p>
+        </p:txBody>
+      </p:sp>
+      <p:sp>
+        <p:nvSpPr>
+          <p:cNvPr id="13" name="quiz-explanation-3">
+            <a:extLst xmlns:a="http://schemas.openxmlformats.org/drawingml/2006/main">
+              <a:ext uri="{FF2B5EF4-FFF2-40B4-BE49-F238E27FC236}">
+                <a16:creationId xmlns:a16="http://schemas.microsoft.com/office/drawing/2014/main" id="{7F729BBD-8D18-4DDB-B872-A273B3693A6E}"/>
+              </a:ext>
+            </a:extLst>
+          </p:cNvPr>
+          <p:cNvSpPr>
+            <a:spLocks xmlns:a="http://schemas.openxmlformats.org/drawingml/2006/main" noGrp="1"/>
+          </p:cNvSpPr>
+          <p:nvPr/>
+        </p:nvSpPr>
+        <p:spPr>
+          <a:xfrm xmlns:a="http://schemas.openxmlformats.org/drawingml/2006/main">
+            <a:off x="1257300" y="6076950"/>
+            <a:ext cx="13011150" cy="247650"/>
+          </a:xfrm>
+          <a:prstGeom xmlns:a="http://schemas.openxmlformats.org/drawingml/2006/main" prst="rect">
+            <a:avLst/>
+          </a:prstGeom>
+          <a:noFill xmlns:a="http://schemas.openxmlformats.org/drawingml/2006/main"/>
+          <a:ln xmlns:a="http://schemas.openxmlformats.org/drawingml/2006/main" w="0">
+            <a:noFill/>
+            <a:prstDash val="solid"/>
+          </a:ln>
+        </p:spPr>
+        <p:txBody>
+          <a:bodyPr xmlns:a="http://schemas.openxmlformats.org/drawingml/2006/main"/>
+          <a:lstStyle xmlns:a="http://schemas.openxmlformats.org/drawingml/2006/main"/>
+          <a:p xmlns:a="http://schemas.openxmlformats.org/drawingml/2006/main">
+            <a:pPr>
+              <a:defRPr sz="1200" b="0">
+                <a:solidFill>
+                  <a:srgbClr val="334155"/>
+                </a:solidFill>
+              </a:defRPr>
+            </a:pPr>
+            <a:r>
+              <a:rPr sz="1200" b="0">
+                <a:solidFill>
+                  <a:srgbClr val="334155"/>
+                </a:solidFill>
+              </a:rPr>
+              <a:t>RRF fuses contributions without pretending channel scores share one scale.</a:t>
+            </a:r>
+          </a:p>
+        </p:txBody>
+      </p:sp>
+    </p:spTree>
+    <p:extLst>
+      <p:ext uri="{BB962C8B-B14F-4D97-AF65-F5344CB8AC3E}">
+        <p14:creationId xmlns:p14="http://schemas.microsoft.com/office/powerpoint/2010/main" val="1316229138"/>
+      </p:ext>
+    </p:extLst>
+  </p:cSld>
+</p:sld>
+</file>
+
 <file path=ppt/slides/slide2.xml><?xml version="1.0" encoding="utf-8"?>
 <p:sld xmlns:p="http://schemas.openxmlformats.org/presentationml/2006/main">
   <p:cSld>
@@ -3190,7 +4726,7 @@
       </p:sp>
       <p:cxnSp>
         <p:nvCxnSpPr>
-          <p:cNvPr id="350" name=""/>
+          <p:cNvPr id="398" name=""/>
           <p:cNvCxnSpPr>
             <a:stCxn xmlns:a="http://schemas.openxmlformats.org/drawingml/2006/main" id="14" idx="2"/>
             <a:endCxn xmlns:a="http://schemas.openxmlformats.org/drawingml/2006/main" id="16" idx="0"/>
@@ -3216,7 +4752,7 @@
       </p:cxnSp>
       <p:cxnSp>
         <p:nvCxnSpPr>
-          <p:cNvPr id="351" name=""/>
+          <p:cNvPr id="399" name=""/>
           <p:cNvCxnSpPr>
             <a:stCxn xmlns:a="http://schemas.openxmlformats.org/drawingml/2006/main" id="14" idx="2"/>
             <a:endCxn xmlns:a="http://schemas.openxmlformats.org/drawingml/2006/main" id="18" idx="0"/>
@@ -3242,7 +4778,7 @@
       </p:cxnSp>
       <p:cxnSp>
         <p:nvCxnSpPr>
-          <p:cNvPr id="352" name=""/>
+          <p:cNvPr id="400" name=""/>
           <p:cNvCxnSpPr>
             <a:stCxn xmlns:a="http://schemas.openxmlformats.org/drawingml/2006/main" id="14" idx="2"/>
             <a:endCxn xmlns:a="http://schemas.openxmlformats.org/drawingml/2006/main" id="20" idx="0"/>
@@ -7874,7 +9410,7 @@
       </p:sp>
       <p:cxnSp>
         <p:nvCxnSpPr>
-          <p:cNvPr id="435" name=""/>
+          <p:cNvPr id="497" name=""/>
           <p:cNvCxnSpPr>
             <a:stCxn xmlns:a="http://schemas.openxmlformats.org/drawingml/2006/main" id="8" idx="3"/>
             <a:endCxn xmlns:a="http://schemas.openxmlformats.org/drawingml/2006/main" id="3" idx="1"/>
@@ -7900,7 +9436,7 @@
       </p:cxnSp>
       <p:cxnSp>
         <p:nvCxnSpPr>
-          <p:cNvPr id="436" name=""/>
+          <p:cNvPr id="498" name=""/>
           <p:cNvCxnSpPr>
             <a:stCxn xmlns:a="http://schemas.openxmlformats.org/drawingml/2006/main" id="11" idx="3"/>
             <a:endCxn xmlns:a="http://schemas.openxmlformats.org/drawingml/2006/main" id="3" idx="1"/>
@@ -7926,7 +9462,7 @@
       </p:cxnSp>
       <p:cxnSp>
         <p:nvCxnSpPr>
-          <p:cNvPr id="437" name=""/>
+          <p:cNvPr id="499" name=""/>
           <p:cNvCxnSpPr>
             <a:stCxn xmlns:a="http://schemas.openxmlformats.org/drawingml/2006/main" id="14" idx="3"/>
             <a:endCxn xmlns:a="http://schemas.openxmlformats.org/drawingml/2006/main" id="3" idx="1"/>
@@ -7952,7 +9488,7 @@
       </p:cxnSp>
       <p:cxnSp>
         <p:nvCxnSpPr>
-          <p:cNvPr id="438" name=""/>
+          <p:cNvPr id="500" name=""/>
           <p:cNvCxnSpPr>
             <a:stCxn xmlns:a="http://schemas.openxmlformats.org/drawingml/2006/main" id="3" idx="3"/>
             <a:endCxn xmlns:a="http://schemas.openxmlformats.org/drawingml/2006/main" id="17" idx="1"/>
@@ -7978,7 +9514,7 @@
       </p:cxnSp>
       <p:cxnSp>
         <p:nvCxnSpPr>
-          <p:cNvPr id="439" name=""/>
+          <p:cNvPr id="501" name=""/>
           <p:cNvCxnSpPr>
             <a:stCxn xmlns:a="http://schemas.openxmlformats.org/drawingml/2006/main" id="3" idx="3"/>
             <a:endCxn xmlns:a="http://schemas.openxmlformats.org/drawingml/2006/main" id="20" idx="1"/>
@@ -8004,7 +9540,7 @@
       </p:cxnSp>
       <p:cxnSp>
         <p:nvCxnSpPr>
-          <p:cNvPr id="440" name=""/>
+          <p:cNvPr id="502" name=""/>
           <p:cNvCxnSpPr>
             <a:stCxn xmlns:a="http://schemas.openxmlformats.org/drawingml/2006/main" id="3" idx="3"/>
             <a:endCxn xmlns:a="http://schemas.openxmlformats.org/drawingml/2006/main" id="23" idx="1"/>
@@ -10951,7 +12487,7 @@
       </p:sp>
       <p:cxnSp>
         <p:nvCxnSpPr>
-          <p:cNvPr id="208" name=""/>
+          <p:cNvPr id="236" name=""/>
           <p:cNvCxnSpPr>
             <a:stCxn xmlns:a="http://schemas.openxmlformats.org/drawingml/2006/main" id="3" idx="3"/>
             <a:endCxn xmlns:a="http://schemas.openxmlformats.org/drawingml/2006/main" id="6" idx="1"/>
@@ -10977,7 +12513,7 @@
       </p:cxnSp>
       <p:cxnSp>
         <p:nvCxnSpPr>
-          <p:cNvPr id="209" name=""/>
+          <p:cNvPr id="237" name=""/>
           <p:cNvCxnSpPr>
             <a:stCxn xmlns:a="http://schemas.openxmlformats.org/drawingml/2006/main" id="6" idx="3"/>
             <a:endCxn xmlns:a="http://schemas.openxmlformats.org/drawingml/2006/main" id="10" idx="1"/>
@@ -12953,7 +14489,7 @@
       </p:sp>
       <p:cxnSp>
         <p:nvCxnSpPr>
-          <p:cNvPr id="369" name=""/>
+          <p:cNvPr id="421" name=""/>
           <p:cNvCxnSpPr>
             <a:stCxn xmlns:a="http://schemas.openxmlformats.org/drawingml/2006/main" id="3" idx="3"/>
             <a:endCxn xmlns:a="http://schemas.openxmlformats.org/drawingml/2006/main" id="7" idx="1"/>
@@ -12979,7 +14515,7 @@
       </p:cxnSp>
       <p:cxnSp>
         <p:nvCxnSpPr>
-          <p:cNvPr id="370" name=""/>
+          <p:cNvPr id="422" name=""/>
           <p:cNvCxnSpPr>
             <a:stCxn xmlns:a="http://schemas.openxmlformats.org/drawingml/2006/main" id="7" idx="3"/>
             <a:endCxn xmlns:a="http://schemas.openxmlformats.org/drawingml/2006/main" id="11" idx="1"/>
@@ -13005,7 +14541,7 @@
       </p:cxnSp>
       <p:cxnSp>
         <p:nvCxnSpPr>
-          <p:cNvPr id="371" name=""/>
+          <p:cNvPr id="423" name=""/>
           <p:cNvCxnSpPr>
             <a:stCxn xmlns:a="http://schemas.openxmlformats.org/drawingml/2006/main" id="11" idx="3"/>
             <a:endCxn xmlns:a="http://schemas.openxmlformats.org/drawingml/2006/main" id="15" idx="1"/>
@@ -13031,7 +14567,7 @@
       </p:cxnSp>
       <p:cxnSp>
         <p:nvCxnSpPr>
-          <p:cNvPr id="372" name=""/>
+          <p:cNvPr id="424" name=""/>
           <p:cNvCxnSpPr>
             <a:stCxn xmlns:a="http://schemas.openxmlformats.org/drawingml/2006/main" id="15" idx="3"/>
             <a:endCxn xmlns:a="http://schemas.openxmlformats.org/drawingml/2006/main" id="19" idx="1"/>
@@ -14753,7 +16289,7 @@
       </p:sp>
       <p:cxnSp>
         <p:nvCxnSpPr>
-          <p:cNvPr id="369" name=""/>
+          <p:cNvPr id="421" name=""/>
           <p:cNvCxnSpPr>
             <a:stCxn xmlns:a="http://schemas.openxmlformats.org/drawingml/2006/main" id="3" idx="3"/>
             <a:endCxn xmlns:a="http://schemas.openxmlformats.org/drawingml/2006/main" id="7" idx="1"/>
@@ -14779,7 +16315,7 @@
       </p:cxnSp>
       <p:cxnSp>
         <p:nvCxnSpPr>
-          <p:cNvPr id="370" name=""/>
+          <p:cNvPr id="422" name=""/>
           <p:cNvCxnSpPr>
             <a:stCxn xmlns:a="http://schemas.openxmlformats.org/drawingml/2006/main" id="7" idx="3"/>
             <a:endCxn xmlns:a="http://schemas.openxmlformats.org/drawingml/2006/main" id="11" idx="1"/>
@@ -14805,7 +16341,7 @@
       </p:cxnSp>
       <p:cxnSp>
         <p:nvCxnSpPr>
-          <p:cNvPr id="371" name=""/>
+          <p:cNvPr id="423" name=""/>
           <p:cNvCxnSpPr>
             <a:stCxn xmlns:a="http://schemas.openxmlformats.org/drawingml/2006/main" id="11" idx="3"/>
             <a:endCxn xmlns:a="http://schemas.openxmlformats.org/drawingml/2006/main" id="15" idx="1"/>
@@ -14831,7 +16367,7 @@
       </p:cxnSp>
       <p:cxnSp>
         <p:nvCxnSpPr>
-          <p:cNvPr id="372" name=""/>
+          <p:cNvPr id="424" name=""/>
           <p:cNvCxnSpPr>
             <a:stCxn xmlns:a="http://schemas.openxmlformats.org/drawingml/2006/main" id="15" idx="3"/>
             <a:endCxn xmlns:a="http://schemas.openxmlformats.org/drawingml/2006/main" id="19" idx="1"/>
@@ -16553,7 +18089,7 @@
       </p:sp>
       <p:cxnSp>
         <p:nvCxnSpPr>
-          <p:cNvPr id="369" name=""/>
+          <p:cNvPr id="421" name=""/>
           <p:cNvCxnSpPr>
             <a:stCxn xmlns:a="http://schemas.openxmlformats.org/drawingml/2006/main" id="3" idx="3"/>
             <a:endCxn xmlns:a="http://schemas.openxmlformats.org/drawingml/2006/main" id="7" idx="1"/>
@@ -16579,7 +18115,7 @@
       </p:cxnSp>
       <p:cxnSp>
         <p:nvCxnSpPr>
-          <p:cNvPr id="370" name=""/>
+          <p:cNvPr id="422" name=""/>
           <p:cNvCxnSpPr>
             <a:stCxn xmlns:a="http://schemas.openxmlformats.org/drawingml/2006/main" id="7" idx="3"/>
             <a:endCxn xmlns:a="http://schemas.openxmlformats.org/drawingml/2006/main" id="11" idx="1"/>
@@ -16605,7 +18141,7 @@
       </p:cxnSp>
       <p:cxnSp>
         <p:nvCxnSpPr>
-          <p:cNvPr id="371" name=""/>
+          <p:cNvPr id="423" name=""/>
           <p:cNvCxnSpPr>
             <a:stCxn xmlns:a="http://schemas.openxmlformats.org/drawingml/2006/main" id="11" idx="3"/>
             <a:endCxn xmlns:a="http://schemas.openxmlformats.org/drawingml/2006/main" id="15" idx="1"/>
@@ -16631,7 +18167,7 @@
       </p:cxnSp>
       <p:cxnSp>
         <p:nvCxnSpPr>
-          <p:cNvPr id="372" name=""/>
+          <p:cNvPr id="424" name=""/>
           <p:cNvCxnSpPr>
             <a:stCxn xmlns:a="http://schemas.openxmlformats.org/drawingml/2006/main" id="15" idx="3"/>
             <a:endCxn xmlns:a="http://schemas.openxmlformats.org/drawingml/2006/main" id="19" idx="1"/>

--- a/decks/06-hybrid-retrieval.pptx
+++ b/decks/06-hybrid-retrieval.pptx
@@ -2,23 +2,23 @@
 <file path=ppt/presentation.xml><?xml version="1.0" encoding="utf-8"?>
 <p:presentation xmlns:p="http://schemas.openxmlformats.org/presentationml/2006/main">
   <p:sldMasterIdLst>
-    <p:sldMasterId xmlns:r="http://schemas.openxmlformats.org/officeDocument/2006/relationships" id="2147483648" r:id="Rf761c4e0df564bc1"/>
+    <p:sldMasterId xmlns:r="http://schemas.openxmlformats.org/officeDocument/2006/relationships" id="2147483648" r:id="Rd7e357ac2834494c"/>
   </p:sldMasterIdLst>
   <p:notesMasterIdLst>
-    <p:notesMasterId xmlns:r="http://schemas.openxmlformats.org/officeDocument/2006/relationships" r:id="R1b8669439f7c448b"/>
+    <p:notesMasterId xmlns:r="http://schemas.openxmlformats.org/officeDocument/2006/relationships" r:id="R41ddbcea6aeb42e5"/>
   </p:notesMasterIdLst>
   <p:sldIdLst>
-    <p:sldId xmlns:r="http://schemas.openxmlformats.org/officeDocument/2006/relationships" id="256" r:id="Rcd678ce9c9ae4a78"/>
-    <p:sldId xmlns:r="http://schemas.openxmlformats.org/officeDocument/2006/relationships" id="257" r:id="Red4122d8109a4f39"/>
-    <p:sldId xmlns:r="http://schemas.openxmlformats.org/officeDocument/2006/relationships" id="258" r:id="R8e396fc52d50486c"/>
-    <p:sldId xmlns:r="http://schemas.openxmlformats.org/officeDocument/2006/relationships" id="259" r:id="R56c06d233c98409e"/>
-    <p:sldId xmlns:r="http://schemas.openxmlformats.org/officeDocument/2006/relationships" id="260" r:id="R84eeacb1f8e24d5f"/>
-    <p:sldId xmlns:r="http://schemas.openxmlformats.org/officeDocument/2006/relationships" id="261" r:id="R8304eb47849b4a84"/>
-    <p:sldId xmlns:r="http://schemas.openxmlformats.org/officeDocument/2006/relationships" id="262" r:id="Rb012c6e793c4426c"/>
-    <p:sldId xmlns:r="http://schemas.openxmlformats.org/officeDocument/2006/relationships" id="263" r:id="R254f9492dc3f4e9d"/>
-    <p:sldId xmlns:r="http://schemas.openxmlformats.org/officeDocument/2006/relationships" id="264" r:id="Rbad87b241dde49ee"/>
-    <p:sldId xmlns:r="http://schemas.openxmlformats.org/officeDocument/2006/relationships" id="265" r:id="R9fcf6825514f43ca"/>
-    <p:sldId xmlns:r="http://schemas.openxmlformats.org/officeDocument/2006/relationships" id="266" r:id="R008942d5f2274753"/>
+    <p:sldId xmlns:r="http://schemas.openxmlformats.org/officeDocument/2006/relationships" id="256" r:id="R4247d9a51bb84487"/>
+    <p:sldId xmlns:r="http://schemas.openxmlformats.org/officeDocument/2006/relationships" id="257" r:id="Rcd988334fde447d3"/>
+    <p:sldId xmlns:r="http://schemas.openxmlformats.org/officeDocument/2006/relationships" id="258" r:id="Rfacd74b056344560"/>
+    <p:sldId xmlns:r="http://schemas.openxmlformats.org/officeDocument/2006/relationships" id="259" r:id="R479f5d083680409e"/>
+    <p:sldId xmlns:r="http://schemas.openxmlformats.org/officeDocument/2006/relationships" id="260" r:id="R1ddd38a3ef154ea4"/>
+    <p:sldId xmlns:r="http://schemas.openxmlformats.org/officeDocument/2006/relationships" id="261" r:id="R9fd666cd26bc41a9"/>
+    <p:sldId xmlns:r="http://schemas.openxmlformats.org/officeDocument/2006/relationships" id="262" r:id="Rad7bd70038ad4c2b"/>
+    <p:sldId xmlns:r="http://schemas.openxmlformats.org/officeDocument/2006/relationships" id="263" r:id="R7a74a41e1955439b"/>
+    <p:sldId xmlns:r="http://schemas.openxmlformats.org/officeDocument/2006/relationships" id="264" r:id="R52aec58fcec24ede"/>
+    <p:sldId xmlns:r="http://schemas.openxmlformats.org/officeDocument/2006/relationships" id="265" r:id="R5aa946280bb743c7"/>
+    <p:sldId xmlns:r="http://schemas.openxmlformats.org/officeDocument/2006/relationships" id="266" r:id="R2f536a10644e4e18"/>
   </p:sldIdLst>
   <p:sldSz cx="15240000" cy="8572500"/>
   <p:notesSz cx="6858000" cy="9144000"/>
@@ -452,32 +452,7 @@
           <a:lstStyle xmlns:a="http://schemas.openxmlformats.org/drawingml/2006/main"/>
           <a:p xmlns:a="http://schemas.openxmlformats.org/drawingml/2006/main">
             <a:r>
-              <a:t>Lesson 06 builds the provider-neutral hybrid retriever used by Lesson 07.</a:t>
-            </a:r>
-          </a:p>
-          <a:p xmlns:a="http://schemas.openxmlformats.org/drawingml/2006/main">
-            <a:r>
-              <a:t/>
-            </a:r>
-          </a:p>
-          <a:p xmlns:a="http://schemas.openxmlformats.org/drawingml/2006/main">
-            <a:r>
-              <a:t>[Sources]</a:t>
-            </a:r>
-          </a:p>
-          <a:p xmlns:a="http://schemas.openxmlformats.org/drawingml/2006/main">
-            <a:r>
-              <a:t>- chapters/06-hybrid-retrieval.md</a:t>
-            </a:r>
-          </a:p>
-          <a:p xmlns:a="http://schemas.openxmlformats.org/drawingml/2006/main">
-            <a:r>
-              <a:t>- notebooks/06_hybrid_retrieval.ipynb</a:t>
-            </a:r>
-          </a:p>
-          <a:p xmlns:a="http://schemas.openxmlformats.org/drawingml/2006/main">
-            <a:r>
-              <a:t>[/Sources]</a:t>
+              <a:t>Open with the failure pattern: finance questions mix literal identifiers and semantic intent. One retrieval channel cannot reliably protect both.</a:t>
             </a:r>
           </a:p>
         </p:txBody>
@@ -547,32 +522,7 @@
           <a:lstStyle xmlns:a="http://schemas.openxmlformats.org/drawingml/2006/main"/>
           <a:p xmlns:a="http://schemas.openxmlformats.org/drawingml/2006/main">
             <a:r>
-              <a:t>Instructor purpose: Check the three core decisions before the lesson closes.</a:t>
-            </a:r>
-          </a:p>
-          <a:p xmlns:a="http://schemas.openxmlformats.org/drawingml/2006/main">
-            <a:r>
-              <a:t>Planned timing: 3 minutes.</a:t>
-            </a:r>
-          </a:p>
-          <a:p xmlns:a="http://schemas.openxmlformats.org/drawingml/2006/main">
-            <a:r>
-              <a:t>Facilitation: ask for one letter per question.</a:t>
-            </a:r>
-          </a:p>
-          <a:p xmlns:a="http://schemas.openxmlformats.org/drawingml/2006/main">
-            <a:r>
-              <a:t>[Sources]</a:t>
-            </a:r>
-          </a:p>
-          <a:p xmlns:a="http://schemas.openxmlformats.org/drawingml/2006/main">
-            <a:r>
-              <a:t>- chapters/06-hybrid-retrieval.md</a:t>
-            </a:r>
-          </a:p>
-          <a:p xmlns:a="http://schemas.openxmlformats.org/drawingml/2006/main">
-            <a:r>
-              <a:t>[/Sources]</a:t>
+              <a:t>Pause before revealing the answers. Ask learners to explain the mechanism, not only choose a letter.</a:t>
             </a:r>
           </a:p>
         </p:txBody>
@@ -642,32 +592,7 @@
           <a:lstStyle xmlns:a="http://schemas.openxmlformats.org/drawingml/2006/main"/>
           <a:p xmlns:a="http://schemas.openxmlformats.org/drawingml/2006/main">
             <a:r>
-              <a:t>Instructor purpose: Correct the quiz and restate the practical rule behind each answer.</a:t>
-            </a:r>
-          </a:p>
-          <a:p xmlns:a="http://schemas.openxmlformats.org/drawingml/2006/main">
-            <a:r>
-              <a:t>Planned timing: 3 minutes.</a:t>
-            </a:r>
-          </a:p>
-          <a:p xmlns:a="http://schemas.openxmlformats.org/drawingml/2006/main">
-            <a:r>
-              <a:t>Facilitation: ask learners to explain each rule in their own words.</a:t>
-            </a:r>
-          </a:p>
-          <a:p xmlns:a="http://schemas.openxmlformats.org/drawingml/2006/main">
-            <a:r>
-              <a:t>[Sources]</a:t>
-            </a:r>
-          </a:p>
-          <a:p xmlns:a="http://schemas.openxmlformats.org/drawingml/2006/main">
-            <a:r>
-              <a:t>- chapters/06-hybrid-retrieval.md</a:t>
-            </a:r>
-          </a:p>
-          <a:p xmlns:a="http://schemas.openxmlformats.org/drawingml/2006/main">
-            <a:r>
-              <a:t>[/Sources]</a:t>
+              <a:t>Close by restating the retrieval order: define eligibility, retrieve through BM25 and dense channels, fuse ranks, rerank a smaller set, and cite the final evidence.</a:t>
             </a:r>
           </a:p>
         </p:txBody>
@@ -737,7 +662,7 @@
           <a:lstStyle xmlns:a="http://schemas.openxmlformats.org/drawingml/2006/main"/>
           <a:p xmlns:a="http://schemas.openxmlformats.org/drawingml/2006/main">
             <a:r>
-              <a:t>Cosine similarity is treated as relative vector alignment, not confidence or truth.</a:t>
+              <a:t>Explain the backbone before the algorithms. The same corpus is searched through a lexical channel and an embedding channel. Rank fusion combines ordering rather than incompatible raw score scales. Anthropic labels the lexical branch TF-IDF in this visual; the lesson implements BM25 as the stronger lexical baseline.</a:t>
             </a:r>
           </a:p>
           <a:p xmlns:a="http://schemas.openxmlformats.org/drawingml/2006/main">
@@ -752,17 +677,7 @@
           </a:p>
           <a:p xmlns:a="http://schemas.openxmlformats.org/drawingml/2006/main">
             <a:r>
-              <a:t>- notebooks/06_hybrid_retrieval.ipynb, embedding geometry section</a:t>
-            </a:r>
-          </a:p>
-          <a:p xmlns:a="http://schemas.openxmlformats.org/drawingml/2006/main">
-            <a:r>
-              <a:t>- src/finai_academy/hybrid_retrieval.py</a:t>
-            </a:r>
-          </a:p>
-          <a:p xmlns:a="http://schemas.openxmlformats.org/drawingml/2006/main">
-            <a:r>
-              <a:t>[/Sources]</a:t>
+              <a:t>- https://www.anthropic.com/engineering/contextual-retrieval</a:t>
             </a:r>
           </a:p>
         </p:txBody>
@@ -832,7 +747,7 @@
           <a:lstStyle xmlns:a="http://schemas.openxmlformats.org/drawingml/2006/main"/>
           <a:p xmlns:a="http://schemas.openxmlformats.org/drawingml/2006/main">
             <a:r>
-              <a:t>Maintained query: Which NVIDIA business generated $193.7 billion? Filter: company=NVIDIA and period=FY2026. Values below are from the deterministic offline execution of notebooks/06_hybrid_retrieval.ipynb. Keyword rank 1: NVDA-2026-10K-EXCERPT-CONTEXTUAL-003 (TF-IDF cosine 0.591); rank 2: NVDA-2026-10K-EXCERPT-CONTEXTUAL-001 (0.357); rank 3: NVDA-2026-10K-EXCERPT-CONTEXTUAL-002 (0.209); rank 4: NVDA-2026-10K-EXCERPT-CONTEXTUAL-004 (0.118). Dense rank 1: NVDA-2026-10K-EXCERPT-CONTEXTUAL-001 (raw cosine 0.577); rank 2: NVDA-2026-10K-EXCERPT-CONTEXTUAL-002 (0.577); rank 3: NVDA-2026-10K-EXCERPT-CONTEXTUAL-004 (0.447); dense rank 4: NVDA-2026-10K-EXCERPT-CONTEXTUAL-003 (0.408). Visible IDs use the collision-safe NVDA…NNN abbreviation; the full stable manifest IDs appear above. Raw embedding cosine is a ranking signal, not confidence.</a:t>
+              <a:t>Read the green passage first: BM25 rewards the maintained evidence token. Dense retrieval ranks by semantic proximity and can miss a literal figure. The channels are complementary, and their raw scores are intentionally not compared.</a:t>
             </a:r>
           </a:p>
           <a:p xmlns:a="http://schemas.openxmlformats.org/drawingml/2006/main">
@@ -847,22 +762,7 @@
           </a:p>
           <a:p xmlns:a="http://schemas.openxmlformats.org/drawingml/2006/main">
             <a:r>
-              <a:t>- Executable maintained run: notebooks/06_hybrid_retrieval.ipynb</a:t>
-            </a:r>
-          </a:p>
-          <a:p xmlns:a="http://schemas.openxmlformats.org/drawingml/2006/main">
-            <a:r>
-              <a:t>- Course explanation and score contracts: chapters/06-hybrid-retrieval.md</a:t>
-            </a:r>
-          </a:p>
-          <a:p xmlns:a="http://schemas.openxmlformats.org/drawingml/2006/main">
-            <a:r>
-              <a:t>- NVIDIA fiscal 2026 Form 10-K: https://www.sec.gov/Archives/edgar/data/1045810/000104581026000021/nvda-20260125.htm</a:t>
-            </a:r>
-          </a:p>
-          <a:p xmlns:a="http://schemas.openxmlformats.org/drawingml/2006/main">
-            <a:r>
-              <a:t>[/Sources]</a:t>
+              <a:t>- https://www.sec.gov/Archives/edgar/data/1045810/000104581026000021/nvda-20260125.htm</a:t>
             </a:r>
           </a:p>
         </p:txBody>
@@ -932,7 +832,7 @@
           <a:lstStyle xmlns:a="http://schemas.openxmlformats.org/drawingml/2006/main"/>
           <a:p xmlns:a="http://schemas.openxmlformats.org/drawingml/2006/main">
             <a:r>
-              <a:t>Eligibility filters are applied before either ranking channel scores candidates.</a:t>
+              <a:t>Filters define the eligible corpus before either channel scores passages. Post-filtering cannot restore evidence that was pushed out of a global top-k by another company or period.</a:t>
             </a:r>
           </a:p>
           <a:p xmlns:a="http://schemas.openxmlformats.org/drawingml/2006/main">
@@ -947,17 +847,7 @@
           </a:p>
           <a:p xmlns:a="http://schemas.openxmlformats.org/drawingml/2006/main">
             <a:r>
-              <a:t>- src/finai_academy/retrieval_pipeline.py</a:t>
-            </a:r>
-          </a:p>
-          <a:p xmlns:a="http://schemas.openxmlformats.org/drawingml/2006/main">
-            <a:r>
-              <a:t>- notebooks/06_hybrid_retrieval.ipynb, eligibility gate</a:t>
-            </a:r>
-          </a:p>
-          <a:p xmlns:a="http://schemas.openxmlformats.org/drawingml/2006/main">
-            <a:r>
-              <a:t>[/Sources]</a:t>
+              <a:t>- https://learn.microsoft.com/en-us/azure/search/hybrid-search-overview</a:t>
             </a:r>
           </a:p>
         </p:txBody>
@@ -1027,7 +917,7 @@
           <a:lstStyle xmlns:a="http://schemas.openxmlformats.org/drawingml/2006/main"/>
           <a:p xmlns:a="http://schemas.openxmlformats.org/drawingml/2006/main">
             <a:r>
-              <a:t>Reciprocal-rank fusion combines rank contributions while preserving per-channel provenance.</a:t>
+              <a:t>RRF assigns a contribution from each channel rank and adds them. It never pretends BM25 and cosine scores share units. Keep each contribution visible so the final ordering remains inspectable.</a:t>
             </a:r>
           </a:p>
           <a:p xmlns:a="http://schemas.openxmlformats.org/drawingml/2006/main">
@@ -1042,17 +932,7 @@
           </a:p>
           <a:p xmlns:a="http://schemas.openxmlformats.org/drawingml/2006/main">
             <a:r>
-              <a:t>- src/finai_academy/hybrid_retrieval.py</a:t>
-            </a:r>
-          </a:p>
-          <a:p xmlns:a="http://schemas.openxmlformats.org/drawingml/2006/main">
-            <a:r>
-              <a:t>- notebooks/06_hybrid_retrieval.ipynb, RRF section</a:t>
-            </a:r>
-          </a:p>
-          <a:p xmlns:a="http://schemas.openxmlformats.org/drawingml/2006/main">
-            <a:r>
-              <a:t>[/Sources]</a:t>
+              <a:t>- https://qdrant.tech/documentation/search/hybrid-queries/</a:t>
             </a:r>
           </a:p>
         </p:txBody>
@@ -1122,7 +1002,7 @@
           <a:lstStyle xmlns:a="http://schemas.openxmlformats.org/drawingml/2006/main"/>
           <a:p xmlns:a="http://schemas.openxmlformats.org/drawingml/2006/main">
             <a:r>
-              <a:t>Reranking spends a smaller evidence budget after broad eligible candidate retrieval.</a:t>
+              <a:t>Candidate retrieval should be broad enough to protect recall, but reranking should operate only on the eligible, deduplicated set. This lesson uses visible finance-aware features so students can explain why the final passages win.</a:t>
             </a:r>
           </a:p>
           <a:p xmlns:a="http://schemas.openxmlformats.org/drawingml/2006/main">
@@ -1137,17 +1017,7 @@
           </a:p>
           <a:p xmlns:a="http://schemas.openxmlformats.org/drawingml/2006/main">
             <a:r>
-              <a:t>- src/finai_academy/retrieval_pipeline.py</a:t>
-            </a:r>
-          </a:p>
-          <a:p xmlns:a="http://schemas.openxmlformats.org/drawingml/2006/main">
-            <a:r>
-              <a:t>- notebooks/06_hybrid_retrieval.ipynb, reranking section</a:t>
-            </a:r>
-          </a:p>
-          <a:p xmlns:a="http://schemas.openxmlformats.org/drawingml/2006/main">
-            <a:r>
-              <a:t>[/Sources]</a:t>
+              <a:t>- https://www.anthropic.com/engineering/contextual-retrieval</a:t>
             </a:r>
           </a:p>
         </p:txBody>
@@ -1217,7 +1087,7 @@
           <a:lstStyle xmlns:a="http://schemas.openxmlformats.org/drawingml/2006/main"/>
           <a:p xmlns:a="http://schemas.openxmlformats.org/drawingml/2006/main">
             <a:r>
-              <a:t>The capstone exposes stable index, eligibility, ranking, fusion, reranking and evidence stages.</a:t>
+              <a:t>Anthropic reports average failed retrievals at top 20 falling from 5.7% for embeddings alone to 1.9% for reranked contextual embeddings plus contextual BM25. This is evidence for the architecture, not a promise that every corpus will obtain the same result.</a:t>
             </a:r>
           </a:p>
           <a:p xmlns:a="http://schemas.openxmlformats.org/drawingml/2006/main">
@@ -1232,17 +1102,7 @@
           </a:p>
           <a:p xmlns:a="http://schemas.openxmlformats.org/drawingml/2006/main">
             <a:r>
-              <a:t>- chapters/06-hybrid-retrieval.md</a:t>
-            </a:r>
-          </a:p>
-          <a:p xmlns:a="http://schemas.openxmlformats.org/drawingml/2006/main">
-            <a:r>
-              <a:t>- notebooks/06_hybrid_retrieval.ipynb, capstone integration</a:t>
-            </a:r>
-          </a:p>
-          <a:p xmlns:a="http://schemas.openxmlformats.org/drawingml/2006/main">
-            <a:r>
-              <a:t>[/Sources]</a:t>
+              <a:t>- https://www.anthropic.com/engineering/contextual-retrieval</a:t>
             </a:r>
           </a:p>
         </p:txBody>
@@ -1312,7 +1172,7 @@
           <a:lstStyle xmlns:a="http://schemas.openxmlformats.org/drawingml/2006/main"/>
           <a:p xmlns:a="http://schemas.openxmlformats.org/drawingml/2006/main">
             <a:r>
-              <a:t>Keep documents, chunks and embeddings as explicit logical records. The teaching index uses exact local search so students can inspect every row. Production may replace only the storage/query engine with pgvector and an HNSW index while preserving stable IDs, metadata filters and evaluation contracts.</a:t>
+              <a:t>Use this slide as the mental model. Eligibility fixes corpus scope; BM25 fixes literal matching; dense search fixes paraphrase and conceptual recall; RRF fixes incomparable channel scores; reranking fixes the final evidence budget.</a:t>
             </a:r>
           </a:p>
           <a:p xmlns:a="http://schemas.openxmlformats.org/drawingml/2006/main">
@@ -1327,17 +1187,12 @@
           </a:p>
           <a:p xmlns:a="http://schemas.openxmlformats.org/drawingml/2006/main">
             <a:r>
-              <a:t>- https://github.com/pgvector/pgvector</a:t>
-            </a:r>
-          </a:p>
-          <a:p xmlns:a="http://schemas.openxmlformats.org/drawingml/2006/main">
-            <a:r>
-              <a:t>- Course Notebook 06 architecture bridge</a:t>
-            </a:r>
-          </a:p>
-          <a:p xmlns:a="http://schemas.openxmlformats.org/drawingml/2006/main">
-            <a:r>
-              <a:t>[/Sources]</a:t>
+              <a:t>- https://learn.microsoft.com/en-us/azure/search/hybrid-search-overview</a:t>
+            </a:r>
+          </a:p>
+          <a:p xmlns:a="http://schemas.openxmlformats.org/drawingml/2006/main">
+            <a:r>
+              <a:t>- https://www.anthropic.com/engineering/contextual-retrieval</a:t>
             </a:r>
           </a:p>
         </p:txBody>
@@ -1407,32 +1262,7 @@
           <a:lstStyle xmlns:a="http://schemas.openxmlformats.org/drawingml/2006/main"/>
           <a:p xmlns:a="http://schemas.openxmlformats.org/drawingml/2006/main">
             <a:r>
-              <a:t>These values are one deterministic offline execution on the instructor machine: eligibility 0.00 ms, keyword 1.04 ms, dense 0.03 ms, fusion 0.01 ms and rerank 0.06 ms. Hardware-dependent timings are observations, not correctness thresholds. Lesson 07 wraps the same stage boundaries as MLflow spans.</a:t>
-            </a:r>
-          </a:p>
-          <a:p xmlns:a="http://schemas.openxmlformats.org/drawingml/2006/main">
-            <a:r>
-              <a:t/>
-            </a:r>
-          </a:p>
-          <a:p xmlns:a="http://schemas.openxmlformats.org/drawingml/2006/main">
-            <a:r>
-              <a:t>[Sources]</a:t>
-            </a:r>
-          </a:p>
-          <a:p xmlns:a="http://schemas.openxmlformats.org/drawingml/2006/main">
-            <a:r>
-              <a:t>- Course Notebook 06 offline execution, Figure 5</a:t>
-            </a:r>
-          </a:p>
-          <a:p xmlns:a="http://schemas.openxmlformats.org/drawingml/2006/main">
-            <a:r>
-              <a:t>- https://mlflow.org/docs/latest/genai/tracing/</a:t>
-            </a:r>
-          </a:p>
-          <a:p xmlns:a="http://schemas.openxmlformats.org/drawingml/2006/main">
-            <a:r>
-              <a:t>[/Sources]</a:t>
+              <a:t>The lab is intentionally compact. Students run six figures, reproduce the exact-number miss and cross-company leakage, inspect RRF contributions and reranker features, and finish with a four-query rank-1 scorecard.</a:t>
             </a:r>
           </a:p>
         </p:txBody>
@@ -1500,7 +1330,7 @@
   </p:cSld>
   <p:clrMap bg1="lt1" tx1="dk1" bg2="lt2" tx2="dk2" accent1="accent1" accent2="accent2" accent3="accent3" accent4="accent4" accent5="accent5" accent6="accent6" hlink="hlink" folHlink="folHlink"/>
   <p:sldLayoutIdLst>
-    <p:sldLayoutId xmlns:r="http://schemas.openxmlformats.org/officeDocument/2006/relationships" id="2147483649" r:id="R73a7362e0e3a4fa2"/>
+    <p:sldLayoutId xmlns:r="http://schemas.openxmlformats.org/officeDocument/2006/relationships" id="2147483649" r:id="R4521224fbf88401f"/>
   </p:sldLayoutIdLst>
   <p:txStyles>
     <p:titleStyle>
@@ -2198,7 +2028,7 @@
                 <a:ea typeface="Calibri"/>
                 <a:cs typeface="Calibri"/>
               </a:rPr>
-              <a:t>Hybrid Retrieval and Reranking</a:t>
+              <a:t>Hybrid Retrieval: Exact Terms + Meaning</a:t>
             </a:r>
           </a:p>
         </p:txBody>
@@ -2260,7 +2090,7 @@
                 <a:ea typeface="Calibri"/>
                 <a:cs typeface="Calibri"/>
               </a:rPr>
-              <a:t>Make eligible evidence compete across complementary ranking channels</a:t>
+              <a:t>Filter first, combine BM25 and dense search, then rerank the evidence you cite</a:t>
             </a:r>
           </a:p>
         </p:txBody>
@@ -2570,7 +2400,7 @@
                 <a:ea typeface="Calibri"/>
                 <a:cs typeface="Calibri"/>
               </a:rPr>
-              <a:t>Quick quiz</a:t>
+              <a:t>Can you defend the retrieval order?</a:t>
             </a:r>
           </a:p>
         </p:txBody>
@@ -2632,7 +2462,7 @@
                 <a:ea typeface="Calibri"/>
                 <a:cs typeface="Calibri"/>
               </a:rPr>
-              <a:t>Choose one answer for each question.</a:t>
+              <a:t>Choose the answer that preserves retrieval correctness.</a:t>
             </a:r>
           </a:p>
         </p:txBody>
@@ -2794,6 +2624,7 @@
           <a:lstStyle xmlns:a="http://schemas.openxmlformats.org/drawingml/2006/main"/>
           <a:p xmlns:a="http://schemas.openxmlformats.org/drawingml/2006/main">
             <a:pPr>
+              <a:buNone/>
               <a:defRPr sz="1500" b="1">
                 <a:solidFill>
                   <a:srgbClr val="001B2E"/>
@@ -2806,7 +2637,7 @@
                   <a:srgbClr val="001B2E"/>
                 </a:solidFill>
               </a:rPr>
-              <a:t>1. Which two channels does hybrid retrieval combine?</a:t>
+              <a:t>1. Which channel best protects exact figures?</a:t>
             </a:r>
           </a:p>
         </p:txBody>
@@ -2844,6 +2675,7 @@
           <a:lstStyle xmlns:a="http://schemas.openxmlformats.org/drawingml/2006/main"/>
           <a:p xmlns:a="http://schemas.openxmlformats.org/drawingml/2006/main">
             <a:pPr>
+              <a:buNone/>
               <a:defRPr sz="1200" b="0">
                 <a:solidFill>
                   <a:srgbClr val="334155"/>
@@ -2856,7 +2688,7 @@
                   <a:srgbClr val="334155"/>
                 </a:solidFill>
               </a:rPr>
-              <a:t>A  Keyword and dense     |     B  Cache and memory     |     C  Prompt and agent</a:t>
+              <a:t>A  BM25     |     B  Dense     |     C  Reranker</a:t>
             </a:r>
           </a:p>
         </p:txBody>
@@ -2894,6 +2726,7 @@
           <a:lstStyle xmlns:a="http://schemas.openxmlformats.org/drawingml/2006/main"/>
           <a:p xmlns:a="http://schemas.openxmlformats.org/drawingml/2006/main">
             <a:pPr>
+              <a:buNone/>
               <a:defRPr sz="1500" b="1">
                 <a:solidFill>
                   <a:srgbClr val="001B2E"/>
@@ -2906,7 +2739,7 @@
                   <a:srgbClr val="001B2E"/>
                 </a:solidFill>
               </a:rPr>
-              <a:t>2. When should eligibility filters be applied?</a:t>
+              <a:t>2. When should eligibility filters run?</a:t>
             </a:r>
           </a:p>
         </p:txBody>
@@ -2944,6 +2777,7 @@
           <a:lstStyle xmlns:a="http://schemas.openxmlformats.org/drawingml/2006/main"/>
           <a:p xmlns:a="http://schemas.openxmlformats.org/drawingml/2006/main">
             <a:pPr>
+              <a:buNone/>
               <a:defRPr sz="1200" b="0">
                 <a:solidFill>
                   <a:srgbClr val="334155"/>
@@ -2956,7 +2790,7 @@
                   <a:srgbClr val="334155"/>
                 </a:solidFill>
               </a:rPr>
-              <a:t>A  Before ranking     |     B  After the answer     |     C  Never</a:t>
+              <a:t>A  Before ranking     |     B  After fusion     |     C  After the answer</a:t>
             </a:r>
           </a:p>
         </p:txBody>
@@ -2994,6 +2828,7 @@
           <a:lstStyle xmlns:a="http://schemas.openxmlformats.org/drawingml/2006/main"/>
           <a:p xmlns:a="http://schemas.openxmlformats.org/drawingml/2006/main">
             <a:pPr>
+              <a:buNone/>
               <a:defRPr sz="1500" b="1">
                 <a:solidFill>
                   <a:srgbClr val="001B2E"/>
@@ -3006,7 +2841,7 @@
                   <a:srgbClr val="001B2E"/>
                 </a:solidFill>
               </a:rPr>
-              <a:t>3. What does RRF combine?</a:t>
+              <a:t>3. What does reciprocal-rank fusion combine?</a:t>
             </a:r>
           </a:p>
         </p:txBody>
@@ -3044,6 +2879,7 @@
           <a:lstStyle xmlns:a="http://schemas.openxmlformats.org/drawingml/2006/main"/>
           <a:p xmlns:a="http://schemas.openxmlformats.org/drawingml/2006/main">
             <a:pPr>
+              <a:buNone/>
               <a:defRPr sz="1200" b="0">
                 <a:solidFill>
                   <a:srgbClr val="334155"/>
@@ -3304,7 +3140,7 @@
                 <a:ea typeface="Calibri"/>
                 <a:cs typeface="Calibri"/>
               </a:rPr>
-              <a:t>Check the idea, not only the letter.</a:t>
+              <a:t>The mechanism matters more than the letter.</a:t>
             </a:r>
           </a:p>
         </p:txBody>
@@ -3466,6 +3302,7 @@
           <a:lstStyle xmlns:a="http://schemas.openxmlformats.org/drawingml/2006/main"/>
           <a:p xmlns:a="http://schemas.openxmlformats.org/drawingml/2006/main">
             <a:pPr>
+              <a:buNone/>
               <a:defRPr sz="1500" b="1">
                 <a:solidFill>
                   <a:srgbClr val="1F40CB"/>
@@ -3478,7 +3315,7 @@
                   <a:srgbClr val="1F40CB"/>
                 </a:solidFill>
               </a:rPr>
-              <a:t>1. A. Keyword and dense</a:t>
+              <a:t>1. A. BM25</a:t>
             </a:r>
           </a:p>
         </p:txBody>
@@ -3516,6 +3353,7 @@
           <a:lstStyle xmlns:a="http://schemas.openxmlformats.org/drawingml/2006/main"/>
           <a:p xmlns:a="http://schemas.openxmlformats.org/drawingml/2006/main">
             <a:pPr>
+              <a:buNone/>
               <a:defRPr sz="1200" b="0">
                 <a:solidFill>
                   <a:srgbClr val="334155"/>
@@ -3528,7 +3366,7 @@
                   <a:srgbClr val="334155"/>
                 </a:solidFill>
               </a:rPr>
-              <a:t>The channels capture exact terms and semantic similarity.</a:t>
+              <a:t>Lexical scoring protects exact figures, names and identifiers.</a:t>
             </a:r>
           </a:p>
         </p:txBody>
@@ -3566,6 +3404,7 @@
           <a:lstStyle xmlns:a="http://schemas.openxmlformats.org/drawingml/2006/main"/>
           <a:p xmlns:a="http://schemas.openxmlformats.org/drawingml/2006/main">
             <a:pPr>
+              <a:buNone/>
               <a:defRPr sz="1500" b="1">
                 <a:solidFill>
                   <a:srgbClr val="1F40CB"/>
@@ -3616,6 +3455,7 @@
           <a:lstStyle xmlns:a="http://schemas.openxmlformats.org/drawingml/2006/main"/>
           <a:p xmlns:a="http://schemas.openxmlformats.org/drawingml/2006/main">
             <a:pPr>
+              <a:buNone/>
               <a:defRPr sz="1200" b="0">
                 <a:solidFill>
                   <a:srgbClr val="334155"/>
@@ -3666,6 +3506,7 @@
           <a:lstStyle xmlns:a="http://schemas.openxmlformats.org/drawingml/2006/main"/>
           <a:p xmlns:a="http://schemas.openxmlformats.org/drawingml/2006/main">
             <a:pPr>
+              <a:buNone/>
               <a:defRPr sz="1500" b="1">
                 <a:solidFill>
                   <a:srgbClr val="1F40CB"/>
@@ -3716,6 +3557,7 @@
           <a:lstStyle xmlns:a="http://schemas.openxmlformats.org/drawingml/2006/main"/>
           <a:p xmlns:a="http://schemas.openxmlformats.org/drawingml/2006/main">
             <a:pPr>
+              <a:buNone/>
               <a:defRPr sz="1200" b="0">
                 <a:solidFill>
                   <a:srgbClr val="334155"/>
@@ -3728,7 +3570,7 @@
                   <a:srgbClr val="334155"/>
                 </a:solidFill>
               </a:rPr>
-              <a:t>RRF fuses contributions without pretending channel scores share one scale.</a:t>
+              <a:t>RRF fuses rank positions without pretending channel scores share one scale.</a:t>
             </a:r>
           </a:p>
         </p:txBody>
@@ -3764,10 +3606,10 @@
       </p:grpSpPr>
       <p:sp>
         <p:nvSpPr>
-          <p:cNvPr id="41" name="">
-            <a:extLst xmlns:a="http://schemas.openxmlformats.org/drawingml/2006/main">
-              <a:ext uri="{FF2B5EF4-FFF2-40B4-BE49-F238E27FC236}">
-                <a16:creationId xmlns:a16="http://schemas.microsoft.com/office/drawing/2014/main" id="{ADB9499D-57E3-4A1D-8EC6-611BB041857C}"/>
+          <p:cNvPr id="44" name="">
+            <a:extLst xmlns:a="http://schemas.openxmlformats.org/drawingml/2006/main">
+              <a:ext uri="{FF2B5EF4-FFF2-40B4-BE49-F238E27FC236}">
+                <a16:creationId xmlns:a16="http://schemas.microsoft.com/office/drawing/2014/main" id="{7F521A64-93BB-447D-87E9-41FC1E867CBC}"/>
               </a:ext>
             </a:extLst>
           </p:cNvPr>
@@ -3819,7 +3661,7 @@
                 <a:ea typeface="Calibri"/>
                 <a:cs typeface="Calibri"/>
               </a:rPr>
-              <a:t>EMBEDDING GEOMETRY</a:t>
+              <a:t>WHY HYBRID RETRIEVAL</a:t>
             </a:r>
           </a:p>
         </p:txBody>
@@ -3829,7 +3671,7 @@
           <p:cNvPr id="2" name="">
             <a:extLst xmlns:a="http://schemas.openxmlformats.org/drawingml/2006/main">
               <a:ext uri="{FF2B5EF4-FFF2-40B4-BE49-F238E27FC236}">
-                <a16:creationId xmlns:a16="http://schemas.microsoft.com/office/drawing/2014/main" id="{2695CF57-625B-488E-BEB2-B69B4A408FE3}"/>
+                <a16:creationId xmlns:a16="http://schemas.microsoft.com/office/drawing/2014/main" id="{9C793F9E-8AD7-4755-853A-CFF63AEDB7A7}"/>
               </a:ext>
             </a:extLst>
           </p:cNvPr>
@@ -3881,29 +3723,95 @@
                 <a:ea typeface="Calibri"/>
                 <a:cs typeface="Calibri"/>
               </a:rPr>
-              <a:t>Cosine measures alignment—not confidence</a:t>
-            </a:r>
-          </a:p>
-        </p:txBody>
-      </p:sp>
-      <p:sp>
-        <p:nvSpPr>
-          <p:cNvPr id="3" name="">
-            <a:extLst xmlns:a="http://schemas.openxmlformats.org/drawingml/2006/main">
-              <a:ext uri="{FF2B5EF4-FFF2-40B4-BE49-F238E27FC236}">
-                <a16:creationId xmlns:a16="http://schemas.microsoft.com/office/drawing/2014/main" id="{18B47AA7-B631-41FD-ABBE-E3FFFB37A706}"/>
-              </a:ext>
-            </a:extLst>
-          </p:cNvPr>
-          <p:cNvSpPr>
-            <a:spLocks xmlns:a="http://schemas.openxmlformats.org/drawingml/2006/main" noGrp="1"/>
-          </p:cNvSpPr>
-          <p:nvPr/>
-        </p:nvSpPr>
-        <p:spPr>
-          <a:xfrm xmlns:a="http://schemas.openxmlformats.org/drawingml/2006/main">
-            <a:off x="1028700" y="2438400"/>
-            <a:ext cx="2857500" cy="285750"/>
+              <a:t>Run lexical and semantic search in parallel—then fuse ranks</a:t>
+            </a:r>
+          </a:p>
+        </p:txBody>
+      </p:sp>
+      <p:sp>
+        <p:nvSpPr>
+          <p:cNvPr id="39" name="">
+            <a:extLst xmlns:a="http://schemas.openxmlformats.org/drawingml/2006/main">
+              <a:ext uri="{FF2B5EF4-FFF2-40B4-BE49-F238E27FC236}">
+                <a16:creationId xmlns:a16="http://schemas.microsoft.com/office/drawing/2014/main" id="{4846780A-5D65-4410-9457-661BBB6C3E5A}"/>
+              </a:ext>
+            </a:extLst>
+          </p:cNvPr>
+          <p:cNvSpPr>
+            <a:spLocks xmlns:a="http://schemas.openxmlformats.org/drawingml/2006/main" noGrp="1"/>
+          </p:cNvSpPr>
+          <p:nvPr/>
+        </p:nvSpPr>
+        <p:spPr>
+          <a:xfrm xmlns:a="http://schemas.openxmlformats.org/drawingml/2006/main">
+            <a:off x="857250" y="7896225"/>
+            <a:ext cx="13525500" cy="28575"/>
+          </a:xfrm>
+          <a:prstGeom xmlns:a="http://schemas.openxmlformats.org/drawingml/2006/main" prst="rect">
+            <a:avLst/>
+          </a:prstGeom>
+          <a:solidFill xmlns:a="http://schemas.openxmlformats.org/drawingml/2006/main">
+            <a:srgbClr val="E4E7E9"/>
+          </a:solidFill>
+          <a:ln xmlns:a="http://schemas.openxmlformats.org/drawingml/2006/main" w="0">
+            <a:solidFill>
+              <a:srgbClr val="E4E7E9"/>
+            </a:solidFill>
+            <a:prstDash val="solid"/>
+          </a:ln>
+        </p:spPr>
+      </p:sp>
+      <p:sp>
+        <p:nvSpPr>
+          <p:cNvPr id="40" name="">
+            <a:extLst xmlns:a="http://schemas.openxmlformats.org/drawingml/2006/main">
+              <a:ext uri="{FF2B5EF4-FFF2-40B4-BE49-F238E27FC236}">
+                <a16:creationId xmlns:a16="http://schemas.microsoft.com/office/drawing/2014/main" id="{0C69519E-645C-4800-9FE8-656AB5D56416}"/>
+              </a:ext>
+            </a:extLst>
+          </p:cNvPr>
+          <p:cNvSpPr>
+            <a:spLocks xmlns:a="http://schemas.openxmlformats.org/drawingml/2006/main" noGrp="1"/>
+          </p:cNvSpPr>
+          <p:nvPr/>
+        </p:nvSpPr>
+        <p:spPr>
+          <a:xfrm xmlns:a="http://schemas.openxmlformats.org/drawingml/2006/main">
+            <a:off x="857250" y="7896225"/>
+            <a:ext cx="8001000" cy="38100"/>
+          </a:xfrm>
+          <a:prstGeom xmlns:a="http://schemas.openxmlformats.org/drawingml/2006/main" prst="rect">
+            <a:avLst/>
+          </a:prstGeom>
+          <a:solidFill xmlns:a="http://schemas.openxmlformats.org/drawingml/2006/main">
+            <a:srgbClr val="00A2EB"/>
+          </a:solidFill>
+          <a:ln xmlns:a="http://schemas.openxmlformats.org/drawingml/2006/main" w="0">
+            <a:solidFill>
+              <a:srgbClr val="00A2EB"/>
+            </a:solidFill>
+            <a:prstDash val="solid"/>
+          </a:ln>
+        </p:spPr>
+      </p:sp>
+      <p:sp>
+        <p:nvSpPr>
+          <p:cNvPr id="41" name="">
+            <a:extLst xmlns:a="http://schemas.openxmlformats.org/drawingml/2006/main">
+              <a:ext uri="{FF2B5EF4-FFF2-40B4-BE49-F238E27FC236}">
+                <a16:creationId xmlns:a16="http://schemas.microsoft.com/office/drawing/2014/main" id="{17032C2C-E113-4AB5-9CC6-D6B41AEDB1C4}"/>
+              </a:ext>
+            </a:extLst>
+          </p:cNvPr>
+          <p:cNvSpPr>
+            <a:spLocks xmlns:a="http://schemas.openxmlformats.org/drawingml/2006/main" noGrp="1"/>
+          </p:cNvSpPr>
+          <p:nvPr/>
+        </p:nvSpPr>
+        <p:spPr>
+          <a:xfrm xmlns:a="http://schemas.openxmlformats.org/drawingml/2006/main">
+            <a:off x="971550" y="8058150"/>
+            <a:ext cx="3714750" cy="323850"/>
           </a:xfrm>
           <a:prstGeom xmlns:a="http://schemas.openxmlformats.org/drawingml/2006/main" prst="rect">
             <a:avLst/>
@@ -3916,7 +3824,7 @@
         </p:spPr>
         <p:txBody>
           <a:bodyPr xmlns:a="http://schemas.openxmlformats.org/drawingml/2006/main" wrap="square" lIns="0" tIns="0" rIns="0" bIns="0" anchor="ctr">
-            <a:noAutofit/>
+            <a:normAutofit fontScale="100000"/>
           </a:bodyPr>
           <a:lstStyle xmlns:a="http://schemas.openxmlformats.org/drawingml/2006/main"/>
           <a:p xmlns:a="http://schemas.openxmlformats.org/drawingml/2006/main">
@@ -3925,1616 +3833,6 @@
                 <a:spcPct val="100000"/>
               </a:lnSpc>
               <a:buNone/>
-              <a:defRPr sz="1275" b="1">
-                <a:solidFill>
-                  <a:srgbClr val="1F40CB"/>
-                </a:solidFill>
-                <a:latin typeface="Calibri"/>
-                <a:ea typeface="Calibri"/>
-                <a:cs typeface="Calibri"/>
-              </a:defRPr>
-            </a:pPr>
-            <a:r>
-              <a:rPr sz="1800" b="1">
-                <a:solidFill>
-                  <a:srgbClr val="1F40CB"/>
-                </a:solidFill>
-                <a:latin typeface="Calibri"/>
-                <a:ea typeface="Calibri"/>
-                <a:cs typeface="Calibri"/>
-              </a:rPr>
-              <a:t>VECTOR INTUITION</a:t>
-            </a:r>
-          </a:p>
-        </p:txBody>
-      </p:sp>
-      <p:sp>
-        <p:nvSpPr>
-          <p:cNvPr id="4" name="">
-            <a:extLst xmlns:a="http://schemas.openxmlformats.org/drawingml/2006/main">
-              <a:ext uri="{FF2B5EF4-FFF2-40B4-BE49-F238E27FC236}">
-                <a16:creationId xmlns:a16="http://schemas.microsoft.com/office/drawing/2014/main" id="{CA5257D7-8A5E-4ED5-99FB-9BEA2CD5AFE1}"/>
-              </a:ext>
-            </a:extLst>
-          </p:cNvPr>
-          <p:cNvSpPr>
-            <a:spLocks xmlns:a="http://schemas.openxmlformats.org/drawingml/2006/main" noGrp="1"/>
-          </p:cNvSpPr>
-          <p:nvPr/>
-        </p:nvSpPr>
-        <p:spPr>
-          <a:xfrm xmlns:a="http://schemas.openxmlformats.org/drawingml/2006/main">
-            <a:off x="1257300" y="3429000"/>
-            <a:ext cx="1028700" cy="41275"/>
-          </a:xfrm>
-          <a:prstGeom xmlns:a="http://schemas.openxmlformats.org/drawingml/2006/main" prst="rect">
-            <a:avLst/>
-          </a:prstGeom>
-          <a:solidFill xmlns:a="http://schemas.openxmlformats.org/drawingml/2006/main">
-            <a:srgbClr val="1F40CB"/>
-          </a:solidFill>
-          <a:ln xmlns:a="http://schemas.openxmlformats.org/drawingml/2006/main" w="0">
-            <a:solidFill>
-              <a:srgbClr val="1F40CB"/>
-            </a:solidFill>
-            <a:prstDash val="solid"/>
-          </a:ln>
-        </p:spPr>
-      </p:sp>
-      <p:sp>
-        <p:nvSpPr>
-          <p:cNvPr id="5" name="">
-            <a:extLst xmlns:a="http://schemas.openxmlformats.org/drawingml/2006/main">
-              <a:ext uri="{FF2B5EF4-FFF2-40B4-BE49-F238E27FC236}">
-                <a16:creationId xmlns:a16="http://schemas.microsoft.com/office/drawing/2014/main" id="{0A28125A-6117-4802-BDED-1521C83E6A1B}"/>
-              </a:ext>
-            </a:extLst>
-          </p:cNvPr>
-          <p:cNvSpPr>
-            <a:spLocks xmlns:a="http://schemas.openxmlformats.org/drawingml/2006/main" noGrp="1"/>
-          </p:cNvSpPr>
-          <p:nvPr/>
-        </p:nvSpPr>
-        <p:spPr>
-          <a:xfrm xmlns:a="http://schemas.openxmlformats.org/drawingml/2006/main">
-            <a:off x="2286000" y="3105150"/>
-            <a:ext cx="1028700" cy="59267"/>
-          </a:xfrm>
-          <a:prstGeom xmlns:a="http://schemas.openxmlformats.org/drawingml/2006/main" prst="rect">
-            <a:avLst/>
-          </a:prstGeom>
-          <a:solidFill xmlns:a="http://schemas.openxmlformats.org/drawingml/2006/main">
-            <a:srgbClr val="1F40CB"/>
-          </a:solidFill>
-          <a:ln xmlns:a="http://schemas.openxmlformats.org/drawingml/2006/main" w="0">
-            <a:solidFill>
-              <a:srgbClr val="1F40CB"/>
-            </a:solidFill>
-            <a:prstDash val="solid"/>
-          </a:ln>
-        </p:spPr>
-      </p:sp>
-      <p:sp>
-        <p:nvSpPr>
-          <p:cNvPr id="6" name="">
-            <a:extLst xmlns:a="http://schemas.openxmlformats.org/drawingml/2006/main">
-              <a:ext uri="{FF2B5EF4-FFF2-40B4-BE49-F238E27FC236}">
-                <a16:creationId xmlns:a16="http://schemas.microsoft.com/office/drawing/2014/main" id="{B0C50A16-6CE2-41AD-9C68-31BCF4A37CA8}"/>
-              </a:ext>
-            </a:extLst>
-          </p:cNvPr>
-          <p:cNvSpPr>
-            <a:spLocks xmlns:a="http://schemas.openxmlformats.org/drawingml/2006/main" noGrp="1"/>
-          </p:cNvSpPr>
-          <p:nvPr/>
-        </p:nvSpPr>
-        <p:spPr>
-          <a:xfrm xmlns:a="http://schemas.openxmlformats.org/drawingml/2006/main">
-            <a:off x="3314700" y="3105150"/>
-            <a:ext cx="1028700" cy="63500"/>
-          </a:xfrm>
-          <a:prstGeom xmlns:a="http://schemas.openxmlformats.org/drawingml/2006/main" prst="rect">
-            <a:avLst/>
-          </a:prstGeom>
-          <a:solidFill xmlns:a="http://schemas.openxmlformats.org/drawingml/2006/main">
-            <a:srgbClr val="1F40CB"/>
-          </a:solidFill>
-          <a:ln xmlns:a="http://schemas.openxmlformats.org/drawingml/2006/main" w="0">
-            <a:solidFill>
-              <a:srgbClr val="1F40CB"/>
-            </a:solidFill>
-            <a:prstDash val="solid"/>
-          </a:ln>
-        </p:spPr>
-      </p:sp>
-      <p:sp>
-        <p:nvSpPr>
-          <p:cNvPr id="7" name="">
-            <a:extLst xmlns:a="http://schemas.openxmlformats.org/drawingml/2006/main">
-              <a:ext uri="{FF2B5EF4-FFF2-40B4-BE49-F238E27FC236}">
-                <a16:creationId xmlns:a16="http://schemas.microsoft.com/office/drawing/2014/main" id="{579E3D30-9339-457F-B7CD-A0EA27BB09FE}"/>
-              </a:ext>
-            </a:extLst>
-          </p:cNvPr>
-          <p:cNvSpPr>
-            <a:spLocks xmlns:a="http://schemas.openxmlformats.org/drawingml/2006/main" noGrp="1"/>
-          </p:cNvSpPr>
-          <p:nvPr/>
-        </p:nvSpPr>
-        <p:spPr>
-          <a:xfrm xmlns:a="http://schemas.openxmlformats.org/drawingml/2006/main">
-            <a:off x="1162050" y="3333750"/>
-            <a:ext cx="190500" cy="190500"/>
-          </a:xfrm>
-          <a:prstGeom xmlns:a="http://schemas.openxmlformats.org/drawingml/2006/main" prst="ellipse">
-            <a:avLst/>
-          </a:prstGeom>
-          <a:solidFill xmlns:a="http://schemas.openxmlformats.org/drawingml/2006/main">
-            <a:srgbClr val="00A2EB"/>
-          </a:solidFill>
-          <a:ln xmlns:a="http://schemas.openxmlformats.org/drawingml/2006/main" w="9525">
-            <a:solidFill>
-              <a:srgbClr val="00A2EB"/>
-            </a:solidFill>
-            <a:prstDash val="solid"/>
-          </a:ln>
-        </p:spPr>
-      </p:sp>
-      <p:sp>
-        <p:nvSpPr>
-          <p:cNvPr id="8" name="">
-            <a:extLst xmlns:a="http://schemas.openxmlformats.org/drawingml/2006/main">
-              <a:ext uri="{FF2B5EF4-FFF2-40B4-BE49-F238E27FC236}">
-                <a16:creationId xmlns:a16="http://schemas.microsoft.com/office/drawing/2014/main" id="{53A8E3BE-28EF-40CE-8891-51278C59B805}"/>
-              </a:ext>
-            </a:extLst>
-          </p:cNvPr>
-          <p:cNvSpPr>
-            <a:spLocks xmlns:a="http://schemas.openxmlformats.org/drawingml/2006/main" noGrp="1"/>
-          </p:cNvSpPr>
-          <p:nvPr/>
-        </p:nvSpPr>
-        <p:spPr>
-          <a:xfrm xmlns:a="http://schemas.openxmlformats.org/drawingml/2006/main">
-            <a:off x="2190750" y="4076700"/>
-            <a:ext cx="190500" cy="190500"/>
-          </a:xfrm>
-          <a:prstGeom xmlns:a="http://schemas.openxmlformats.org/drawingml/2006/main" prst="ellipse">
-            <a:avLst/>
-          </a:prstGeom>
-          <a:solidFill xmlns:a="http://schemas.openxmlformats.org/drawingml/2006/main">
-            <a:srgbClr val="00A2EB"/>
-          </a:solidFill>
-          <a:ln xmlns:a="http://schemas.openxmlformats.org/drawingml/2006/main" w="9525">
-            <a:solidFill>
-              <a:srgbClr val="00A2EB"/>
-            </a:solidFill>
-            <a:prstDash val="solid"/>
-          </a:ln>
-        </p:spPr>
-      </p:sp>
-      <p:sp>
-        <p:nvSpPr>
-          <p:cNvPr id="9" name="">
-            <a:extLst xmlns:a="http://schemas.openxmlformats.org/drawingml/2006/main">
-              <a:ext uri="{FF2B5EF4-FFF2-40B4-BE49-F238E27FC236}">
-                <a16:creationId xmlns:a16="http://schemas.microsoft.com/office/drawing/2014/main" id="{4701DE89-BF1D-4E47-A0E5-E2BD6B90EAD1}"/>
-              </a:ext>
-            </a:extLst>
-          </p:cNvPr>
-          <p:cNvSpPr>
-            <a:spLocks xmlns:a="http://schemas.openxmlformats.org/drawingml/2006/main" noGrp="1"/>
-          </p:cNvSpPr>
-          <p:nvPr/>
-        </p:nvSpPr>
-        <p:spPr>
-          <a:xfrm xmlns:a="http://schemas.openxmlformats.org/drawingml/2006/main">
-            <a:off x="3219450" y="3009900"/>
-            <a:ext cx="190500" cy="190500"/>
-          </a:xfrm>
-          <a:prstGeom xmlns:a="http://schemas.openxmlformats.org/drawingml/2006/main" prst="ellipse">
-            <a:avLst/>
-          </a:prstGeom>
-          <a:solidFill xmlns:a="http://schemas.openxmlformats.org/drawingml/2006/main">
-            <a:srgbClr val="00A2EB"/>
-          </a:solidFill>
-          <a:ln xmlns:a="http://schemas.openxmlformats.org/drawingml/2006/main" w="9525">
-            <a:solidFill>
-              <a:srgbClr val="00A2EB"/>
-            </a:solidFill>
-            <a:prstDash val="solid"/>
-          </a:ln>
-        </p:spPr>
-      </p:sp>
-      <p:sp>
-        <p:nvSpPr>
-          <p:cNvPr id="10" name="">
-            <a:extLst xmlns:a="http://schemas.openxmlformats.org/drawingml/2006/main">
-              <a:ext uri="{FF2B5EF4-FFF2-40B4-BE49-F238E27FC236}">
-                <a16:creationId xmlns:a16="http://schemas.microsoft.com/office/drawing/2014/main" id="{B3BE587B-C753-4E2B-8104-881E1547F2F8}"/>
-              </a:ext>
-            </a:extLst>
-          </p:cNvPr>
-          <p:cNvSpPr>
-            <a:spLocks xmlns:a="http://schemas.openxmlformats.org/drawingml/2006/main" noGrp="1"/>
-          </p:cNvSpPr>
-          <p:nvPr/>
-        </p:nvSpPr>
-        <p:spPr>
-          <a:xfrm xmlns:a="http://schemas.openxmlformats.org/drawingml/2006/main">
-            <a:off x="4248150" y="4152900"/>
-            <a:ext cx="190500" cy="190500"/>
-          </a:xfrm>
-          <a:prstGeom xmlns:a="http://schemas.openxmlformats.org/drawingml/2006/main" prst="ellipse">
-            <a:avLst/>
-          </a:prstGeom>
-          <a:solidFill xmlns:a="http://schemas.openxmlformats.org/drawingml/2006/main">
-            <a:srgbClr val="00A2EB"/>
-          </a:solidFill>
-          <a:ln xmlns:a="http://schemas.openxmlformats.org/drawingml/2006/main" w="9525">
-            <a:solidFill>
-              <a:srgbClr val="00A2EB"/>
-            </a:solidFill>
-            <a:prstDash val="solid"/>
-          </a:ln>
-        </p:spPr>
-      </p:sp>
-      <p:sp>
-        <p:nvSpPr>
-          <p:cNvPr id="11" name="">
-            <a:extLst xmlns:a="http://schemas.openxmlformats.org/drawingml/2006/main">
-              <a:ext uri="{FF2B5EF4-FFF2-40B4-BE49-F238E27FC236}">
-                <a16:creationId xmlns:a16="http://schemas.microsoft.com/office/drawing/2014/main" id="{E569151E-D420-4D59-85E7-111FD86A437B}"/>
-              </a:ext>
-            </a:extLst>
-          </p:cNvPr>
-          <p:cNvSpPr>
-            <a:spLocks xmlns:a="http://schemas.openxmlformats.org/drawingml/2006/main" noGrp="1"/>
-          </p:cNvSpPr>
-          <p:nvPr/>
-        </p:nvSpPr>
-        <p:spPr>
-          <a:xfrm xmlns:a="http://schemas.openxmlformats.org/drawingml/2006/main">
-            <a:off x="1143000" y="3981450"/>
-            <a:ext cx="3562350" cy="28575"/>
-          </a:xfrm>
-          <a:prstGeom xmlns:a="http://schemas.openxmlformats.org/drawingml/2006/main" prst="rect">
-            <a:avLst/>
-          </a:prstGeom>
-          <a:solidFill xmlns:a="http://schemas.openxmlformats.org/drawingml/2006/main">
-            <a:srgbClr val="F07D00"/>
-          </a:solidFill>
-          <a:ln xmlns:a="http://schemas.openxmlformats.org/drawingml/2006/main" w="0">
-            <a:solidFill>
-              <a:srgbClr val="F07D00"/>
-            </a:solidFill>
-            <a:prstDash val="solid"/>
-          </a:ln>
-        </p:spPr>
-      </p:sp>
-      <p:sp>
-        <p:nvSpPr>
-          <p:cNvPr id="12" name="">
-            <a:extLst xmlns:a="http://schemas.openxmlformats.org/drawingml/2006/main">
-              <a:ext uri="{FF2B5EF4-FFF2-40B4-BE49-F238E27FC236}">
-                <a16:creationId xmlns:a16="http://schemas.microsoft.com/office/drawing/2014/main" id="{7F6E1099-8F96-4D4A-A076-9A2E90695D3B}"/>
-              </a:ext>
-            </a:extLst>
-          </p:cNvPr>
-          <p:cNvSpPr>
-            <a:spLocks xmlns:a="http://schemas.openxmlformats.org/drawingml/2006/main" noGrp="1"/>
-          </p:cNvSpPr>
-          <p:nvPr/>
-        </p:nvSpPr>
-        <p:spPr>
-          <a:xfrm xmlns:a="http://schemas.openxmlformats.org/drawingml/2006/main">
-            <a:off x="1752600" y="4438650"/>
-            <a:ext cx="2667000" cy="323850"/>
-          </a:xfrm>
-          <a:prstGeom xmlns:a="http://schemas.openxmlformats.org/drawingml/2006/main" prst="rect">
-            <a:avLst/>
-          </a:prstGeom>
-          <a:noFill xmlns:a="http://schemas.openxmlformats.org/drawingml/2006/main"/>
-          <a:ln xmlns:a="http://schemas.openxmlformats.org/drawingml/2006/main" w="0">
-            <a:noFill/>
-            <a:prstDash val="solid"/>
-          </a:ln>
-        </p:spPr>
-        <p:txBody>
-          <a:bodyPr xmlns:a="http://schemas.openxmlformats.org/drawingml/2006/main" wrap="square" lIns="0" tIns="0" rIns="0" bIns="0" anchor="ctr">
-            <a:normAutofit fontScale="100000"/>
-          </a:bodyPr>
-          <a:lstStyle xmlns:a="http://schemas.openxmlformats.org/drawingml/2006/main"/>
-          <a:p xmlns:a="http://schemas.openxmlformats.org/drawingml/2006/main">
-            <a:pPr algn="ctr">
-              <a:lnSpc>
-                <a:spcPct val="100000"/>
-              </a:lnSpc>
-              <a:buNone/>
-              <a:defRPr sz="1425" b="1">
-                <a:solidFill>
-                  <a:srgbClr val="F07D00"/>
-                </a:solidFill>
-                <a:latin typeface="Calibri"/>
-                <a:ea typeface="Calibri"/>
-                <a:cs typeface="Calibri"/>
-              </a:defRPr>
-            </a:pPr>
-            <a:r>
-              <a:rPr sz="1425" b="1">
-                <a:solidFill>
-                  <a:srgbClr val="F07D00"/>
-                </a:solidFill>
-                <a:latin typeface="Calibri"/>
-                <a:ea typeface="Calibri"/>
-                <a:cs typeface="Calibri"/>
-              </a:rPr>
-              <a:t>angle grows → cosine falls</a:t>
-            </a:r>
-          </a:p>
-        </p:txBody>
-      </p:sp>
-      <p:sp>
-        <p:nvSpPr>
-          <p:cNvPr id="13" name="">
-            <a:extLst xmlns:a="http://schemas.openxmlformats.org/drawingml/2006/main">
-              <a:ext uri="{FF2B5EF4-FFF2-40B4-BE49-F238E27FC236}">
-                <a16:creationId xmlns:a16="http://schemas.microsoft.com/office/drawing/2014/main" id="{CE498DFA-9E2C-4070-94C7-94B630627C4C}"/>
-              </a:ext>
-            </a:extLst>
-          </p:cNvPr>
-          <p:cNvSpPr>
-            <a:spLocks xmlns:a="http://schemas.openxmlformats.org/drawingml/2006/main" noGrp="1"/>
-          </p:cNvSpPr>
-          <p:nvPr/>
-        </p:nvSpPr>
-        <p:spPr>
-          <a:xfrm xmlns:a="http://schemas.openxmlformats.org/drawingml/2006/main">
-            <a:off x="5810250" y="2438400"/>
-            <a:ext cx="2476500" cy="285750"/>
-          </a:xfrm>
-          <a:prstGeom xmlns:a="http://schemas.openxmlformats.org/drawingml/2006/main" prst="rect">
-            <a:avLst/>
-          </a:prstGeom>
-          <a:noFill xmlns:a="http://schemas.openxmlformats.org/drawingml/2006/main"/>
-          <a:ln xmlns:a="http://schemas.openxmlformats.org/drawingml/2006/main" w="0">
-            <a:noFill/>
-            <a:prstDash val="solid"/>
-          </a:ln>
-        </p:spPr>
-        <p:txBody>
-          <a:bodyPr xmlns:a="http://schemas.openxmlformats.org/drawingml/2006/main" wrap="square" lIns="0" tIns="0" rIns="0" bIns="0" anchor="ctr">
-            <a:noAutofit/>
-          </a:bodyPr>
-          <a:lstStyle xmlns:a="http://schemas.openxmlformats.org/drawingml/2006/main"/>
-          <a:p xmlns:a="http://schemas.openxmlformats.org/drawingml/2006/main">
-            <a:pPr algn="l">
-              <a:lnSpc>
-                <a:spcPct val="100000"/>
-              </a:lnSpc>
-              <a:buNone/>
-              <a:defRPr sz="1275" b="1">
-                <a:solidFill>
-                  <a:srgbClr val="1F40CB"/>
-                </a:solidFill>
-                <a:latin typeface="Calibri"/>
-                <a:ea typeface="Calibri"/>
-                <a:cs typeface="Calibri"/>
-              </a:defRPr>
-            </a:pPr>
-            <a:r>
-              <a:rPr sz="1800" b="1">
-                <a:solidFill>
-                  <a:srgbClr val="1F40CB"/>
-                </a:solidFill>
-                <a:latin typeface="Calibri"/>
-                <a:ea typeface="Calibri"/>
-                <a:cs typeface="Calibri"/>
-              </a:rPr>
-              <a:t>COSINE SIMILARITY</a:t>
-            </a:r>
-          </a:p>
-        </p:txBody>
-      </p:sp>
-      <p:sp>
-        <p:nvSpPr>
-          <p:cNvPr id="14" name="parent-section">
-            <a:extLst xmlns:a="http://schemas.openxmlformats.org/drawingml/2006/main">
-              <a:ext uri="{FF2B5EF4-FFF2-40B4-BE49-F238E27FC236}">
-                <a16:creationId xmlns:a16="http://schemas.microsoft.com/office/drawing/2014/main" id="{7E782CAC-BF7C-46FC-866C-E3E89506D3F0}"/>
-              </a:ext>
-            </a:extLst>
-          </p:cNvPr>
-          <p:cNvSpPr>
-            <a:spLocks xmlns:a="http://schemas.openxmlformats.org/drawingml/2006/main" noGrp="1"/>
-          </p:cNvSpPr>
-          <p:nvPr/>
-        </p:nvSpPr>
-        <p:spPr>
-          <a:xfrm xmlns:a="http://schemas.openxmlformats.org/drawingml/2006/main">
-            <a:off x="6267450" y="3009900"/>
-            <a:ext cx="2724150" cy="704850"/>
-          </a:xfrm>
-          <a:prstGeom xmlns:a="http://schemas.openxmlformats.org/drawingml/2006/main" prst="roundRect">
-            <a:avLst>
-              <a:gd name="adj" fmla="val 16216"/>
-            </a:avLst>
-          </a:prstGeom>
-          <a:solidFill xmlns:a="http://schemas.openxmlformats.org/drawingml/2006/main">
-            <a:srgbClr val="062433"/>
-          </a:solidFill>
-          <a:ln xmlns:a="http://schemas.openxmlformats.org/drawingml/2006/main" w="9525">
-            <a:solidFill>
-              <a:srgbClr val="062433"/>
-            </a:solidFill>
-            <a:prstDash val="solid"/>
-          </a:ln>
-        </p:spPr>
-      </p:sp>
-      <p:sp>
-        <p:nvSpPr>
-          <p:cNvPr id="15" name="">
-            <a:extLst xmlns:a="http://schemas.openxmlformats.org/drawingml/2006/main">
-              <a:ext uri="{FF2B5EF4-FFF2-40B4-BE49-F238E27FC236}">
-                <a16:creationId xmlns:a16="http://schemas.microsoft.com/office/drawing/2014/main" id="{23DA1344-7C73-4F1F-9D24-59FEB65C1E97}"/>
-              </a:ext>
-            </a:extLst>
-          </p:cNvPr>
-          <p:cNvSpPr>
-            <a:spLocks xmlns:a="http://schemas.openxmlformats.org/drawingml/2006/main" noGrp="1"/>
-          </p:cNvSpPr>
-          <p:nvPr/>
-        </p:nvSpPr>
-        <p:spPr>
-          <a:xfrm xmlns:a="http://schemas.openxmlformats.org/drawingml/2006/main">
-            <a:off x="6496050" y="3143250"/>
-            <a:ext cx="2266950" cy="438150"/>
-          </a:xfrm>
-          <a:prstGeom xmlns:a="http://schemas.openxmlformats.org/drawingml/2006/main" prst="rect">
-            <a:avLst/>
-          </a:prstGeom>
-          <a:noFill xmlns:a="http://schemas.openxmlformats.org/drawingml/2006/main"/>
-          <a:ln xmlns:a="http://schemas.openxmlformats.org/drawingml/2006/main" w="0">
-            <a:noFill/>
-            <a:prstDash val="solid"/>
-          </a:ln>
-        </p:spPr>
-        <p:txBody>
-          <a:bodyPr xmlns:a="http://schemas.openxmlformats.org/drawingml/2006/main" wrap="square" lIns="0" tIns="0" rIns="0" bIns="0" anchor="ctr">
-            <a:normAutofit fontScale="100000"/>
-          </a:bodyPr>
-          <a:lstStyle xmlns:a="http://schemas.openxmlformats.org/drawingml/2006/main"/>
-          <a:p xmlns:a="http://schemas.openxmlformats.org/drawingml/2006/main">
-            <a:pPr algn="ctr">
-              <a:lnSpc>
-                <a:spcPct val="100000"/>
-              </a:lnSpc>
-              <a:buNone/>
-              <a:defRPr sz="1500" b="1">
-                <a:solidFill>
-                  <a:srgbClr val="FFFFFF"/>
-                </a:solidFill>
-                <a:latin typeface="Calibri"/>
-                <a:ea typeface="Calibri"/>
-                <a:cs typeface="Calibri"/>
-              </a:defRPr>
-            </a:pPr>
-            <a:r>
-              <a:rPr sz="1500" b="1">
-                <a:solidFill>
-                  <a:srgbClr val="FFFFFF"/>
-                </a:solidFill>
-                <a:latin typeface="Calibri"/>
-                <a:ea typeface="Calibri"/>
-                <a:cs typeface="Calibri"/>
-              </a:rPr>
-              <a:t>q · d / (‖q‖ · ‖d‖)</a:t>
-            </a:r>
-          </a:p>
-        </p:txBody>
-      </p:sp>
-      <p:sp>
-        <p:nvSpPr>
-          <p:cNvPr id="16" name="child-0">
-            <a:extLst xmlns:a="http://schemas.openxmlformats.org/drawingml/2006/main">
-              <a:ext uri="{FF2B5EF4-FFF2-40B4-BE49-F238E27FC236}">
-                <a16:creationId xmlns:a16="http://schemas.microsoft.com/office/drawing/2014/main" id="{49FF913A-8883-45CD-B244-354955ACD0E3}"/>
-              </a:ext>
-            </a:extLst>
-          </p:cNvPr>
-          <p:cNvSpPr>
-            <a:spLocks xmlns:a="http://schemas.openxmlformats.org/drawingml/2006/main" noGrp="1"/>
-          </p:cNvSpPr>
-          <p:nvPr/>
-        </p:nvSpPr>
-        <p:spPr>
-          <a:xfrm xmlns:a="http://schemas.openxmlformats.org/drawingml/2006/main">
-            <a:off x="5791200" y="4476750"/>
-            <a:ext cx="1219200" cy="723900"/>
-          </a:xfrm>
-          <a:prstGeom xmlns:a="http://schemas.openxmlformats.org/drawingml/2006/main" prst="roundRect">
-            <a:avLst>
-              <a:gd name="adj" fmla="val 15789"/>
-            </a:avLst>
-          </a:prstGeom>
-          <a:solidFill xmlns:a="http://schemas.openxmlformats.org/drawingml/2006/main">
-            <a:srgbClr val="FFFFFF"/>
-          </a:solidFill>
-          <a:ln xmlns:a="http://schemas.openxmlformats.org/drawingml/2006/main" w="19050">
-            <a:solidFill>
-              <a:srgbClr val="00A2EB"/>
-            </a:solidFill>
-            <a:prstDash val="solid"/>
-          </a:ln>
-        </p:spPr>
-      </p:sp>
-      <p:sp>
-        <p:nvSpPr>
-          <p:cNvPr id="17" name="">
-            <a:extLst xmlns:a="http://schemas.openxmlformats.org/drawingml/2006/main">
-              <a:ext uri="{FF2B5EF4-FFF2-40B4-BE49-F238E27FC236}">
-                <a16:creationId xmlns:a16="http://schemas.microsoft.com/office/drawing/2014/main" id="{573589B9-91C1-4446-A372-5FFFE4BDCBC9}"/>
-              </a:ext>
-            </a:extLst>
-          </p:cNvPr>
-          <p:cNvSpPr>
-            <a:spLocks xmlns:a="http://schemas.openxmlformats.org/drawingml/2006/main" noGrp="1"/>
-          </p:cNvSpPr>
-          <p:nvPr/>
-        </p:nvSpPr>
-        <p:spPr>
-          <a:xfrm xmlns:a="http://schemas.openxmlformats.org/drawingml/2006/main">
-            <a:off x="5886450" y="4629150"/>
-            <a:ext cx="1028700" cy="400050"/>
-          </a:xfrm>
-          <a:prstGeom xmlns:a="http://schemas.openxmlformats.org/drawingml/2006/main" prst="rect">
-            <a:avLst/>
-          </a:prstGeom>
-          <a:noFill xmlns:a="http://schemas.openxmlformats.org/drawingml/2006/main"/>
-          <a:ln xmlns:a="http://schemas.openxmlformats.org/drawingml/2006/main" w="0">
-            <a:noFill/>
-            <a:prstDash val="solid"/>
-          </a:ln>
-        </p:spPr>
-        <p:txBody>
-          <a:bodyPr xmlns:a="http://schemas.openxmlformats.org/drawingml/2006/main" wrap="square" lIns="0" tIns="0" rIns="0" bIns="0" anchor="ctr">
-            <a:normAutofit fontScale="100000"/>
-          </a:bodyPr>
-          <a:lstStyle xmlns:a="http://schemas.openxmlformats.org/drawingml/2006/main"/>
-          <a:p xmlns:a="http://schemas.openxmlformats.org/drawingml/2006/main">
-            <a:pPr algn="ctr">
-              <a:lnSpc>
-                <a:spcPct val="100000"/>
-              </a:lnSpc>
-              <a:buNone/>
-              <a:defRPr sz="1275" b="1">
-                <a:solidFill>
-                  <a:srgbClr val="051C2A"/>
-                </a:solidFill>
-                <a:latin typeface="Calibri"/>
-                <a:ea typeface="Calibri"/>
-                <a:cs typeface="Calibri"/>
-              </a:defRPr>
-            </a:pPr>
-            <a:r>
-              <a:rPr sz="1275" b="1">
-                <a:solidFill>
-                  <a:srgbClr val="051C2A"/>
-                </a:solidFill>
-                <a:latin typeface="Calibri"/>
-                <a:ea typeface="Calibri"/>
-                <a:cs typeface="Calibri"/>
-              </a:rPr>
-              <a:t>−1</a:t>
-            </a:r>
-          </a:p>
-        </p:txBody>
-      </p:sp>
-      <p:sp>
-        <p:nvSpPr>
-          <p:cNvPr id="18" name="child-1">
-            <a:extLst xmlns:a="http://schemas.openxmlformats.org/drawingml/2006/main">
-              <a:ext uri="{FF2B5EF4-FFF2-40B4-BE49-F238E27FC236}">
-                <a16:creationId xmlns:a16="http://schemas.microsoft.com/office/drawing/2014/main" id="{7ADCF829-81FB-4C43-A5F1-10A73F9F1EFA}"/>
-              </a:ext>
-            </a:extLst>
-          </p:cNvPr>
-          <p:cNvSpPr>
-            <a:spLocks xmlns:a="http://schemas.openxmlformats.org/drawingml/2006/main" noGrp="1"/>
-          </p:cNvSpPr>
-          <p:nvPr/>
-        </p:nvSpPr>
-        <p:spPr>
-          <a:xfrm xmlns:a="http://schemas.openxmlformats.org/drawingml/2006/main">
-            <a:off x="7258050" y="4476750"/>
-            <a:ext cx="1219200" cy="723900"/>
-          </a:xfrm>
-          <a:prstGeom xmlns:a="http://schemas.openxmlformats.org/drawingml/2006/main" prst="roundRect">
-            <a:avLst>
-              <a:gd name="adj" fmla="val 15789"/>
-            </a:avLst>
-          </a:prstGeom>
-          <a:solidFill xmlns:a="http://schemas.openxmlformats.org/drawingml/2006/main">
-            <a:srgbClr val="FFFFFF"/>
-          </a:solidFill>
-          <a:ln xmlns:a="http://schemas.openxmlformats.org/drawingml/2006/main" w="19050">
-            <a:solidFill>
-              <a:srgbClr val="00A2EB"/>
-            </a:solidFill>
-            <a:prstDash val="solid"/>
-          </a:ln>
-        </p:spPr>
-      </p:sp>
-      <p:sp>
-        <p:nvSpPr>
-          <p:cNvPr id="19" name="">
-            <a:extLst xmlns:a="http://schemas.openxmlformats.org/drawingml/2006/main">
-              <a:ext uri="{FF2B5EF4-FFF2-40B4-BE49-F238E27FC236}">
-                <a16:creationId xmlns:a16="http://schemas.microsoft.com/office/drawing/2014/main" id="{114D7249-C284-46C6-A639-E3A0E60C64E2}"/>
-              </a:ext>
-            </a:extLst>
-          </p:cNvPr>
-          <p:cNvSpPr>
-            <a:spLocks xmlns:a="http://schemas.openxmlformats.org/drawingml/2006/main" noGrp="1"/>
-          </p:cNvSpPr>
-          <p:nvPr/>
-        </p:nvSpPr>
-        <p:spPr>
-          <a:xfrm xmlns:a="http://schemas.openxmlformats.org/drawingml/2006/main">
-            <a:off x="7353300" y="4629150"/>
-            <a:ext cx="1028700" cy="400050"/>
-          </a:xfrm>
-          <a:prstGeom xmlns:a="http://schemas.openxmlformats.org/drawingml/2006/main" prst="rect">
-            <a:avLst/>
-          </a:prstGeom>
-          <a:noFill xmlns:a="http://schemas.openxmlformats.org/drawingml/2006/main"/>
-          <a:ln xmlns:a="http://schemas.openxmlformats.org/drawingml/2006/main" w="0">
-            <a:noFill/>
-            <a:prstDash val="solid"/>
-          </a:ln>
-        </p:spPr>
-        <p:txBody>
-          <a:bodyPr xmlns:a="http://schemas.openxmlformats.org/drawingml/2006/main" wrap="square" lIns="0" tIns="0" rIns="0" bIns="0" anchor="ctr">
-            <a:normAutofit fontScale="100000"/>
-          </a:bodyPr>
-          <a:lstStyle xmlns:a="http://schemas.openxmlformats.org/drawingml/2006/main"/>
-          <a:p xmlns:a="http://schemas.openxmlformats.org/drawingml/2006/main">
-            <a:pPr algn="ctr">
-              <a:lnSpc>
-                <a:spcPct val="100000"/>
-              </a:lnSpc>
-              <a:buNone/>
-              <a:defRPr sz="1275" b="1">
-                <a:solidFill>
-                  <a:srgbClr val="051C2A"/>
-                </a:solidFill>
-                <a:latin typeface="Calibri"/>
-                <a:ea typeface="Calibri"/>
-                <a:cs typeface="Calibri"/>
-              </a:defRPr>
-            </a:pPr>
-            <a:r>
-              <a:rPr sz="1275" b="1">
-                <a:solidFill>
-                  <a:srgbClr val="051C2A"/>
-                </a:solidFill>
-                <a:latin typeface="Calibri"/>
-                <a:ea typeface="Calibri"/>
-                <a:cs typeface="Calibri"/>
-              </a:rPr>
-              <a:t>0</a:t>
-            </a:r>
-          </a:p>
-        </p:txBody>
-      </p:sp>
-      <p:sp>
-        <p:nvSpPr>
-          <p:cNvPr id="20" name="child-2">
-            <a:extLst xmlns:a="http://schemas.openxmlformats.org/drawingml/2006/main">
-              <a:ext uri="{FF2B5EF4-FFF2-40B4-BE49-F238E27FC236}">
-                <a16:creationId xmlns:a16="http://schemas.microsoft.com/office/drawing/2014/main" id="{D221F047-9582-4D03-9D8B-65910E5A16CC}"/>
-              </a:ext>
-            </a:extLst>
-          </p:cNvPr>
-          <p:cNvSpPr>
-            <a:spLocks xmlns:a="http://schemas.openxmlformats.org/drawingml/2006/main" noGrp="1"/>
-          </p:cNvSpPr>
-          <p:nvPr/>
-        </p:nvSpPr>
-        <p:spPr>
-          <a:xfrm xmlns:a="http://schemas.openxmlformats.org/drawingml/2006/main">
-            <a:off x="8724900" y="4476750"/>
-            <a:ext cx="1219200" cy="723900"/>
-          </a:xfrm>
-          <a:prstGeom xmlns:a="http://schemas.openxmlformats.org/drawingml/2006/main" prst="roundRect">
-            <a:avLst>
-              <a:gd name="adj" fmla="val 15789"/>
-            </a:avLst>
-          </a:prstGeom>
-          <a:solidFill xmlns:a="http://schemas.openxmlformats.org/drawingml/2006/main">
-            <a:srgbClr val="FFFFFF"/>
-          </a:solidFill>
-          <a:ln xmlns:a="http://schemas.openxmlformats.org/drawingml/2006/main" w="19050">
-            <a:solidFill>
-              <a:srgbClr val="00A2EB"/>
-            </a:solidFill>
-            <a:prstDash val="solid"/>
-          </a:ln>
-        </p:spPr>
-      </p:sp>
-      <p:sp>
-        <p:nvSpPr>
-          <p:cNvPr id="21" name="">
-            <a:extLst xmlns:a="http://schemas.openxmlformats.org/drawingml/2006/main">
-              <a:ext uri="{FF2B5EF4-FFF2-40B4-BE49-F238E27FC236}">
-                <a16:creationId xmlns:a16="http://schemas.microsoft.com/office/drawing/2014/main" id="{ADE71631-E8CD-4C8E-83BE-21A31097CDEF}"/>
-              </a:ext>
-            </a:extLst>
-          </p:cNvPr>
-          <p:cNvSpPr>
-            <a:spLocks xmlns:a="http://schemas.openxmlformats.org/drawingml/2006/main" noGrp="1"/>
-          </p:cNvSpPr>
-          <p:nvPr/>
-        </p:nvSpPr>
-        <p:spPr>
-          <a:xfrm xmlns:a="http://schemas.openxmlformats.org/drawingml/2006/main">
-            <a:off x="8820150" y="4629150"/>
-            <a:ext cx="1028700" cy="400050"/>
-          </a:xfrm>
-          <a:prstGeom xmlns:a="http://schemas.openxmlformats.org/drawingml/2006/main" prst="rect">
-            <a:avLst/>
-          </a:prstGeom>
-          <a:noFill xmlns:a="http://schemas.openxmlformats.org/drawingml/2006/main"/>
-          <a:ln xmlns:a="http://schemas.openxmlformats.org/drawingml/2006/main" w="0">
-            <a:noFill/>
-            <a:prstDash val="solid"/>
-          </a:ln>
-        </p:spPr>
-        <p:txBody>
-          <a:bodyPr xmlns:a="http://schemas.openxmlformats.org/drawingml/2006/main" wrap="square" lIns="0" tIns="0" rIns="0" bIns="0" anchor="ctr">
-            <a:normAutofit fontScale="100000"/>
-          </a:bodyPr>
-          <a:lstStyle xmlns:a="http://schemas.openxmlformats.org/drawingml/2006/main"/>
-          <a:p xmlns:a="http://schemas.openxmlformats.org/drawingml/2006/main">
-            <a:pPr algn="ctr">
-              <a:lnSpc>
-                <a:spcPct val="100000"/>
-              </a:lnSpc>
-              <a:buNone/>
-              <a:defRPr sz="1275" b="1">
-                <a:solidFill>
-                  <a:srgbClr val="051C2A"/>
-                </a:solidFill>
-                <a:latin typeface="Calibri"/>
-                <a:ea typeface="Calibri"/>
-                <a:cs typeface="Calibri"/>
-              </a:defRPr>
-            </a:pPr>
-            <a:r>
-              <a:rPr sz="1275" b="1">
-                <a:solidFill>
-                  <a:srgbClr val="051C2A"/>
-                </a:solidFill>
-                <a:latin typeface="Calibri"/>
-                <a:ea typeface="Calibri"/>
-                <a:cs typeface="Calibri"/>
-              </a:rPr>
-              <a:t>+1</a:t>
-            </a:r>
-          </a:p>
-        </p:txBody>
-      </p:sp>
-      <p:cxnSp>
-        <p:nvCxnSpPr>
-          <p:cNvPr id="398" name=""/>
-          <p:cNvCxnSpPr>
-            <a:stCxn xmlns:a="http://schemas.openxmlformats.org/drawingml/2006/main" id="14" idx="2"/>
-            <a:endCxn xmlns:a="http://schemas.openxmlformats.org/drawingml/2006/main" id="16" idx="0"/>
-          </p:cNvCxnSpPr>
-          <p:nvPr/>
-        </p:nvCxnSpPr>
-        <p:spPr>
-          <a:xfrm xmlns:a="http://schemas.openxmlformats.org/drawingml/2006/main" flipH="1">
-            <a:off x="6400800" y="3714750"/>
-            <a:ext cx="1228725" cy="762000"/>
-          </a:xfrm>
-          <a:prstGeom xmlns:a="http://schemas.openxmlformats.org/drawingml/2006/main" prst="straightConnector1">
-            <a:avLst/>
-          </a:prstGeom>
-          <a:ln xmlns:a="http://schemas.openxmlformats.org/drawingml/2006/main" w="19050">
-            <a:solidFill>
-              <a:srgbClr val="00A2EB"/>
-            </a:solidFill>
-            <a:prstDash val="solid"/>
-            <a:tailEnd type="triangle" w="sm" len="sm"/>
-          </a:ln>
-        </p:spPr>
-      </p:cxnSp>
-      <p:cxnSp>
-        <p:nvCxnSpPr>
-          <p:cNvPr id="399" name=""/>
-          <p:cNvCxnSpPr>
-            <a:stCxn xmlns:a="http://schemas.openxmlformats.org/drawingml/2006/main" id="14" idx="2"/>
-            <a:endCxn xmlns:a="http://schemas.openxmlformats.org/drawingml/2006/main" id="18" idx="0"/>
-          </p:cNvCxnSpPr>
-          <p:nvPr/>
-        </p:nvCxnSpPr>
-        <p:spPr>
-          <a:xfrm xmlns:a="http://schemas.openxmlformats.org/drawingml/2006/main">
-            <a:off x="7629525" y="3714750"/>
-            <a:ext cx="238125" cy="762000"/>
-          </a:xfrm>
-          <a:prstGeom xmlns:a="http://schemas.openxmlformats.org/drawingml/2006/main" prst="straightConnector1">
-            <a:avLst/>
-          </a:prstGeom>
-          <a:ln xmlns:a="http://schemas.openxmlformats.org/drawingml/2006/main" w="19050">
-            <a:solidFill>
-              <a:srgbClr val="00A2EB"/>
-            </a:solidFill>
-            <a:prstDash val="solid"/>
-            <a:tailEnd type="triangle" w="sm" len="sm"/>
-          </a:ln>
-        </p:spPr>
-      </p:cxnSp>
-      <p:cxnSp>
-        <p:nvCxnSpPr>
-          <p:cNvPr id="400" name=""/>
-          <p:cNvCxnSpPr>
-            <a:stCxn xmlns:a="http://schemas.openxmlformats.org/drawingml/2006/main" id="14" idx="2"/>
-            <a:endCxn xmlns:a="http://schemas.openxmlformats.org/drawingml/2006/main" id="20" idx="0"/>
-          </p:cNvCxnSpPr>
-          <p:nvPr/>
-        </p:nvCxnSpPr>
-        <p:spPr>
-          <a:xfrm xmlns:a="http://schemas.openxmlformats.org/drawingml/2006/main">
-            <a:off x="7629525" y="3714750"/>
-            <a:ext cx="1704975" cy="762000"/>
-          </a:xfrm>
-          <a:prstGeom xmlns:a="http://schemas.openxmlformats.org/drawingml/2006/main" prst="straightConnector1">
-            <a:avLst/>
-          </a:prstGeom>
-          <a:ln xmlns:a="http://schemas.openxmlformats.org/drawingml/2006/main" w="19050">
-            <a:solidFill>
-              <a:srgbClr val="00A2EB"/>
-            </a:solidFill>
-            <a:prstDash val="solid"/>
-            <a:tailEnd type="triangle" w="sm" len="sm"/>
-          </a:ln>
-        </p:spPr>
-      </p:cxnSp>
-      <p:sp>
-        <p:nvSpPr>
-          <p:cNvPr id="25" name="">
-            <a:extLst xmlns:a="http://schemas.openxmlformats.org/drawingml/2006/main">
-              <a:ext uri="{FF2B5EF4-FFF2-40B4-BE49-F238E27FC236}">
-                <a16:creationId xmlns:a16="http://schemas.microsoft.com/office/drawing/2014/main" id="{B459A2EB-91A2-485C-8769-4414CA087B5D}"/>
-              </a:ext>
-            </a:extLst>
-          </p:cNvPr>
-          <p:cNvSpPr>
-            <a:spLocks xmlns:a="http://schemas.openxmlformats.org/drawingml/2006/main" noGrp="1"/>
-          </p:cNvSpPr>
-          <p:nvPr/>
-        </p:nvSpPr>
-        <p:spPr>
-          <a:xfrm xmlns:a="http://schemas.openxmlformats.org/drawingml/2006/main">
-            <a:off x="5905500" y="5524500"/>
-            <a:ext cx="4038600" cy="323850"/>
-          </a:xfrm>
-          <a:prstGeom xmlns:a="http://schemas.openxmlformats.org/drawingml/2006/main" prst="rect">
-            <a:avLst/>
-          </a:prstGeom>
-          <a:noFill xmlns:a="http://schemas.openxmlformats.org/drawingml/2006/main"/>
-          <a:ln xmlns:a="http://schemas.openxmlformats.org/drawingml/2006/main" w="0">
-            <a:noFill/>
-            <a:prstDash val="solid"/>
-          </a:ln>
-        </p:spPr>
-        <p:txBody>
-          <a:bodyPr xmlns:a="http://schemas.openxmlformats.org/drawingml/2006/main" wrap="square" lIns="0" tIns="0" rIns="0" bIns="0" anchor="ctr">
-            <a:normAutofit fontScale="100000"/>
-          </a:bodyPr>
-          <a:lstStyle xmlns:a="http://schemas.openxmlformats.org/drawingml/2006/main"/>
-          <a:p xmlns:a="http://schemas.openxmlformats.org/drawingml/2006/main">
-            <a:pPr algn="ctr">
-              <a:lnSpc>
-                <a:spcPct val="100000"/>
-              </a:lnSpc>
-              <a:buNone/>
-              <a:defRPr sz="1425" b="1">
-                <a:solidFill>
-                  <a:srgbClr val="051C2A"/>
-                </a:solidFill>
-                <a:latin typeface="Calibri"/>
-                <a:ea typeface="Calibri"/>
-                <a:cs typeface="Calibri"/>
-              </a:defRPr>
-            </a:pPr>
-            <a:r>
-              <a:rPr sz="1425" b="1">
-                <a:solidFill>
-                  <a:srgbClr val="051C2A"/>
-                </a:solidFill>
-                <a:latin typeface="Calibri"/>
-                <a:ea typeface="Calibri"/>
-                <a:cs typeface="Calibri"/>
-              </a:rPr>
-              <a:t>opposed · orthogonal · aligned</a:t>
-            </a:r>
-          </a:p>
-        </p:txBody>
-      </p:sp>
-      <p:sp>
-        <p:nvSpPr>
-          <p:cNvPr id="26" name="">
-            <a:extLst xmlns:a="http://schemas.openxmlformats.org/drawingml/2006/main">
-              <a:ext uri="{FF2B5EF4-FFF2-40B4-BE49-F238E27FC236}">
-                <a16:creationId xmlns:a16="http://schemas.microsoft.com/office/drawing/2014/main" id="{811A9A77-C203-4FF0-B40D-A9FCCEC00A04}"/>
-              </a:ext>
-            </a:extLst>
-          </p:cNvPr>
-          <p:cNvSpPr>
-            <a:spLocks xmlns:a="http://schemas.openxmlformats.org/drawingml/2006/main" noGrp="1"/>
-          </p:cNvSpPr>
-          <p:nvPr/>
-        </p:nvSpPr>
-        <p:spPr>
-          <a:xfrm xmlns:a="http://schemas.openxmlformats.org/drawingml/2006/main">
-            <a:off x="10725150" y="2438400"/>
-            <a:ext cx="3429000" cy="285750"/>
-          </a:xfrm>
-          <a:prstGeom xmlns:a="http://schemas.openxmlformats.org/drawingml/2006/main" prst="rect">
-            <a:avLst/>
-          </a:prstGeom>
-          <a:noFill xmlns:a="http://schemas.openxmlformats.org/drawingml/2006/main"/>
-          <a:ln xmlns:a="http://schemas.openxmlformats.org/drawingml/2006/main" w="0">
-            <a:noFill/>
-            <a:prstDash val="solid"/>
-          </a:ln>
-        </p:spPr>
-        <p:txBody>
-          <a:bodyPr xmlns:a="http://schemas.openxmlformats.org/drawingml/2006/main" wrap="square" lIns="0" tIns="0" rIns="0" bIns="0" anchor="ctr">
-            <a:noAutofit/>
-          </a:bodyPr>
-          <a:lstStyle xmlns:a="http://schemas.openxmlformats.org/drawingml/2006/main"/>
-          <a:p xmlns:a="http://schemas.openxmlformats.org/drawingml/2006/main">
-            <a:pPr algn="l">
-              <a:lnSpc>
-                <a:spcPct val="100000"/>
-              </a:lnSpc>
-              <a:buNone/>
-              <a:defRPr sz="1275" b="1">
-                <a:solidFill>
-                  <a:srgbClr val="1F40CB"/>
-                </a:solidFill>
-                <a:latin typeface="Calibri"/>
-                <a:ea typeface="Calibri"/>
-                <a:cs typeface="Calibri"/>
-              </a:defRPr>
-            </a:pPr>
-            <a:r>
-              <a:rPr sz="1800" b="1">
-                <a:solidFill>
-                  <a:srgbClr val="1F40CB"/>
-                </a:solidFill>
-                <a:latin typeface="Calibri"/>
-                <a:ea typeface="Calibri"/>
-                <a:cs typeface="Calibri"/>
-              </a:rPr>
-              <a:t>INTERPRETATION</a:t>
-            </a:r>
-          </a:p>
-        </p:txBody>
-      </p:sp>
-      <p:sp>
-        <p:nvSpPr>
-          <p:cNvPr id="27" name="context-prefix">
-            <a:extLst xmlns:a="http://schemas.openxmlformats.org/drawingml/2006/main">
-              <a:ext uri="{FF2B5EF4-FFF2-40B4-BE49-F238E27FC236}">
-                <a16:creationId xmlns:a16="http://schemas.microsoft.com/office/drawing/2014/main" id="{394DF3A4-55D3-49A5-B189-7898A8E7DBB5}"/>
-              </a:ext>
-            </a:extLst>
-          </p:cNvPr>
-          <p:cNvSpPr>
-            <a:spLocks xmlns:a="http://schemas.openxmlformats.org/drawingml/2006/main" noGrp="1"/>
-          </p:cNvSpPr>
-          <p:nvPr/>
-        </p:nvSpPr>
-        <p:spPr>
-          <a:xfrm xmlns:a="http://schemas.openxmlformats.org/drawingml/2006/main">
-            <a:off x="10725150" y="3009900"/>
-            <a:ext cx="3409950" cy="895350"/>
-          </a:xfrm>
-          <a:prstGeom xmlns:a="http://schemas.openxmlformats.org/drawingml/2006/main" prst="roundRect">
-            <a:avLst>
-              <a:gd name="adj" fmla="val 12766"/>
-            </a:avLst>
-          </a:prstGeom>
-          <a:solidFill xmlns:a="http://schemas.openxmlformats.org/drawingml/2006/main">
-            <a:srgbClr val="E8F6FB"/>
-          </a:solidFill>
-          <a:ln xmlns:a="http://schemas.openxmlformats.org/drawingml/2006/main" w="9525">
-            <a:solidFill>
-              <a:srgbClr val="00A2EB"/>
-            </a:solidFill>
-            <a:prstDash val="solid"/>
-          </a:ln>
-        </p:spPr>
-      </p:sp>
-      <p:sp>
-        <p:nvSpPr>
-          <p:cNvPr id="28" name="">
-            <a:extLst xmlns:a="http://schemas.openxmlformats.org/drawingml/2006/main">
-              <a:ext uri="{FF2B5EF4-FFF2-40B4-BE49-F238E27FC236}">
-                <a16:creationId xmlns:a16="http://schemas.microsoft.com/office/drawing/2014/main" id="{8A481E31-07AB-413F-A9BC-2CCE1BE44056}"/>
-              </a:ext>
-            </a:extLst>
-          </p:cNvPr>
-          <p:cNvSpPr>
-            <a:spLocks xmlns:a="http://schemas.openxmlformats.org/drawingml/2006/main" noGrp="1"/>
-          </p:cNvSpPr>
-          <p:nvPr/>
-        </p:nvSpPr>
-        <p:spPr>
-          <a:xfrm xmlns:a="http://schemas.openxmlformats.org/drawingml/2006/main">
-            <a:off x="10934700" y="3162300"/>
-            <a:ext cx="2990850" cy="285750"/>
-          </a:xfrm>
-          <a:prstGeom xmlns:a="http://schemas.openxmlformats.org/drawingml/2006/main" prst="rect">
-            <a:avLst/>
-          </a:prstGeom>
-          <a:noFill xmlns:a="http://schemas.openxmlformats.org/drawingml/2006/main"/>
-          <a:ln xmlns:a="http://schemas.openxmlformats.org/drawingml/2006/main" w="0">
-            <a:noFill/>
-            <a:prstDash val="solid"/>
-          </a:ln>
-        </p:spPr>
-        <p:txBody>
-          <a:bodyPr xmlns:a="http://schemas.openxmlformats.org/drawingml/2006/main" wrap="square" lIns="0" tIns="0" rIns="0" bIns="0" anchor="ctr">
-            <a:noAutofit/>
-          </a:bodyPr>
-          <a:lstStyle xmlns:a="http://schemas.openxmlformats.org/drawingml/2006/main"/>
-          <a:p xmlns:a="http://schemas.openxmlformats.org/drawingml/2006/main">
-            <a:pPr algn="ctr">
-              <a:lnSpc>
-                <a:spcPct val="100000"/>
-              </a:lnSpc>
-              <a:buNone/>
-              <a:defRPr sz="1350" b="1">
-                <a:solidFill>
-                  <a:srgbClr val="1F40CB"/>
-                </a:solidFill>
-                <a:latin typeface="Calibri"/>
-                <a:ea typeface="Calibri"/>
-                <a:cs typeface="Calibri"/>
-              </a:defRPr>
-            </a:pPr>
-            <a:r>
-              <a:rPr sz="1800" b="1">
-                <a:solidFill>
-                  <a:srgbClr val="1F40CB"/>
-                </a:solidFill>
-                <a:latin typeface="Calibri"/>
-                <a:ea typeface="Calibri"/>
-                <a:cs typeface="Calibri"/>
-              </a:rPr>
-              <a:t>Relative alignment</a:t>
-            </a:r>
-          </a:p>
-        </p:txBody>
-      </p:sp>
-      <p:sp>
-        <p:nvSpPr>
-          <p:cNvPr id="29" name="">
-            <a:extLst xmlns:a="http://schemas.openxmlformats.org/drawingml/2006/main">
-              <a:ext uri="{FF2B5EF4-FFF2-40B4-BE49-F238E27FC236}">
-                <a16:creationId xmlns:a16="http://schemas.microsoft.com/office/drawing/2014/main" id="{0340ED50-2261-4CBA-A9F0-AC58EB913FA2}"/>
-              </a:ext>
-            </a:extLst>
-          </p:cNvPr>
-          <p:cNvSpPr>
-            <a:spLocks xmlns:a="http://schemas.openxmlformats.org/drawingml/2006/main" noGrp="1"/>
-          </p:cNvSpPr>
-          <p:nvPr/>
-        </p:nvSpPr>
-        <p:spPr>
-          <a:xfrm xmlns:a="http://schemas.openxmlformats.org/drawingml/2006/main">
-            <a:off x="10934700" y="3486150"/>
-            <a:ext cx="2990850" cy="266700"/>
-          </a:xfrm>
-          <a:prstGeom xmlns:a="http://schemas.openxmlformats.org/drawingml/2006/main" prst="rect">
-            <a:avLst/>
-          </a:prstGeom>
-          <a:noFill xmlns:a="http://schemas.openxmlformats.org/drawingml/2006/main"/>
-          <a:ln xmlns:a="http://schemas.openxmlformats.org/drawingml/2006/main" w="0">
-            <a:noFill/>
-            <a:prstDash val="solid"/>
-          </a:ln>
-        </p:spPr>
-        <p:txBody>
-          <a:bodyPr xmlns:a="http://schemas.openxmlformats.org/drawingml/2006/main" wrap="square" lIns="0" tIns="0" rIns="0" bIns="0" anchor="ctr">
-            <a:normAutofit fontScale="100000"/>
-          </a:bodyPr>
-          <a:lstStyle xmlns:a="http://schemas.openxmlformats.org/drawingml/2006/main"/>
-          <a:p xmlns:a="http://schemas.openxmlformats.org/drawingml/2006/main">
-            <a:pPr algn="ctr">
-              <a:lnSpc>
-                <a:spcPct val="100000"/>
-              </a:lnSpc>
-              <a:buNone/>
-              <a:defRPr sz="1350" b="0">
-                <a:solidFill>
-                  <a:srgbClr val="051C2A"/>
-                </a:solidFill>
-                <a:latin typeface="Calibri"/>
-                <a:ea typeface="Calibri"/>
-                <a:cs typeface="Calibri"/>
-              </a:defRPr>
-            </a:pPr>
-            <a:r>
-              <a:rPr sz="1350" b="0">
-                <a:solidFill>
-                  <a:srgbClr val="051C2A"/>
-                </a:solidFill>
-                <a:latin typeface="Calibri"/>
-                <a:ea typeface="Calibri"/>
-                <a:cs typeface="Calibri"/>
-              </a:rPr>
-              <a:t>one embedding space</a:t>
-            </a:r>
-          </a:p>
-        </p:txBody>
-      </p:sp>
-      <p:sp>
-        <p:nvSpPr>
-          <p:cNvPr id="30" name="proposition">
-            <a:extLst xmlns:a="http://schemas.openxmlformats.org/drawingml/2006/main">
-              <a:ext uri="{FF2B5EF4-FFF2-40B4-BE49-F238E27FC236}">
-                <a16:creationId xmlns:a16="http://schemas.microsoft.com/office/drawing/2014/main" id="{72273FB0-E051-4A9D-ACF9-E2567C1DB770}"/>
-              </a:ext>
-            </a:extLst>
-          </p:cNvPr>
-          <p:cNvSpPr>
-            <a:spLocks xmlns:a="http://schemas.openxmlformats.org/drawingml/2006/main" noGrp="1"/>
-          </p:cNvSpPr>
-          <p:nvPr/>
-        </p:nvSpPr>
-        <p:spPr>
-          <a:xfrm xmlns:a="http://schemas.openxmlformats.org/drawingml/2006/main">
-            <a:off x="10725150" y="4343400"/>
-            <a:ext cx="3409950" cy="1162050"/>
-          </a:xfrm>
-          <a:prstGeom xmlns:a="http://schemas.openxmlformats.org/drawingml/2006/main" prst="roundRect">
-            <a:avLst>
-              <a:gd name="adj" fmla="val 9836"/>
-            </a:avLst>
-          </a:prstGeom>
-          <a:solidFill xmlns:a="http://schemas.openxmlformats.org/drawingml/2006/main">
-            <a:srgbClr val="FFF1E5"/>
-          </a:solidFill>
-          <a:ln xmlns:a="http://schemas.openxmlformats.org/drawingml/2006/main" w="9525">
-            <a:solidFill>
-              <a:srgbClr val="F07D00"/>
-            </a:solidFill>
-            <a:prstDash val="solid"/>
-          </a:ln>
-        </p:spPr>
-      </p:sp>
-      <p:sp>
-        <p:nvSpPr>
-          <p:cNvPr id="31" name="">
-            <a:extLst xmlns:a="http://schemas.openxmlformats.org/drawingml/2006/main">
-              <a:ext uri="{FF2B5EF4-FFF2-40B4-BE49-F238E27FC236}">
-                <a16:creationId xmlns:a16="http://schemas.microsoft.com/office/drawing/2014/main" id="{B2B58602-B779-49B2-B2C2-E7F6692D3E12}"/>
-              </a:ext>
-            </a:extLst>
-          </p:cNvPr>
-          <p:cNvSpPr>
-            <a:spLocks xmlns:a="http://schemas.openxmlformats.org/drawingml/2006/main" noGrp="1"/>
-          </p:cNvSpPr>
-          <p:nvPr/>
-        </p:nvSpPr>
-        <p:spPr>
-          <a:xfrm xmlns:a="http://schemas.openxmlformats.org/drawingml/2006/main">
-            <a:off x="10953750" y="4457700"/>
-            <a:ext cx="2952750" cy="304800"/>
-          </a:xfrm>
-          <a:prstGeom xmlns:a="http://schemas.openxmlformats.org/drawingml/2006/main" prst="rect">
-            <a:avLst/>
-          </a:prstGeom>
-          <a:noFill xmlns:a="http://schemas.openxmlformats.org/drawingml/2006/main"/>
-          <a:ln xmlns:a="http://schemas.openxmlformats.org/drawingml/2006/main" w="0">
-            <a:noFill/>
-            <a:prstDash val="solid"/>
-          </a:ln>
-        </p:spPr>
-        <p:txBody>
-          <a:bodyPr xmlns:a="http://schemas.openxmlformats.org/drawingml/2006/main" wrap="square" lIns="0" tIns="0" rIns="0" bIns="0" anchor="ctr">
-            <a:noAutofit/>
-          </a:bodyPr>
-          <a:lstStyle xmlns:a="http://schemas.openxmlformats.org/drawingml/2006/main"/>
-          <a:p xmlns:a="http://schemas.openxmlformats.org/drawingml/2006/main">
-            <a:pPr algn="ctr">
-              <a:lnSpc>
-                <a:spcPct val="100000"/>
-              </a:lnSpc>
-              <a:buNone/>
-              <a:defRPr sz="1200" b="1">
-                <a:solidFill>
-                  <a:srgbClr val="F07D00"/>
-                </a:solidFill>
-                <a:latin typeface="Calibri"/>
-                <a:ea typeface="Calibri"/>
-                <a:cs typeface="Calibri"/>
-              </a:defRPr>
-            </a:pPr>
-            <a:r>
-              <a:rPr sz="1800" b="1">
-                <a:solidFill>
-                  <a:srgbClr val="F07D00"/>
-                </a:solidFill>
-                <a:latin typeface="Calibri"/>
-                <a:ea typeface="Calibri"/>
-                <a:cs typeface="Calibri"/>
-              </a:rPr>
-              <a:t>NOT CONFIDENCE</a:t>
-            </a:r>
-          </a:p>
-        </p:txBody>
-      </p:sp>
-      <p:sp>
-        <p:nvSpPr>
-          <p:cNvPr id="32" name="">
-            <a:extLst xmlns:a="http://schemas.openxmlformats.org/drawingml/2006/main">
-              <a:ext uri="{FF2B5EF4-FFF2-40B4-BE49-F238E27FC236}">
-                <a16:creationId xmlns:a16="http://schemas.microsoft.com/office/drawing/2014/main" id="{D815A273-EB10-4B84-9D74-5A6A52A52780}"/>
-              </a:ext>
-            </a:extLst>
-          </p:cNvPr>
-          <p:cNvSpPr>
-            <a:spLocks xmlns:a="http://schemas.openxmlformats.org/drawingml/2006/main" noGrp="1"/>
-          </p:cNvSpPr>
-          <p:nvPr/>
-        </p:nvSpPr>
-        <p:spPr>
-          <a:xfrm xmlns:a="http://schemas.openxmlformats.org/drawingml/2006/main">
-            <a:off x="10953750" y="4800600"/>
-            <a:ext cx="2952750" cy="514350"/>
-          </a:xfrm>
-          <a:prstGeom xmlns:a="http://schemas.openxmlformats.org/drawingml/2006/main" prst="rect">
-            <a:avLst/>
-          </a:prstGeom>
-          <a:noFill xmlns:a="http://schemas.openxmlformats.org/drawingml/2006/main"/>
-          <a:ln xmlns:a="http://schemas.openxmlformats.org/drawingml/2006/main" w="0">
-            <a:noFill/>
-            <a:prstDash val="solid"/>
-          </a:ln>
-        </p:spPr>
-        <p:txBody>
-          <a:bodyPr xmlns:a="http://schemas.openxmlformats.org/drawingml/2006/main" wrap="square" lIns="0" tIns="0" rIns="0" bIns="0" anchor="ctr">
-            <a:normAutofit fontScale="100000"/>
-          </a:bodyPr>
-          <a:lstStyle xmlns:a="http://schemas.openxmlformats.org/drawingml/2006/main"/>
-          <a:p xmlns:a="http://schemas.openxmlformats.org/drawingml/2006/main">
-            <a:pPr algn="ctr">
-              <a:lnSpc>
-                <a:spcPct val="100000"/>
-              </a:lnSpc>
-              <a:buNone/>
-              <a:defRPr sz="1500" b="1">
-                <a:solidFill>
-                  <a:srgbClr val="051C2A"/>
-                </a:solidFill>
-                <a:latin typeface="Calibri"/>
-                <a:ea typeface="Calibri"/>
-                <a:cs typeface="Calibri"/>
-              </a:defRPr>
-            </a:pPr>
-            <a:r>
-              <a:rPr sz="1500" b="1">
-                <a:solidFill>
-                  <a:srgbClr val="051C2A"/>
-                </a:solidFill>
-                <a:latin typeface="Calibri"/>
-                <a:ea typeface="Calibri"/>
-                <a:cs typeface="Calibri"/>
-              </a:rPr>
-              <a:t>not probability</a:t>
-            </a:r>
-          </a:p>
-          <a:p xmlns:a="http://schemas.openxmlformats.org/drawingml/2006/main">
-            <a:pPr algn="ctr">
-              <a:lnSpc>
-                <a:spcPct val="100000"/>
-              </a:lnSpc>
-              <a:buNone/>
-              <a:defRPr sz="1500" b="1">
-                <a:solidFill>
-                  <a:srgbClr val="051C2A"/>
-                </a:solidFill>
-                <a:latin typeface="Calibri"/>
-                <a:ea typeface="Calibri"/>
-                <a:cs typeface="Calibri"/>
-              </a:defRPr>
-            </a:pPr>
-            <a:r>
-              <a:rPr sz="1500" b="1">
-                <a:solidFill>
-                  <a:srgbClr val="051C2A"/>
-                </a:solidFill>
-                <a:latin typeface="Calibri"/>
-                <a:ea typeface="Calibri"/>
-                <a:cs typeface="Calibri"/>
-              </a:rPr>
-              <a:t>not truth</a:t>
-            </a:r>
-          </a:p>
-        </p:txBody>
-      </p:sp>
-      <p:sp>
-        <p:nvSpPr>
-          <p:cNvPr id="33" name="">
-            <a:extLst xmlns:a="http://schemas.openxmlformats.org/drawingml/2006/main">
-              <a:ext uri="{FF2B5EF4-FFF2-40B4-BE49-F238E27FC236}">
-                <a16:creationId xmlns:a16="http://schemas.microsoft.com/office/drawing/2014/main" id="{D641F16E-B897-4CFF-BC22-D4ACA3F5D853}"/>
-              </a:ext>
-            </a:extLst>
-          </p:cNvPr>
-          <p:cNvSpPr>
-            <a:spLocks xmlns:a="http://schemas.openxmlformats.org/drawingml/2006/main" noGrp="1"/>
-          </p:cNvSpPr>
-          <p:nvPr/>
-        </p:nvSpPr>
-        <p:spPr>
-          <a:xfrm xmlns:a="http://schemas.openxmlformats.org/drawingml/2006/main">
-            <a:off x="10725150" y="5772150"/>
-            <a:ext cx="3409950" cy="400050"/>
-          </a:xfrm>
-          <a:prstGeom xmlns:a="http://schemas.openxmlformats.org/drawingml/2006/main" prst="rect">
-            <a:avLst/>
-          </a:prstGeom>
-          <a:noFill xmlns:a="http://schemas.openxmlformats.org/drawingml/2006/main"/>
-          <a:ln xmlns:a="http://schemas.openxmlformats.org/drawingml/2006/main" w="0">
-            <a:noFill/>
-            <a:prstDash val="solid"/>
-          </a:ln>
-        </p:spPr>
-        <p:txBody>
-          <a:bodyPr xmlns:a="http://schemas.openxmlformats.org/drawingml/2006/main" wrap="square" lIns="0" tIns="0" rIns="0" bIns="0" anchor="ctr">
-            <a:normAutofit fontScale="97222"/>
-          </a:bodyPr>
-          <a:lstStyle xmlns:a="http://schemas.openxmlformats.org/drawingml/2006/main"/>
-          <a:p xmlns:a="http://schemas.openxmlformats.org/drawingml/2006/main">
-            <a:pPr algn="ctr">
-              <a:lnSpc>
-                <a:spcPct val="100000"/>
-              </a:lnSpc>
-              <a:buNone/>
-              <a:defRPr sz="1350" b="0">
-                <a:solidFill>
-                  <a:srgbClr val="64748B"/>
-                </a:solidFill>
-                <a:latin typeface="Calibri"/>
-                <a:ea typeface="Calibri"/>
-                <a:cs typeface="Calibri"/>
-              </a:defRPr>
-            </a:pPr>
-            <a:r>
-              <a:rPr sz="1350" b="0">
-                <a:solidFill>
-                  <a:srgbClr val="64748B"/>
-                </a:solidFill>
-                <a:latin typeface="Calibri"/>
-                <a:ea typeface="Calibri"/>
-                <a:cs typeface="Calibri"/>
-              </a:rPr>
-              <a:t>2D projection is explanatory; retrieval uses the full vector dimensions.</a:t>
-            </a:r>
-          </a:p>
-        </p:txBody>
-      </p:sp>
-      <p:sp>
-        <p:nvSpPr>
-          <p:cNvPr id="34" name="">
-            <a:extLst xmlns:a="http://schemas.openxmlformats.org/drawingml/2006/main">
-              <a:ext uri="{FF2B5EF4-FFF2-40B4-BE49-F238E27FC236}">
-                <a16:creationId xmlns:a16="http://schemas.microsoft.com/office/drawing/2014/main" id="{CBBEFBEB-C8FB-4ACA-94DB-124FCEC52DB9}"/>
-              </a:ext>
-            </a:extLst>
-          </p:cNvPr>
-          <p:cNvSpPr>
-            <a:spLocks xmlns:a="http://schemas.openxmlformats.org/drawingml/2006/main" noGrp="1"/>
-          </p:cNvSpPr>
-          <p:nvPr/>
-        </p:nvSpPr>
-        <p:spPr>
-          <a:xfrm xmlns:a="http://schemas.openxmlformats.org/drawingml/2006/main">
-            <a:off x="2266950" y="6705600"/>
-            <a:ext cx="10706100" cy="628650"/>
-          </a:xfrm>
-          <a:prstGeom xmlns:a="http://schemas.openxmlformats.org/drawingml/2006/main" prst="roundRect">
-            <a:avLst>
-              <a:gd name="adj" fmla="val 12121"/>
-            </a:avLst>
-          </a:prstGeom>
-          <a:solidFill xmlns:a="http://schemas.openxmlformats.org/drawingml/2006/main">
-            <a:srgbClr val="FFFFFF"/>
-          </a:solidFill>
-          <a:ln xmlns:a="http://schemas.openxmlformats.org/drawingml/2006/main" w="9525">
-            <a:solidFill>
-              <a:srgbClr val="E4E7E9"/>
-            </a:solidFill>
-            <a:prstDash val="solid"/>
-          </a:ln>
-        </p:spPr>
-      </p:sp>
-      <p:sp>
-        <p:nvSpPr>
-          <p:cNvPr id="35" name="">
-            <a:extLst xmlns:a="http://schemas.openxmlformats.org/drawingml/2006/main">
-              <a:ext uri="{FF2B5EF4-FFF2-40B4-BE49-F238E27FC236}">
-                <a16:creationId xmlns:a16="http://schemas.microsoft.com/office/drawing/2014/main" id="{46F55544-8A98-45CD-8540-D0A1E30F9870}"/>
-              </a:ext>
-            </a:extLst>
-          </p:cNvPr>
-          <p:cNvSpPr>
-            <a:spLocks xmlns:a="http://schemas.openxmlformats.org/drawingml/2006/main" noGrp="1"/>
-          </p:cNvSpPr>
-          <p:nvPr/>
-        </p:nvSpPr>
-        <p:spPr>
-          <a:xfrm xmlns:a="http://schemas.openxmlformats.org/drawingml/2006/main">
-            <a:off x="2571750" y="6819900"/>
-            <a:ext cx="10096500" cy="400050"/>
-          </a:xfrm>
-          <a:prstGeom xmlns:a="http://schemas.openxmlformats.org/drawingml/2006/main" prst="rect">
-            <a:avLst/>
-          </a:prstGeom>
-          <a:noFill xmlns:a="http://schemas.openxmlformats.org/drawingml/2006/main"/>
-          <a:ln xmlns:a="http://schemas.openxmlformats.org/drawingml/2006/main" w="0">
-            <a:noFill/>
-            <a:prstDash val="solid"/>
-          </a:ln>
-        </p:spPr>
-        <p:txBody>
-          <a:bodyPr xmlns:a="http://schemas.openxmlformats.org/drawingml/2006/main" wrap="square" lIns="0" tIns="0" rIns="0" bIns="0" anchor="ctr">
-            <a:normAutofit fontScale="100000"/>
-          </a:bodyPr>
-          <a:lstStyle xmlns:a="http://schemas.openxmlformats.org/drawingml/2006/main"/>
-          <a:p xmlns:a="http://schemas.openxmlformats.org/drawingml/2006/main">
-            <a:pPr algn="ctr">
-              <a:lnSpc>
-                <a:spcPct val="100000"/>
-              </a:lnSpc>
-              <a:buNone/>
-              <a:defRPr sz="1875" b="1">
-                <a:solidFill>
-                  <a:srgbClr val="051C2A"/>
-                </a:solidFill>
-                <a:latin typeface="Calibri"/>
-                <a:ea typeface="Calibri"/>
-                <a:cs typeface="Calibri"/>
-              </a:defRPr>
-            </a:pPr>
-            <a:r>
-              <a:rPr sz="1875" b="1">
-                <a:solidFill>
-                  <a:srgbClr val="051C2A"/>
-                </a:solidFill>
-                <a:latin typeface="Calibri"/>
-                <a:ea typeface="Calibri"/>
-                <a:cs typeface="Calibri"/>
-              </a:rPr>
-              <a:t>Compare passages only within one versioned embedding space.</a:t>
-            </a:r>
-          </a:p>
-        </p:txBody>
-      </p:sp>
-      <p:sp>
-        <p:nvSpPr>
-          <p:cNvPr id="36" name="">
-            <a:extLst xmlns:a="http://schemas.openxmlformats.org/drawingml/2006/main">
-              <a:ext uri="{FF2B5EF4-FFF2-40B4-BE49-F238E27FC236}">
-                <a16:creationId xmlns:a16="http://schemas.microsoft.com/office/drawing/2014/main" id="{5AF8A41E-A99D-409D-84BE-F33131D113E9}"/>
-              </a:ext>
-            </a:extLst>
-          </p:cNvPr>
-          <p:cNvSpPr>
-            <a:spLocks xmlns:a="http://schemas.openxmlformats.org/drawingml/2006/main" noGrp="1"/>
-          </p:cNvSpPr>
-          <p:nvPr/>
-        </p:nvSpPr>
-        <p:spPr>
-          <a:xfrm xmlns:a="http://schemas.openxmlformats.org/drawingml/2006/main">
-            <a:off x="857250" y="7896225"/>
-            <a:ext cx="13525500" cy="28575"/>
-          </a:xfrm>
-          <a:prstGeom xmlns:a="http://schemas.openxmlformats.org/drawingml/2006/main" prst="rect">
-            <a:avLst/>
-          </a:prstGeom>
-          <a:solidFill xmlns:a="http://schemas.openxmlformats.org/drawingml/2006/main">
-            <a:srgbClr val="E4E7E9"/>
-          </a:solidFill>
-          <a:ln xmlns:a="http://schemas.openxmlformats.org/drawingml/2006/main" w="0">
-            <a:solidFill>
-              <a:srgbClr val="E4E7E9"/>
-            </a:solidFill>
-            <a:prstDash val="solid"/>
-          </a:ln>
-        </p:spPr>
-      </p:sp>
-      <p:sp>
-        <p:nvSpPr>
-          <p:cNvPr id="37" name="">
-            <a:extLst xmlns:a="http://schemas.openxmlformats.org/drawingml/2006/main">
-              <a:ext uri="{FF2B5EF4-FFF2-40B4-BE49-F238E27FC236}">
-                <a16:creationId xmlns:a16="http://schemas.microsoft.com/office/drawing/2014/main" id="{33956031-4C7C-48C0-AB87-5A7D7BA6813C}"/>
-              </a:ext>
-            </a:extLst>
-          </p:cNvPr>
-          <p:cNvSpPr>
-            <a:spLocks xmlns:a="http://schemas.openxmlformats.org/drawingml/2006/main" noGrp="1"/>
-          </p:cNvSpPr>
-          <p:nvPr/>
-        </p:nvSpPr>
-        <p:spPr>
-          <a:xfrm xmlns:a="http://schemas.openxmlformats.org/drawingml/2006/main">
-            <a:off x="857250" y="7896225"/>
-            <a:ext cx="8001000" cy="38100"/>
-          </a:xfrm>
-          <a:prstGeom xmlns:a="http://schemas.openxmlformats.org/drawingml/2006/main" prst="rect">
-            <a:avLst/>
-          </a:prstGeom>
-          <a:solidFill xmlns:a="http://schemas.openxmlformats.org/drawingml/2006/main">
-            <a:srgbClr val="00A2EB"/>
-          </a:solidFill>
-          <a:ln xmlns:a="http://schemas.openxmlformats.org/drawingml/2006/main" w="0">
-            <a:solidFill>
-              <a:srgbClr val="00A2EB"/>
-            </a:solidFill>
-            <a:prstDash val="solid"/>
-          </a:ln>
-        </p:spPr>
-      </p:sp>
-      <p:sp>
-        <p:nvSpPr>
-          <p:cNvPr id="38" name="">
-            <a:extLst xmlns:a="http://schemas.openxmlformats.org/drawingml/2006/main">
-              <a:ext uri="{FF2B5EF4-FFF2-40B4-BE49-F238E27FC236}">
-                <a16:creationId xmlns:a16="http://schemas.microsoft.com/office/drawing/2014/main" id="{913A278E-A894-4D27-A6F3-22DC6B6D402E}"/>
-              </a:ext>
-            </a:extLst>
-          </p:cNvPr>
-          <p:cNvSpPr>
-            <a:spLocks xmlns:a="http://schemas.openxmlformats.org/drawingml/2006/main" noGrp="1"/>
-          </p:cNvSpPr>
-          <p:nvPr/>
-        </p:nvSpPr>
-        <p:spPr>
-          <a:xfrm xmlns:a="http://schemas.openxmlformats.org/drawingml/2006/main">
-            <a:off x="971550" y="8058150"/>
-            <a:ext cx="3714750" cy="323850"/>
-          </a:xfrm>
-          <a:prstGeom xmlns:a="http://schemas.openxmlformats.org/drawingml/2006/main" prst="rect">
-            <a:avLst/>
-          </a:prstGeom>
-          <a:noFill xmlns:a="http://schemas.openxmlformats.org/drawingml/2006/main"/>
-          <a:ln xmlns:a="http://schemas.openxmlformats.org/drawingml/2006/main" w="0">
-            <a:noFill/>
-            <a:prstDash val="solid"/>
-          </a:ln>
-        </p:spPr>
-        <p:txBody>
-          <a:bodyPr xmlns:a="http://schemas.openxmlformats.org/drawingml/2006/main" wrap="square" lIns="0" tIns="0" rIns="0" bIns="0" anchor="ctr">
-            <a:normAutofit fontScale="100000"/>
-          </a:bodyPr>
-          <a:lstStyle xmlns:a="http://schemas.openxmlformats.org/drawingml/2006/main"/>
-          <a:p xmlns:a="http://schemas.openxmlformats.org/drawingml/2006/main">
-            <a:pPr algn="l">
-              <a:lnSpc>
-                <a:spcPct val="100000"/>
-              </a:lnSpc>
-              <a:buNone/>
               <a:defRPr sz="1200" b="0">
                 <a:solidFill>
                   <a:srgbClr val="9A9A9F"/>
@@ -5560,10 +3858,10 @@
       </p:sp>
       <p:sp>
         <p:nvSpPr>
-          <p:cNvPr id="39" name="">
-            <a:extLst xmlns:a="http://schemas.openxmlformats.org/drawingml/2006/main">
-              <a:ext uri="{FF2B5EF4-FFF2-40B4-BE49-F238E27FC236}">
-                <a16:creationId xmlns:a16="http://schemas.microsoft.com/office/drawing/2014/main" id="{F08798E0-FBD0-46BF-A594-53A0061D62D3}"/>
+          <p:cNvPr id="42" name="">
+            <a:extLst xmlns:a="http://schemas.openxmlformats.org/drawingml/2006/main">
+              <a:ext uri="{FF2B5EF4-FFF2-40B4-BE49-F238E27FC236}">
+                <a16:creationId xmlns:a16="http://schemas.microsoft.com/office/drawing/2014/main" id="{23DD0EC2-8E86-44C8-B8C1-3DB1E93C5D33}"/>
               </a:ext>
             </a:extLst>
           </p:cNvPr>
@@ -5615,17 +3913,17 @@
                 <a:ea typeface="Calibri"/>
                 <a:cs typeface="Calibri"/>
               </a:rPr>
-              <a:t>GEOMETRY</a:t>
-            </a:r>
-          </a:p>
-        </p:txBody>
-      </p:sp>
-      <p:sp>
-        <p:nvSpPr>
-          <p:cNvPr id="40" name="">
-            <a:extLst xmlns:a="http://schemas.openxmlformats.org/drawingml/2006/main">
-              <a:ext uri="{FF2B5EF4-FFF2-40B4-BE49-F238E27FC236}">
-                <a16:creationId xmlns:a16="http://schemas.microsoft.com/office/drawing/2014/main" id="{7F1CC3F1-A84C-4B1D-A2E0-A25EF0E905EF}"/>
+              <a:t>ARCHITECTURE</a:t>
+            </a:r>
+          </a:p>
+        </p:txBody>
+      </p:sp>
+      <p:sp>
+        <p:nvSpPr>
+          <p:cNvPr id="43" name="">
+            <a:extLst xmlns:a="http://schemas.openxmlformats.org/drawingml/2006/main">
+              <a:ext uri="{FF2B5EF4-FFF2-40B4-BE49-F238E27FC236}">
+                <a16:creationId xmlns:a16="http://schemas.microsoft.com/office/drawing/2014/main" id="{A107089F-BB21-465D-B53D-42746B7A7540}"/>
               </a:ext>
             </a:extLst>
           </p:cNvPr>
@@ -5682,10 +3980,191 @@
           </a:p>
         </p:txBody>
       </p:sp>
+      <p:pic>
+        <p:nvPicPr>
+          <p:cNvPr id="54" name=""/>
+          <p:cNvPicPr>
+            <a:picLocks xmlns:a="http://schemas.openxmlformats.org/drawingml/2006/main" noChangeAspect="1"/>
+          </p:cNvPicPr>
+          <p:nvPr/>
+        </p:nvPicPr>
+        <p:blipFill>
+          <a:blip xmlns:r="http://schemas.openxmlformats.org/officeDocument/2006/relationships" xmlns:a="http://schemas.openxmlformats.org/drawingml/2006/main" r:embed="R55122afec8354706"/>
+          <a:stretch xmlns:a="http://schemas.openxmlformats.org/drawingml/2006/main"/>
+        </p:blipFill>
+        <p:spPr>
+          <a:xfrm xmlns:a="http://schemas.openxmlformats.org/drawingml/2006/main">
+            <a:off x="1100667" y="2076450"/>
+            <a:ext cx="9990667" cy="5619750"/>
+          </a:xfrm>
+          <a:prstGeom xmlns:a="http://schemas.openxmlformats.org/drawingml/2006/main" prst="rect">
+            <a:avLst/>
+          </a:prstGeom>
+        </p:spPr>
+      </p:pic>
+      <p:sp>
+        <p:nvSpPr>
+          <p:cNvPr id="46" name="source-interpretation">
+            <a:extLst xmlns:a="http://schemas.openxmlformats.org/drawingml/2006/main">
+              <a:ext uri="{FF2B5EF4-FFF2-40B4-BE49-F238E27FC236}">
+                <a16:creationId xmlns:a16="http://schemas.microsoft.com/office/drawing/2014/main" id="{87F0D186-B0BB-4204-AE26-E6899FEC351E}"/>
+              </a:ext>
+            </a:extLst>
+          </p:cNvPr>
+          <p:cNvSpPr>
+            <a:spLocks xmlns:a="http://schemas.openxmlformats.org/drawingml/2006/main" noGrp="1"/>
+          </p:cNvSpPr>
+          <p:nvPr/>
+        </p:nvSpPr>
+        <p:spPr>
+          <a:xfrm xmlns:a="http://schemas.openxmlformats.org/drawingml/2006/main">
+            <a:off x="11658600" y="2838450"/>
+            <a:ext cx="2857500" cy="2895600"/>
+          </a:xfrm>
+          <a:prstGeom xmlns:a="http://schemas.openxmlformats.org/drawingml/2006/main" prst="roundRect">
+            <a:avLst>
+              <a:gd name="adj" fmla="val 2667"/>
+            </a:avLst>
+          </a:prstGeom>
+          <a:solidFill xmlns:a="http://schemas.openxmlformats.org/drawingml/2006/main">
+            <a:srgbClr val="051C2A"/>
+          </a:solidFill>
+          <a:ln xmlns:a="http://schemas.openxmlformats.org/drawingml/2006/main" w="0">
+            <a:solidFill>
+              <a:srgbClr val="051C2A"/>
+            </a:solidFill>
+            <a:prstDash val="solid"/>
+          </a:ln>
+        </p:spPr>
+        <p:txBody>
+          <a:bodyPr xmlns:a="http://schemas.openxmlformats.org/drawingml/2006/main" lIns="133350" tIns="133350" rIns="133350" bIns="133350" anchor="ctr"/>
+          <a:lstStyle xmlns:a="http://schemas.openxmlformats.org/drawingml/2006/main"/>
+          <a:p xmlns:a="http://schemas.openxmlformats.org/drawingml/2006/main">
+            <a:pPr algn="ctr">
+              <a:defRPr sz="1650" b="1">
+                <a:solidFill>
+                  <a:srgbClr val="FFFFFF"/>
+                </a:solidFill>
+                <a:latin typeface="Calibri"/>
+                <a:ea typeface="Calibri"/>
+                <a:cs typeface="Calibri"/>
+              </a:defRPr>
+            </a:pPr>
+            <a:r>
+              <a:rPr sz="1650" b="1">
+                <a:solidFill>
+                  <a:srgbClr val="FFFFFF"/>
+                </a:solidFill>
+                <a:latin typeface="Calibri"/>
+                <a:ea typeface="Calibri"/>
+                <a:cs typeface="Calibri"/>
+              </a:rPr>
+              <a:t>THE PATTERN</a:t>
+            </a:r>
+          </a:p>
+          <a:p xmlns:a="http://schemas.openxmlformats.org/drawingml/2006/main">
+            <a:pPr algn="ctr">
+              <a:defRPr sz="1650" b="1">
+                <a:solidFill>
+                  <a:srgbClr val="FFFFFF"/>
+                </a:solidFill>
+                <a:latin typeface="Calibri"/>
+                <a:ea typeface="Calibri"/>
+                <a:cs typeface="Calibri"/>
+              </a:defRPr>
+            </a:pPr>
+            <a:r>
+              <a:rPr sz="1650" b="1">
+                <a:solidFill>
+                  <a:srgbClr val="FFFFFF"/>
+                </a:solidFill>
+                <a:latin typeface="Calibri"/>
+                <a:ea typeface="Calibri"/>
+                <a:cs typeface="Calibri"/>
+              </a:rPr>
+              <a:t>Lexical + semantic</a:t>
+            </a:r>
+          </a:p>
+          <a:p xmlns:a="http://schemas.openxmlformats.org/drawingml/2006/main">
+            <a:pPr algn="ctr">
+              <a:defRPr sz="1650" b="1">
+                <a:solidFill>
+                  <a:srgbClr val="FFFFFF"/>
+                </a:solidFill>
+                <a:latin typeface="Calibri"/>
+                <a:ea typeface="Calibri"/>
+                <a:cs typeface="Calibri"/>
+              </a:defRPr>
+            </a:pPr>
+            <a:r>
+              <a:rPr sz="1650" b="1">
+                <a:solidFill>
+                  <a:srgbClr val="FFFFFF"/>
+                </a:solidFill>
+                <a:latin typeface="Calibri"/>
+                <a:ea typeface="Calibri"/>
+                <a:cs typeface="Calibri"/>
+              </a:rPr>
+              <a:t>Fuse ranks</a:t>
+            </a:r>
+          </a:p>
+          <a:p xmlns:a="http://schemas.openxmlformats.org/drawingml/2006/main">
+            <a:r>
+              <a:t/>
+            </a:r>
+          </a:p>
+          <a:p xmlns:a="http://schemas.openxmlformats.org/drawingml/2006/main">
+            <a:pPr algn="ctr">
+              <a:defRPr sz="1650" b="1">
+                <a:solidFill>
+                  <a:srgbClr val="FFFFFF"/>
+                </a:solidFill>
+                <a:latin typeface="Calibri"/>
+                <a:ea typeface="Calibri"/>
+                <a:cs typeface="Calibri"/>
+              </a:defRPr>
+            </a:pPr>
+            <a:r>
+              <a:rPr sz="1650" b="1">
+                <a:solidFill>
+                  <a:srgbClr val="FFFFFF"/>
+                </a:solidFill>
+                <a:latin typeface="Calibri"/>
+                <a:ea typeface="Calibri"/>
+                <a:cs typeface="Calibri"/>
+              </a:rPr>
+              <a:t>LAB UPGRADE</a:t>
+            </a:r>
+          </a:p>
+          <a:p xmlns:a="http://schemas.openxmlformats.org/drawingml/2006/main">
+            <a:pPr algn="ctr">
+              <a:defRPr sz="1650" b="1">
+                <a:solidFill>
+                  <a:srgbClr val="FFFFFF"/>
+                </a:solidFill>
+                <a:latin typeface="Calibri"/>
+                <a:ea typeface="Calibri"/>
+                <a:cs typeface="Calibri"/>
+              </a:defRPr>
+            </a:pPr>
+            <a:r>
+              <a:rPr sz="1650" b="1">
+                <a:solidFill>
+                  <a:srgbClr val="FFFFFF"/>
+                </a:solidFill>
+                <a:latin typeface="Calibri"/>
+                <a:ea typeface="Calibri"/>
+                <a:cs typeface="Calibri"/>
+              </a:rPr>
+              <a:t>BM25 replaces TF-IDF</a:t>
+            </a:r>
+          </a:p>
+        </p:txBody>
+      </p:sp>
     </p:spTree>
     <p:extLst>
       <p:ext uri="{BB962C8B-B14F-4D97-AF65-F5344CB8AC3E}">
-        <p14:creationId xmlns:p14="http://schemas.microsoft.com/office/powerpoint/2010/main" val="1257035274"/>
+        <p14:creationId xmlns:p14="http://schemas.microsoft.com/office/powerpoint/2010/main" val="349444305"/>
       </p:ext>
     </p:extLst>
   </p:cSld>
@@ -5768,7 +4247,7 @@
                 <a:ea typeface="Calibri"/>
                 <a:cs typeface="Calibri"/>
               </a:rPr>
-              <a:t>MAINTAINED QUERY · OFFLINE</a:t>
+              <a:t>COMPLEMENTARY CHANNELS</a:t>
             </a:r>
           </a:p>
         </p:txBody>
@@ -5830,29 +4309,95 @@
                 <a:ea typeface="Calibri"/>
                 <a:cs typeface="Calibri"/>
               </a:rPr>
-              <a:t>Which NVIDIA business generated $193.7 billion?</a:t>
-            </a:r>
-          </a:p>
-        </p:txBody>
-      </p:sp>
-      <p:sp>
-        <p:nvSpPr>
-          <p:cNvPr id="3" name="">
-            <a:extLst xmlns:a="http://schemas.openxmlformats.org/drawingml/2006/main">
-              <a:ext uri="{FF2B5EF4-FFF2-40B4-BE49-F238E27FC236}">
-                <a16:creationId xmlns:a16="http://schemas.microsoft.com/office/drawing/2014/main" id="{274302C1-E6C0-49C0-9FA8-BA7896D6FDBE}"/>
-              </a:ext>
-            </a:extLst>
-          </p:cNvPr>
-          <p:cNvSpPr>
-            <a:spLocks xmlns:a="http://schemas.openxmlformats.org/drawingml/2006/main" noGrp="1"/>
-          </p:cNvSpPr>
-          <p:nvPr/>
-        </p:nvSpPr>
-        <p:spPr>
-          <a:xfrm xmlns:a="http://schemas.openxmlformats.org/drawingml/2006/main">
-            <a:off x="1028700" y="2343150"/>
-            <a:ext cx="2667000" cy="285750"/>
+              <a:t>BM25 finds the figure; dense search finds the meaning</a:t>
+            </a:r>
+          </a:p>
+        </p:txBody>
+      </p:sp>
+      <p:sp>
+        <p:nvSpPr>
+          <p:cNvPr id="39" name="">
+            <a:extLst xmlns:a="http://schemas.openxmlformats.org/drawingml/2006/main">
+              <a:ext uri="{FF2B5EF4-FFF2-40B4-BE49-F238E27FC236}">
+                <a16:creationId xmlns:a16="http://schemas.microsoft.com/office/drawing/2014/main" id="{4846780A-5D65-4410-9457-661BBB6C3E5A}"/>
+              </a:ext>
+            </a:extLst>
+          </p:cNvPr>
+          <p:cNvSpPr>
+            <a:spLocks xmlns:a="http://schemas.openxmlformats.org/drawingml/2006/main" noGrp="1"/>
+          </p:cNvSpPr>
+          <p:nvPr/>
+        </p:nvSpPr>
+        <p:spPr>
+          <a:xfrm xmlns:a="http://schemas.openxmlformats.org/drawingml/2006/main">
+            <a:off x="857250" y="7896225"/>
+            <a:ext cx="13525500" cy="28575"/>
+          </a:xfrm>
+          <a:prstGeom xmlns:a="http://schemas.openxmlformats.org/drawingml/2006/main" prst="rect">
+            <a:avLst/>
+          </a:prstGeom>
+          <a:solidFill xmlns:a="http://schemas.openxmlformats.org/drawingml/2006/main">
+            <a:srgbClr val="E4E7E9"/>
+          </a:solidFill>
+          <a:ln xmlns:a="http://schemas.openxmlformats.org/drawingml/2006/main" w="0">
+            <a:solidFill>
+              <a:srgbClr val="E4E7E9"/>
+            </a:solidFill>
+            <a:prstDash val="solid"/>
+          </a:ln>
+        </p:spPr>
+      </p:sp>
+      <p:sp>
+        <p:nvSpPr>
+          <p:cNvPr id="40" name="">
+            <a:extLst xmlns:a="http://schemas.openxmlformats.org/drawingml/2006/main">
+              <a:ext uri="{FF2B5EF4-FFF2-40B4-BE49-F238E27FC236}">
+                <a16:creationId xmlns:a16="http://schemas.microsoft.com/office/drawing/2014/main" id="{0C69519E-645C-4800-9FE8-656AB5D56416}"/>
+              </a:ext>
+            </a:extLst>
+          </p:cNvPr>
+          <p:cNvSpPr>
+            <a:spLocks xmlns:a="http://schemas.openxmlformats.org/drawingml/2006/main" noGrp="1"/>
+          </p:cNvSpPr>
+          <p:nvPr/>
+        </p:nvSpPr>
+        <p:spPr>
+          <a:xfrm xmlns:a="http://schemas.openxmlformats.org/drawingml/2006/main">
+            <a:off x="857250" y="7896225"/>
+            <a:ext cx="8001000" cy="38100"/>
+          </a:xfrm>
+          <a:prstGeom xmlns:a="http://schemas.openxmlformats.org/drawingml/2006/main" prst="rect">
+            <a:avLst/>
+          </a:prstGeom>
+          <a:solidFill xmlns:a="http://schemas.openxmlformats.org/drawingml/2006/main">
+            <a:srgbClr val="00A2EB"/>
+          </a:solidFill>
+          <a:ln xmlns:a="http://schemas.openxmlformats.org/drawingml/2006/main" w="0">
+            <a:solidFill>
+              <a:srgbClr val="00A2EB"/>
+            </a:solidFill>
+            <a:prstDash val="solid"/>
+          </a:ln>
+        </p:spPr>
+      </p:sp>
+      <p:sp>
+        <p:nvSpPr>
+          <p:cNvPr id="41" name="">
+            <a:extLst xmlns:a="http://schemas.openxmlformats.org/drawingml/2006/main">
+              <a:ext uri="{FF2B5EF4-FFF2-40B4-BE49-F238E27FC236}">
+                <a16:creationId xmlns:a16="http://schemas.microsoft.com/office/drawing/2014/main" id="{17032C2C-E113-4AB5-9CC6-D6B41AEDB1C4}"/>
+              </a:ext>
+            </a:extLst>
+          </p:cNvPr>
+          <p:cNvSpPr>
+            <a:spLocks xmlns:a="http://schemas.openxmlformats.org/drawingml/2006/main" noGrp="1"/>
+          </p:cNvSpPr>
+          <p:nvPr/>
+        </p:nvSpPr>
+        <p:spPr>
+          <a:xfrm xmlns:a="http://schemas.openxmlformats.org/drawingml/2006/main">
+            <a:off x="971550" y="8058150"/>
+            <a:ext cx="3714750" cy="323850"/>
           </a:xfrm>
           <a:prstGeom xmlns:a="http://schemas.openxmlformats.org/drawingml/2006/main" prst="rect">
             <a:avLst/>
@@ -5865,7 +4410,7 @@
         </p:spPr>
         <p:txBody>
           <a:bodyPr xmlns:a="http://schemas.openxmlformats.org/drawingml/2006/main" wrap="square" lIns="0" tIns="0" rIns="0" bIns="0" anchor="ctr">
-            <a:noAutofit/>
+            <a:normAutofit fontScale="100000"/>
           </a:bodyPr>
           <a:lstStyle xmlns:a="http://schemas.openxmlformats.org/drawingml/2006/main"/>
           <a:p xmlns:a="http://schemas.openxmlformats.org/drawingml/2006/main">
@@ -5874,2005 +4419,6 @@
                 <a:spcPct val="100000"/>
               </a:lnSpc>
               <a:buNone/>
-              <a:defRPr sz="1350" b="1">
-                <a:solidFill>
-                  <a:srgbClr val="F07D00"/>
-                </a:solidFill>
-                <a:latin typeface="Calibri"/>
-                <a:ea typeface="Calibri"/>
-                <a:cs typeface="Calibri"/>
-              </a:defRPr>
-            </a:pPr>
-            <a:r>
-              <a:rPr sz="1800" b="1">
-                <a:solidFill>
-                  <a:srgbClr val="F07D00"/>
-                </a:solidFill>
-                <a:latin typeface="Calibri"/>
-                <a:ea typeface="Calibri"/>
-                <a:cs typeface="Calibri"/>
-              </a:rPr>
-              <a:t>KEYWORD · TF-IDF</a:t>
-            </a:r>
-          </a:p>
-        </p:txBody>
-      </p:sp>
-      <p:sp>
-        <p:nvSpPr>
-          <p:cNvPr id="4" name="fixed-one">
-            <a:extLst xmlns:a="http://schemas.openxmlformats.org/drawingml/2006/main">
-              <a:ext uri="{FF2B5EF4-FFF2-40B4-BE49-F238E27FC236}">
-                <a16:creationId xmlns:a16="http://schemas.microsoft.com/office/drawing/2014/main" id="{40C15356-6CC0-4340-AD48-214BA676B1CA}"/>
-              </a:ext>
-            </a:extLst>
-          </p:cNvPr>
-          <p:cNvSpPr>
-            <a:spLocks xmlns:a="http://schemas.openxmlformats.org/drawingml/2006/main" noGrp="1"/>
-          </p:cNvSpPr>
-          <p:nvPr/>
-        </p:nvSpPr>
-        <p:spPr>
-          <a:xfrm xmlns:a="http://schemas.openxmlformats.org/drawingml/2006/main">
-            <a:off x="1028700" y="2800350"/>
-            <a:ext cx="5334000" cy="1104900"/>
-          </a:xfrm>
-          <a:prstGeom xmlns:a="http://schemas.openxmlformats.org/drawingml/2006/main" prst="roundRect">
-            <a:avLst>
-              <a:gd name="adj" fmla="val 10345"/>
-            </a:avLst>
-          </a:prstGeom>
-          <a:solidFill xmlns:a="http://schemas.openxmlformats.org/drawingml/2006/main">
-            <a:srgbClr val="FFF1E5"/>
-          </a:solidFill>
-          <a:ln xmlns:a="http://schemas.openxmlformats.org/drawingml/2006/main" w="19050">
-            <a:solidFill>
-              <a:srgbClr val="F07D00"/>
-            </a:solidFill>
-            <a:prstDash val="solid"/>
-          </a:ln>
-        </p:spPr>
-      </p:sp>
-      <p:sp>
-        <p:nvSpPr>
-          <p:cNvPr id="5" name="">
-            <a:extLst xmlns:a="http://schemas.openxmlformats.org/drawingml/2006/main">
-              <a:ext uri="{FF2B5EF4-FFF2-40B4-BE49-F238E27FC236}">
-                <a16:creationId xmlns:a16="http://schemas.microsoft.com/office/drawing/2014/main" id="{2782FFA5-77A1-442E-984F-08CF9D903B3C}"/>
-              </a:ext>
-            </a:extLst>
-          </p:cNvPr>
-          <p:cNvSpPr>
-            <a:spLocks xmlns:a="http://schemas.openxmlformats.org/drawingml/2006/main" noGrp="1"/>
-          </p:cNvSpPr>
-          <p:nvPr/>
-        </p:nvSpPr>
-        <p:spPr>
-          <a:xfrm xmlns:a="http://schemas.openxmlformats.org/drawingml/2006/main">
-            <a:off x="1276350" y="2952750"/>
-            <a:ext cx="4838700" cy="800100"/>
-          </a:xfrm>
-          <a:prstGeom xmlns:a="http://schemas.openxmlformats.org/drawingml/2006/main" prst="rect">
-            <a:avLst/>
-          </a:prstGeom>
-          <a:noFill xmlns:a="http://schemas.openxmlformats.org/drawingml/2006/main"/>
-          <a:ln xmlns:a="http://schemas.openxmlformats.org/drawingml/2006/main" w="0">
-            <a:noFill/>
-            <a:prstDash val="solid"/>
-          </a:ln>
-        </p:spPr>
-        <p:txBody>
-          <a:bodyPr xmlns:a="http://schemas.openxmlformats.org/drawingml/2006/main" wrap="square" lIns="0" tIns="0" rIns="0" bIns="0" anchor="ctr">
-            <a:normAutofit fontScale="100000"/>
-          </a:bodyPr>
-          <a:lstStyle xmlns:a="http://schemas.openxmlformats.org/drawingml/2006/main"/>
-          <a:p xmlns:a="http://schemas.openxmlformats.org/drawingml/2006/main">
-            <a:pPr algn="l">
-              <a:lnSpc>
-                <a:spcPct val="100000"/>
-              </a:lnSpc>
-              <a:buNone/>
-              <a:defRPr sz="1425" b="0">
-                <a:solidFill>
-                  <a:srgbClr val="051C2A"/>
-                </a:solidFill>
-                <a:latin typeface="Courier New"/>
-                <a:ea typeface="Courier New"/>
-                <a:cs typeface="Courier New"/>
-              </a:defRPr>
-            </a:pPr>
-            <a:r>
-              <a:rPr sz="1425" b="0">
-                <a:solidFill>
-                  <a:srgbClr val="051C2A"/>
-                </a:solidFill>
-                <a:latin typeface="Courier New"/>
-                <a:ea typeface="Courier New"/>
-                <a:cs typeface="Courier New"/>
-              </a:rPr>
-              <a:t>R1  NVDA…003  .591</a:t>
-            </a:r>
-          </a:p>
-          <a:p xmlns:a="http://schemas.openxmlformats.org/drawingml/2006/main">
-            <a:pPr algn="l">
-              <a:lnSpc>
-                <a:spcPct val="100000"/>
-              </a:lnSpc>
-              <a:buNone/>
-              <a:defRPr sz="1425" b="0">
-                <a:solidFill>
-                  <a:srgbClr val="051C2A"/>
-                </a:solidFill>
-                <a:latin typeface="Courier New"/>
-                <a:ea typeface="Courier New"/>
-                <a:cs typeface="Courier New"/>
-              </a:defRPr>
-            </a:pPr>
-            <a:r>
-              <a:rPr sz="1425" b="0">
-                <a:solidFill>
-                  <a:srgbClr val="051C2A"/>
-                </a:solidFill>
-                <a:latin typeface="Courier New"/>
-                <a:ea typeface="Courier New"/>
-                <a:cs typeface="Courier New"/>
-              </a:rPr>
-              <a:t>$193.7bn exact match</a:t>
-            </a:r>
-          </a:p>
-        </p:txBody>
-      </p:sp>
-      <p:sp>
-        <p:nvSpPr>
-          <p:cNvPr id="6" name="fixed-two">
-            <a:extLst xmlns:a="http://schemas.openxmlformats.org/drawingml/2006/main">
-              <a:ext uri="{FF2B5EF4-FFF2-40B4-BE49-F238E27FC236}">
-                <a16:creationId xmlns:a16="http://schemas.microsoft.com/office/drawing/2014/main" id="{AD30FCD2-C657-4E45-B1A1-6793E46E7142}"/>
-              </a:ext>
-            </a:extLst>
-          </p:cNvPr>
-          <p:cNvSpPr>
-            <a:spLocks xmlns:a="http://schemas.openxmlformats.org/drawingml/2006/main" noGrp="1"/>
-          </p:cNvSpPr>
-          <p:nvPr/>
-        </p:nvSpPr>
-        <p:spPr>
-          <a:xfrm xmlns:a="http://schemas.openxmlformats.org/drawingml/2006/main">
-            <a:off x="1028700" y="4324350"/>
-            <a:ext cx="2857500" cy="723900"/>
-          </a:xfrm>
-          <a:prstGeom xmlns:a="http://schemas.openxmlformats.org/drawingml/2006/main" prst="roundRect">
-            <a:avLst>
-              <a:gd name="adj" fmla="val 15789"/>
-            </a:avLst>
-          </a:prstGeom>
-          <a:solidFill xmlns:a="http://schemas.openxmlformats.org/drawingml/2006/main">
-            <a:srgbClr val="FFF1E5"/>
-          </a:solidFill>
-          <a:ln xmlns:a="http://schemas.openxmlformats.org/drawingml/2006/main" w="19050">
-            <a:solidFill>
-              <a:srgbClr val="F07D00"/>
-            </a:solidFill>
-            <a:prstDash val="solid"/>
-          </a:ln>
-        </p:spPr>
-      </p:sp>
-      <p:sp>
-        <p:nvSpPr>
-          <p:cNvPr id="7" name="">
-            <a:extLst xmlns:a="http://schemas.openxmlformats.org/drawingml/2006/main">
-              <a:ext uri="{FF2B5EF4-FFF2-40B4-BE49-F238E27FC236}">
-                <a16:creationId xmlns:a16="http://schemas.microsoft.com/office/drawing/2014/main" id="{CF3EC4B2-CAE9-400F-B11D-2D4F3052F980}"/>
-              </a:ext>
-            </a:extLst>
-          </p:cNvPr>
-          <p:cNvSpPr>
-            <a:spLocks xmlns:a="http://schemas.openxmlformats.org/drawingml/2006/main" noGrp="1"/>
-          </p:cNvSpPr>
-          <p:nvPr/>
-        </p:nvSpPr>
-        <p:spPr>
-          <a:xfrm xmlns:a="http://schemas.openxmlformats.org/drawingml/2006/main">
-            <a:off x="1276350" y="4457700"/>
-            <a:ext cx="2381250" cy="438150"/>
-          </a:xfrm>
-          <a:prstGeom xmlns:a="http://schemas.openxmlformats.org/drawingml/2006/main" prst="rect">
-            <a:avLst/>
-          </a:prstGeom>
-          <a:noFill xmlns:a="http://schemas.openxmlformats.org/drawingml/2006/main"/>
-          <a:ln xmlns:a="http://schemas.openxmlformats.org/drawingml/2006/main" w="0">
-            <a:noFill/>
-            <a:prstDash val="solid"/>
-          </a:ln>
-        </p:spPr>
-        <p:txBody>
-          <a:bodyPr xmlns:a="http://schemas.openxmlformats.org/drawingml/2006/main" wrap="square" lIns="0" tIns="0" rIns="0" bIns="0" anchor="ctr">
-            <a:normAutofit fontScale="100000"/>
-          </a:bodyPr>
-          <a:lstStyle xmlns:a="http://schemas.openxmlformats.org/drawingml/2006/main"/>
-          <a:p xmlns:a="http://schemas.openxmlformats.org/drawingml/2006/main">
-            <a:pPr algn="l">
-              <a:lnSpc>
-                <a:spcPct val="100000"/>
-              </a:lnSpc>
-              <a:buNone/>
-              <a:defRPr sz="1500" b="1">
-                <a:solidFill>
-                  <a:srgbClr val="051C2A"/>
-                </a:solidFill>
-                <a:latin typeface="Courier New"/>
-                <a:ea typeface="Courier New"/>
-                <a:cs typeface="Courier New"/>
-              </a:defRPr>
-            </a:pPr>
-            <a:r>
-              <a:rPr sz="1500" b="1">
-                <a:solidFill>
-                  <a:srgbClr val="051C2A"/>
-                </a:solidFill>
-                <a:latin typeface="Courier New"/>
-                <a:ea typeface="Courier New"/>
-                <a:cs typeface="Courier New"/>
-              </a:rPr>
-              <a:t>R2  NVDA…001  .357</a:t>
-            </a:r>
-          </a:p>
-        </p:txBody>
-      </p:sp>
-      <p:sp>
-        <p:nvSpPr>
-          <p:cNvPr id="8" name="">
-            <a:extLst xmlns:a="http://schemas.openxmlformats.org/drawingml/2006/main">
-              <a:ext uri="{FF2B5EF4-FFF2-40B4-BE49-F238E27FC236}">
-                <a16:creationId xmlns:a16="http://schemas.microsoft.com/office/drawing/2014/main" id="{EF846D44-14BC-44D4-9667-69FFDFBE94EE}"/>
-              </a:ext>
-            </a:extLst>
-          </p:cNvPr>
-          <p:cNvSpPr>
-            <a:spLocks xmlns:a="http://schemas.openxmlformats.org/drawingml/2006/main" noGrp="1"/>
-          </p:cNvSpPr>
-          <p:nvPr/>
-        </p:nvSpPr>
-        <p:spPr>
-          <a:xfrm xmlns:a="http://schemas.openxmlformats.org/drawingml/2006/main">
-            <a:off x="1028700" y="5276850"/>
-            <a:ext cx="5334000" cy="419100"/>
-          </a:xfrm>
-          <a:prstGeom xmlns:a="http://schemas.openxmlformats.org/drawingml/2006/main" prst="rect">
-            <a:avLst/>
-          </a:prstGeom>
-          <a:noFill xmlns:a="http://schemas.openxmlformats.org/drawingml/2006/main"/>
-          <a:ln xmlns:a="http://schemas.openxmlformats.org/drawingml/2006/main" w="0">
-            <a:noFill/>
-            <a:prstDash val="solid"/>
-          </a:ln>
-        </p:spPr>
-        <p:txBody>
-          <a:bodyPr xmlns:a="http://schemas.openxmlformats.org/drawingml/2006/main" wrap="square" lIns="0" tIns="0" rIns="0" bIns="0" anchor="ctr">
-            <a:noAutofit/>
-          </a:bodyPr>
-          <a:lstStyle xmlns:a="http://schemas.openxmlformats.org/drawingml/2006/main"/>
-          <a:p xmlns:a="http://schemas.openxmlformats.org/drawingml/2006/main">
-            <a:pPr algn="l">
-              <a:lnSpc>
-                <a:spcPct val="100000"/>
-              </a:lnSpc>
-              <a:buNone/>
-              <a:defRPr sz="1575" b="1">
-                <a:solidFill>
-                  <a:srgbClr val="F07D00"/>
-                </a:solidFill>
-                <a:latin typeface="Calibri"/>
-                <a:ea typeface="Calibri"/>
-                <a:cs typeface="Calibri"/>
-              </a:defRPr>
-            </a:pPr>
-            <a:r>
-              <a:rPr sz="1800" b="1">
-                <a:solidFill>
-                  <a:srgbClr val="F07D00"/>
-                </a:solidFill>
-                <a:latin typeface="Calibri"/>
-                <a:ea typeface="Calibri"/>
-                <a:cs typeface="Calibri"/>
-              </a:rPr>
-              <a:t>Filter · NVIDIA · FY2026</a:t>
-            </a:r>
-          </a:p>
-        </p:txBody>
-      </p:sp>
-      <p:sp>
-        <p:nvSpPr>
-          <p:cNvPr id="9" name="">
-            <a:extLst xmlns:a="http://schemas.openxmlformats.org/drawingml/2006/main">
-              <a:ext uri="{FF2B5EF4-FFF2-40B4-BE49-F238E27FC236}">
-                <a16:creationId xmlns:a16="http://schemas.microsoft.com/office/drawing/2014/main" id="{1106CDE7-35E6-4C8C-A738-6BACCF9A4851}"/>
-              </a:ext>
-            </a:extLst>
-          </p:cNvPr>
-          <p:cNvSpPr>
-            <a:spLocks xmlns:a="http://schemas.openxmlformats.org/drawingml/2006/main" noGrp="1"/>
-          </p:cNvSpPr>
-          <p:nvPr/>
-        </p:nvSpPr>
-        <p:spPr>
-          <a:xfrm xmlns:a="http://schemas.openxmlformats.org/drawingml/2006/main">
-            <a:off x="7334250" y="2343150"/>
-            <a:ext cx="2857500" cy="285750"/>
-          </a:xfrm>
-          <a:prstGeom xmlns:a="http://schemas.openxmlformats.org/drawingml/2006/main" prst="rect">
-            <a:avLst/>
-          </a:prstGeom>
-          <a:noFill xmlns:a="http://schemas.openxmlformats.org/drawingml/2006/main"/>
-          <a:ln xmlns:a="http://schemas.openxmlformats.org/drawingml/2006/main" w="0">
-            <a:noFill/>
-            <a:prstDash val="solid"/>
-          </a:ln>
-        </p:spPr>
-        <p:txBody>
-          <a:bodyPr xmlns:a="http://schemas.openxmlformats.org/drawingml/2006/main" wrap="square" lIns="0" tIns="0" rIns="0" bIns="0" anchor="ctr">
-            <a:noAutofit/>
-          </a:bodyPr>
-          <a:lstStyle xmlns:a="http://schemas.openxmlformats.org/drawingml/2006/main"/>
-          <a:p xmlns:a="http://schemas.openxmlformats.org/drawingml/2006/main">
-            <a:pPr algn="l">
-              <a:lnSpc>
-                <a:spcPct val="100000"/>
-              </a:lnSpc>
-              <a:buNone/>
-              <a:defRPr sz="1350" b="1">
-                <a:solidFill>
-                  <a:srgbClr val="2E8B57"/>
-                </a:solidFill>
-                <a:latin typeface="Calibri"/>
-                <a:ea typeface="Calibri"/>
-                <a:cs typeface="Calibri"/>
-              </a:defRPr>
-            </a:pPr>
-            <a:r>
-              <a:rPr sz="1800" b="1">
-                <a:solidFill>
-                  <a:srgbClr val="2E8B57"/>
-                </a:solidFill>
-                <a:latin typeface="Calibri"/>
-                <a:ea typeface="Calibri"/>
-                <a:cs typeface="Calibri"/>
-              </a:rPr>
-              <a:t>DENSE · OFFLINE</a:t>
-            </a:r>
-          </a:p>
-        </p:txBody>
-      </p:sp>
-      <p:sp>
-        <p:nvSpPr>
-          <p:cNvPr id="10" name="">
-            <a:extLst xmlns:a="http://schemas.openxmlformats.org/drawingml/2006/main">
-              <a:ext uri="{FF2B5EF4-FFF2-40B4-BE49-F238E27FC236}">
-                <a16:creationId xmlns:a16="http://schemas.microsoft.com/office/drawing/2014/main" id="{562A6E03-2E74-4AA0-BC40-D36976B59F68}"/>
-              </a:ext>
-            </a:extLst>
-          </p:cNvPr>
-          <p:cNvSpPr>
-            <a:spLocks xmlns:a="http://schemas.openxmlformats.org/drawingml/2006/main" noGrp="1"/>
-          </p:cNvSpPr>
-          <p:nvPr/>
-        </p:nvSpPr>
-        <p:spPr>
-          <a:xfrm xmlns:a="http://schemas.openxmlformats.org/drawingml/2006/main">
-            <a:off x="7334250" y="2800350"/>
-            <a:ext cx="2152650" cy="609600"/>
-          </a:xfrm>
-          <a:prstGeom xmlns:a="http://schemas.openxmlformats.org/drawingml/2006/main" prst="roundRect">
-            <a:avLst>
-              <a:gd name="adj" fmla="val 3125"/>
-            </a:avLst>
-          </a:prstGeom>
-          <a:solidFill xmlns:a="http://schemas.openxmlformats.org/drawingml/2006/main">
-            <a:srgbClr val="E8F7EE"/>
-          </a:solidFill>
-          <a:ln xmlns:a="http://schemas.openxmlformats.org/drawingml/2006/main" w="9525">
-            <a:solidFill>
-              <a:srgbClr val="FFFFFF"/>
-            </a:solidFill>
-            <a:prstDash val="solid"/>
-          </a:ln>
-        </p:spPr>
-      </p:sp>
-      <p:sp>
-        <p:nvSpPr>
-          <p:cNvPr id="11" name="">
-            <a:extLst xmlns:a="http://schemas.openxmlformats.org/drawingml/2006/main">
-              <a:ext uri="{FF2B5EF4-FFF2-40B4-BE49-F238E27FC236}">
-                <a16:creationId xmlns:a16="http://schemas.microsoft.com/office/drawing/2014/main" id="{44E18B6A-26EA-404D-8004-B4AEFB1AC04F}"/>
-              </a:ext>
-            </a:extLst>
-          </p:cNvPr>
-          <p:cNvSpPr>
-            <a:spLocks xmlns:a="http://schemas.openxmlformats.org/drawingml/2006/main" noGrp="1"/>
-          </p:cNvSpPr>
-          <p:nvPr/>
-        </p:nvSpPr>
-        <p:spPr>
-          <a:xfrm xmlns:a="http://schemas.openxmlformats.org/drawingml/2006/main">
-            <a:off x="7448550" y="2905125"/>
-            <a:ext cx="1924050" cy="400050"/>
-          </a:xfrm>
-          <a:prstGeom xmlns:a="http://schemas.openxmlformats.org/drawingml/2006/main" prst="rect">
-            <a:avLst/>
-          </a:prstGeom>
-          <a:noFill xmlns:a="http://schemas.openxmlformats.org/drawingml/2006/main"/>
-          <a:ln xmlns:a="http://schemas.openxmlformats.org/drawingml/2006/main" w="0">
-            <a:noFill/>
-            <a:prstDash val="solid"/>
-          </a:ln>
-        </p:spPr>
-        <p:txBody>
-          <a:bodyPr xmlns:a="http://schemas.openxmlformats.org/drawingml/2006/main" wrap="square" lIns="0" tIns="0" rIns="0" bIns="0" anchor="ctr">
-            <a:noAutofit/>
-          </a:bodyPr>
-          <a:lstStyle xmlns:a="http://schemas.openxmlformats.org/drawingml/2006/main"/>
-          <a:p xmlns:a="http://schemas.openxmlformats.org/drawingml/2006/main">
-            <a:pPr algn="l">
-              <a:lnSpc>
-                <a:spcPct val="100000"/>
-              </a:lnSpc>
-              <a:buNone/>
-              <a:defRPr sz="1350" b="1">
-                <a:solidFill>
-                  <a:srgbClr val="051C2A"/>
-                </a:solidFill>
-                <a:latin typeface="Calibri"/>
-                <a:ea typeface="Calibri"/>
-                <a:cs typeface="Calibri"/>
-              </a:defRPr>
-            </a:pPr>
-            <a:r>
-              <a:rPr sz="1800" b="1">
-                <a:solidFill>
-                  <a:srgbClr val="051C2A"/>
-                </a:solidFill>
-                <a:latin typeface="Calibri"/>
-                <a:ea typeface="Calibri"/>
-                <a:cs typeface="Calibri"/>
-              </a:rPr>
-              <a:t>Rank</a:t>
-            </a:r>
-          </a:p>
-        </p:txBody>
-      </p:sp>
-      <p:sp>
-        <p:nvSpPr>
-          <p:cNvPr id="12" name="">
-            <a:extLst xmlns:a="http://schemas.openxmlformats.org/drawingml/2006/main">
-              <a:ext uri="{FF2B5EF4-FFF2-40B4-BE49-F238E27FC236}">
-                <a16:creationId xmlns:a16="http://schemas.microsoft.com/office/drawing/2014/main" id="{4F7E5910-AC18-40D2-B2F3-6FC1F08D1B7D}"/>
-              </a:ext>
-            </a:extLst>
-          </p:cNvPr>
-          <p:cNvSpPr>
-            <a:spLocks xmlns:a="http://schemas.openxmlformats.org/drawingml/2006/main" noGrp="1"/>
-          </p:cNvSpPr>
-          <p:nvPr/>
-        </p:nvSpPr>
-        <p:spPr>
-          <a:xfrm xmlns:a="http://schemas.openxmlformats.org/drawingml/2006/main">
-            <a:off x="9544050" y="2800350"/>
-            <a:ext cx="1962150" cy="609600"/>
-          </a:xfrm>
-          <a:prstGeom xmlns:a="http://schemas.openxmlformats.org/drawingml/2006/main" prst="roundRect">
-            <a:avLst>
-              <a:gd name="adj" fmla="val 3125"/>
-            </a:avLst>
-          </a:prstGeom>
-          <a:solidFill xmlns:a="http://schemas.openxmlformats.org/drawingml/2006/main">
-            <a:srgbClr val="E8F7EE"/>
-          </a:solidFill>
-          <a:ln xmlns:a="http://schemas.openxmlformats.org/drawingml/2006/main" w="9525">
-            <a:solidFill>
-              <a:srgbClr val="FFFFFF"/>
-            </a:solidFill>
-            <a:prstDash val="solid"/>
-          </a:ln>
-        </p:spPr>
-      </p:sp>
-      <p:sp>
-        <p:nvSpPr>
-          <p:cNvPr id="13" name="">
-            <a:extLst xmlns:a="http://schemas.openxmlformats.org/drawingml/2006/main">
-              <a:ext uri="{FF2B5EF4-FFF2-40B4-BE49-F238E27FC236}">
-                <a16:creationId xmlns:a16="http://schemas.microsoft.com/office/drawing/2014/main" id="{664DBD99-75A2-4F76-80D2-886026B31195}"/>
-              </a:ext>
-            </a:extLst>
-          </p:cNvPr>
-          <p:cNvSpPr>
-            <a:spLocks xmlns:a="http://schemas.openxmlformats.org/drawingml/2006/main" noGrp="1"/>
-          </p:cNvSpPr>
-          <p:nvPr/>
-        </p:nvSpPr>
-        <p:spPr>
-          <a:xfrm xmlns:a="http://schemas.openxmlformats.org/drawingml/2006/main">
-            <a:off x="9658350" y="2905125"/>
-            <a:ext cx="1733550" cy="400050"/>
-          </a:xfrm>
-          <a:prstGeom xmlns:a="http://schemas.openxmlformats.org/drawingml/2006/main" prst="rect">
-            <a:avLst/>
-          </a:prstGeom>
-          <a:noFill xmlns:a="http://schemas.openxmlformats.org/drawingml/2006/main"/>
-          <a:ln xmlns:a="http://schemas.openxmlformats.org/drawingml/2006/main" w="0">
-            <a:noFill/>
-            <a:prstDash val="solid"/>
-          </a:ln>
-        </p:spPr>
-        <p:txBody>
-          <a:bodyPr xmlns:a="http://schemas.openxmlformats.org/drawingml/2006/main" wrap="square" lIns="0" tIns="0" rIns="0" bIns="0" anchor="ctr">
-            <a:noAutofit/>
-          </a:bodyPr>
-          <a:lstStyle xmlns:a="http://schemas.openxmlformats.org/drawingml/2006/main"/>
-          <a:p xmlns:a="http://schemas.openxmlformats.org/drawingml/2006/main">
-            <a:pPr algn="l">
-              <a:lnSpc>
-                <a:spcPct val="100000"/>
-              </a:lnSpc>
-              <a:buNone/>
-              <a:defRPr sz="1350" b="1">
-                <a:solidFill>
-                  <a:srgbClr val="051C2A"/>
-                </a:solidFill>
-                <a:latin typeface="Calibri"/>
-                <a:ea typeface="Calibri"/>
-                <a:cs typeface="Calibri"/>
-              </a:defRPr>
-            </a:pPr>
-            <a:r>
-              <a:rPr sz="1800" b="1">
-                <a:solidFill>
-                  <a:srgbClr val="051C2A"/>
-                </a:solidFill>
-                <a:latin typeface="Calibri"/>
-                <a:ea typeface="Calibri"/>
-                <a:cs typeface="Calibri"/>
-              </a:rPr>
-              <a:t>Candidate</a:t>
-            </a:r>
-          </a:p>
-        </p:txBody>
-      </p:sp>
-      <p:sp>
-        <p:nvSpPr>
-          <p:cNvPr id="14" name="">
-            <a:extLst xmlns:a="http://schemas.openxmlformats.org/drawingml/2006/main">
-              <a:ext uri="{FF2B5EF4-FFF2-40B4-BE49-F238E27FC236}">
-                <a16:creationId xmlns:a16="http://schemas.microsoft.com/office/drawing/2014/main" id="{90461F5A-F082-42F4-BA7B-33237B017D96}"/>
-              </a:ext>
-            </a:extLst>
-          </p:cNvPr>
-          <p:cNvSpPr>
-            <a:spLocks xmlns:a="http://schemas.openxmlformats.org/drawingml/2006/main" noGrp="1"/>
-          </p:cNvSpPr>
-          <p:nvPr/>
-        </p:nvSpPr>
-        <p:spPr>
-          <a:xfrm xmlns:a="http://schemas.openxmlformats.org/drawingml/2006/main">
-            <a:off x="11563350" y="2800350"/>
-            <a:ext cx="2571750" cy="609600"/>
-          </a:xfrm>
-          <a:prstGeom xmlns:a="http://schemas.openxmlformats.org/drawingml/2006/main" prst="roundRect">
-            <a:avLst>
-              <a:gd name="adj" fmla="val 3125"/>
-            </a:avLst>
-          </a:prstGeom>
-          <a:solidFill xmlns:a="http://schemas.openxmlformats.org/drawingml/2006/main">
-            <a:srgbClr val="E8F7EE"/>
-          </a:solidFill>
-          <a:ln xmlns:a="http://schemas.openxmlformats.org/drawingml/2006/main" w="9525">
-            <a:solidFill>
-              <a:srgbClr val="FFFFFF"/>
-            </a:solidFill>
-            <a:prstDash val="solid"/>
-          </a:ln>
-        </p:spPr>
-      </p:sp>
-      <p:sp>
-        <p:nvSpPr>
-          <p:cNvPr id="15" name="">
-            <a:extLst xmlns:a="http://schemas.openxmlformats.org/drawingml/2006/main">
-              <a:ext uri="{FF2B5EF4-FFF2-40B4-BE49-F238E27FC236}">
-                <a16:creationId xmlns:a16="http://schemas.microsoft.com/office/drawing/2014/main" id="{26A70624-C8CA-468D-98D9-3780748870C7}"/>
-              </a:ext>
-            </a:extLst>
-          </p:cNvPr>
-          <p:cNvSpPr>
-            <a:spLocks xmlns:a="http://schemas.openxmlformats.org/drawingml/2006/main" noGrp="1"/>
-          </p:cNvSpPr>
-          <p:nvPr/>
-        </p:nvSpPr>
-        <p:spPr>
-          <a:xfrm xmlns:a="http://schemas.openxmlformats.org/drawingml/2006/main">
-            <a:off x="11677650" y="2905125"/>
-            <a:ext cx="2343150" cy="400050"/>
-          </a:xfrm>
-          <a:prstGeom xmlns:a="http://schemas.openxmlformats.org/drawingml/2006/main" prst="rect">
-            <a:avLst/>
-          </a:prstGeom>
-          <a:noFill xmlns:a="http://schemas.openxmlformats.org/drawingml/2006/main"/>
-          <a:ln xmlns:a="http://schemas.openxmlformats.org/drawingml/2006/main" w="0">
-            <a:noFill/>
-            <a:prstDash val="solid"/>
-          </a:ln>
-        </p:spPr>
-        <p:txBody>
-          <a:bodyPr xmlns:a="http://schemas.openxmlformats.org/drawingml/2006/main" wrap="square" lIns="0" tIns="0" rIns="0" bIns="0" anchor="ctr">
-            <a:noAutofit/>
-          </a:bodyPr>
-          <a:lstStyle xmlns:a="http://schemas.openxmlformats.org/drawingml/2006/main"/>
-          <a:p xmlns:a="http://schemas.openxmlformats.org/drawingml/2006/main">
-            <a:pPr algn="l">
-              <a:lnSpc>
-                <a:spcPct val="100000"/>
-              </a:lnSpc>
-              <a:buNone/>
-              <a:defRPr sz="1350" b="1">
-                <a:solidFill>
-                  <a:srgbClr val="051C2A"/>
-                </a:solidFill>
-                <a:latin typeface="Calibri"/>
-                <a:ea typeface="Calibri"/>
-                <a:cs typeface="Calibri"/>
-              </a:defRPr>
-            </a:pPr>
-            <a:r>
-              <a:rPr sz="1800" b="1">
-                <a:solidFill>
-                  <a:srgbClr val="051C2A"/>
-                </a:solidFill>
-                <a:latin typeface="Calibri"/>
-                <a:ea typeface="Calibri"/>
-                <a:cs typeface="Calibri"/>
-              </a:rPr>
-              <a:t>Why it ranks</a:t>
-            </a:r>
-          </a:p>
-        </p:txBody>
-      </p:sp>
-      <p:sp>
-        <p:nvSpPr>
-          <p:cNvPr id="16" name="">
-            <a:extLst xmlns:a="http://schemas.openxmlformats.org/drawingml/2006/main">
-              <a:ext uri="{FF2B5EF4-FFF2-40B4-BE49-F238E27FC236}">
-                <a16:creationId xmlns:a16="http://schemas.microsoft.com/office/drawing/2014/main" id="{D403A85A-2DFF-4A0D-A0C0-99283CEFD139}"/>
-              </a:ext>
-            </a:extLst>
-          </p:cNvPr>
-          <p:cNvSpPr>
-            <a:spLocks xmlns:a="http://schemas.openxmlformats.org/drawingml/2006/main" noGrp="1"/>
-          </p:cNvSpPr>
-          <p:nvPr/>
-        </p:nvSpPr>
-        <p:spPr>
-          <a:xfrm xmlns:a="http://schemas.openxmlformats.org/drawingml/2006/main">
-            <a:off x="7334250" y="3448050"/>
-            <a:ext cx="2152650" cy="666750"/>
-          </a:xfrm>
-          <a:prstGeom xmlns:a="http://schemas.openxmlformats.org/drawingml/2006/main" prst="roundRect">
-            <a:avLst>
-              <a:gd name="adj" fmla="val 2857"/>
-            </a:avLst>
-          </a:prstGeom>
-          <a:solidFill xmlns:a="http://schemas.openxmlformats.org/drawingml/2006/main">
-            <a:srgbClr val="F7FBF8"/>
-          </a:solidFill>
-          <a:ln xmlns:a="http://schemas.openxmlformats.org/drawingml/2006/main" w="9525">
-            <a:solidFill>
-              <a:srgbClr val="FFFFFF"/>
-            </a:solidFill>
-            <a:prstDash val="solid"/>
-          </a:ln>
-        </p:spPr>
-      </p:sp>
-      <p:sp>
-        <p:nvSpPr>
-          <p:cNvPr id="17" name="">
-            <a:extLst xmlns:a="http://schemas.openxmlformats.org/drawingml/2006/main">
-              <a:ext uri="{FF2B5EF4-FFF2-40B4-BE49-F238E27FC236}">
-                <a16:creationId xmlns:a16="http://schemas.microsoft.com/office/drawing/2014/main" id="{91684354-1A30-417B-8AE7-ECA5F6B039A6}"/>
-              </a:ext>
-            </a:extLst>
-          </p:cNvPr>
-          <p:cNvSpPr>
-            <a:spLocks xmlns:a="http://schemas.openxmlformats.org/drawingml/2006/main" noGrp="1"/>
-          </p:cNvSpPr>
-          <p:nvPr/>
-        </p:nvSpPr>
-        <p:spPr>
-          <a:xfrm xmlns:a="http://schemas.openxmlformats.org/drawingml/2006/main">
-            <a:off x="7448550" y="3562350"/>
-            <a:ext cx="1924050" cy="419100"/>
-          </a:xfrm>
-          <a:prstGeom xmlns:a="http://schemas.openxmlformats.org/drawingml/2006/main" prst="rect">
-            <a:avLst/>
-          </a:prstGeom>
-          <a:noFill xmlns:a="http://schemas.openxmlformats.org/drawingml/2006/main"/>
-          <a:ln xmlns:a="http://schemas.openxmlformats.org/drawingml/2006/main" w="0">
-            <a:noFill/>
-            <a:prstDash val="solid"/>
-          </a:ln>
-        </p:spPr>
-        <p:txBody>
-          <a:bodyPr xmlns:a="http://schemas.openxmlformats.org/drawingml/2006/main" wrap="square" lIns="0" tIns="0" rIns="0" bIns="0" anchor="ctr">
-            <a:normAutofit fontScale="100000"/>
-          </a:bodyPr>
-          <a:lstStyle xmlns:a="http://schemas.openxmlformats.org/drawingml/2006/main"/>
-          <a:p xmlns:a="http://schemas.openxmlformats.org/drawingml/2006/main">
-            <a:pPr algn="l">
-              <a:lnSpc>
-                <a:spcPct val="100000"/>
-              </a:lnSpc>
-              <a:buNone/>
-              <a:defRPr sz="1425" b="0">
-                <a:solidFill>
-                  <a:srgbClr val="051C2A"/>
-                </a:solidFill>
-                <a:latin typeface="Calibri"/>
-                <a:ea typeface="Calibri"/>
-                <a:cs typeface="Calibri"/>
-              </a:defRPr>
-            </a:pPr>
-            <a:r>
-              <a:rPr sz="1425" b="0">
-                <a:solidFill>
-                  <a:srgbClr val="051C2A"/>
-                </a:solidFill>
-                <a:latin typeface="Calibri"/>
-                <a:ea typeface="Calibri"/>
-                <a:cs typeface="Calibri"/>
-              </a:rPr>
-              <a:t>1</a:t>
-            </a:r>
-          </a:p>
-        </p:txBody>
-      </p:sp>
-      <p:sp>
-        <p:nvSpPr>
-          <p:cNvPr id="18" name="">
-            <a:extLst xmlns:a="http://schemas.openxmlformats.org/drawingml/2006/main">
-              <a:ext uri="{FF2B5EF4-FFF2-40B4-BE49-F238E27FC236}">
-                <a16:creationId xmlns:a16="http://schemas.microsoft.com/office/drawing/2014/main" id="{65B55295-3DA8-457F-83F0-53BB6A03876C}"/>
-              </a:ext>
-            </a:extLst>
-          </p:cNvPr>
-          <p:cNvSpPr>
-            <a:spLocks xmlns:a="http://schemas.openxmlformats.org/drawingml/2006/main" noGrp="1"/>
-          </p:cNvSpPr>
-          <p:nvPr/>
-        </p:nvSpPr>
-        <p:spPr>
-          <a:xfrm xmlns:a="http://schemas.openxmlformats.org/drawingml/2006/main">
-            <a:off x="9544050" y="3448050"/>
-            <a:ext cx="1962150" cy="666750"/>
-          </a:xfrm>
-          <a:prstGeom xmlns:a="http://schemas.openxmlformats.org/drawingml/2006/main" prst="roundRect">
-            <a:avLst>
-              <a:gd name="adj" fmla="val 2857"/>
-            </a:avLst>
-          </a:prstGeom>
-          <a:solidFill xmlns:a="http://schemas.openxmlformats.org/drawingml/2006/main">
-            <a:srgbClr val="F7FBF8"/>
-          </a:solidFill>
-          <a:ln xmlns:a="http://schemas.openxmlformats.org/drawingml/2006/main" w="9525">
-            <a:solidFill>
-              <a:srgbClr val="FFFFFF"/>
-            </a:solidFill>
-            <a:prstDash val="solid"/>
-          </a:ln>
-        </p:spPr>
-      </p:sp>
-      <p:sp>
-        <p:nvSpPr>
-          <p:cNvPr id="19" name="">
-            <a:extLst xmlns:a="http://schemas.openxmlformats.org/drawingml/2006/main">
-              <a:ext uri="{FF2B5EF4-FFF2-40B4-BE49-F238E27FC236}">
-                <a16:creationId xmlns:a16="http://schemas.microsoft.com/office/drawing/2014/main" id="{3A696DF8-2386-42C4-91BD-18AC99A2924A}"/>
-              </a:ext>
-            </a:extLst>
-          </p:cNvPr>
-          <p:cNvSpPr>
-            <a:spLocks xmlns:a="http://schemas.openxmlformats.org/drawingml/2006/main" noGrp="1"/>
-          </p:cNvSpPr>
-          <p:nvPr/>
-        </p:nvSpPr>
-        <p:spPr>
-          <a:xfrm xmlns:a="http://schemas.openxmlformats.org/drawingml/2006/main">
-            <a:off x="9658350" y="3562350"/>
-            <a:ext cx="1733550" cy="419100"/>
-          </a:xfrm>
-          <a:prstGeom xmlns:a="http://schemas.openxmlformats.org/drawingml/2006/main" prst="rect">
-            <a:avLst/>
-          </a:prstGeom>
-          <a:noFill xmlns:a="http://schemas.openxmlformats.org/drawingml/2006/main"/>
-          <a:ln xmlns:a="http://schemas.openxmlformats.org/drawingml/2006/main" w="0">
-            <a:noFill/>
-            <a:prstDash val="solid"/>
-          </a:ln>
-        </p:spPr>
-        <p:txBody>
-          <a:bodyPr xmlns:a="http://schemas.openxmlformats.org/drawingml/2006/main" wrap="square" lIns="0" tIns="0" rIns="0" bIns="0" anchor="ctr">
-            <a:normAutofit fontScale="100000"/>
-          </a:bodyPr>
-          <a:lstStyle xmlns:a="http://schemas.openxmlformats.org/drawingml/2006/main"/>
-          <a:p xmlns:a="http://schemas.openxmlformats.org/drawingml/2006/main">
-            <a:pPr algn="l">
-              <a:lnSpc>
-                <a:spcPct val="100000"/>
-              </a:lnSpc>
-              <a:buNone/>
-              <a:defRPr sz="1425" b="0">
-                <a:solidFill>
-                  <a:srgbClr val="051C2A"/>
-                </a:solidFill>
-                <a:latin typeface="Calibri"/>
-                <a:ea typeface="Calibri"/>
-                <a:cs typeface="Calibri"/>
-              </a:defRPr>
-            </a:pPr>
-            <a:r>
-              <a:rPr sz="1425" b="0">
-                <a:solidFill>
-                  <a:srgbClr val="051C2A"/>
-                </a:solidFill>
-                <a:latin typeface="Calibri"/>
-                <a:ea typeface="Calibri"/>
-                <a:cs typeface="Calibri"/>
-              </a:rPr>
-              <a:t>NVDA…001</a:t>
-            </a:r>
-          </a:p>
-        </p:txBody>
-      </p:sp>
-      <p:sp>
-        <p:nvSpPr>
-          <p:cNvPr id="20" name="">
-            <a:extLst xmlns:a="http://schemas.openxmlformats.org/drawingml/2006/main">
-              <a:ext uri="{FF2B5EF4-FFF2-40B4-BE49-F238E27FC236}">
-                <a16:creationId xmlns:a16="http://schemas.microsoft.com/office/drawing/2014/main" id="{E339A1A9-4564-4056-8CDC-CEDB497A7AD1}"/>
-              </a:ext>
-            </a:extLst>
-          </p:cNvPr>
-          <p:cNvSpPr>
-            <a:spLocks xmlns:a="http://schemas.openxmlformats.org/drawingml/2006/main" noGrp="1"/>
-          </p:cNvSpPr>
-          <p:nvPr/>
-        </p:nvSpPr>
-        <p:spPr>
-          <a:xfrm xmlns:a="http://schemas.openxmlformats.org/drawingml/2006/main">
-            <a:off x="11563350" y="3448050"/>
-            <a:ext cx="2571750" cy="666750"/>
-          </a:xfrm>
-          <a:prstGeom xmlns:a="http://schemas.openxmlformats.org/drawingml/2006/main" prst="roundRect">
-            <a:avLst>
-              <a:gd name="adj" fmla="val 2857"/>
-            </a:avLst>
-          </a:prstGeom>
-          <a:solidFill xmlns:a="http://schemas.openxmlformats.org/drawingml/2006/main">
-            <a:srgbClr val="F7FBF8"/>
-          </a:solidFill>
-          <a:ln xmlns:a="http://schemas.openxmlformats.org/drawingml/2006/main" w="9525">
-            <a:solidFill>
-              <a:srgbClr val="FFFFFF"/>
-            </a:solidFill>
-            <a:prstDash val="solid"/>
-          </a:ln>
-        </p:spPr>
-      </p:sp>
-      <p:sp>
-        <p:nvSpPr>
-          <p:cNvPr id="21" name="">
-            <a:extLst xmlns:a="http://schemas.openxmlformats.org/drawingml/2006/main">
-              <a:ext uri="{FF2B5EF4-FFF2-40B4-BE49-F238E27FC236}">
-                <a16:creationId xmlns:a16="http://schemas.microsoft.com/office/drawing/2014/main" id="{9BC725B4-5DC5-4222-B581-EB84BE90E77A}"/>
-              </a:ext>
-            </a:extLst>
-          </p:cNvPr>
-          <p:cNvSpPr>
-            <a:spLocks xmlns:a="http://schemas.openxmlformats.org/drawingml/2006/main" noGrp="1"/>
-          </p:cNvSpPr>
-          <p:nvPr/>
-        </p:nvSpPr>
-        <p:spPr>
-          <a:xfrm xmlns:a="http://schemas.openxmlformats.org/drawingml/2006/main">
-            <a:off x="11677650" y="3562350"/>
-            <a:ext cx="2343150" cy="419100"/>
-          </a:xfrm>
-          <a:prstGeom xmlns:a="http://schemas.openxmlformats.org/drawingml/2006/main" prst="rect">
-            <a:avLst/>
-          </a:prstGeom>
-          <a:noFill xmlns:a="http://schemas.openxmlformats.org/drawingml/2006/main"/>
-          <a:ln xmlns:a="http://schemas.openxmlformats.org/drawingml/2006/main" w="0">
-            <a:noFill/>
-            <a:prstDash val="solid"/>
-          </a:ln>
-        </p:spPr>
-        <p:txBody>
-          <a:bodyPr xmlns:a="http://schemas.openxmlformats.org/drawingml/2006/main" wrap="square" lIns="0" tIns="0" rIns="0" bIns="0" anchor="ctr">
-            <a:normAutofit fontScale="100000"/>
-          </a:bodyPr>
-          <a:lstStyle xmlns:a="http://schemas.openxmlformats.org/drawingml/2006/main"/>
-          <a:p xmlns:a="http://schemas.openxmlformats.org/drawingml/2006/main">
-            <a:pPr algn="l">
-              <a:lnSpc>
-                <a:spcPct val="100000"/>
-              </a:lnSpc>
-              <a:buNone/>
-              <a:defRPr sz="1425" b="0">
-                <a:solidFill>
-                  <a:srgbClr val="051C2A"/>
-                </a:solidFill>
-                <a:latin typeface="Calibri"/>
-                <a:ea typeface="Calibri"/>
-                <a:cs typeface="Calibri"/>
-              </a:defRPr>
-            </a:pPr>
-            <a:r>
-              <a:rPr sz="1425" b="0">
-                <a:solidFill>
-                  <a:srgbClr val="051C2A"/>
-                </a:solidFill>
-                <a:latin typeface="Calibri"/>
-                <a:ea typeface="Calibri"/>
-                <a:cs typeface="Calibri"/>
-              </a:rPr>
-              <a:t>raw cosine .577</a:t>
-            </a:r>
-          </a:p>
-        </p:txBody>
-      </p:sp>
-      <p:sp>
-        <p:nvSpPr>
-          <p:cNvPr id="22" name="">
-            <a:extLst xmlns:a="http://schemas.openxmlformats.org/drawingml/2006/main">
-              <a:ext uri="{FF2B5EF4-FFF2-40B4-BE49-F238E27FC236}">
-                <a16:creationId xmlns:a16="http://schemas.microsoft.com/office/drawing/2014/main" id="{0D160DDC-C4FB-4932-B81B-093415961B73}"/>
-              </a:ext>
-            </a:extLst>
-          </p:cNvPr>
-          <p:cNvSpPr>
-            <a:spLocks xmlns:a="http://schemas.openxmlformats.org/drawingml/2006/main" noGrp="1"/>
-          </p:cNvSpPr>
-          <p:nvPr/>
-        </p:nvSpPr>
-        <p:spPr>
-          <a:xfrm xmlns:a="http://schemas.openxmlformats.org/drawingml/2006/main">
-            <a:off x="7334250" y="4171950"/>
-            <a:ext cx="2152650" cy="666750"/>
-          </a:xfrm>
-          <a:prstGeom xmlns:a="http://schemas.openxmlformats.org/drawingml/2006/main" prst="roundRect">
-            <a:avLst>
-              <a:gd name="adj" fmla="val 2857"/>
-            </a:avLst>
-          </a:prstGeom>
-          <a:solidFill xmlns:a="http://schemas.openxmlformats.org/drawingml/2006/main">
-            <a:srgbClr val="F7FBF8"/>
-          </a:solidFill>
-          <a:ln xmlns:a="http://schemas.openxmlformats.org/drawingml/2006/main" w="9525">
-            <a:solidFill>
-              <a:srgbClr val="FFFFFF"/>
-            </a:solidFill>
-            <a:prstDash val="solid"/>
-          </a:ln>
-        </p:spPr>
-      </p:sp>
-      <p:sp>
-        <p:nvSpPr>
-          <p:cNvPr id="23" name="">
-            <a:extLst xmlns:a="http://schemas.openxmlformats.org/drawingml/2006/main">
-              <a:ext uri="{FF2B5EF4-FFF2-40B4-BE49-F238E27FC236}">
-                <a16:creationId xmlns:a16="http://schemas.microsoft.com/office/drawing/2014/main" id="{328C8390-620E-4337-B177-E20E16662614}"/>
-              </a:ext>
-            </a:extLst>
-          </p:cNvPr>
-          <p:cNvSpPr>
-            <a:spLocks xmlns:a="http://schemas.openxmlformats.org/drawingml/2006/main" noGrp="1"/>
-          </p:cNvSpPr>
-          <p:nvPr/>
-        </p:nvSpPr>
-        <p:spPr>
-          <a:xfrm xmlns:a="http://schemas.openxmlformats.org/drawingml/2006/main">
-            <a:off x="7448550" y="4286250"/>
-            <a:ext cx="1924050" cy="419100"/>
-          </a:xfrm>
-          <a:prstGeom xmlns:a="http://schemas.openxmlformats.org/drawingml/2006/main" prst="rect">
-            <a:avLst/>
-          </a:prstGeom>
-          <a:noFill xmlns:a="http://schemas.openxmlformats.org/drawingml/2006/main"/>
-          <a:ln xmlns:a="http://schemas.openxmlformats.org/drawingml/2006/main" w="0">
-            <a:noFill/>
-            <a:prstDash val="solid"/>
-          </a:ln>
-        </p:spPr>
-        <p:txBody>
-          <a:bodyPr xmlns:a="http://schemas.openxmlformats.org/drawingml/2006/main" wrap="square" lIns="0" tIns="0" rIns="0" bIns="0" anchor="ctr">
-            <a:normAutofit fontScale="100000"/>
-          </a:bodyPr>
-          <a:lstStyle xmlns:a="http://schemas.openxmlformats.org/drawingml/2006/main"/>
-          <a:p xmlns:a="http://schemas.openxmlformats.org/drawingml/2006/main">
-            <a:pPr algn="l">
-              <a:lnSpc>
-                <a:spcPct val="100000"/>
-              </a:lnSpc>
-              <a:buNone/>
-              <a:defRPr sz="1425" b="0">
-                <a:solidFill>
-                  <a:srgbClr val="051C2A"/>
-                </a:solidFill>
-                <a:latin typeface="Calibri"/>
-                <a:ea typeface="Calibri"/>
-                <a:cs typeface="Calibri"/>
-              </a:defRPr>
-            </a:pPr>
-            <a:r>
-              <a:rPr sz="1425" b="0">
-                <a:solidFill>
-                  <a:srgbClr val="051C2A"/>
-                </a:solidFill>
-                <a:latin typeface="Calibri"/>
-                <a:ea typeface="Calibri"/>
-                <a:cs typeface="Calibri"/>
-              </a:rPr>
-              <a:t>2</a:t>
-            </a:r>
-          </a:p>
-        </p:txBody>
-      </p:sp>
-      <p:sp>
-        <p:nvSpPr>
-          <p:cNvPr id="24" name="">
-            <a:extLst xmlns:a="http://schemas.openxmlformats.org/drawingml/2006/main">
-              <a:ext uri="{FF2B5EF4-FFF2-40B4-BE49-F238E27FC236}">
-                <a16:creationId xmlns:a16="http://schemas.microsoft.com/office/drawing/2014/main" id="{78123193-7BA4-459F-B618-D3AB37E4EFEA}"/>
-              </a:ext>
-            </a:extLst>
-          </p:cNvPr>
-          <p:cNvSpPr>
-            <a:spLocks xmlns:a="http://schemas.openxmlformats.org/drawingml/2006/main" noGrp="1"/>
-          </p:cNvSpPr>
-          <p:nvPr/>
-        </p:nvSpPr>
-        <p:spPr>
-          <a:xfrm xmlns:a="http://schemas.openxmlformats.org/drawingml/2006/main">
-            <a:off x="9544050" y="4171950"/>
-            <a:ext cx="1962150" cy="666750"/>
-          </a:xfrm>
-          <a:prstGeom xmlns:a="http://schemas.openxmlformats.org/drawingml/2006/main" prst="roundRect">
-            <a:avLst>
-              <a:gd name="adj" fmla="val 2857"/>
-            </a:avLst>
-          </a:prstGeom>
-          <a:solidFill xmlns:a="http://schemas.openxmlformats.org/drawingml/2006/main">
-            <a:srgbClr val="F7FBF8"/>
-          </a:solidFill>
-          <a:ln xmlns:a="http://schemas.openxmlformats.org/drawingml/2006/main" w="9525">
-            <a:solidFill>
-              <a:srgbClr val="FFFFFF"/>
-            </a:solidFill>
-            <a:prstDash val="solid"/>
-          </a:ln>
-        </p:spPr>
-      </p:sp>
-      <p:sp>
-        <p:nvSpPr>
-          <p:cNvPr id="25" name="">
-            <a:extLst xmlns:a="http://schemas.openxmlformats.org/drawingml/2006/main">
-              <a:ext uri="{FF2B5EF4-FFF2-40B4-BE49-F238E27FC236}">
-                <a16:creationId xmlns:a16="http://schemas.microsoft.com/office/drawing/2014/main" id="{CAA33689-B136-4C82-B577-8954D2056B7F}"/>
-              </a:ext>
-            </a:extLst>
-          </p:cNvPr>
-          <p:cNvSpPr>
-            <a:spLocks xmlns:a="http://schemas.openxmlformats.org/drawingml/2006/main" noGrp="1"/>
-          </p:cNvSpPr>
-          <p:nvPr/>
-        </p:nvSpPr>
-        <p:spPr>
-          <a:xfrm xmlns:a="http://schemas.openxmlformats.org/drawingml/2006/main">
-            <a:off x="9658350" y="4286250"/>
-            <a:ext cx="1733550" cy="419100"/>
-          </a:xfrm>
-          <a:prstGeom xmlns:a="http://schemas.openxmlformats.org/drawingml/2006/main" prst="rect">
-            <a:avLst/>
-          </a:prstGeom>
-          <a:noFill xmlns:a="http://schemas.openxmlformats.org/drawingml/2006/main"/>
-          <a:ln xmlns:a="http://schemas.openxmlformats.org/drawingml/2006/main" w="0">
-            <a:noFill/>
-            <a:prstDash val="solid"/>
-          </a:ln>
-        </p:spPr>
-        <p:txBody>
-          <a:bodyPr xmlns:a="http://schemas.openxmlformats.org/drawingml/2006/main" wrap="square" lIns="0" tIns="0" rIns="0" bIns="0" anchor="ctr">
-            <a:normAutofit fontScale="100000"/>
-          </a:bodyPr>
-          <a:lstStyle xmlns:a="http://schemas.openxmlformats.org/drawingml/2006/main"/>
-          <a:p xmlns:a="http://schemas.openxmlformats.org/drawingml/2006/main">
-            <a:pPr algn="l">
-              <a:lnSpc>
-                <a:spcPct val="100000"/>
-              </a:lnSpc>
-              <a:buNone/>
-              <a:defRPr sz="1425" b="0">
-                <a:solidFill>
-                  <a:srgbClr val="051C2A"/>
-                </a:solidFill>
-                <a:latin typeface="Calibri"/>
-                <a:ea typeface="Calibri"/>
-                <a:cs typeface="Calibri"/>
-              </a:defRPr>
-            </a:pPr>
-            <a:r>
-              <a:rPr sz="1425" b="0">
-                <a:solidFill>
-                  <a:srgbClr val="051C2A"/>
-                </a:solidFill>
-                <a:latin typeface="Calibri"/>
-                <a:ea typeface="Calibri"/>
-                <a:cs typeface="Calibri"/>
-              </a:rPr>
-              <a:t>NVDA…002</a:t>
-            </a:r>
-          </a:p>
-        </p:txBody>
-      </p:sp>
-      <p:sp>
-        <p:nvSpPr>
-          <p:cNvPr id="26" name="">
-            <a:extLst xmlns:a="http://schemas.openxmlformats.org/drawingml/2006/main">
-              <a:ext uri="{FF2B5EF4-FFF2-40B4-BE49-F238E27FC236}">
-                <a16:creationId xmlns:a16="http://schemas.microsoft.com/office/drawing/2014/main" id="{BF49AE3A-93EC-4D6A-8CF3-2D01BDBDCB84}"/>
-              </a:ext>
-            </a:extLst>
-          </p:cNvPr>
-          <p:cNvSpPr>
-            <a:spLocks xmlns:a="http://schemas.openxmlformats.org/drawingml/2006/main" noGrp="1"/>
-          </p:cNvSpPr>
-          <p:nvPr/>
-        </p:nvSpPr>
-        <p:spPr>
-          <a:xfrm xmlns:a="http://schemas.openxmlformats.org/drawingml/2006/main">
-            <a:off x="11563350" y="4171950"/>
-            <a:ext cx="2571750" cy="666750"/>
-          </a:xfrm>
-          <a:prstGeom xmlns:a="http://schemas.openxmlformats.org/drawingml/2006/main" prst="roundRect">
-            <a:avLst>
-              <a:gd name="adj" fmla="val 2857"/>
-            </a:avLst>
-          </a:prstGeom>
-          <a:solidFill xmlns:a="http://schemas.openxmlformats.org/drawingml/2006/main">
-            <a:srgbClr val="F7FBF8"/>
-          </a:solidFill>
-          <a:ln xmlns:a="http://schemas.openxmlformats.org/drawingml/2006/main" w="9525">
-            <a:solidFill>
-              <a:srgbClr val="FFFFFF"/>
-            </a:solidFill>
-            <a:prstDash val="solid"/>
-          </a:ln>
-        </p:spPr>
-      </p:sp>
-      <p:sp>
-        <p:nvSpPr>
-          <p:cNvPr id="27" name="">
-            <a:extLst xmlns:a="http://schemas.openxmlformats.org/drawingml/2006/main">
-              <a:ext uri="{FF2B5EF4-FFF2-40B4-BE49-F238E27FC236}">
-                <a16:creationId xmlns:a16="http://schemas.microsoft.com/office/drawing/2014/main" id="{6F772D1E-8248-480D-BA11-3458C9BA2755}"/>
-              </a:ext>
-            </a:extLst>
-          </p:cNvPr>
-          <p:cNvSpPr>
-            <a:spLocks xmlns:a="http://schemas.openxmlformats.org/drawingml/2006/main" noGrp="1"/>
-          </p:cNvSpPr>
-          <p:nvPr/>
-        </p:nvSpPr>
-        <p:spPr>
-          <a:xfrm xmlns:a="http://schemas.openxmlformats.org/drawingml/2006/main">
-            <a:off x="11677650" y="4286250"/>
-            <a:ext cx="2343150" cy="419100"/>
-          </a:xfrm>
-          <a:prstGeom xmlns:a="http://schemas.openxmlformats.org/drawingml/2006/main" prst="rect">
-            <a:avLst/>
-          </a:prstGeom>
-          <a:noFill xmlns:a="http://schemas.openxmlformats.org/drawingml/2006/main"/>
-          <a:ln xmlns:a="http://schemas.openxmlformats.org/drawingml/2006/main" w="0">
-            <a:noFill/>
-            <a:prstDash val="solid"/>
-          </a:ln>
-        </p:spPr>
-        <p:txBody>
-          <a:bodyPr xmlns:a="http://schemas.openxmlformats.org/drawingml/2006/main" wrap="square" lIns="0" tIns="0" rIns="0" bIns="0" anchor="ctr">
-            <a:normAutofit fontScale="100000"/>
-          </a:bodyPr>
-          <a:lstStyle xmlns:a="http://schemas.openxmlformats.org/drawingml/2006/main"/>
-          <a:p xmlns:a="http://schemas.openxmlformats.org/drawingml/2006/main">
-            <a:pPr algn="l">
-              <a:lnSpc>
-                <a:spcPct val="100000"/>
-              </a:lnSpc>
-              <a:buNone/>
-              <a:defRPr sz="1425" b="0">
-                <a:solidFill>
-                  <a:srgbClr val="051C2A"/>
-                </a:solidFill>
-                <a:latin typeface="Calibri"/>
-                <a:ea typeface="Calibri"/>
-                <a:cs typeface="Calibri"/>
-              </a:defRPr>
-            </a:pPr>
-            <a:r>
-              <a:rPr sz="1425" b="0">
-                <a:solidFill>
-                  <a:srgbClr val="051C2A"/>
-                </a:solidFill>
-                <a:latin typeface="Calibri"/>
-                <a:ea typeface="Calibri"/>
-                <a:cs typeface="Calibri"/>
-              </a:rPr>
-              <a:t>raw cosine .577</a:t>
-            </a:r>
-          </a:p>
-        </p:txBody>
-      </p:sp>
-      <p:sp>
-        <p:nvSpPr>
-          <p:cNvPr id="28" name="">
-            <a:extLst xmlns:a="http://schemas.openxmlformats.org/drawingml/2006/main">
-              <a:ext uri="{FF2B5EF4-FFF2-40B4-BE49-F238E27FC236}">
-                <a16:creationId xmlns:a16="http://schemas.microsoft.com/office/drawing/2014/main" id="{3EF86CEA-598B-4254-9CEF-1D77B357BD37}"/>
-              </a:ext>
-            </a:extLst>
-          </p:cNvPr>
-          <p:cNvSpPr>
-            <a:spLocks xmlns:a="http://schemas.openxmlformats.org/drawingml/2006/main" noGrp="1"/>
-          </p:cNvSpPr>
-          <p:nvPr/>
-        </p:nvSpPr>
-        <p:spPr>
-          <a:xfrm xmlns:a="http://schemas.openxmlformats.org/drawingml/2006/main">
-            <a:off x="7334250" y="5124450"/>
-            <a:ext cx="6800850" cy="400050"/>
-          </a:xfrm>
-          <a:prstGeom xmlns:a="http://schemas.openxmlformats.org/drawingml/2006/main" prst="rect">
-            <a:avLst/>
-          </a:prstGeom>
-          <a:noFill xmlns:a="http://schemas.openxmlformats.org/drawingml/2006/main"/>
-          <a:ln xmlns:a="http://schemas.openxmlformats.org/drawingml/2006/main" w="0">
-            <a:noFill/>
-            <a:prstDash val="solid"/>
-          </a:ln>
-        </p:spPr>
-        <p:txBody>
-          <a:bodyPr xmlns:a="http://schemas.openxmlformats.org/drawingml/2006/main" wrap="square" lIns="0" tIns="0" rIns="0" bIns="0" anchor="ctr">
-            <a:noAutofit/>
-          </a:bodyPr>
-          <a:lstStyle xmlns:a="http://schemas.openxmlformats.org/drawingml/2006/main"/>
-          <a:p xmlns:a="http://schemas.openxmlformats.org/drawingml/2006/main">
-            <a:pPr algn="ctr">
-              <a:lnSpc>
-                <a:spcPct val="100000"/>
-              </a:lnSpc>
-              <a:buNone/>
-              <a:defRPr sz="1575" b="1">
-                <a:solidFill>
-                  <a:srgbClr val="2E8B57"/>
-                </a:solidFill>
-                <a:latin typeface="Calibri"/>
-                <a:ea typeface="Calibri"/>
-                <a:cs typeface="Calibri"/>
-              </a:defRPr>
-            </a:pPr>
-            <a:r>
-              <a:rPr sz="1800" b="1">
-                <a:solidFill>
-                  <a:srgbClr val="2E8B57"/>
-                </a:solidFill>
-                <a:latin typeface="Calibri"/>
-                <a:ea typeface="Calibri"/>
-                <a:cs typeface="Calibri"/>
-              </a:rPr>
-              <a:t>Evidence at dense R4 · NVDA…003 · raw cosine .408</a:t>
-            </a:r>
-          </a:p>
-        </p:txBody>
-      </p:sp>
-      <p:sp>
-        <p:nvSpPr>
-          <p:cNvPr id="29" name="">
-            <a:extLst xmlns:a="http://schemas.openxmlformats.org/drawingml/2006/main">
-              <a:ext uri="{FF2B5EF4-FFF2-40B4-BE49-F238E27FC236}">
-                <a16:creationId xmlns:a16="http://schemas.microsoft.com/office/drawing/2014/main" id="{B65E3BAB-E11C-4A7E-89F3-AB1868F4F013}"/>
-              </a:ext>
-            </a:extLst>
-          </p:cNvPr>
-          <p:cNvSpPr>
-            <a:spLocks xmlns:a="http://schemas.openxmlformats.org/drawingml/2006/main" noGrp="1"/>
-          </p:cNvSpPr>
-          <p:nvPr/>
-        </p:nvSpPr>
-        <p:spPr>
-          <a:xfrm xmlns:a="http://schemas.openxmlformats.org/drawingml/2006/main">
-            <a:off x="6953250" y="2362200"/>
-            <a:ext cx="28575" cy="3390900"/>
-          </a:xfrm>
-          <a:prstGeom xmlns:a="http://schemas.openxmlformats.org/drawingml/2006/main" prst="rect">
-            <a:avLst/>
-          </a:prstGeom>
-          <a:solidFill xmlns:a="http://schemas.openxmlformats.org/drawingml/2006/main">
-            <a:srgbClr val="E4E7E9"/>
-          </a:solidFill>
-          <a:ln xmlns:a="http://schemas.openxmlformats.org/drawingml/2006/main" w="0">
-            <a:solidFill>
-              <a:srgbClr val="E4E7E9"/>
-            </a:solidFill>
-            <a:prstDash val="solid"/>
-          </a:ln>
-        </p:spPr>
-      </p:sp>
-      <p:sp>
-        <p:nvSpPr>
-          <p:cNvPr id="30" name="">
-            <a:extLst xmlns:a="http://schemas.openxmlformats.org/drawingml/2006/main">
-              <a:ext uri="{FF2B5EF4-FFF2-40B4-BE49-F238E27FC236}">
-                <a16:creationId xmlns:a16="http://schemas.microsoft.com/office/drawing/2014/main" id="{71233CBA-8C3B-4B18-A5D5-D4F7061FDCF8}"/>
-              </a:ext>
-            </a:extLst>
-          </p:cNvPr>
-          <p:cNvSpPr>
-            <a:spLocks xmlns:a="http://schemas.openxmlformats.org/drawingml/2006/main" noGrp="1"/>
-          </p:cNvSpPr>
-          <p:nvPr/>
-        </p:nvSpPr>
-        <p:spPr>
-          <a:xfrm xmlns:a="http://schemas.openxmlformats.org/drawingml/2006/main">
-            <a:off x="1028700" y="6153150"/>
-            <a:ext cx="4286250" cy="285750"/>
-          </a:xfrm>
-          <a:prstGeom xmlns:a="http://schemas.openxmlformats.org/drawingml/2006/main" prst="rect">
-            <a:avLst/>
-          </a:prstGeom>
-          <a:noFill xmlns:a="http://schemas.openxmlformats.org/drawingml/2006/main"/>
-          <a:ln xmlns:a="http://schemas.openxmlformats.org/drawingml/2006/main" w="0">
-            <a:noFill/>
-            <a:prstDash val="solid"/>
-          </a:ln>
-        </p:spPr>
-        <p:txBody>
-          <a:bodyPr xmlns:a="http://schemas.openxmlformats.org/drawingml/2006/main" wrap="square" lIns="0" tIns="0" rIns="0" bIns="0" anchor="ctr">
-            <a:noAutofit/>
-          </a:bodyPr>
-          <a:lstStyle xmlns:a="http://schemas.openxmlformats.org/drawingml/2006/main"/>
-          <a:p xmlns:a="http://schemas.openxmlformats.org/drawingml/2006/main">
-            <a:pPr algn="l">
-              <a:lnSpc>
-                <a:spcPct val="100000"/>
-              </a:lnSpc>
-              <a:buNone/>
-              <a:defRPr sz="1275" b="1">
-                <a:solidFill>
-                  <a:srgbClr val="1F40CB"/>
-                </a:solidFill>
-                <a:latin typeface="Calibri"/>
-                <a:ea typeface="Calibri"/>
-                <a:cs typeface="Calibri"/>
-              </a:defRPr>
-            </a:pPr>
-            <a:r>
-              <a:rPr sz="1800" b="1">
-                <a:solidFill>
-                  <a:srgbClr val="1F40CB"/>
-                </a:solidFill>
-                <a:latin typeface="Calibri"/>
-                <a:ea typeface="Calibri"/>
-                <a:cs typeface="Calibri"/>
-              </a:rPr>
-              <a:t>SCORE TYPES STAY DISTINCT</a:t>
-            </a:r>
-          </a:p>
-        </p:txBody>
-      </p:sp>
-      <p:sp>
-        <p:nvSpPr>
-          <p:cNvPr id="31" name="">
-            <a:extLst xmlns:a="http://schemas.openxmlformats.org/drawingml/2006/main">
-              <a:ext uri="{FF2B5EF4-FFF2-40B4-BE49-F238E27FC236}">
-                <a16:creationId xmlns:a16="http://schemas.microsoft.com/office/drawing/2014/main" id="{5DEA1FB2-5ABC-4E19-B39E-FBEB026EF177}"/>
-              </a:ext>
-            </a:extLst>
-          </p:cNvPr>
-          <p:cNvSpPr>
-            <a:spLocks xmlns:a="http://schemas.openxmlformats.org/drawingml/2006/main" noGrp="1"/>
-          </p:cNvSpPr>
-          <p:nvPr/>
-        </p:nvSpPr>
-        <p:spPr>
-          <a:xfrm xmlns:a="http://schemas.openxmlformats.org/drawingml/2006/main">
-            <a:off x="1028700" y="6534150"/>
-            <a:ext cx="2667000" cy="285750"/>
-          </a:xfrm>
-          <a:prstGeom xmlns:a="http://schemas.openxmlformats.org/drawingml/2006/main" prst="rect">
-            <a:avLst/>
-          </a:prstGeom>
-          <a:noFill xmlns:a="http://schemas.openxmlformats.org/drawingml/2006/main"/>
-          <a:ln xmlns:a="http://schemas.openxmlformats.org/drawingml/2006/main" w="0">
-            <a:noFill/>
-            <a:prstDash val="solid"/>
-          </a:ln>
-        </p:spPr>
-        <p:txBody>
-          <a:bodyPr xmlns:a="http://schemas.openxmlformats.org/drawingml/2006/main" wrap="square" lIns="0" tIns="0" rIns="0" bIns="0" anchor="ctr">
-            <a:noAutofit/>
-          </a:bodyPr>
-          <a:lstStyle xmlns:a="http://schemas.openxmlformats.org/drawingml/2006/main"/>
-          <a:p xmlns:a="http://schemas.openxmlformats.org/drawingml/2006/main">
-            <a:pPr algn="l">
-              <a:lnSpc>
-                <a:spcPct val="100000"/>
-              </a:lnSpc>
-              <a:buNone/>
-              <a:defRPr sz="1275" b="0">
-                <a:solidFill>
-                  <a:srgbClr val="64748B"/>
-                </a:solidFill>
-                <a:latin typeface="Calibri"/>
-                <a:ea typeface="Calibri"/>
-                <a:cs typeface="Calibri"/>
-              </a:defRPr>
-            </a:pPr>
-            <a:r>
-              <a:rPr sz="1800" b="0">
-                <a:solidFill>
-                  <a:srgbClr val="64748B"/>
-                </a:solidFill>
-                <a:latin typeface="Calibri"/>
-                <a:ea typeface="Calibri"/>
-                <a:cs typeface="Calibri"/>
-              </a:rPr>
-              <a:t>Keyword scale</a:t>
-            </a:r>
-          </a:p>
-        </p:txBody>
-      </p:sp>
-      <p:sp>
-        <p:nvSpPr>
-          <p:cNvPr id="32" name="">
-            <a:extLst xmlns:a="http://schemas.openxmlformats.org/drawingml/2006/main">
-              <a:ext uri="{FF2B5EF4-FFF2-40B4-BE49-F238E27FC236}">
-                <a16:creationId xmlns:a16="http://schemas.microsoft.com/office/drawing/2014/main" id="{79EE73CC-AED7-4593-A08D-4913CB1DF80E}"/>
-              </a:ext>
-            </a:extLst>
-          </p:cNvPr>
-          <p:cNvSpPr>
-            <a:spLocks xmlns:a="http://schemas.openxmlformats.org/drawingml/2006/main" noGrp="1"/>
-          </p:cNvSpPr>
-          <p:nvPr/>
-        </p:nvSpPr>
-        <p:spPr>
-          <a:xfrm xmlns:a="http://schemas.openxmlformats.org/drawingml/2006/main">
-            <a:off x="1028700" y="6858000"/>
-            <a:ext cx="2667000" cy="457200"/>
-          </a:xfrm>
-          <a:prstGeom xmlns:a="http://schemas.openxmlformats.org/drawingml/2006/main" prst="rect">
-            <a:avLst/>
-          </a:prstGeom>
-          <a:noFill xmlns:a="http://schemas.openxmlformats.org/drawingml/2006/main"/>
-          <a:ln xmlns:a="http://schemas.openxmlformats.org/drawingml/2006/main" w="0">
-            <a:noFill/>
-            <a:prstDash val="solid"/>
-          </a:ln>
-        </p:spPr>
-        <p:txBody>
-          <a:bodyPr xmlns:a="http://schemas.openxmlformats.org/drawingml/2006/main" wrap="square" lIns="0" tIns="0" rIns="0" bIns="0" anchor="ctr">
-            <a:normAutofit fontScale="100000"/>
-          </a:bodyPr>
-          <a:lstStyle xmlns:a="http://schemas.openxmlformats.org/drawingml/2006/main"/>
-          <a:p xmlns:a="http://schemas.openxmlformats.org/drawingml/2006/main">
-            <a:pPr algn="l">
-              <a:lnSpc>
-                <a:spcPct val="100000"/>
-              </a:lnSpc>
-              <a:buNone/>
-              <a:defRPr sz="2550" b="1">
-                <a:solidFill>
-                  <a:srgbClr val="F07D00"/>
-                </a:solidFill>
-                <a:latin typeface="Calibri"/>
-                <a:ea typeface="Calibri"/>
-                <a:cs typeface="Calibri"/>
-              </a:defRPr>
-            </a:pPr>
-            <a:r>
-              <a:rPr sz="2550" b="1">
-                <a:solidFill>
-                  <a:srgbClr val="F07D00"/>
-                </a:solidFill>
-                <a:latin typeface="Calibri"/>
-                <a:ea typeface="Calibri"/>
-                <a:cs typeface="Calibri"/>
-              </a:rPr>
-              <a:t>TF-IDF cosine</a:t>
-            </a:r>
-          </a:p>
-        </p:txBody>
-      </p:sp>
-      <p:sp>
-        <p:nvSpPr>
-          <p:cNvPr id="33" name="">
-            <a:extLst xmlns:a="http://schemas.openxmlformats.org/drawingml/2006/main">
-              <a:ext uri="{FF2B5EF4-FFF2-40B4-BE49-F238E27FC236}">
-                <a16:creationId xmlns:a16="http://schemas.microsoft.com/office/drawing/2014/main" id="{043BC68A-D5B2-4F89-AC7A-F4A6B12238B6}"/>
-              </a:ext>
-            </a:extLst>
-          </p:cNvPr>
-          <p:cNvSpPr>
-            <a:spLocks xmlns:a="http://schemas.openxmlformats.org/drawingml/2006/main" noGrp="1"/>
-          </p:cNvSpPr>
-          <p:nvPr/>
-        </p:nvSpPr>
-        <p:spPr>
-          <a:xfrm xmlns:a="http://schemas.openxmlformats.org/drawingml/2006/main">
-            <a:off x="4343400" y="6534150"/>
-            <a:ext cx="2667000" cy="285750"/>
-          </a:xfrm>
-          <a:prstGeom xmlns:a="http://schemas.openxmlformats.org/drawingml/2006/main" prst="rect">
-            <a:avLst/>
-          </a:prstGeom>
-          <a:noFill xmlns:a="http://schemas.openxmlformats.org/drawingml/2006/main"/>
-          <a:ln xmlns:a="http://schemas.openxmlformats.org/drawingml/2006/main" w="0">
-            <a:noFill/>
-            <a:prstDash val="solid"/>
-          </a:ln>
-        </p:spPr>
-        <p:txBody>
-          <a:bodyPr xmlns:a="http://schemas.openxmlformats.org/drawingml/2006/main" wrap="square" lIns="0" tIns="0" rIns="0" bIns="0" anchor="ctr">
-            <a:noAutofit/>
-          </a:bodyPr>
-          <a:lstStyle xmlns:a="http://schemas.openxmlformats.org/drawingml/2006/main"/>
-          <a:p xmlns:a="http://schemas.openxmlformats.org/drawingml/2006/main">
-            <a:pPr algn="l">
-              <a:lnSpc>
-                <a:spcPct val="100000"/>
-              </a:lnSpc>
-              <a:buNone/>
-              <a:defRPr sz="1275" b="0">
-                <a:solidFill>
-                  <a:srgbClr val="64748B"/>
-                </a:solidFill>
-                <a:latin typeface="Calibri"/>
-                <a:ea typeface="Calibri"/>
-                <a:cs typeface="Calibri"/>
-              </a:defRPr>
-            </a:pPr>
-            <a:r>
-              <a:rPr sz="1800" b="0">
-                <a:solidFill>
-                  <a:srgbClr val="64748B"/>
-                </a:solidFill>
-                <a:latin typeface="Calibri"/>
-                <a:ea typeface="Calibri"/>
-                <a:cs typeface="Calibri"/>
-              </a:rPr>
-              <a:t>Dense scale</a:t>
-            </a:r>
-          </a:p>
-        </p:txBody>
-      </p:sp>
-      <p:sp>
-        <p:nvSpPr>
-          <p:cNvPr id="34" name="">
-            <a:extLst xmlns:a="http://schemas.openxmlformats.org/drawingml/2006/main">
-              <a:ext uri="{FF2B5EF4-FFF2-40B4-BE49-F238E27FC236}">
-                <a16:creationId xmlns:a16="http://schemas.microsoft.com/office/drawing/2014/main" id="{CD38EEE4-AA29-40C4-BA3C-01E40A9D56EB}"/>
-              </a:ext>
-            </a:extLst>
-          </p:cNvPr>
-          <p:cNvSpPr>
-            <a:spLocks xmlns:a="http://schemas.openxmlformats.org/drawingml/2006/main" noGrp="1"/>
-          </p:cNvSpPr>
-          <p:nvPr/>
-        </p:nvSpPr>
-        <p:spPr>
-          <a:xfrm xmlns:a="http://schemas.openxmlformats.org/drawingml/2006/main">
-            <a:off x="4343400" y="6858000"/>
-            <a:ext cx="2667000" cy="457200"/>
-          </a:xfrm>
-          <a:prstGeom xmlns:a="http://schemas.openxmlformats.org/drawingml/2006/main" prst="rect">
-            <a:avLst/>
-          </a:prstGeom>
-          <a:noFill xmlns:a="http://schemas.openxmlformats.org/drawingml/2006/main"/>
-          <a:ln xmlns:a="http://schemas.openxmlformats.org/drawingml/2006/main" w="0">
-            <a:noFill/>
-            <a:prstDash val="solid"/>
-          </a:ln>
-        </p:spPr>
-        <p:txBody>
-          <a:bodyPr xmlns:a="http://schemas.openxmlformats.org/drawingml/2006/main" wrap="square" lIns="0" tIns="0" rIns="0" bIns="0" anchor="ctr">
-            <a:normAutofit fontScale="100000"/>
-          </a:bodyPr>
-          <a:lstStyle xmlns:a="http://schemas.openxmlformats.org/drawingml/2006/main"/>
-          <a:p xmlns:a="http://schemas.openxmlformats.org/drawingml/2006/main">
-            <a:pPr algn="l">
-              <a:lnSpc>
-                <a:spcPct val="100000"/>
-              </a:lnSpc>
-              <a:buNone/>
-              <a:defRPr sz="2550" b="1">
-                <a:solidFill>
-                  <a:srgbClr val="2E8B57"/>
-                </a:solidFill>
-                <a:latin typeface="Calibri"/>
-                <a:ea typeface="Calibri"/>
-                <a:cs typeface="Calibri"/>
-              </a:defRPr>
-            </a:pPr>
-            <a:r>
-              <a:rPr sz="2550" b="1">
-                <a:solidFill>
-                  <a:srgbClr val="2E8B57"/>
-                </a:solidFill>
-                <a:latin typeface="Calibri"/>
-                <a:ea typeface="Calibri"/>
-                <a:cs typeface="Calibri"/>
-              </a:rPr>
-              <a:t>raw cosine</a:t>
-            </a:r>
-          </a:p>
-        </p:txBody>
-      </p:sp>
-      <p:sp>
-        <p:nvSpPr>
-          <p:cNvPr id="35" name="">
-            <a:extLst xmlns:a="http://schemas.openxmlformats.org/drawingml/2006/main">
-              <a:ext uri="{FF2B5EF4-FFF2-40B4-BE49-F238E27FC236}">
-                <a16:creationId xmlns:a16="http://schemas.microsoft.com/office/drawing/2014/main" id="{4B5D4A6D-C246-49F7-9388-C795B5E0FCC0}"/>
-              </a:ext>
-            </a:extLst>
-          </p:cNvPr>
-          <p:cNvSpPr>
-            <a:spLocks xmlns:a="http://schemas.openxmlformats.org/drawingml/2006/main" noGrp="1"/>
-          </p:cNvSpPr>
-          <p:nvPr/>
-        </p:nvSpPr>
-        <p:spPr>
-          <a:xfrm xmlns:a="http://schemas.openxmlformats.org/drawingml/2006/main">
-            <a:off x="7658100" y="6534150"/>
-            <a:ext cx="2667000" cy="285750"/>
-          </a:xfrm>
-          <a:prstGeom xmlns:a="http://schemas.openxmlformats.org/drawingml/2006/main" prst="rect">
-            <a:avLst/>
-          </a:prstGeom>
-          <a:noFill xmlns:a="http://schemas.openxmlformats.org/drawingml/2006/main"/>
-          <a:ln xmlns:a="http://schemas.openxmlformats.org/drawingml/2006/main" w="0">
-            <a:noFill/>
-            <a:prstDash val="solid"/>
-          </a:ln>
-        </p:spPr>
-        <p:txBody>
-          <a:bodyPr xmlns:a="http://schemas.openxmlformats.org/drawingml/2006/main" wrap="square" lIns="0" tIns="0" rIns="0" bIns="0" anchor="ctr">
-            <a:noAutofit/>
-          </a:bodyPr>
-          <a:lstStyle xmlns:a="http://schemas.openxmlformats.org/drawingml/2006/main"/>
-          <a:p xmlns:a="http://schemas.openxmlformats.org/drawingml/2006/main">
-            <a:pPr algn="l">
-              <a:lnSpc>
-                <a:spcPct val="100000"/>
-              </a:lnSpc>
-              <a:buNone/>
-              <a:defRPr sz="1275" b="0">
-                <a:solidFill>
-                  <a:srgbClr val="64748B"/>
-                </a:solidFill>
-                <a:latin typeface="Calibri"/>
-                <a:ea typeface="Calibri"/>
-                <a:cs typeface="Calibri"/>
-              </a:defRPr>
-            </a:pPr>
-            <a:r>
-              <a:rPr sz="1800" b="0">
-                <a:solidFill>
-                  <a:srgbClr val="64748B"/>
-                </a:solidFill>
-                <a:latin typeface="Calibri"/>
-                <a:ea typeface="Calibri"/>
-                <a:cs typeface="Calibri"/>
-              </a:rPr>
-              <a:t>Fusion input</a:t>
-            </a:r>
-          </a:p>
-        </p:txBody>
-      </p:sp>
-      <p:sp>
-        <p:nvSpPr>
-          <p:cNvPr id="36" name="">
-            <a:extLst xmlns:a="http://schemas.openxmlformats.org/drawingml/2006/main">
-              <a:ext uri="{FF2B5EF4-FFF2-40B4-BE49-F238E27FC236}">
-                <a16:creationId xmlns:a16="http://schemas.microsoft.com/office/drawing/2014/main" id="{02066664-5058-4CD5-A636-49C7B36A91B5}"/>
-              </a:ext>
-            </a:extLst>
-          </p:cNvPr>
-          <p:cNvSpPr>
-            <a:spLocks xmlns:a="http://schemas.openxmlformats.org/drawingml/2006/main" noGrp="1"/>
-          </p:cNvSpPr>
-          <p:nvPr/>
-        </p:nvSpPr>
-        <p:spPr>
-          <a:xfrm xmlns:a="http://schemas.openxmlformats.org/drawingml/2006/main">
-            <a:off x="7658100" y="6858000"/>
-            <a:ext cx="2667000" cy="457200"/>
-          </a:xfrm>
-          <a:prstGeom xmlns:a="http://schemas.openxmlformats.org/drawingml/2006/main" prst="rect">
-            <a:avLst/>
-          </a:prstGeom>
-          <a:noFill xmlns:a="http://schemas.openxmlformats.org/drawingml/2006/main"/>
-          <a:ln xmlns:a="http://schemas.openxmlformats.org/drawingml/2006/main" w="0">
-            <a:noFill/>
-            <a:prstDash val="solid"/>
-          </a:ln>
-        </p:spPr>
-        <p:txBody>
-          <a:bodyPr xmlns:a="http://schemas.openxmlformats.org/drawingml/2006/main" wrap="square" lIns="0" tIns="0" rIns="0" bIns="0" anchor="ctr">
-            <a:normAutofit fontScale="100000"/>
-          </a:bodyPr>
-          <a:lstStyle xmlns:a="http://schemas.openxmlformats.org/drawingml/2006/main"/>
-          <a:p xmlns:a="http://schemas.openxmlformats.org/drawingml/2006/main">
-            <a:pPr algn="l">
-              <a:lnSpc>
-                <a:spcPct val="100000"/>
-              </a:lnSpc>
-              <a:buNone/>
-              <a:defRPr sz="2550" b="1">
-                <a:solidFill>
-                  <a:srgbClr val="F07D00"/>
-                </a:solidFill>
-                <a:latin typeface="Calibri"/>
-                <a:ea typeface="Calibri"/>
-                <a:cs typeface="Calibri"/>
-              </a:defRPr>
-            </a:pPr>
-            <a:r>
-              <a:rPr sz="2550" b="1">
-                <a:solidFill>
-                  <a:srgbClr val="F07D00"/>
-                </a:solidFill>
-                <a:latin typeface="Calibri"/>
-                <a:ea typeface="Calibri"/>
-                <a:cs typeface="Calibri"/>
-              </a:rPr>
-              <a:t>rank positions</a:t>
-            </a:r>
-          </a:p>
-        </p:txBody>
-      </p:sp>
-      <p:sp>
-        <p:nvSpPr>
-          <p:cNvPr id="37" name="">
-            <a:extLst xmlns:a="http://schemas.openxmlformats.org/drawingml/2006/main">
-              <a:ext uri="{FF2B5EF4-FFF2-40B4-BE49-F238E27FC236}">
-                <a16:creationId xmlns:a16="http://schemas.microsoft.com/office/drawing/2014/main" id="{D2483989-A3BC-4F4A-A656-ACD3BAC9F2F1}"/>
-              </a:ext>
-            </a:extLst>
-          </p:cNvPr>
-          <p:cNvSpPr>
-            <a:spLocks xmlns:a="http://schemas.openxmlformats.org/drawingml/2006/main" noGrp="1"/>
-          </p:cNvSpPr>
-          <p:nvPr/>
-        </p:nvSpPr>
-        <p:spPr>
-          <a:xfrm xmlns:a="http://schemas.openxmlformats.org/drawingml/2006/main">
-            <a:off x="10972800" y="6534150"/>
-            <a:ext cx="2667000" cy="285750"/>
-          </a:xfrm>
-          <a:prstGeom xmlns:a="http://schemas.openxmlformats.org/drawingml/2006/main" prst="rect">
-            <a:avLst/>
-          </a:prstGeom>
-          <a:noFill xmlns:a="http://schemas.openxmlformats.org/drawingml/2006/main"/>
-          <a:ln xmlns:a="http://schemas.openxmlformats.org/drawingml/2006/main" w="0">
-            <a:noFill/>
-            <a:prstDash val="solid"/>
-          </a:ln>
-        </p:spPr>
-        <p:txBody>
-          <a:bodyPr xmlns:a="http://schemas.openxmlformats.org/drawingml/2006/main" wrap="square" lIns="0" tIns="0" rIns="0" bIns="0" anchor="ctr">
-            <a:noAutofit/>
-          </a:bodyPr>
-          <a:lstStyle xmlns:a="http://schemas.openxmlformats.org/drawingml/2006/main"/>
-          <a:p xmlns:a="http://schemas.openxmlformats.org/drawingml/2006/main">
-            <a:pPr algn="l">
-              <a:lnSpc>
-                <a:spcPct val="100000"/>
-              </a:lnSpc>
-              <a:buNone/>
-              <a:defRPr sz="1275" b="0">
-                <a:solidFill>
-                  <a:srgbClr val="64748B"/>
-                </a:solidFill>
-                <a:latin typeface="Calibri"/>
-                <a:ea typeface="Calibri"/>
-                <a:cs typeface="Calibri"/>
-              </a:defRPr>
-            </a:pPr>
-            <a:r>
-              <a:rPr sz="1800" b="0">
-                <a:solidFill>
-                  <a:srgbClr val="64748B"/>
-                </a:solidFill>
-                <a:latin typeface="Calibri"/>
-                <a:ea typeface="Calibri"/>
-                <a:cs typeface="Calibri"/>
-              </a:rPr>
-              <a:t>Join key</a:t>
-            </a:r>
-          </a:p>
-        </p:txBody>
-      </p:sp>
-      <p:sp>
-        <p:nvSpPr>
-          <p:cNvPr id="38" name="">
-            <a:extLst xmlns:a="http://schemas.openxmlformats.org/drawingml/2006/main">
-              <a:ext uri="{FF2B5EF4-FFF2-40B4-BE49-F238E27FC236}">
-                <a16:creationId xmlns:a16="http://schemas.microsoft.com/office/drawing/2014/main" id="{75B3CFBA-FD87-4351-8C2A-CF0B6F60B63E}"/>
-              </a:ext>
-            </a:extLst>
-          </p:cNvPr>
-          <p:cNvSpPr>
-            <a:spLocks xmlns:a="http://schemas.openxmlformats.org/drawingml/2006/main" noGrp="1"/>
-          </p:cNvSpPr>
-          <p:nvPr/>
-        </p:nvSpPr>
-        <p:spPr>
-          <a:xfrm xmlns:a="http://schemas.openxmlformats.org/drawingml/2006/main">
-            <a:off x="10972800" y="6858000"/>
-            <a:ext cx="2667000" cy="457200"/>
-          </a:xfrm>
-          <a:prstGeom xmlns:a="http://schemas.openxmlformats.org/drawingml/2006/main" prst="rect">
-            <a:avLst/>
-          </a:prstGeom>
-          <a:noFill xmlns:a="http://schemas.openxmlformats.org/drawingml/2006/main"/>
-          <a:ln xmlns:a="http://schemas.openxmlformats.org/drawingml/2006/main" w="0">
-            <a:noFill/>
-            <a:prstDash val="solid"/>
-          </a:ln>
-        </p:spPr>
-        <p:txBody>
-          <a:bodyPr xmlns:a="http://schemas.openxmlformats.org/drawingml/2006/main" wrap="square" lIns="0" tIns="0" rIns="0" bIns="0" anchor="ctr">
-            <a:normAutofit fontScale="100000"/>
-          </a:bodyPr>
-          <a:lstStyle xmlns:a="http://schemas.openxmlformats.org/drawingml/2006/main"/>
-          <a:p xmlns:a="http://schemas.openxmlformats.org/drawingml/2006/main">
-            <a:pPr algn="l">
-              <a:lnSpc>
-                <a:spcPct val="100000"/>
-              </a:lnSpc>
-              <a:buNone/>
-              <a:defRPr sz="2550" b="1">
-                <a:solidFill>
-                  <a:srgbClr val="2E8B57"/>
-                </a:solidFill>
-                <a:latin typeface="Calibri"/>
-                <a:ea typeface="Calibri"/>
-                <a:cs typeface="Calibri"/>
-              </a:defRPr>
-            </a:pPr>
-            <a:r>
-              <a:rPr sz="2550" b="1">
-                <a:solidFill>
-                  <a:srgbClr val="2E8B57"/>
-                </a:solidFill>
-                <a:latin typeface="Calibri"/>
-                <a:ea typeface="Calibri"/>
-                <a:cs typeface="Calibri"/>
-              </a:rPr>
-              <a:t>manifest ID</a:t>
-            </a:r>
-          </a:p>
-        </p:txBody>
-      </p:sp>
-      <p:sp>
-        <p:nvSpPr>
-          <p:cNvPr id="39" name="">
-            <a:extLst xmlns:a="http://schemas.openxmlformats.org/drawingml/2006/main">
-              <a:ext uri="{FF2B5EF4-FFF2-40B4-BE49-F238E27FC236}">
-                <a16:creationId xmlns:a16="http://schemas.microsoft.com/office/drawing/2014/main" id="{4846780A-5D65-4410-9457-661BBB6C3E5A}"/>
-              </a:ext>
-            </a:extLst>
-          </p:cNvPr>
-          <p:cNvSpPr>
-            <a:spLocks xmlns:a="http://schemas.openxmlformats.org/drawingml/2006/main" noGrp="1"/>
-          </p:cNvSpPr>
-          <p:nvPr/>
-        </p:nvSpPr>
-        <p:spPr>
-          <a:xfrm xmlns:a="http://schemas.openxmlformats.org/drawingml/2006/main">
-            <a:off x="857250" y="7896225"/>
-            <a:ext cx="13525500" cy="28575"/>
-          </a:xfrm>
-          <a:prstGeom xmlns:a="http://schemas.openxmlformats.org/drawingml/2006/main" prst="rect">
-            <a:avLst/>
-          </a:prstGeom>
-          <a:solidFill xmlns:a="http://schemas.openxmlformats.org/drawingml/2006/main">
-            <a:srgbClr val="E4E7E9"/>
-          </a:solidFill>
-          <a:ln xmlns:a="http://schemas.openxmlformats.org/drawingml/2006/main" w="0">
-            <a:solidFill>
-              <a:srgbClr val="E4E7E9"/>
-            </a:solidFill>
-            <a:prstDash val="solid"/>
-          </a:ln>
-        </p:spPr>
-      </p:sp>
-      <p:sp>
-        <p:nvSpPr>
-          <p:cNvPr id="40" name="">
-            <a:extLst xmlns:a="http://schemas.openxmlformats.org/drawingml/2006/main">
-              <a:ext uri="{FF2B5EF4-FFF2-40B4-BE49-F238E27FC236}">
-                <a16:creationId xmlns:a16="http://schemas.microsoft.com/office/drawing/2014/main" id="{0C69519E-645C-4800-9FE8-656AB5D56416}"/>
-              </a:ext>
-            </a:extLst>
-          </p:cNvPr>
-          <p:cNvSpPr>
-            <a:spLocks xmlns:a="http://schemas.openxmlformats.org/drawingml/2006/main" noGrp="1"/>
-          </p:cNvSpPr>
-          <p:nvPr/>
-        </p:nvSpPr>
-        <p:spPr>
-          <a:xfrm xmlns:a="http://schemas.openxmlformats.org/drawingml/2006/main">
-            <a:off x="857250" y="7896225"/>
-            <a:ext cx="8001000" cy="38100"/>
-          </a:xfrm>
-          <a:prstGeom xmlns:a="http://schemas.openxmlformats.org/drawingml/2006/main" prst="rect">
-            <a:avLst/>
-          </a:prstGeom>
-          <a:solidFill xmlns:a="http://schemas.openxmlformats.org/drawingml/2006/main">
-            <a:srgbClr val="00A2EB"/>
-          </a:solidFill>
-          <a:ln xmlns:a="http://schemas.openxmlformats.org/drawingml/2006/main" w="0">
-            <a:solidFill>
-              <a:srgbClr val="00A2EB"/>
-            </a:solidFill>
-            <a:prstDash val="solid"/>
-          </a:ln>
-        </p:spPr>
-      </p:sp>
-      <p:sp>
-        <p:nvSpPr>
-          <p:cNvPr id="41" name="">
-            <a:extLst xmlns:a="http://schemas.openxmlformats.org/drawingml/2006/main">
-              <a:ext uri="{FF2B5EF4-FFF2-40B4-BE49-F238E27FC236}">
-                <a16:creationId xmlns:a16="http://schemas.microsoft.com/office/drawing/2014/main" id="{17032C2C-E113-4AB5-9CC6-D6B41AEDB1C4}"/>
-              </a:ext>
-            </a:extLst>
-          </p:cNvPr>
-          <p:cNvSpPr>
-            <a:spLocks xmlns:a="http://schemas.openxmlformats.org/drawingml/2006/main" noGrp="1"/>
-          </p:cNvSpPr>
-          <p:nvPr/>
-        </p:nvSpPr>
-        <p:spPr>
-          <a:xfrm xmlns:a="http://schemas.openxmlformats.org/drawingml/2006/main">
-            <a:off x="971550" y="8058150"/>
-            <a:ext cx="3714750" cy="323850"/>
-          </a:xfrm>
-          <a:prstGeom xmlns:a="http://schemas.openxmlformats.org/drawingml/2006/main" prst="rect">
-            <a:avLst/>
-          </a:prstGeom>
-          <a:noFill xmlns:a="http://schemas.openxmlformats.org/drawingml/2006/main"/>
-          <a:ln xmlns:a="http://schemas.openxmlformats.org/drawingml/2006/main" w="0">
-            <a:noFill/>
-            <a:prstDash val="solid"/>
-          </a:ln>
-        </p:spPr>
-        <p:txBody>
-          <a:bodyPr xmlns:a="http://schemas.openxmlformats.org/drawingml/2006/main" wrap="square" lIns="0" tIns="0" rIns="0" bIns="0" anchor="ctr">
-            <a:normAutofit fontScale="100000"/>
-          </a:bodyPr>
-          <a:lstStyle xmlns:a="http://schemas.openxmlformats.org/drawingml/2006/main"/>
-          <a:p xmlns:a="http://schemas.openxmlformats.org/drawingml/2006/main">
-            <a:pPr algn="l">
-              <a:lnSpc>
-                <a:spcPct val="100000"/>
-              </a:lnSpc>
-              <a:buNone/>
               <a:defRPr sz="1200" b="0">
                 <a:solidFill>
                   <a:srgbClr val="9A9A9F"/>
@@ -8020,6 +4566,28 @@
           </a:p>
         </p:txBody>
       </p:sp>
+      <p:pic>
+        <p:nvPicPr>
+          <p:cNvPr id="53" name=""/>
+          <p:cNvPicPr>
+            <a:picLocks xmlns:a="http://schemas.openxmlformats.org/drawingml/2006/main" noChangeAspect="1"/>
+          </p:cNvPicPr>
+          <p:nvPr/>
+        </p:nvPicPr>
+        <p:blipFill>
+          <a:blip xmlns:r="http://schemas.openxmlformats.org/officeDocument/2006/relationships" xmlns:a="http://schemas.openxmlformats.org/drawingml/2006/main" r:embed="R715eb731dbf5407a"/>
+          <a:stretch xmlns:a="http://schemas.openxmlformats.org/drawingml/2006/main"/>
+        </p:blipFill>
+        <p:spPr>
+          <a:xfrm xmlns:a="http://schemas.openxmlformats.org/drawingml/2006/main">
+            <a:off x="990600" y="2291726"/>
+            <a:ext cx="13258800" cy="5208247"/>
+          </a:xfrm>
+          <a:prstGeom xmlns:a="http://schemas.openxmlformats.org/drawingml/2006/main" prst="rect">
+            <a:avLst/>
+          </a:prstGeom>
+        </p:spPr>
+      </p:pic>
     </p:spTree>
     <p:extLst>
       <p:ext uri="{BB962C8B-B14F-4D97-AF65-F5344CB8AC3E}">
@@ -8106,7 +4674,7 @@
                 <a:ea typeface="Calibri"/>
                 <a:cs typeface="Calibri"/>
               </a:rPr>
-              <a:t>ELIGIBILITY BARRIER</a:t>
+              <a:t>SAFETY GATE</a:t>
             </a:r>
           </a:p>
         </p:txBody>
@@ -8141,7 +4709,7 @@
         </p:spPr>
         <p:txBody>
           <a:bodyPr xmlns:a="http://schemas.openxmlformats.org/drawingml/2006/main" wrap="none" lIns="0" tIns="0" rIns="0" bIns="0" anchor="ctr">
-            <a:normAutofit fontScale="100000"/>
+            <a:normAutofit fontScale="98132"/>
           </a:bodyPr>
           <a:lstStyle xmlns:a="http://schemas.openxmlformats.org/drawingml/2006/main"/>
           <a:p xmlns:a="http://schemas.openxmlformats.org/drawingml/2006/main">
@@ -8168,7 +4736,7 @@
                 <a:ea typeface="Calibri"/>
                 <a:cs typeface="Calibri"/>
               </a:rPr>
-              <a:t>Filter first: ineligible passages never enter either top-k</a:t>
+              <a:t>Filter first: ineligible passages never enter either candidate list</a:t>
             </a:r>
           </a:p>
         </p:txBody>
@@ -9023,7 +5591,7 @@
                 <a:ea typeface="Calibri"/>
                 <a:cs typeface="Calibri"/>
               </a:rPr>
-              <a:t>KEYWORD</a:t>
+              <a:t>BM25</a:t>
             </a:r>
           </a:p>
         </p:txBody>
@@ -9085,7 +5653,7 @@
                 <a:ea typeface="Calibri"/>
                 <a:cs typeface="Calibri"/>
               </a:rPr>
-              <a:t>exact-term candidates</a:t>
+              <a:t>exact lexical candidates</a:t>
             </a:r>
           </a:p>
         </p:txBody>
@@ -9410,7 +5978,7 @@
       </p:sp>
       <p:cxnSp>
         <p:nvCxnSpPr>
-          <p:cNvPr id="497" name=""/>
+          <p:cNvPr id="559" name=""/>
           <p:cNvCxnSpPr>
             <a:stCxn xmlns:a="http://schemas.openxmlformats.org/drawingml/2006/main" id="8" idx="3"/>
             <a:endCxn xmlns:a="http://schemas.openxmlformats.org/drawingml/2006/main" id="3" idx="1"/>
@@ -9436,7 +6004,7 @@
       </p:cxnSp>
       <p:cxnSp>
         <p:nvCxnSpPr>
-          <p:cNvPr id="498" name=""/>
+          <p:cNvPr id="560" name=""/>
           <p:cNvCxnSpPr>
             <a:stCxn xmlns:a="http://schemas.openxmlformats.org/drawingml/2006/main" id="11" idx="3"/>
             <a:endCxn xmlns:a="http://schemas.openxmlformats.org/drawingml/2006/main" id="3" idx="1"/>
@@ -9462,7 +6030,7 @@
       </p:cxnSp>
       <p:cxnSp>
         <p:nvCxnSpPr>
-          <p:cNvPr id="499" name=""/>
+          <p:cNvPr id="561" name=""/>
           <p:cNvCxnSpPr>
             <a:stCxn xmlns:a="http://schemas.openxmlformats.org/drawingml/2006/main" id="14" idx="3"/>
             <a:endCxn xmlns:a="http://schemas.openxmlformats.org/drawingml/2006/main" id="3" idx="1"/>
@@ -9488,7 +6056,7 @@
       </p:cxnSp>
       <p:cxnSp>
         <p:nvCxnSpPr>
-          <p:cNvPr id="500" name=""/>
+          <p:cNvPr id="562" name=""/>
           <p:cNvCxnSpPr>
             <a:stCxn xmlns:a="http://schemas.openxmlformats.org/drawingml/2006/main" id="3" idx="3"/>
             <a:endCxn xmlns:a="http://schemas.openxmlformats.org/drawingml/2006/main" id="17" idx="1"/>
@@ -9514,7 +6082,7 @@
       </p:cxnSp>
       <p:cxnSp>
         <p:nvCxnSpPr>
-          <p:cNvPr id="501" name=""/>
+          <p:cNvPr id="563" name=""/>
           <p:cNvCxnSpPr>
             <a:stCxn xmlns:a="http://schemas.openxmlformats.org/drawingml/2006/main" id="3" idx="3"/>
             <a:endCxn xmlns:a="http://schemas.openxmlformats.org/drawingml/2006/main" id="20" idx="1"/>
@@ -9540,7 +6108,7 @@
       </p:cxnSp>
       <p:cxnSp>
         <p:nvCxnSpPr>
-          <p:cNvPr id="502" name=""/>
+          <p:cNvPr id="564" name=""/>
           <p:cNvCxnSpPr>
             <a:stCxn xmlns:a="http://schemas.openxmlformats.org/drawingml/2006/main" id="3" idx="3"/>
             <a:endCxn xmlns:a="http://schemas.openxmlformats.org/drawingml/2006/main" id="23" idx="1"/>
@@ -10088,7 +6656,7 @@
                 <a:ea typeface="Calibri"/>
                 <a:cs typeface="Calibri"/>
               </a:rPr>
-              <a:t>KEYWORD · w=1</a:t>
+              <a:t>BM25 RANKS · w=1</a:t>
             </a:r>
           </a:p>
         </p:txBody>
@@ -11806,7 +8374,7 @@
                 <a:ea typeface="Calibri"/>
                 <a:cs typeface="Calibri"/>
               </a:rPr>
-              <a:t>Retrieve widely, then rerank a smaller eligible set</a:t>
+              <a:t>Retrieve for recall; rerank for final evidence quality</a:t>
             </a:r>
           </a:p>
         </p:txBody>
@@ -12487,7 +9055,7 @@
       </p:sp>
       <p:cxnSp>
         <p:nvCxnSpPr>
-          <p:cNvPr id="236" name=""/>
+          <p:cNvPr id="264" name=""/>
           <p:cNvCxnSpPr>
             <a:stCxn xmlns:a="http://schemas.openxmlformats.org/drawingml/2006/main" id="3" idx="3"/>
             <a:endCxn xmlns:a="http://schemas.openxmlformats.org/drawingml/2006/main" id="6" idx="1"/>
@@ -12513,7 +9081,7 @@
       </p:cxnSp>
       <p:cxnSp>
         <p:nvCxnSpPr>
-          <p:cNvPr id="237" name=""/>
+          <p:cNvPr id="265" name=""/>
           <p:cNvCxnSpPr>
             <a:stCxn xmlns:a="http://schemas.openxmlformats.org/drawingml/2006/main" id="6" idx="3"/>
             <a:endCxn xmlns:a="http://schemas.openxmlformats.org/drawingml/2006/main" id="10" idx="1"/>
@@ -12972,7 +9540,7 @@
                 <a:ea typeface="Calibri"/>
                 <a:cs typeface="Calibri"/>
               </a:rPr>
-              <a:t>Candidate retrieval protects recall; reranking spends the evidence budget deliberately.</a:t>
+              <a:t>The reranker spends a small evidence budget on visible, finance-aware features.</a:t>
             </a:r>
           </a:p>
         </p:txBody>
@@ -13260,10 +9828,10 @@
       </p:grpSpPr>
       <p:sp>
         <p:nvSpPr>
-          <p:cNvPr id="35" name="">
-            <a:extLst xmlns:a="http://schemas.openxmlformats.org/drawingml/2006/main">
-              <a:ext uri="{FF2B5EF4-FFF2-40B4-BE49-F238E27FC236}">
-                <a16:creationId xmlns:a16="http://schemas.microsoft.com/office/drawing/2014/main" id="{45EAFBC5-0120-406B-9113-A189734D7D27}"/>
+          <p:cNvPr id="44" name="">
+            <a:extLst xmlns:a="http://schemas.openxmlformats.org/drawingml/2006/main">
+              <a:ext uri="{FF2B5EF4-FFF2-40B4-BE49-F238E27FC236}">
+                <a16:creationId xmlns:a16="http://schemas.microsoft.com/office/drawing/2014/main" id="{7F521A64-93BB-447D-87E9-41FC1E867CBC}"/>
               </a:ext>
             </a:extLst>
           </p:cNvPr>
@@ -13315,7 +9883,7 @@
                 <a:ea typeface="Calibri"/>
                 <a:cs typeface="Calibri"/>
               </a:rPr>
-              <a:t>CAPSTONE PIPELINE</a:t>
+              <a:t>EVIDENCE FROM PRACTICE</a:t>
             </a:r>
           </a:p>
         </p:txBody>
@@ -13325,7 +9893,7 @@
           <p:cNvPr id="2" name="">
             <a:extLst xmlns:a="http://schemas.openxmlformats.org/drawingml/2006/main">
               <a:ext uri="{FF2B5EF4-FFF2-40B4-BE49-F238E27FC236}">
-                <a16:creationId xmlns:a16="http://schemas.microsoft.com/office/drawing/2014/main" id="{E788E1BA-062C-4D13-89C4-9762E55DD5F6}"/>
+                <a16:creationId xmlns:a16="http://schemas.microsoft.com/office/drawing/2014/main" id="{9C793F9E-8AD7-4755-853A-CFF63AEDB7A7}"/>
               </a:ext>
             </a:extLst>
           </p:cNvPr>
@@ -13377,39 +9945,37 @@
                 <a:ea typeface="Calibri"/>
                 <a:cs typeface="Calibri"/>
               </a:rPr>
-              <a:t>The capstone now exposes every retrieval decision</a:t>
-            </a:r>
-          </a:p>
-        </p:txBody>
-      </p:sp>
-      <p:sp>
-        <p:nvSpPr>
-          <p:cNvPr id="3" name="ingestion-1">
-            <a:extLst xmlns:a="http://schemas.openxmlformats.org/drawingml/2006/main">
-              <a:ext uri="{FF2B5EF4-FFF2-40B4-BE49-F238E27FC236}">
-                <a16:creationId xmlns:a16="http://schemas.microsoft.com/office/drawing/2014/main" id="{EF5CEA91-0836-4E99-95C1-43A271A11FFF}"/>
-              </a:ext>
-            </a:extLst>
-          </p:cNvPr>
-          <p:cNvSpPr>
-            <a:spLocks xmlns:a="http://schemas.openxmlformats.org/drawingml/2006/main" noGrp="1"/>
-          </p:cNvSpPr>
-          <p:nvPr/>
-        </p:nvSpPr>
-        <p:spPr>
-          <a:xfrm xmlns:a="http://schemas.openxmlformats.org/drawingml/2006/main">
-            <a:off x="990600" y="3086100"/>
-            <a:ext cx="2247900" cy="2266950"/>
-          </a:xfrm>
-          <a:prstGeom xmlns:a="http://schemas.openxmlformats.org/drawingml/2006/main" prst="roundRect">
-            <a:avLst>
-              <a:gd name="adj" fmla="val 5085"/>
-            </a:avLst>
+              <a:t>Hybrid retrieval + reranking cut failed retrievals by 67%</a:t>
+            </a:r>
+          </a:p>
+        </p:txBody>
+      </p:sp>
+      <p:sp>
+        <p:nvSpPr>
+          <p:cNvPr id="39" name="">
+            <a:extLst xmlns:a="http://schemas.openxmlformats.org/drawingml/2006/main">
+              <a:ext uri="{FF2B5EF4-FFF2-40B4-BE49-F238E27FC236}">
+                <a16:creationId xmlns:a16="http://schemas.microsoft.com/office/drawing/2014/main" id="{4846780A-5D65-4410-9457-661BBB6C3E5A}"/>
+              </a:ext>
+            </a:extLst>
+          </p:cNvPr>
+          <p:cNvSpPr>
+            <a:spLocks xmlns:a="http://schemas.openxmlformats.org/drawingml/2006/main" noGrp="1"/>
+          </p:cNvSpPr>
+          <p:nvPr/>
+        </p:nvSpPr>
+        <p:spPr>
+          <a:xfrm xmlns:a="http://schemas.openxmlformats.org/drawingml/2006/main">
+            <a:off x="857250" y="7896225"/>
+            <a:ext cx="13525500" cy="28575"/>
+          </a:xfrm>
+          <a:prstGeom xmlns:a="http://schemas.openxmlformats.org/drawingml/2006/main" prst="rect">
+            <a:avLst/>
           </a:prstGeom>
           <a:solidFill xmlns:a="http://schemas.openxmlformats.org/drawingml/2006/main">
-            <a:srgbClr val="FFFFFF"/>
+            <a:srgbClr val="E4E7E9"/>
           </a:solidFill>
-          <a:ln xmlns:a="http://schemas.openxmlformats.org/drawingml/2006/main" w="9525">
+          <a:ln xmlns:a="http://schemas.openxmlformats.org/drawingml/2006/main" w="0">
             <a:solidFill>
               <a:srgbClr val="E4E7E9"/>
             </a:solidFill>
@@ -13419,22 +9985,55 @@
       </p:sp>
       <p:sp>
         <p:nvSpPr>
-          <p:cNvPr id="4" name="">
-            <a:extLst xmlns:a="http://schemas.openxmlformats.org/drawingml/2006/main">
-              <a:ext uri="{FF2B5EF4-FFF2-40B4-BE49-F238E27FC236}">
-                <a16:creationId xmlns:a16="http://schemas.microsoft.com/office/drawing/2014/main" id="{4A163ADC-FDBA-49AB-AB53-62FA29104479}"/>
-              </a:ext>
-            </a:extLst>
-          </p:cNvPr>
-          <p:cNvSpPr>
-            <a:spLocks xmlns:a="http://schemas.openxmlformats.org/drawingml/2006/main" noGrp="1"/>
-          </p:cNvSpPr>
-          <p:nvPr/>
-        </p:nvSpPr>
-        <p:spPr>
-          <a:xfrm xmlns:a="http://schemas.openxmlformats.org/drawingml/2006/main">
-            <a:off x="1181100" y="3295650"/>
-            <a:ext cx="514350" cy="285750"/>
+          <p:cNvPr id="40" name="">
+            <a:extLst xmlns:a="http://schemas.openxmlformats.org/drawingml/2006/main">
+              <a:ext uri="{FF2B5EF4-FFF2-40B4-BE49-F238E27FC236}">
+                <a16:creationId xmlns:a16="http://schemas.microsoft.com/office/drawing/2014/main" id="{0C69519E-645C-4800-9FE8-656AB5D56416}"/>
+              </a:ext>
+            </a:extLst>
+          </p:cNvPr>
+          <p:cNvSpPr>
+            <a:spLocks xmlns:a="http://schemas.openxmlformats.org/drawingml/2006/main" noGrp="1"/>
+          </p:cNvSpPr>
+          <p:nvPr/>
+        </p:nvSpPr>
+        <p:spPr>
+          <a:xfrm xmlns:a="http://schemas.openxmlformats.org/drawingml/2006/main">
+            <a:off x="857250" y="7896225"/>
+            <a:ext cx="8001000" cy="38100"/>
+          </a:xfrm>
+          <a:prstGeom xmlns:a="http://schemas.openxmlformats.org/drawingml/2006/main" prst="rect">
+            <a:avLst/>
+          </a:prstGeom>
+          <a:solidFill xmlns:a="http://schemas.openxmlformats.org/drawingml/2006/main">
+            <a:srgbClr val="00A2EB"/>
+          </a:solidFill>
+          <a:ln xmlns:a="http://schemas.openxmlformats.org/drawingml/2006/main" w="0">
+            <a:solidFill>
+              <a:srgbClr val="00A2EB"/>
+            </a:solidFill>
+            <a:prstDash val="solid"/>
+          </a:ln>
+        </p:spPr>
+      </p:sp>
+      <p:sp>
+        <p:nvSpPr>
+          <p:cNvPr id="41" name="">
+            <a:extLst xmlns:a="http://schemas.openxmlformats.org/drawingml/2006/main">
+              <a:ext uri="{FF2B5EF4-FFF2-40B4-BE49-F238E27FC236}">
+                <a16:creationId xmlns:a16="http://schemas.microsoft.com/office/drawing/2014/main" id="{17032C2C-E113-4AB5-9CC6-D6B41AEDB1C4}"/>
+              </a:ext>
+            </a:extLst>
+          </p:cNvPr>
+          <p:cNvSpPr>
+            <a:spLocks xmlns:a="http://schemas.openxmlformats.org/drawingml/2006/main" noGrp="1"/>
+          </p:cNvSpPr>
+          <p:nvPr/>
+        </p:nvSpPr>
+        <p:spPr>
+          <a:xfrm xmlns:a="http://schemas.openxmlformats.org/drawingml/2006/main">
+            <a:off x="971550" y="8058150"/>
+            <a:ext cx="3714750" cy="323850"/>
           </a:xfrm>
           <a:prstGeom xmlns:a="http://schemas.openxmlformats.org/drawingml/2006/main" prst="rect">
             <a:avLst/>
@@ -13447,7 +10046,7 @@
         </p:spPr>
         <p:txBody>
           <a:bodyPr xmlns:a="http://schemas.openxmlformats.org/drawingml/2006/main" wrap="square" lIns="0" tIns="0" rIns="0" bIns="0" anchor="ctr">
-            <a:noAutofit/>
+            <a:normAutofit fontScale="100000"/>
           </a:bodyPr>
           <a:lstStyle xmlns:a="http://schemas.openxmlformats.org/drawingml/2006/main"/>
           <a:p xmlns:a="http://schemas.openxmlformats.org/drawingml/2006/main">
@@ -13456,133 +10055,9 @@
                 <a:spcPct val="100000"/>
               </a:lnSpc>
               <a:buNone/>
-              <a:defRPr sz="1350" b="1">
-                <a:solidFill>
-                  <a:srgbClr val="00A2EB"/>
-                </a:solidFill>
-                <a:latin typeface="Calibri"/>
-                <a:ea typeface="Calibri"/>
-                <a:cs typeface="Calibri"/>
-              </a:defRPr>
-            </a:pPr>
-            <a:r>
-              <a:rPr sz="1800" b="1">
-                <a:solidFill>
-                  <a:srgbClr val="00A2EB"/>
-                </a:solidFill>
-                <a:latin typeface="Calibri"/>
-                <a:ea typeface="Calibri"/>
-                <a:cs typeface="Calibri"/>
-              </a:rPr>
-              <a:t>01</a:t>
-            </a:r>
-          </a:p>
-        </p:txBody>
-      </p:sp>
-      <p:sp>
-        <p:nvSpPr>
-          <p:cNvPr id="5" name="">
-            <a:extLst xmlns:a="http://schemas.openxmlformats.org/drawingml/2006/main">
-              <a:ext uri="{FF2B5EF4-FFF2-40B4-BE49-F238E27FC236}">
-                <a16:creationId xmlns:a16="http://schemas.microsoft.com/office/drawing/2014/main" id="{26D1AD73-F995-4369-A266-8FA41354CE3D}"/>
-              </a:ext>
-            </a:extLst>
-          </p:cNvPr>
-          <p:cNvSpPr>
-            <a:spLocks xmlns:a="http://schemas.openxmlformats.org/drawingml/2006/main" noGrp="1"/>
-          </p:cNvSpPr>
-          <p:nvPr/>
-        </p:nvSpPr>
-        <p:spPr>
-          <a:xfrm xmlns:a="http://schemas.openxmlformats.org/drawingml/2006/main">
-            <a:off x="1104900" y="3752850"/>
-            <a:ext cx="2019300" cy="685800"/>
-          </a:xfrm>
-          <a:prstGeom xmlns:a="http://schemas.openxmlformats.org/drawingml/2006/main" prst="rect">
-            <a:avLst/>
-          </a:prstGeom>
-          <a:noFill xmlns:a="http://schemas.openxmlformats.org/drawingml/2006/main"/>
-          <a:ln xmlns:a="http://schemas.openxmlformats.org/drawingml/2006/main" w="0">
-            <a:noFill/>
-            <a:prstDash val="solid"/>
-          </a:ln>
-        </p:spPr>
-        <p:txBody>
-          <a:bodyPr xmlns:a="http://schemas.openxmlformats.org/drawingml/2006/main" wrap="square" lIns="0" tIns="0" rIns="0" bIns="0" anchor="ctr">
-            <a:normAutofit fontScale="100000"/>
-          </a:bodyPr>
-          <a:lstStyle xmlns:a="http://schemas.openxmlformats.org/drawingml/2006/main"/>
-          <a:p xmlns:a="http://schemas.openxmlformats.org/drawingml/2006/main">
-            <a:pPr algn="l">
-              <a:lnSpc>
-                <a:spcPct val="100000"/>
-              </a:lnSpc>
-              <a:buNone/>
-              <a:defRPr sz="1950" b="1">
-                <a:solidFill>
-                  <a:srgbClr val="051C2A"/>
-                </a:solidFill>
-                <a:latin typeface="Calibri"/>
-                <a:ea typeface="Calibri"/>
-                <a:cs typeface="Calibri"/>
-              </a:defRPr>
-            </a:pPr>
-            <a:r>
-              <a:rPr sz="1950" b="1">
-                <a:solidFill>
-                  <a:srgbClr val="051C2A"/>
-                </a:solidFill>
-                <a:latin typeface="Calibri"/>
-                <a:ea typeface="Calibri"/>
-                <a:cs typeface="Calibri"/>
-              </a:rPr>
-              <a:t>Versioned index</a:t>
-            </a:r>
-          </a:p>
-        </p:txBody>
-      </p:sp>
-      <p:sp>
-        <p:nvSpPr>
-          <p:cNvPr id="6" name="">
-            <a:extLst xmlns:a="http://schemas.openxmlformats.org/drawingml/2006/main">
-              <a:ext uri="{FF2B5EF4-FFF2-40B4-BE49-F238E27FC236}">
-                <a16:creationId xmlns:a16="http://schemas.microsoft.com/office/drawing/2014/main" id="{4CA7F72B-07B6-4BF4-A3F9-5860F8AC7245}"/>
-              </a:ext>
-            </a:extLst>
-          </p:cNvPr>
-          <p:cNvSpPr>
-            <a:spLocks xmlns:a="http://schemas.openxmlformats.org/drawingml/2006/main" noGrp="1"/>
-          </p:cNvSpPr>
-          <p:nvPr/>
-        </p:nvSpPr>
-        <p:spPr>
-          <a:xfrm xmlns:a="http://schemas.openxmlformats.org/drawingml/2006/main">
-            <a:off x="1181100" y="4610100"/>
-            <a:ext cx="1866900" cy="514350"/>
-          </a:xfrm>
-          <a:prstGeom xmlns:a="http://schemas.openxmlformats.org/drawingml/2006/main" prst="rect">
-            <a:avLst/>
-          </a:prstGeom>
-          <a:noFill xmlns:a="http://schemas.openxmlformats.org/drawingml/2006/main"/>
-          <a:ln xmlns:a="http://schemas.openxmlformats.org/drawingml/2006/main" w="0">
-            <a:noFill/>
-            <a:prstDash val="solid"/>
-          </a:ln>
-        </p:spPr>
-        <p:txBody>
-          <a:bodyPr xmlns:a="http://schemas.openxmlformats.org/drawingml/2006/main" wrap="square" lIns="0" tIns="0" rIns="0" bIns="0" anchor="ctr">
-            <a:normAutofit fontScale="100000"/>
-          </a:bodyPr>
-          <a:lstStyle xmlns:a="http://schemas.openxmlformats.org/drawingml/2006/main"/>
-          <a:p xmlns:a="http://schemas.openxmlformats.org/drawingml/2006/main">
-            <a:pPr algn="l">
-              <a:lnSpc>
-                <a:spcPct val="100000"/>
-              </a:lnSpc>
-              <a:buNone/>
               <a:defRPr sz="1200" b="0">
                 <a:solidFill>
-                  <a:srgbClr val="1F40CB"/>
+                  <a:srgbClr val="9A9A9F"/>
                 </a:solidFill>
                 <a:latin typeface="Calibri"/>
                 <a:ea typeface="Calibri"/>
@@ -13592,1313 +10067,11 @@
             <a:r>
               <a:rPr sz="1200" b="0">
                 <a:solidFill>
-                  <a:srgbClr val="1F40CB"/>
-                </a:solidFill>
-                <a:latin typeface="Calibri"/>
-                <a:ea typeface="Calibri"/>
-                <a:cs typeface="Calibri"/>
-              </a:rPr>
-              <a:t>provider · model · dimensions</a:t>
-            </a:r>
-          </a:p>
-        </p:txBody>
-      </p:sp>
-      <p:sp>
-        <p:nvSpPr>
-          <p:cNvPr id="7" name="ingestion-2">
-            <a:extLst xmlns:a="http://schemas.openxmlformats.org/drawingml/2006/main">
-              <a:ext uri="{FF2B5EF4-FFF2-40B4-BE49-F238E27FC236}">
-                <a16:creationId xmlns:a16="http://schemas.microsoft.com/office/drawing/2014/main" id="{B39DEECB-E0D1-415A-8F2A-C8075A6D97BA}"/>
-              </a:ext>
-            </a:extLst>
-          </p:cNvPr>
-          <p:cNvSpPr>
-            <a:spLocks xmlns:a="http://schemas.openxmlformats.org/drawingml/2006/main" noGrp="1"/>
-          </p:cNvSpPr>
-          <p:nvPr/>
-        </p:nvSpPr>
-        <p:spPr>
-          <a:xfrm xmlns:a="http://schemas.openxmlformats.org/drawingml/2006/main">
-            <a:off x="3810000" y="3086100"/>
-            <a:ext cx="2247900" cy="2266950"/>
-          </a:xfrm>
-          <a:prstGeom xmlns:a="http://schemas.openxmlformats.org/drawingml/2006/main" prst="roundRect">
-            <a:avLst>
-              <a:gd name="adj" fmla="val 5085"/>
-            </a:avLst>
-          </a:prstGeom>
-          <a:solidFill xmlns:a="http://schemas.openxmlformats.org/drawingml/2006/main">
-            <a:srgbClr val="FFFFFF"/>
-          </a:solidFill>
-          <a:ln xmlns:a="http://schemas.openxmlformats.org/drawingml/2006/main" w="9525">
-            <a:solidFill>
-              <a:srgbClr val="E4E7E9"/>
-            </a:solidFill>
-            <a:prstDash val="solid"/>
-          </a:ln>
-        </p:spPr>
-      </p:sp>
-      <p:sp>
-        <p:nvSpPr>
-          <p:cNvPr id="8" name="">
-            <a:extLst xmlns:a="http://schemas.openxmlformats.org/drawingml/2006/main">
-              <a:ext uri="{FF2B5EF4-FFF2-40B4-BE49-F238E27FC236}">
-                <a16:creationId xmlns:a16="http://schemas.microsoft.com/office/drawing/2014/main" id="{18679081-8A68-4B7E-9199-340CF95714DE}"/>
-              </a:ext>
-            </a:extLst>
-          </p:cNvPr>
-          <p:cNvSpPr>
-            <a:spLocks xmlns:a="http://schemas.openxmlformats.org/drawingml/2006/main" noGrp="1"/>
-          </p:cNvSpPr>
-          <p:nvPr/>
-        </p:nvSpPr>
-        <p:spPr>
-          <a:xfrm xmlns:a="http://schemas.openxmlformats.org/drawingml/2006/main">
-            <a:off x="4000500" y="3295650"/>
-            <a:ext cx="514350" cy="285750"/>
-          </a:xfrm>
-          <a:prstGeom xmlns:a="http://schemas.openxmlformats.org/drawingml/2006/main" prst="rect">
-            <a:avLst/>
-          </a:prstGeom>
-          <a:noFill xmlns:a="http://schemas.openxmlformats.org/drawingml/2006/main"/>
-          <a:ln xmlns:a="http://schemas.openxmlformats.org/drawingml/2006/main" w="0">
-            <a:noFill/>
-            <a:prstDash val="solid"/>
-          </a:ln>
-        </p:spPr>
-        <p:txBody>
-          <a:bodyPr xmlns:a="http://schemas.openxmlformats.org/drawingml/2006/main" wrap="square" lIns="0" tIns="0" rIns="0" bIns="0" anchor="ctr">
-            <a:noAutofit/>
-          </a:bodyPr>
-          <a:lstStyle xmlns:a="http://schemas.openxmlformats.org/drawingml/2006/main"/>
-          <a:p xmlns:a="http://schemas.openxmlformats.org/drawingml/2006/main">
-            <a:pPr algn="l">
-              <a:lnSpc>
-                <a:spcPct val="100000"/>
-              </a:lnSpc>
-              <a:buNone/>
-              <a:defRPr sz="1350" b="1">
-                <a:solidFill>
-                  <a:srgbClr val="00A2EB"/>
-                </a:solidFill>
-                <a:latin typeface="Calibri"/>
-                <a:ea typeface="Calibri"/>
-                <a:cs typeface="Calibri"/>
-              </a:defRPr>
-            </a:pPr>
-            <a:r>
-              <a:rPr sz="1800" b="1">
-                <a:solidFill>
-                  <a:srgbClr val="00A2EB"/>
-                </a:solidFill>
-                <a:latin typeface="Calibri"/>
-                <a:ea typeface="Calibri"/>
-                <a:cs typeface="Calibri"/>
-              </a:rPr>
-              <a:t>02</a:t>
-            </a:r>
-          </a:p>
-        </p:txBody>
-      </p:sp>
-      <p:sp>
-        <p:nvSpPr>
-          <p:cNvPr id="9" name="">
-            <a:extLst xmlns:a="http://schemas.openxmlformats.org/drawingml/2006/main">
-              <a:ext uri="{FF2B5EF4-FFF2-40B4-BE49-F238E27FC236}">
-                <a16:creationId xmlns:a16="http://schemas.microsoft.com/office/drawing/2014/main" id="{ED095E54-44DC-4092-9EB7-0C81E4B47710}"/>
-              </a:ext>
-            </a:extLst>
-          </p:cNvPr>
-          <p:cNvSpPr>
-            <a:spLocks xmlns:a="http://schemas.openxmlformats.org/drawingml/2006/main" noGrp="1"/>
-          </p:cNvSpPr>
-          <p:nvPr/>
-        </p:nvSpPr>
-        <p:spPr>
-          <a:xfrm xmlns:a="http://schemas.openxmlformats.org/drawingml/2006/main">
-            <a:off x="3924300" y="3752850"/>
-            <a:ext cx="2019300" cy="685800"/>
-          </a:xfrm>
-          <a:prstGeom xmlns:a="http://schemas.openxmlformats.org/drawingml/2006/main" prst="rect">
-            <a:avLst/>
-          </a:prstGeom>
-          <a:noFill xmlns:a="http://schemas.openxmlformats.org/drawingml/2006/main"/>
-          <a:ln xmlns:a="http://schemas.openxmlformats.org/drawingml/2006/main" w="0">
-            <a:noFill/>
-            <a:prstDash val="solid"/>
-          </a:ln>
-        </p:spPr>
-        <p:txBody>
-          <a:bodyPr xmlns:a="http://schemas.openxmlformats.org/drawingml/2006/main" wrap="square" lIns="0" tIns="0" rIns="0" bIns="0" anchor="ctr">
-            <a:normAutofit fontScale="100000"/>
-          </a:bodyPr>
-          <a:lstStyle xmlns:a="http://schemas.openxmlformats.org/drawingml/2006/main"/>
-          <a:p xmlns:a="http://schemas.openxmlformats.org/drawingml/2006/main">
-            <a:pPr algn="l">
-              <a:lnSpc>
-                <a:spcPct val="100000"/>
-              </a:lnSpc>
-              <a:buNone/>
-              <a:defRPr sz="1950" b="1">
-                <a:solidFill>
-                  <a:srgbClr val="051C2A"/>
-                </a:solidFill>
-                <a:latin typeface="Calibri"/>
-                <a:ea typeface="Calibri"/>
-                <a:cs typeface="Calibri"/>
-              </a:defRPr>
-            </a:pPr>
-            <a:r>
-              <a:rPr sz="1950" b="1">
-                <a:solidFill>
-                  <a:srgbClr val="051C2A"/>
-                </a:solidFill>
-                <a:latin typeface="Calibri"/>
-                <a:ea typeface="Calibri"/>
-                <a:cs typeface="Calibri"/>
-              </a:rPr>
-              <a:t>Pre-filter eligibility</a:t>
-            </a:r>
-          </a:p>
-        </p:txBody>
-      </p:sp>
-      <p:sp>
-        <p:nvSpPr>
-          <p:cNvPr id="10" name="">
-            <a:extLst xmlns:a="http://schemas.openxmlformats.org/drawingml/2006/main">
-              <a:ext uri="{FF2B5EF4-FFF2-40B4-BE49-F238E27FC236}">
-                <a16:creationId xmlns:a16="http://schemas.microsoft.com/office/drawing/2014/main" id="{4DB65E8E-6BA9-40DB-99F9-46D3397B13A3}"/>
-              </a:ext>
-            </a:extLst>
-          </p:cNvPr>
-          <p:cNvSpPr>
-            <a:spLocks xmlns:a="http://schemas.openxmlformats.org/drawingml/2006/main" noGrp="1"/>
-          </p:cNvSpPr>
-          <p:nvPr/>
-        </p:nvSpPr>
-        <p:spPr>
-          <a:xfrm xmlns:a="http://schemas.openxmlformats.org/drawingml/2006/main">
-            <a:off x="4000500" y="4610100"/>
-            <a:ext cx="1866900" cy="514350"/>
-          </a:xfrm>
-          <a:prstGeom xmlns:a="http://schemas.openxmlformats.org/drawingml/2006/main" prst="rect">
-            <a:avLst/>
-          </a:prstGeom>
-          <a:noFill xmlns:a="http://schemas.openxmlformats.org/drawingml/2006/main"/>
-          <a:ln xmlns:a="http://schemas.openxmlformats.org/drawingml/2006/main" w="0">
-            <a:noFill/>
-            <a:prstDash val="solid"/>
-          </a:ln>
-        </p:spPr>
-        <p:txBody>
-          <a:bodyPr xmlns:a="http://schemas.openxmlformats.org/drawingml/2006/main" wrap="square" lIns="0" tIns="0" rIns="0" bIns="0" anchor="ctr">
-            <a:normAutofit fontScale="100000"/>
-          </a:bodyPr>
-          <a:lstStyle xmlns:a="http://schemas.openxmlformats.org/drawingml/2006/main"/>
-          <a:p xmlns:a="http://schemas.openxmlformats.org/drawingml/2006/main">
-            <a:pPr algn="l">
-              <a:lnSpc>
-                <a:spcPct val="100000"/>
-              </a:lnSpc>
-              <a:buNone/>
-              <a:defRPr sz="1200" b="0">
-                <a:solidFill>
-                  <a:srgbClr val="1F40CB"/>
-                </a:solidFill>
-                <a:latin typeface="Calibri"/>
-                <a:ea typeface="Calibri"/>
-                <a:cs typeface="Calibri"/>
-              </a:defRPr>
-            </a:pPr>
-            <a:r>
-              <a:rPr sz="1200" b="0">
-                <a:solidFill>
-                  <a:srgbClr val="1F40CB"/>
-                </a:solidFill>
-                <a:latin typeface="Calibri"/>
-                <a:ea typeface="Calibri"/>
-                <a:cs typeface="Calibri"/>
-              </a:rPr>
-              <a:t>company · period · document</a:t>
-            </a:r>
-          </a:p>
-        </p:txBody>
-      </p:sp>
-      <p:sp>
-        <p:nvSpPr>
-          <p:cNvPr id="11" name="ingestion-3">
-            <a:extLst xmlns:a="http://schemas.openxmlformats.org/drawingml/2006/main">
-              <a:ext uri="{FF2B5EF4-FFF2-40B4-BE49-F238E27FC236}">
-                <a16:creationId xmlns:a16="http://schemas.microsoft.com/office/drawing/2014/main" id="{D4342A97-3791-461F-A305-9671DA4948CE}"/>
-              </a:ext>
-            </a:extLst>
-          </p:cNvPr>
-          <p:cNvSpPr>
-            <a:spLocks xmlns:a="http://schemas.openxmlformats.org/drawingml/2006/main" noGrp="1"/>
-          </p:cNvSpPr>
-          <p:nvPr/>
-        </p:nvSpPr>
-        <p:spPr>
-          <a:xfrm xmlns:a="http://schemas.openxmlformats.org/drawingml/2006/main">
-            <a:off x="6629400" y="3086100"/>
-            <a:ext cx="2247900" cy="2266950"/>
-          </a:xfrm>
-          <a:prstGeom xmlns:a="http://schemas.openxmlformats.org/drawingml/2006/main" prst="roundRect">
-            <a:avLst>
-              <a:gd name="adj" fmla="val 5085"/>
-            </a:avLst>
-          </a:prstGeom>
-          <a:solidFill xmlns:a="http://schemas.openxmlformats.org/drawingml/2006/main">
-            <a:srgbClr val="062433"/>
-          </a:solidFill>
-          <a:ln xmlns:a="http://schemas.openxmlformats.org/drawingml/2006/main" w="9525">
-            <a:solidFill>
-              <a:srgbClr val="062433"/>
-            </a:solidFill>
-            <a:prstDash val="solid"/>
-          </a:ln>
-        </p:spPr>
-      </p:sp>
-      <p:sp>
-        <p:nvSpPr>
-          <p:cNvPr id="12" name="">
-            <a:extLst xmlns:a="http://schemas.openxmlformats.org/drawingml/2006/main">
-              <a:ext uri="{FF2B5EF4-FFF2-40B4-BE49-F238E27FC236}">
-                <a16:creationId xmlns:a16="http://schemas.microsoft.com/office/drawing/2014/main" id="{64E49A95-2D88-4387-8BD5-FA749ABD0960}"/>
-              </a:ext>
-            </a:extLst>
-          </p:cNvPr>
-          <p:cNvSpPr>
-            <a:spLocks xmlns:a="http://schemas.openxmlformats.org/drawingml/2006/main" noGrp="1"/>
-          </p:cNvSpPr>
-          <p:nvPr/>
-        </p:nvSpPr>
-        <p:spPr>
-          <a:xfrm xmlns:a="http://schemas.openxmlformats.org/drawingml/2006/main">
-            <a:off x="6819900" y="3295650"/>
-            <a:ext cx="514350" cy="285750"/>
-          </a:xfrm>
-          <a:prstGeom xmlns:a="http://schemas.openxmlformats.org/drawingml/2006/main" prst="rect">
-            <a:avLst/>
-          </a:prstGeom>
-          <a:noFill xmlns:a="http://schemas.openxmlformats.org/drawingml/2006/main"/>
-          <a:ln xmlns:a="http://schemas.openxmlformats.org/drawingml/2006/main" w="0">
-            <a:noFill/>
-            <a:prstDash val="solid"/>
-          </a:ln>
-        </p:spPr>
-        <p:txBody>
-          <a:bodyPr xmlns:a="http://schemas.openxmlformats.org/drawingml/2006/main" wrap="square" lIns="0" tIns="0" rIns="0" bIns="0" anchor="ctr">
-            <a:noAutofit/>
-          </a:bodyPr>
-          <a:lstStyle xmlns:a="http://schemas.openxmlformats.org/drawingml/2006/main"/>
-          <a:p xmlns:a="http://schemas.openxmlformats.org/drawingml/2006/main">
-            <a:pPr algn="l">
-              <a:lnSpc>
-                <a:spcPct val="100000"/>
-              </a:lnSpc>
-              <a:buNone/>
-              <a:defRPr sz="1350" b="1">
-                <a:solidFill>
-                  <a:srgbClr val="00A2EB"/>
-                </a:solidFill>
-                <a:latin typeface="Calibri"/>
-                <a:ea typeface="Calibri"/>
-                <a:cs typeface="Calibri"/>
-              </a:defRPr>
-            </a:pPr>
-            <a:r>
-              <a:rPr sz="1800" b="1">
-                <a:solidFill>
-                  <a:srgbClr val="00A2EB"/>
-                </a:solidFill>
-                <a:latin typeface="Calibri"/>
-                <a:ea typeface="Calibri"/>
-                <a:cs typeface="Calibri"/>
-              </a:rPr>
-              <a:t>03</a:t>
-            </a:r>
-          </a:p>
-        </p:txBody>
-      </p:sp>
-      <p:sp>
-        <p:nvSpPr>
-          <p:cNvPr id="13" name="">
-            <a:extLst xmlns:a="http://schemas.openxmlformats.org/drawingml/2006/main">
-              <a:ext uri="{FF2B5EF4-FFF2-40B4-BE49-F238E27FC236}">
-                <a16:creationId xmlns:a16="http://schemas.microsoft.com/office/drawing/2014/main" id="{572D3874-F985-4CD0-BBFF-D59F5B7B32BE}"/>
-              </a:ext>
-            </a:extLst>
-          </p:cNvPr>
-          <p:cNvSpPr>
-            <a:spLocks xmlns:a="http://schemas.openxmlformats.org/drawingml/2006/main" noGrp="1"/>
-          </p:cNvSpPr>
-          <p:nvPr/>
-        </p:nvSpPr>
-        <p:spPr>
-          <a:xfrm xmlns:a="http://schemas.openxmlformats.org/drawingml/2006/main">
-            <a:off x="6743700" y="3752850"/>
-            <a:ext cx="2019300" cy="685800"/>
-          </a:xfrm>
-          <a:prstGeom xmlns:a="http://schemas.openxmlformats.org/drawingml/2006/main" prst="rect">
-            <a:avLst/>
-          </a:prstGeom>
-          <a:noFill xmlns:a="http://schemas.openxmlformats.org/drawingml/2006/main"/>
-          <a:ln xmlns:a="http://schemas.openxmlformats.org/drawingml/2006/main" w="0">
-            <a:noFill/>
-            <a:prstDash val="solid"/>
-          </a:ln>
-        </p:spPr>
-        <p:txBody>
-          <a:bodyPr xmlns:a="http://schemas.openxmlformats.org/drawingml/2006/main" wrap="square" lIns="0" tIns="0" rIns="0" bIns="0" anchor="ctr">
-            <a:noAutofit/>
-          </a:bodyPr>
-          <a:lstStyle xmlns:a="http://schemas.openxmlformats.org/drawingml/2006/main"/>
-          <a:p xmlns:a="http://schemas.openxmlformats.org/drawingml/2006/main">
-            <a:pPr algn="l">
-              <a:lnSpc>
-                <a:spcPct val="100000"/>
-              </a:lnSpc>
-              <a:buNone/>
-              <a:defRPr sz="1650" b="1">
-                <a:solidFill>
-                  <a:srgbClr val="FFFFFF"/>
-                </a:solidFill>
-                <a:latin typeface="Calibri"/>
-                <a:ea typeface="Calibri"/>
-                <a:cs typeface="Calibri"/>
-              </a:defRPr>
-            </a:pPr>
-            <a:r>
-              <a:rPr sz="1800" b="1">
-                <a:solidFill>
-                  <a:srgbClr val="FFFFFF"/>
-                </a:solidFill>
-                <a:latin typeface="Calibri"/>
-                <a:ea typeface="Calibri"/>
-                <a:cs typeface="Calibri"/>
-              </a:rPr>
-              <a:t>Keyword + dense</a:t>
-            </a:r>
-          </a:p>
-        </p:txBody>
-      </p:sp>
-      <p:sp>
-        <p:nvSpPr>
-          <p:cNvPr id="14" name="">
-            <a:extLst xmlns:a="http://schemas.openxmlformats.org/drawingml/2006/main">
-              <a:ext uri="{FF2B5EF4-FFF2-40B4-BE49-F238E27FC236}">
-                <a16:creationId xmlns:a16="http://schemas.microsoft.com/office/drawing/2014/main" id="{9599AF29-91DE-47C0-8189-B0778BB52724}"/>
-              </a:ext>
-            </a:extLst>
-          </p:cNvPr>
-          <p:cNvSpPr>
-            <a:spLocks xmlns:a="http://schemas.openxmlformats.org/drawingml/2006/main" noGrp="1"/>
-          </p:cNvSpPr>
-          <p:nvPr/>
-        </p:nvSpPr>
-        <p:spPr>
-          <a:xfrm xmlns:a="http://schemas.openxmlformats.org/drawingml/2006/main">
-            <a:off x="6819900" y="4610100"/>
-            <a:ext cx="1866900" cy="514350"/>
-          </a:xfrm>
-          <a:prstGeom xmlns:a="http://schemas.openxmlformats.org/drawingml/2006/main" prst="rect">
-            <a:avLst/>
-          </a:prstGeom>
-          <a:noFill xmlns:a="http://schemas.openxmlformats.org/drawingml/2006/main"/>
-          <a:ln xmlns:a="http://schemas.openxmlformats.org/drawingml/2006/main" w="0">
-            <a:noFill/>
-            <a:prstDash val="solid"/>
-          </a:ln>
-        </p:spPr>
-        <p:txBody>
-          <a:bodyPr xmlns:a="http://schemas.openxmlformats.org/drawingml/2006/main" wrap="square" lIns="0" tIns="0" rIns="0" bIns="0" anchor="ctr">
-            <a:normAutofit fontScale="100000"/>
-          </a:bodyPr>
-          <a:lstStyle xmlns:a="http://schemas.openxmlformats.org/drawingml/2006/main"/>
-          <a:p xmlns:a="http://schemas.openxmlformats.org/drawingml/2006/main">
-            <a:pPr algn="l">
-              <a:lnSpc>
-                <a:spcPct val="100000"/>
-              </a:lnSpc>
-              <a:buNone/>
-              <a:defRPr sz="1200" b="0">
-                <a:solidFill>
-                  <a:srgbClr val="00A2EB"/>
-                </a:solidFill>
-                <a:latin typeface="Calibri"/>
-                <a:ea typeface="Calibri"/>
-                <a:cs typeface="Calibri"/>
-              </a:defRPr>
-            </a:pPr>
-            <a:r>
-              <a:rPr sz="1200" b="0">
-                <a:solidFill>
-                  <a:srgbClr val="00A2EB"/>
-                </a:solidFill>
-                <a:latin typeface="Calibri"/>
-                <a:ea typeface="Calibri"/>
-                <a:cs typeface="Calibri"/>
-              </a:rPr>
-              <a:t>candidate_k · ranked passage IDs</a:t>
-            </a:r>
-          </a:p>
-        </p:txBody>
-      </p:sp>
-      <p:sp>
-        <p:nvSpPr>
-          <p:cNvPr id="15" name="ingestion-4">
-            <a:extLst xmlns:a="http://schemas.openxmlformats.org/drawingml/2006/main">
-              <a:ext uri="{FF2B5EF4-FFF2-40B4-BE49-F238E27FC236}">
-                <a16:creationId xmlns:a16="http://schemas.microsoft.com/office/drawing/2014/main" id="{7952DE37-BD86-481C-A575-8709971DD74E}"/>
-              </a:ext>
-            </a:extLst>
-          </p:cNvPr>
-          <p:cNvSpPr>
-            <a:spLocks xmlns:a="http://schemas.openxmlformats.org/drawingml/2006/main" noGrp="1"/>
-          </p:cNvSpPr>
-          <p:nvPr/>
-        </p:nvSpPr>
-        <p:spPr>
-          <a:xfrm xmlns:a="http://schemas.openxmlformats.org/drawingml/2006/main">
-            <a:off x="9448800" y="3086100"/>
-            <a:ext cx="2247900" cy="2266950"/>
-          </a:xfrm>
-          <a:prstGeom xmlns:a="http://schemas.openxmlformats.org/drawingml/2006/main" prst="roundRect">
-            <a:avLst>
-              <a:gd name="adj" fmla="val 5085"/>
-            </a:avLst>
-          </a:prstGeom>
-          <a:solidFill xmlns:a="http://schemas.openxmlformats.org/drawingml/2006/main">
-            <a:srgbClr val="FFFFFF"/>
-          </a:solidFill>
-          <a:ln xmlns:a="http://schemas.openxmlformats.org/drawingml/2006/main" w="9525">
-            <a:solidFill>
-              <a:srgbClr val="E4E7E9"/>
-            </a:solidFill>
-            <a:prstDash val="solid"/>
-          </a:ln>
-        </p:spPr>
-      </p:sp>
-      <p:sp>
-        <p:nvSpPr>
-          <p:cNvPr id="16" name="">
-            <a:extLst xmlns:a="http://schemas.openxmlformats.org/drawingml/2006/main">
-              <a:ext uri="{FF2B5EF4-FFF2-40B4-BE49-F238E27FC236}">
-                <a16:creationId xmlns:a16="http://schemas.microsoft.com/office/drawing/2014/main" id="{62EC2EC9-18A1-4F72-A64D-AF536DDC8F61}"/>
-              </a:ext>
-            </a:extLst>
-          </p:cNvPr>
-          <p:cNvSpPr>
-            <a:spLocks xmlns:a="http://schemas.openxmlformats.org/drawingml/2006/main" noGrp="1"/>
-          </p:cNvSpPr>
-          <p:nvPr/>
-        </p:nvSpPr>
-        <p:spPr>
-          <a:xfrm xmlns:a="http://schemas.openxmlformats.org/drawingml/2006/main">
-            <a:off x="9639300" y="3295650"/>
-            <a:ext cx="514350" cy="285750"/>
-          </a:xfrm>
-          <a:prstGeom xmlns:a="http://schemas.openxmlformats.org/drawingml/2006/main" prst="rect">
-            <a:avLst/>
-          </a:prstGeom>
-          <a:noFill xmlns:a="http://schemas.openxmlformats.org/drawingml/2006/main"/>
-          <a:ln xmlns:a="http://schemas.openxmlformats.org/drawingml/2006/main" w="0">
-            <a:noFill/>
-            <a:prstDash val="solid"/>
-          </a:ln>
-        </p:spPr>
-        <p:txBody>
-          <a:bodyPr xmlns:a="http://schemas.openxmlformats.org/drawingml/2006/main" wrap="square" lIns="0" tIns="0" rIns="0" bIns="0" anchor="ctr">
-            <a:noAutofit/>
-          </a:bodyPr>
-          <a:lstStyle xmlns:a="http://schemas.openxmlformats.org/drawingml/2006/main"/>
-          <a:p xmlns:a="http://schemas.openxmlformats.org/drawingml/2006/main">
-            <a:pPr algn="l">
-              <a:lnSpc>
-                <a:spcPct val="100000"/>
-              </a:lnSpc>
-              <a:buNone/>
-              <a:defRPr sz="1350" b="1">
-                <a:solidFill>
-                  <a:srgbClr val="00A2EB"/>
-                </a:solidFill>
-                <a:latin typeface="Calibri"/>
-                <a:ea typeface="Calibri"/>
-                <a:cs typeface="Calibri"/>
-              </a:defRPr>
-            </a:pPr>
-            <a:r>
-              <a:rPr sz="1800" b="1">
-                <a:solidFill>
-                  <a:srgbClr val="00A2EB"/>
-                </a:solidFill>
-                <a:latin typeface="Calibri"/>
-                <a:ea typeface="Calibri"/>
-                <a:cs typeface="Calibri"/>
-              </a:rPr>
-              <a:t>04</a:t>
-            </a:r>
-          </a:p>
-        </p:txBody>
-      </p:sp>
-      <p:sp>
-        <p:nvSpPr>
-          <p:cNvPr id="17" name="">
-            <a:extLst xmlns:a="http://schemas.openxmlformats.org/drawingml/2006/main">
-              <a:ext uri="{FF2B5EF4-FFF2-40B4-BE49-F238E27FC236}">
-                <a16:creationId xmlns:a16="http://schemas.microsoft.com/office/drawing/2014/main" id="{8540FD5A-1C0F-4BE1-B862-685F20D0F43C}"/>
-              </a:ext>
-            </a:extLst>
-          </p:cNvPr>
-          <p:cNvSpPr>
-            <a:spLocks xmlns:a="http://schemas.openxmlformats.org/drawingml/2006/main" noGrp="1"/>
-          </p:cNvSpPr>
-          <p:nvPr/>
-        </p:nvSpPr>
-        <p:spPr>
-          <a:xfrm xmlns:a="http://schemas.openxmlformats.org/drawingml/2006/main">
-            <a:off x="9563100" y="3752850"/>
-            <a:ext cx="2019300" cy="685800"/>
-          </a:xfrm>
-          <a:prstGeom xmlns:a="http://schemas.openxmlformats.org/drawingml/2006/main" prst="rect">
-            <a:avLst/>
-          </a:prstGeom>
-          <a:noFill xmlns:a="http://schemas.openxmlformats.org/drawingml/2006/main"/>
-          <a:ln xmlns:a="http://schemas.openxmlformats.org/drawingml/2006/main" w="0">
-            <a:noFill/>
-            <a:prstDash val="solid"/>
-          </a:ln>
-        </p:spPr>
-        <p:txBody>
-          <a:bodyPr xmlns:a="http://schemas.openxmlformats.org/drawingml/2006/main" wrap="square" lIns="0" tIns="0" rIns="0" bIns="0" anchor="ctr">
-            <a:normAutofit fontScale="100000"/>
-          </a:bodyPr>
-          <a:lstStyle xmlns:a="http://schemas.openxmlformats.org/drawingml/2006/main"/>
-          <a:p xmlns:a="http://schemas.openxmlformats.org/drawingml/2006/main">
-            <a:pPr algn="l">
-              <a:lnSpc>
-                <a:spcPct val="100000"/>
-              </a:lnSpc>
-              <a:buNone/>
-              <a:defRPr sz="1950" b="1">
-                <a:solidFill>
-                  <a:srgbClr val="051C2A"/>
-                </a:solidFill>
-                <a:latin typeface="Calibri"/>
-                <a:ea typeface="Calibri"/>
-                <a:cs typeface="Calibri"/>
-              </a:defRPr>
-            </a:pPr>
-            <a:r>
-              <a:rPr sz="1950" b="1">
-                <a:solidFill>
-                  <a:srgbClr val="051C2A"/>
-                </a:solidFill>
-                <a:latin typeface="Calibri"/>
-                <a:ea typeface="Calibri"/>
-                <a:cs typeface="Calibri"/>
-              </a:rPr>
-              <a:t>RRF + rerank</a:t>
-            </a:r>
-          </a:p>
-        </p:txBody>
-      </p:sp>
-      <p:sp>
-        <p:nvSpPr>
-          <p:cNvPr id="18" name="">
-            <a:extLst xmlns:a="http://schemas.openxmlformats.org/drawingml/2006/main">
-              <a:ext uri="{FF2B5EF4-FFF2-40B4-BE49-F238E27FC236}">
-                <a16:creationId xmlns:a16="http://schemas.microsoft.com/office/drawing/2014/main" id="{67E52B70-645C-40F7-B0DE-1D1D177875CC}"/>
-              </a:ext>
-            </a:extLst>
-          </p:cNvPr>
-          <p:cNvSpPr>
-            <a:spLocks xmlns:a="http://schemas.openxmlformats.org/drawingml/2006/main" noGrp="1"/>
-          </p:cNvSpPr>
-          <p:nvPr/>
-        </p:nvSpPr>
-        <p:spPr>
-          <a:xfrm xmlns:a="http://schemas.openxmlformats.org/drawingml/2006/main">
-            <a:off x="9639300" y="4610100"/>
-            <a:ext cx="1866900" cy="514350"/>
-          </a:xfrm>
-          <a:prstGeom xmlns:a="http://schemas.openxmlformats.org/drawingml/2006/main" prst="rect">
-            <a:avLst/>
-          </a:prstGeom>
-          <a:noFill xmlns:a="http://schemas.openxmlformats.org/drawingml/2006/main"/>
-          <a:ln xmlns:a="http://schemas.openxmlformats.org/drawingml/2006/main" w="0">
-            <a:noFill/>
-            <a:prstDash val="solid"/>
-          </a:ln>
-        </p:spPr>
-        <p:txBody>
-          <a:bodyPr xmlns:a="http://schemas.openxmlformats.org/drawingml/2006/main" wrap="square" lIns="0" tIns="0" rIns="0" bIns="0" anchor="ctr">
-            <a:normAutofit fontScale="100000"/>
-          </a:bodyPr>
-          <a:lstStyle xmlns:a="http://schemas.openxmlformats.org/drawingml/2006/main"/>
-          <a:p xmlns:a="http://schemas.openxmlformats.org/drawingml/2006/main">
-            <a:pPr algn="l">
-              <a:lnSpc>
-                <a:spcPct val="100000"/>
-              </a:lnSpc>
-              <a:buNone/>
-              <a:defRPr sz="1200" b="0">
-                <a:solidFill>
-                  <a:srgbClr val="1F40CB"/>
-                </a:solidFill>
-                <a:latin typeface="Calibri"/>
-                <a:ea typeface="Calibri"/>
-                <a:cs typeface="Calibri"/>
-              </a:defRPr>
-            </a:pPr>
-            <a:r>
-              <a:rPr sz="1200" b="0">
-                <a:solidFill>
-                  <a:srgbClr val="1F40CB"/>
-                </a:solidFill>
-                <a:latin typeface="Calibri"/>
-                <a:ea typeface="Calibri"/>
-                <a:cs typeface="Calibri"/>
-              </a:rPr>
-              <a:t>rank fusion · transparent features</a:t>
-            </a:r>
-          </a:p>
-        </p:txBody>
-      </p:sp>
-      <p:sp>
-        <p:nvSpPr>
-          <p:cNvPr id="19" name="ingestion-5">
-            <a:extLst xmlns:a="http://schemas.openxmlformats.org/drawingml/2006/main">
-              <a:ext uri="{FF2B5EF4-FFF2-40B4-BE49-F238E27FC236}">
-                <a16:creationId xmlns:a16="http://schemas.microsoft.com/office/drawing/2014/main" id="{43F7E1B1-E237-4A79-B0C4-38965CF32D74}"/>
-              </a:ext>
-            </a:extLst>
-          </p:cNvPr>
-          <p:cNvSpPr>
-            <a:spLocks xmlns:a="http://schemas.openxmlformats.org/drawingml/2006/main" noGrp="1"/>
-          </p:cNvSpPr>
-          <p:nvPr/>
-        </p:nvSpPr>
-        <p:spPr>
-          <a:xfrm xmlns:a="http://schemas.openxmlformats.org/drawingml/2006/main">
-            <a:off x="12268200" y="3086100"/>
-            <a:ext cx="2247900" cy="2266950"/>
-          </a:xfrm>
-          <a:prstGeom xmlns:a="http://schemas.openxmlformats.org/drawingml/2006/main" prst="roundRect">
-            <a:avLst>
-              <a:gd name="adj" fmla="val 5085"/>
-            </a:avLst>
-          </a:prstGeom>
-          <a:solidFill xmlns:a="http://schemas.openxmlformats.org/drawingml/2006/main">
-            <a:srgbClr val="FFFFFF"/>
-          </a:solidFill>
-          <a:ln xmlns:a="http://schemas.openxmlformats.org/drawingml/2006/main" w="19050">
-            <a:solidFill>
-              <a:srgbClr val="F07D00"/>
-            </a:solidFill>
-            <a:prstDash val="solid"/>
-          </a:ln>
-        </p:spPr>
-      </p:sp>
-      <p:sp>
-        <p:nvSpPr>
-          <p:cNvPr id="20" name="">
-            <a:extLst xmlns:a="http://schemas.openxmlformats.org/drawingml/2006/main">
-              <a:ext uri="{FF2B5EF4-FFF2-40B4-BE49-F238E27FC236}">
-                <a16:creationId xmlns:a16="http://schemas.microsoft.com/office/drawing/2014/main" id="{51764D39-05B0-4F08-BC2B-2221BE2F38D6}"/>
-              </a:ext>
-            </a:extLst>
-          </p:cNvPr>
-          <p:cNvSpPr>
-            <a:spLocks xmlns:a="http://schemas.openxmlformats.org/drawingml/2006/main" noGrp="1"/>
-          </p:cNvSpPr>
-          <p:nvPr/>
-        </p:nvSpPr>
-        <p:spPr>
-          <a:xfrm xmlns:a="http://schemas.openxmlformats.org/drawingml/2006/main">
-            <a:off x="12458700" y="3295650"/>
-            <a:ext cx="514350" cy="285750"/>
-          </a:xfrm>
-          <a:prstGeom xmlns:a="http://schemas.openxmlformats.org/drawingml/2006/main" prst="rect">
-            <a:avLst/>
-          </a:prstGeom>
-          <a:noFill xmlns:a="http://schemas.openxmlformats.org/drawingml/2006/main"/>
-          <a:ln xmlns:a="http://schemas.openxmlformats.org/drawingml/2006/main" w="0">
-            <a:noFill/>
-            <a:prstDash val="solid"/>
-          </a:ln>
-        </p:spPr>
-        <p:txBody>
-          <a:bodyPr xmlns:a="http://schemas.openxmlformats.org/drawingml/2006/main" wrap="square" lIns="0" tIns="0" rIns="0" bIns="0" anchor="ctr">
-            <a:noAutofit/>
-          </a:bodyPr>
-          <a:lstStyle xmlns:a="http://schemas.openxmlformats.org/drawingml/2006/main"/>
-          <a:p xmlns:a="http://schemas.openxmlformats.org/drawingml/2006/main">
-            <a:pPr algn="l">
-              <a:lnSpc>
-                <a:spcPct val="100000"/>
-              </a:lnSpc>
-              <a:buNone/>
-              <a:defRPr sz="1350" b="1">
-                <a:solidFill>
-                  <a:srgbClr val="00A2EB"/>
-                </a:solidFill>
-                <a:latin typeface="Calibri"/>
-                <a:ea typeface="Calibri"/>
-                <a:cs typeface="Calibri"/>
-              </a:defRPr>
-            </a:pPr>
-            <a:r>
-              <a:rPr sz="1800" b="1">
-                <a:solidFill>
-                  <a:srgbClr val="00A2EB"/>
-                </a:solidFill>
-                <a:latin typeface="Calibri"/>
-                <a:ea typeface="Calibri"/>
-                <a:cs typeface="Calibri"/>
-              </a:rPr>
-              <a:t>05</a:t>
-            </a:r>
-          </a:p>
-        </p:txBody>
-      </p:sp>
-      <p:sp>
-        <p:nvSpPr>
-          <p:cNvPr id="21" name="">
-            <a:extLst xmlns:a="http://schemas.openxmlformats.org/drawingml/2006/main">
-              <a:ext uri="{FF2B5EF4-FFF2-40B4-BE49-F238E27FC236}">
-                <a16:creationId xmlns:a16="http://schemas.microsoft.com/office/drawing/2014/main" id="{C0F4CBB5-9FF7-4C7B-8D8C-5AA3541DD5E4}"/>
-              </a:ext>
-            </a:extLst>
-          </p:cNvPr>
-          <p:cNvSpPr>
-            <a:spLocks xmlns:a="http://schemas.openxmlformats.org/drawingml/2006/main" noGrp="1"/>
-          </p:cNvSpPr>
-          <p:nvPr/>
-        </p:nvSpPr>
-        <p:spPr>
-          <a:xfrm xmlns:a="http://schemas.openxmlformats.org/drawingml/2006/main">
-            <a:off x="12382500" y="3752850"/>
-            <a:ext cx="2019300" cy="685800"/>
-          </a:xfrm>
-          <a:prstGeom xmlns:a="http://schemas.openxmlformats.org/drawingml/2006/main" prst="rect">
-            <a:avLst/>
-          </a:prstGeom>
-          <a:noFill xmlns:a="http://schemas.openxmlformats.org/drawingml/2006/main"/>
-          <a:ln xmlns:a="http://schemas.openxmlformats.org/drawingml/2006/main" w="0">
-            <a:noFill/>
-            <a:prstDash val="solid"/>
-          </a:ln>
-        </p:spPr>
-        <p:txBody>
-          <a:bodyPr xmlns:a="http://schemas.openxmlformats.org/drawingml/2006/main" wrap="square" lIns="0" tIns="0" rIns="0" bIns="0" anchor="ctr">
-            <a:normAutofit fontScale="100000"/>
-          </a:bodyPr>
-          <a:lstStyle xmlns:a="http://schemas.openxmlformats.org/drawingml/2006/main"/>
-          <a:p xmlns:a="http://schemas.openxmlformats.org/drawingml/2006/main">
-            <a:pPr algn="l">
-              <a:lnSpc>
-                <a:spcPct val="100000"/>
-              </a:lnSpc>
-              <a:buNone/>
-              <a:defRPr sz="1950" b="1">
-                <a:solidFill>
-                  <a:srgbClr val="051C2A"/>
-                </a:solidFill>
-                <a:latin typeface="Calibri"/>
-                <a:ea typeface="Calibri"/>
-                <a:cs typeface="Calibri"/>
-              </a:defRPr>
-            </a:pPr>
-            <a:r>
-              <a:rPr sz="1950" b="1">
-                <a:solidFill>
-                  <a:srgbClr val="051C2A"/>
-                </a:solidFill>
-                <a:latin typeface="Calibri"/>
-                <a:ea typeface="Calibri"/>
-                <a:cs typeface="Calibri"/>
-              </a:rPr>
-              <a:t>Cited evidence set</a:t>
-            </a:r>
-          </a:p>
-        </p:txBody>
-      </p:sp>
-      <p:sp>
-        <p:nvSpPr>
-          <p:cNvPr id="22" name="">
-            <a:extLst xmlns:a="http://schemas.openxmlformats.org/drawingml/2006/main">
-              <a:ext uri="{FF2B5EF4-FFF2-40B4-BE49-F238E27FC236}">
-                <a16:creationId xmlns:a16="http://schemas.microsoft.com/office/drawing/2014/main" id="{8856B515-B8BF-4B9C-8D6B-EC909D2B3B4E}"/>
-              </a:ext>
-            </a:extLst>
-          </p:cNvPr>
-          <p:cNvSpPr>
-            <a:spLocks xmlns:a="http://schemas.openxmlformats.org/drawingml/2006/main" noGrp="1"/>
-          </p:cNvSpPr>
-          <p:nvPr/>
-        </p:nvSpPr>
-        <p:spPr>
-          <a:xfrm xmlns:a="http://schemas.openxmlformats.org/drawingml/2006/main">
-            <a:off x="12458700" y="4610100"/>
-            <a:ext cx="1866900" cy="514350"/>
-          </a:xfrm>
-          <a:prstGeom xmlns:a="http://schemas.openxmlformats.org/drawingml/2006/main" prst="rect">
-            <a:avLst/>
-          </a:prstGeom>
-          <a:noFill xmlns:a="http://schemas.openxmlformats.org/drawingml/2006/main"/>
-          <a:ln xmlns:a="http://schemas.openxmlformats.org/drawingml/2006/main" w="0">
-            <a:noFill/>
-            <a:prstDash val="solid"/>
-          </a:ln>
-        </p:spPr>
-        <p:txBody>
-          <a:bodyPr xmlns:a="http://schemas.openxmlformats.org/drawingml/2006/main" wrap="square" lIns="0" tIns="0" rIns="0" bIns="0" anchor="ctr">
-            <a:normAutofit fontScale="100000"/>
-          </a:bodyPr>
-          <a:lstStyle xmlns:a="http://schemas.openxmlformats.org/drawingml/2006/main"/>
-          <a:p xmlns:a="http://schemas.openxmlformats.org/drawingml/2006/main">
-            <a:pPr algn="l">
-              <a:lnSpc>
-                <a:spcPct val="100000"/>
-              </a:lnSpc>
-              <a:buNone/>
-              <a:defRPr sz="1200" b="0">
-                <a:solidFill>
-                  <a:srgbClr val="1F40CB"/>
-                </a:solidFill>
-                <a:latin typeface="Calibri"/>
-                <a:ea typeface="Calibri"/>
-                <a:cs typeface="Calibri"/>
-              </a:defRPr>
-            </a:pPr>
-            <a:r>
-              <a:rPr sz="1200" b="0">
-                <a:solidFill>
-                  <a:srgbClr val="1F40CB"/>
-                </a:solidFill>
-                <a:latin typeface="Calibri"/>
-                <a:ea typeface="Calibri"/>
-                <a:cs typeface="Calibri"/>
-              </a:rPr>
-              <a:t>final_k · provenance intact</a:t>
-            </a:r>
-          </a:p>
-        </p:txBody>
-      </p:sp>
-      <p:cxnSp>
-        <p:nvCxnSpPr>
-          <p:cNvPr id="421" name=""/>
-          <p:cNvCxnSpPr>
-            <a:stCxn xmlns:a="http://schemas.openxmlformats.org/drawingml/2006/main" id="3" idx="3"/>
-            <a:endCxn xmlns:a="http://schemas.openxmlformats.org/drawingml/2006/main" id="7" idx="1"/>
-          </p:cNvCxnSpPr>
-          <p:nvPr/>
-        </p:nvCxnSpPr>
-        <p:spPr>
-          <a:xfrm xmlns:a="http://schemas.openxmlformats.org/drawingml/2006/main">
-            <a:off x="3238500" y="4219575"/>
-            <a:ext cx="571500" cy="0"/>
-          </a:xfrm>
-          <a:prstGeom xmlns:a="http://schemas.openxmlformats.org/drawingml/2006/main" prst="straightConnector1">
-            <a:avLst/>
-          </a:prstGeom>
-          <a:ln xmlns:a="http://schemas.openxmlformats.org/drawingml/2006/main" w="28575">
-            <a:solidFill>
-              <a:srgbClr val="9A9A9F"/>
-            </a:solidFill>
-            <a:prstDash val="solid"/>
-            <a:tailEnd type="triangle" w="med" len="med"/>
-          </a:ln>
-        </p:spPr>
-      </p:cxnSp>
-      <p:cxnSp>
-        <p:nvCxnSpPr>
-          <p:cNvPr id="422" name=""/>
-          <p:cNvCxnSpPr>
-            <a:stCxn xmlns:a="http://schemas.openxmlformats.org/drawingml/2006/main" id="7" idx="3"/>
-            <a:endCxn xmlns:a="http://schemas.openxmlformats.org/drawingml/2006/main" id="11" idx="1"/>
-          </p:cNvCxnSpPr>
-          <p:nvPr/>
-        </p:nvCxnSpPr>
-        <p:spPr>
-          <a:xfrm xmlns:a="http://schemas.openxmlformats.org/drawingml/2006/main">
-            <a:off x="6057900" y="4219575"/>
-            <a:ext cx="571500" cy="0"/>
-          </a:xfrm>
-          <a:prstGeom xmlns:a="http://schemas.openxmlformats.org/drawingml/2006/main" prst="straightConnector1">
-            <a:avLst/>
-          </a:prstGeom>
-          <a:ln xmlns:a="http://schemas.openxmlformats.org/drawingml/2006/main" w="28575">
-            <a:solidFill>
-              <a:srgbClr val="9A9A9F"/>
-            </a:solidFill>
-            <a:prstDash val="solid"/>
-            <a:tailEnd type="triangle" w="med" len="med"/>
-          </a:ln>
-        </p:spPr>
-      </p:cxnSp>
-      <p:cxnSp>
-        <p:nvCxnSpPr>
-          <p:cNvPr id="423" name=""/>
-          <p:cNvCxnSpPr>
-            <a:stCxn xmlns:a="http://schemas.openxmlformats.org/drawingml/2006/main" id="11" idx="3"/>
-            <a:endCxn xmlns:a="http://schemas.openxmlformats.org/drawingml/2006/main" id="15" idx="1"/>
-          </p:cNvCxnSpPr>
-          <p:nvPr/>
-        </p:nvCxnSpPr>
-        <p:spPr>
-          <a:xfrm xmlns:a="http://schemas.openxmlformats.org/drawingml/2006/main">
-            <a:off x="8877300" y="4219575"/>
-            <a:ext cx="571500" cy="0"/>
-          </a:xfrm>
-          <a:prstGeom xmlns:a="http://schemas.openxmlformats.org/drawingml/2006/main" prst="straightConnector1">
-            <a:avLst/>
-          </a:prstGeom>
-          <a:ln xmlns:a="http://schemas.openxmlformats.org/drawingml/2006/main" w="28575">
-            <a:solidFill>
-              <a:srgbClr val="9A9A9F"/>
-            </a:solidFill>
-            <a:prstDash val="solid"/>
-            <a:tailEnd type="triangle" w="med" len="med"/>
-          </a:ln>
-        </p:spPr>
-      </p:cxnSp>
-      <p:cxnSp>
-        <p:nvCxnSpPr>
-          <p:cNvPr id="424" name=""/>
-          <p:cNvCxnSpPr>
-            <a:stCxn xmlns:a="http://schemas.openxmlformats.org/drawingml/2006/main" id="15" idx="3"/>
-            <a:endCxn xmlns:a="http://schemas.openxmlformats.org/drawingml/2006/main" id="19" idx="1"/>
-          </p:cNvCxnSpPr>
-          <p:nvPr/>
-        </p:nvCxnSpPr>
-        <p:spPr>
-          <a:xfrm xmlns:a="http://schemas.openxmlformats.org/drawingml/2006/main">
-            <a:off x="11696700" y="4219575"/>
-            <a:ext cx="571500" cy="0"/>
-          </a:xfrm>
-          <a:prstGeom xmlns:a="http://schemas.openxmlformats.org/drawingml/2006/main" prst="straightConnector1">
-            <a:avLst/>
-          </a:prstGeom>
-          <a:ln xmlns:a="http://schemas.openxmlformats.org/drawingml/2006/main" w="28575">
-            <a:solidFill>
-              <a:srgbClr val="9A9A9F"/>
-            </a:solidFill>
-            <a:prstDash val="solid"/>
-            <a:tailEnd type="triangle" w="med" len="med"/>
-          </a:ln>
-        </p:spPr>
-      </p:cxnSp>
-      <p:sp>
-        <p:nvSpPr>
-          <p:cNvPr id="27" name="">
-            <a:extLst xmlns:a="http://schemas.openxmlformats.org/drawingml/2006/main">
-              <a:ext uri="{FF2B5EF4-FFF2-40B4-BE49-F238E27FC236}">
-                <a16:creationId xmlns:a16="http://schemas.microsoft.com/office/drawing/2014/main" id="{79128475-820B-447C-A724-7D8A31328FFE}"/>
-              </a:ext>
-            </a:extLst>
-          </p:cNvPr>
-          <p:cNvSpPr>
-            <a:spLocks xmlns:a="http://schemas.openxmlformats.org/drawingml/2006/main" noGrp="1"/>
-          </p:cNvSpPr>
-          <p:nvPr/>
-        </p:nvSpPr>
-        <p:spPr>
-          <a:xfrm xmlns:a="http://schemas.openxmlformats.org/drawingml/2006/main">
-            <a:off x="2381250" y="6210300"/>
-            <a:ext cx="10477500" cy="457200"/>
-          </a:xfrm>
-          <a:prstGeom xmlns:a="http://schemas.openxmlformats.org/drawingml/2006/main" prst="rect">
-            <a:avLst/>
-          </a:prstGeom>
-          <a:noFill xmlns:a="http://schemas.openxmlformats.org/drawingml/2006/main"/>
-          <a:ln xmlns:a="http://schemas.openxmlformats.org/drawingml/2006/main" w="0">
-            <a:noFill/>
-            <a:prstDash val="solid"/>
-          </a:ln>
-        </p:spPr>
-        <p:txBody>
-          <a:bodyPr xmlns:a="http://schemas.openxmlformats.org/drawingml/2006/main" wrap="square" lIns="0" tIns="0" rIns="0" bIns="0" anchor="ctr">
-            <a:normAutofit fontScale="100000"/>
-          </a:bodyPr>
-          <a:lstStyle xmlns:a="http://schemas.openxmlformats.org/drawingml/2006/main"/>
-          <a:p xmlns:a="http://schemas.openxmlformats.org/drawingml/2006/main">
-            <a:pPr algn="ctr">
-              <a:lnSpc>
-                <a:spcPct val="100000"/>
-              </a:lnSpc>
-              <a:buNone/>
-              <a:defRPr sz="2100" b="1">
-                <a:solidFill>
-                  <a:srgbClr val="051C2A"/>
-                </a:solidFill>
-                <a:latin typeface="Calibri"/>
-                <a:ea typeface="Calibri"/>
-                <a:cs typeface="Calibri"/>
-              </a:defRPr>
-            </a:pPr>
-            <a:r>
-              <a:rPr sz="2100" b="1">
-                <a:solidFill>
-                  <a:srgbClr val="051C2A"/>
-                </a:solidFill>
-                <a:latin typeface="Calibri"/>
-                <a:ea typeface="Calibri"/>
-                <a:cs typeface="Calibri"/>
-              </a:rPr>
-              <a:t>Lesson 07 evaluates each stage and traces the answer path.</a:t>
-            </a:r>
-          </a:p>
-        </p:txBody>
-      </p:sp>
-      <p:sp>
-        <p:nvSpPr>
-          <p:cNvPr id="28" name="">
-            <a:extLst xmlns:a="http://schemas.openxmlformats.org/drawingml/2006/main">
-              <a:ext uri="{FF2B5EF4-FFF2-40B4-BE49-F238E27FC236}">
-                <a16:creationId xmlns:a16="http://schemas.microsoft.com/office/drawing/2014/main" id="{685F2AAD-81FC-436A-88F7-89F49C9F1671}"/>
-              </a:ext>
-            </a:extLst>
-          </p:cNvPr>
-          <p:cNvSpPr>
-            <a:spLocks xmlns:a="http://schemas.openxmlformats.org/drawingml/2006/main" noGrp="1"/>
-          </p:cNvSpPr>
-          <p:nvPr/>
-        </p:nvSpPr>
-        <p:spPr>
-          <a:xfrm xmlns:a="http://schemas.openxmlformats.org/drawingml/2006/main">
-            <a:off x="1885950" y="6838950"/>
-            <a:ext cx="4476750" cy="323850"/>
-          </a:xfrm>
-          <a:prstGeom xmlns:a="http://schemas.openxmlformats.org/drawingml/2006/main" prst="rect">
-            <a:avLst/>
-          </a:prstGeom>
-          <a:noFill xmlns:a="http://schemas.openxmlformats.org/drawingml/2006/main"/>
-          <a:ln xmlns:a="http://schemas.openxmlformats.org/drawingml/2006/main" w="0">
-            <a:noFill/>
-            <a:prstDash val="solid"/>
-          </a:ln>
-        </p:spPr>
-        <p:txBody>
-          <a:bodyPr xmlns:a="http://schemas.openxmlformats.org/drawingml/2006/main" wrap="square" lIns="0" tIns="0" rIns="0" bIns="0" anchor="ctr">
-            <a:normAutofit fontScale="100000"/>
-          </a:bodyPr>
-          <a:lstStyle xmlns:a="http://schemas.openxmlformats.org/drawingml/2006/main"/>
-          <a:p xmlns:a="http://schemas.openxmlformats.org/drawingml/2006/main">
-            <a:pPr algn="ctr">
-              <a:lnSpc>
-                <a:spcPct val="100000"/>
-              </a:lnSpc>
-              <a:buNone/>
-              <a:defRPr sz="1500" b="0">
-                <a:solidFill>
-                  <a:srgbClr val="64748B"/>
-                </a:solidFill>
-                <a:latin typeface="Calibri"/>
-                <a:ea typeface="Calibri"/>
-                <a:cs typeface="Calibri"/>
-              </a:defRPr>
-            </a:pPr>
-            <a:r>
-              <a:rPr sz="1500" b="0">
-                <a:solidFill>
-                  <a:srgbClr val="64748B"/>
-                </a:solidFill>
-                <a:latin typeface="Calibri"/>
-                <a:ea typeface="Calibri"/>
-                <a:cs typeface="Calibri"/>
-              </a:rPr>
-              <a:t>retrieval recall is measured</a:t>
-            </a:r>
-          </a:p>
-        </p:txBody>
-      </p:sp>
-      <p:sp>
-        <p:nvSpPr>
-          <p:cNvPr id="29" name="">
-            <a:extLst xmlns:a="http://schemas.openxmlformats.org/drawingml/2006/main">
-              <a:ext uri="{FF2B5EF4-FFF2-40B4-BE49-F238E27FC236}">
-                <a16:creationId xmlns:a16="http://schemas.microsoft.com/office/drawing/2014/main" id="{CDE04AD7-6CBE-4792-B549-765578FB3E1E}"/>
-              </a:ext>
-            </a:extLst>
-          </p:cNvPr>
-          <p:cNvSpPr>
-            <a:spLocks xmlns:a="http://schemas.openxmlformats.org/drawingml/2006/main" noGrp="1"/>
-          </p:cNvSpPr>
-          <p:nvPr/>
-        </p:nvSpPr>
-        <p:spPr>
-          <a:xfrm xmlns:a="http://schemas.openxmlformats.org/drawingml/2006/main">
-            <a:off x="8801100" y="6838950"/>
-            <a:ext cx="4762500" cy="323850"/>
-          </a:xfrm>
-          <a:prstGeom xmlns:a="http://schemas.openxmlformats.org/drawingml/2006/main" prst="rect">
-            <a:avLst/>
-          </a:prstGeom>
-          <a:noFill xmlns:a="http://schemas.openxmlformats.org/drawingml/2006/main"/>
-          <a:ln xmlns:a="http://schemas.openxmlformats.org/drawingml/2006/main" w="0">
-            <a:noFill/>
-            <a:prstDash val="solid"/>
-          </a:ln>
-        </p:spPr>
-        <p:txBody>
-          <a:bodyPr xmlns:a="http://schemas.openxmlformats.org/drawingml/2006/main" wrap="square" lIns="0" tIns="0" rIns="0" bIns="0" anchor="ctr">
-            <a:normAutofit fontScale="100000"/>
-          </a:bodyPr>
-          <a:lstStyle xmlns:a="http://schemas.openxmlformats.org/drawingml/2006/main"/>
-          <a:p xmlns:a="http://schemas.openxmlformats.org/drawingml/2006/main">
-            <a:pPr algn="ctr">
-              <a:lnSpc>
-                <a:spcPct val="100000"/>
-              </a:lnSpc>
-              <a:buNone/>
-              <a:defRPr sz="1500" b="0">
-                <a:solidFill>
-                  <a:srgbClr val="64748B"/>
-                </a:solidFill>
-                <a:latin typeface="Calibri"/>
-                <a:ea typeface="Calibri"/>
-                <a:cs typeface="Calibri"/>
-              </a:defRPr>
-            </a:pPr>
-            <a:r>
-              <a:rPr sz="1500" b="0">
-                <a:solidFill>
-                  <a:srgbClr val="64748B"/>
-                </a:solidFill>
-                <a:latin typeface="Calibri"/>
-                <a:ea typeface="Calibri"/>
-                <a:cs typeface="Calibri"/>
-              </a:rPr>
-              <a:t>answer groundedness stays separate</a:t>
-            </a:r>
-          </a:p>
-        </p:txBody>
-      </p:sp>
-      <p:sp>
-        <p:nvSpPr>
-          <p:cNvPr id="30" name="">
-            <a:extLst xmlns:a="http://schemas.openxmlformats.org/drawingml/2006/main">
-              <a:ext uri="{FF2B5EF4-FFF2-40B4-BE49-F238E27FC236}">
-                <a16:creationId xmlns:a16="http://schemas.microsoft.com/office/drawing/2014/main" id="{28CBA7AE-993C-4F84-A696-8D1323AC4E80}"/>
-              </a:ext>
-            </a:extLst>
-          </p:cNvPr>
-          <p:cNvSpPr>
-            <a:spLocks xmlns:a="http://schemas.openxmlformats.org/drawingml/2006/main" noGrp="1"/>
-          </p:cNvSpPr>
-          <p:nvPr/>
-        </p:nvSpPr>
-        <p:spPr>
-          <a:xfrm xmlns:a="http://schemas.openxmlformats.org/drawingml/2006/main">
-            <a:off x="857250" y="7896225"/>
-            <a:ext cx="13525500" cy="28575"/>
-          </a:xfrm>
-          <a:prstGeom xmlns:a="http://schemas.openxmlformats.org/drawingml/2006/main" prst="rect">
-            <a:avLst/>
-          </a:prstGeom>
-          <a:solidFill xmlns:a="http://schemas.openxmlformats.org/drawingml/2006/main">
-            <a:srgbClr val="E4E7E9"/>
-          </a:solidFill>
-          <a:ln xmlns:a="http://schemas.openxmlformats.org/drawingml/2006/main" w="0">
-            <a:solidFill>
-              <a:srgbClr val="E4E7E9"/>
-            </a:solidFill>
-            <a:prstDash val="solid"/>
-          </a:ln>
-        </p:spPr>
-      </p:sp>
-      <p:sp>
-        <p:nvSpPr>
-          <p:cNvPr id="31" name="">
-            <a:extLst xmlns:a="http://schemas.openxmlformats.org/drawingml/2006/main">
-              <a:ext uri="{FF2B5EF4-FFF2-40B4-BE49-F238E27FC236}">
-                <a16:creationId xmlns:a16="http://schemas.microsoft.com/office/drawing/2014/main" id="{DE97BF4D-EDBC-4480-A82B-512A72221950}"/>
-              </a:ext>
-            </a:extLst>
-          </p:cNvPr>
-          <p:cNvSpPr>
-            <a:spLocks xmlns:a="http://schemas.openxmlformats.org/drawingml/2006/main" noGrp="1"/>
-          </p:cNvSpPr>
-          <p:nvPr/>
-        </p:nvSpPr>
-        <p:spPr>
-          <a:xfrm xmlns:a="http://schemas.openxmlformats.org/drawingml/2006/main">
-            <a:off x="857250" y="7896225"/>
-            <a:ext cx="8001000" cy="38100"/>
-          </a:xfrm>
-          <a:prstGeom xmlns:a="http://schemas.openxmlformats.org/drawingml/2006/main" prst="rect">
-            <a:avLst/>
-          </a:prstGeom>
-          <a:solidFill xmlns:a="http://schemas.openxmlformats.org/drawingml/2006/main">
-            <a:srgbClr val="00A2EB"/>
-          </a:solidFill>
-          <a:ln xmlns:a="http://schemas.openxmlformats.org/drawingml/2006/main" w="0">
-            <a:solidFill>
-              <a:srgbClr val="00A2EB"/>
-            </a:solidFill>
-            <a:prstDash val="solid"/>
-          </a:ln>
-        </p:spPr>
-      </p:sp>
-      <p:sp>
-        <p:nvSpPr>
-          <p:cNvPr id="32" name="">
-            <a:extLst xmlns:a="http://schemas.openxmlformats.org/drawingml/2006/main">
-              <a:ext uri="{FF2B5EF4-FFF2-40B4-BE49-F238E27FC236}">
-                <a16:creationId xmlns:a16="http://schemas.microsoft.com/office/drawing/2014/main" id="{49281B64-2F0F-4357-A085-C65451F28236}"/>
-              </a:ext>
-            </a:extLst>
-          </p:cNvPr>
-          <p:cNvSpPr>
-            <a:spLocks xmlns:a="http://schemas.openxmlformats.org/drawingml/2006/main" noGrp="1"/>
-          </p:cNvSpPr>
-          <p:nvPr/>
-        </p:nvSpPr>
-        <p:spPr>
-          <a:xfrm xmlns:a="http://schemas.openxmlformats.org/drawingml/2006/main">
-            <a:off x="971550" y="8058150"/>
-            <a:ext cx="3714750" cy="323850"/>
-          </a:xfrm>
-          <a:prstGeom xmlns:a="http://schemas.openxmlformats.org/drawingml/2006/main" prst="rect">
-            <a:avLst/>
-          </a:prstGeom>
-          <a:noFill xmlns:a="http://schemas.openxmlformats.org/drawingml/2006/main"/>
-          <a:ln xmlns:a="http://schemas.openxmlformats.org/drawingml/2006/main" w="0">
-            <a:noFill/>
-            <a:prstDash val="solid"/>
-          </a:ln>
-        </p:spPr>
-        <p:txBody>
-          <a:bodyPr xmlns:a="http://schemas.openxmlformats.org/drawingml/2006/main" wrap="square" lIns="0" tIns="0" rIns="0" bIns="0" anchor="ctr">
-            <a:normAutofit fontScale="100000"/>
-          </a:bodyPr>
-          <a:lstStyle xmlns:a="http://schemas.openxmlformats.org/drawingml/2006/main"/>
-          <a:p xmlns:a="http://schemas.openxmlformats.org/drawingml/2006/main">
-            <a:pPr algn="l">
-              <a:lnSpc>
-                <a:spcPct val="100000"/>
-              </a:lnSpc>
-              <a:buNone/>
-              <a:defRPr sz="1200" b="0">
-                <a:solidFill>
                   <a:srgbClr val="9A9A9F"/>
                 </a:solidFill>
                 <a:latin typeface="Calibri"/>
                 <a:ea typeface="Calibri"/>
                 <a:cs typeface="Calibri"/>
-              </a:defRPr>
-            </a:pPr>
-            <a:r>
-              <a:rPr sz="1200" b="0">
-                <a:solidFill>
-                  <a:srgbClr val="9A9A9F"/>
-                </a:solidFill>
-                <a:latin typeface="Calibri"/>
-                <a:ea typeface="Calibri"/>
-                <a:cs typeface="Calibri"/>
               </a:rPr>
               <a:t>First Finance - Arnaud Demes</a:t>
             </a:r>
@@ -14907,10 +10080,10 @@
       </p:sp>
       <p:sp>
         <p:nvSpPr>
-          <p:cNvPr id="33" name="">
-            <a:extLst xmlns:a="http://schemas.openxmlformats.org/drawingml/2006/main">
-              <a:ext uri="{FF2B5EF4-FFF2-40B4-BE49-F238E27FC236}">
-                <a16:creationId xmlns:a16="http://schemas.microsoft.com/office/drawing/2014/main" id="{EAA325A4-7EC6-42CE-A13A-4B38A32DE7F2}"/>
+          <p:cNvPr id="42" name="">
+            <a:extLst xmlns:a="http://schemas.openxmlformats.org/drawingml/2006/main">
+              <a:ext uri="{FF2B5EF4-FFF2-40B4-BE49-F238E27FC236}">
+                <a16:creationId xmlns:a16="http://schemas.microsoft.com/office/drawing/2014/main" id="{23DD0EC2-8E86-44C8-B8C1-3DB1E93C5D33}"/>
               </a:ext>
             </a:extLst>
           </p:cNvPr>
@@ -14962,17 +10135,17 @@
                 <a:ea typeface="Calibri"/>
                 <a:cs typeface="Calibri"/>
               </a:rPr>
-              <a:t>HANDOFF</a:t>
-            </a:r>
-          </a:p>
-        </p:txBody>
-      </p:sp>
-      <p:sp>
-        <p:nvSpPr>
-          <p:cNvPr id="34" name="">
-            <a:extLst xmlns:a="http://schemas.openxmlformats.org/drawingml/2006/main">
-              <a:ext uri="{FF2B5EF4-FFF2-40B4-BE49-F238E27FC236}">
-                <a16:creationId xmlns:a16="http://schemas.microsoft.com/office/drawing/2014/main" id="{5F7FB65A-4A0D-4595-92F4-FD9B71638842}"/>
+              <a:t>BENCHMARK</a:t>
+            </a:r>
+          </a:p>
+        </p:txBody>
+      </p:sp>
+      <p:sp>
+        <p:nvSpPr>
+          <p:cNvPr id="43" name="">
+            <a:extLst xmlns:a="http://schemas.openxmlformats.org/drawingml/2006/main">
+              <a:ext uri="{FF2B5EF4-FFF2-40B4-BE49-F238E27FC236}">
+                <a16:creationId xmlns:a16="http://schemas.microsoft.com/office/drawing/2014/main" id="{A107089F-BB21-465D-B53D-42746B7A7540}"/>
               </a:ext>
             </a:extLst>
           </p:cNvPr>
@@ -15029,10 +10202,168 @@
           </a:p>
         </p:txBody>
       </p:sp>
+      <p:pic>
+        <p:nvPicPr>
+          <p:cNvPr id="54" name=""/>
+          <p:cNvPicPr>
+            <a:picLocks xmlns:a="http://schemas.openxmlformats.org/drawingml/2006/main" noChangeAspect="1"/>
+          </p:cNvPicPr>
+          <p:nvPr/>
+        </p:nvPicPr>
+        <p:blipFill>
+          <a:blip xmlns:r="http://schemas.openxmlformats.org/officeDocument/2006/relationships" xmlns:a="http://schemas.openxmlformats.org/drawingml/2006/main" r:embed="R7c99ca316cda464e"/>
+          <a:stretch xmlns:a="http://schemas.openxmlformats.org/drawingml/2006/main"/>
+        </p:blipFill>
+        <p:spPr>
+          <a:xfrm xmlns:a="http://schemas.openxmlformats.org/drawingml/2006/main">
+            <a:off x="972608" y="2038350"/>
+            <a:ext cx="10227733" cy="5753100"/>
+          </a:xfrm>
+          <a:prstGeom xmlns:a="http://schemas.openxmlformats.org/drawingml/2006/main" prst="rect">
+            <a:avLst/>
+          </a:prstGeom>
+        </p:spPr>
+      </p:pic>
+      <p:sp>
+        <p:nvSpPr>
+          <p:cNvPr id="46" name="source-interpretation">
+            <a:extLst xmlns:a="http://schemas.openxmlformats.org/drawingml/2006/main">
+              <a:ext uri="{FF2B5EF4-FFF2-40B4-BE49-F238E27FC236}">
+                <a16:creationId xmlns:a16="http://schemas.microsoft.com/office/drawing/2014/main" id="{CFC781F6-587C-447E-9E75-9BA54DF6FCF0}"/>
+              </a:ext>
+            </a:extLst>
+          </p:cNvPr>
+          <p:cNvSpPr>
+            <a:spLocks xmlns:a="http://schemas.openxmlformats.org/drawingml/2006/main" noGrp="1"/>
+          </p:cNvSpPr>
+          <p:nvPr/>
+        </p:nvSpPr>
+        <p:spPr>
+          <a:xfrm xmlns:a="http://schemas.openxmlformats.org/drawingml/2006/main">
+            <a:off x="11601450" y="3028950"/>
+            <a:ext cx="2914650" cy="2667000"/>
+          </a:xfrm>
+          <a:prstGeom xmlns:a="http://schemas.openxmlformats.org/drawingml/2006/main" prst="roundRect">
+            <a:avLst>
+              <a:gd name="adj" fmla="val 2857"/>
+            </a:avLst>
+          </a:prstGeom>
+          <a:solidFill xmlns:a="http://schemas.openxmlformats.org/drawingml/2006/main">
+            <a:srgbClr val="1F40CB"/>
+          </a:solidFill>
+          <a:ln xmlns:a="http://schemas.openxmlformats.org/drawingml/2006/main" w="0">
+            <a:solidFill>
+              <a:srgbClr val="1F40CB"/>
+            </a:solidFill>
+            <a:prstDash val="solid"/>
+          </a:ln>
+        </p:spPr>
+        <p:txBody>
+          <a:bodyPr xmlns:a="http://schemas.openxmlformats.org/drawingml/2006/main" lIns="133350" tIns="133350" rIns="133350" bIns="133350" anchor="ctr"/>
+          <a:lstStyle xmlns:a="http://schemas.openxmlformats.org/drawingml/2006/main"/>
+          <a:p xmlns:a="http://schemas.openxmlformats.org/drawingml/2006/main">
+            <a:pPr algn="ctr">
+              <a:defRPr sz="1650" b="1">
+                <a:solidFill>
+                  <a:srgbClr val="FFFFFF"/>
+                </a:solidFill>
+                <a:latin typeface="Calibri"/>
+                <a:ea typeface="Calibri"/>
+                <a:cs typeface="Calibri"/>
+              </a:defRPr>
+            </a:pPr>
+            <a:r>
+              <a:rPr sz="1650" b="1">
+                <a:solidFill>
+                  <a:srgbClr val="FFFFFF"/>
+                </a:solidFill>
+                <a:latin typeface="Calibri"/>
+                <a:ea typeface="Calibri"/>
+                <a:cs typeface="Calibri"/>
+              </a:rPr>
+              <a:t>67% FEWER</a:t>
+            </a:r>
+          </a:p>
+          <a:p xmlns:a="http://schemas.openxmlformats.org/drawingml/2006/main">
+            <a:pPr algn="ctr">
+              <a:defRPr sz="1650" b="1">
+                <a:solidFill>
+                  <a:srgbClr val="FFFFFF"/>
+                </a:solidFill>
+                <a:latin typeface="Calibri"/>
+                <a:ea typeface="Calibri"/>
+                <a:cs typeface="Calibri"/>
+              </a:defRPr>
+            </a:pPr>
+            <a:r>
+              <a:rPr sz="1650" b="1">
+                <a:solidFill>
+                  <a:srgbClr val="FFFFFF"/>
+                </a:solidFill>
+                <a:latin typeface="Calibri"/>
+                <a:ea typeface="Calibri"/>
+                <a:cs typeface="Calibri"/>
+              </a:rPr>
+              <a:t>FAILED RETRIEVALS</a:t>
+            </a:r>
+          </a:p>
+          <a:p xmlns:a="http://schemas.openxmlformats.org/drawingml/2006/main">
+            <a:r>
+              <a:t/>
+            </a:r>
+          </a:p>
+          <a:p xmlns:a="http://schemas.openxmlformats.org/drawingml/2006/main">
+            <a:pPr algn="ctr">
+              <a:defRPr sz="1650" b="1">
+                <a:solidFill>
+                  <a:srgbClr val="FFFFFF"/>
+                </a:solidFill>
+                <a:latin typeface="Calibri"/>
+                <a:ea typeface="Calibri"/>
+                <a:cs typeface="Calibri"/>
+              </a:defRPr>
+            </a:pPr>
+            <a:r>
+              <a:rPr sz="1650" b="1">
+                <a:solidFill>
+                  <a:srgbClr val="FFFFFF"/>
+                </a:solidFill>
+                <a:latin typeface="Calibri"/>
+                <a:ea typeface="Calibri"/>
+                <a:cs typeface="Calibri"/>
+              </a:rPr>
+              <a:t>5.7% → 1.9%</a:t>
+            </a:r>
+          </a:p>
+          <a:p xmlns:a="http://schemas.openxmlformats.org/drawingml/2006/main">
+            <a:pPr algn="ctr">
+              <a:defRPr sz="1650" b="1">
+                <a:solidFill>
+                  <a:srgbClr val="FFFFFF"/>
+                </a:solidFill>
+                <a:latin typeface="Calibri"/>
+                <a:ea typeface="Calibri"/>
+                <a:cs typeface="Calibri"/>
+              </a:defRPr>
+            </a:pPr>
+            <a:r>
+              <a:rPr sz="1650" b="1">
+                <a:solidFill>
+                  <a:srgbClr val="FFFFFF"/>
+                </a:solidFill>
+                <a:latin typeface="Calibri"/>
+                <a:ea typeface="Calibri"/>
+                <a:cs typeface="Calibri"/>
+              </a:rPr>
+              <a:t>Top-20 benchmark</a:t>
+            </a:r>
+          </a:p>
+        </p:txBody>
+      </p:sp>
     </p:spTree>
     <p:extLst>
       <p:ext uri="{BB962C8B-B14F-4D97-AF65-F5344CB8AC3E}">
-        <p14:creationId xmlns:p14="http://schemas.microsoft.com/office/powerpoint/2010/main" val="1169510731"/>
+        <p14:creationId xmlns:p14="http://schemas.microsoft.com/office/powerpoint/2010/main" val="349444305"/>
       </p:ext>
     </p:extLst>
   </p:cSld>
@@ -15115,7 +10446,7 @@
                 <a:ea typeface="Calibri"/>
                 <a:cs typeface="Calibri"/>
               </a:rPr>
-              <a:t>STORAGE CONTRACT</a:t>
+              <a:t>DESIGN BACKBONE</a:t>
             </a:r>
           </a:p>
         </p:txBody>
@@ -15177,7 +10508,7 @@
                 <a:ea typeface="Calibri"/>
                 <a:cs typeface="Calibri"/>
               </a:rPr>
-              <a:t>Keep one logical schema when the vector engine changes</a:t>
+              <a:t>Each stage repairs a different retrieval failure</a:t>
             </a:r>
           </a:p>
         </p:txBody>
@@ -15336,7 +10667,7 @@
                 <a:ea typeface="Calibri"/>
                 <a:cs typeface="Calibri"/>
               </a:rPr>
-              <a:t>Documents</a:t>
+              <a:t>Eligibility</a:t>
             </a:r>
           </a:p>
         </p:txBody>
@@ -15398,7 +10729,7 @@
                 <a:ea typeface="Calibri"/>
                 <a:cs typeface="Calibri"/>
               </a:rPr>
-              <a:t>source · company · period</a:t>
+              <a:t>wrong company · period · type</a:t>
             </a:r>
           </a:p>
         </p:txBody>
@@ -15557,7 +10888,7 @@
                 <a:ea typeface="Calibri"/>
                 <a:cs typeface="Calibri"/>
               </a:rPr>
-              <a:t>Chunks</a:t>
+              <a:t>BM25</a:t>
             </a:r>
           </a:p>
         </p:txBody>
@@ -15619,7 +10950,7 @@
                 <a:ea typeface="Calibri"/>
                 <a:cs typeface="Calibri"/>
               </a:rPr>
-              <a:t>stable ID · page · section</a:t>
+              <a:t>exact figures · names · identifiers</a:t>
             </a:r>
           </a:p>
         </p:txBody>
@@ -15778,7 +11109,7 @@
                 <a:ea typeface="Calibri"/>
                 <a:cs typeface="Calibri"/>
               </a:rPr>
-              <a:t>Embeddings</a:t>
+              <a:t>Dense</a:t>
             </a:r>
           </a:p>
         </p:txBody>
@@ -15840,7 +11171,7 @@
                 <a:ea typeface="Calibri"/>
                 <a:cs typeface="Calibri"/>
               </a:rPr>
-              <a:t>model · dimensions · vector</a:t>
+              <a:t>concepts · paraphrases · related meaning</a:t>
             </a:r>
           </a:p>
         </p:txBody>
@@ -15999,7 +11330,7 @@
                 <a:ea typeface="Calibri"/>
                 <a:cs typeface="Calibri"/>
               </a:rPr>
-              <a:t>Local index</a:t>
+              <a:t>RRF</a:t>
             </a:r>
           </a:p>
         </p:txBody>
@@ -16061,7 +11392,7 @@
                 <a:ea typeface="Calibri"/>
                 <a:cs typeface="Calibri"/>
               </a:rPr>
-              <a:t>NumPy · exact search</a:t>
+              <a:t>rank fusion · no score calibration</a:t>
             </a:r>
           </a:p>
         </p:txBody>
@@ -16220,7 +11551,7 @@
                 <a:ea typeface="Calibri"/>
                 <a:cs typeface="Calibri"/>
               </a:rPr>
-              <a:t>pgvector / HNSW</a:t>
+              <a:t>Rerank</a:t>
             </a:r>
           </a:p>
         </p:txBody>
@@ -16282,14 +11613,14 @@
                 <a:ea typeface="Calibri"/>
                 <a:cs typeface="Calibri"/>
               </a:rPr>
-              <a:t>persistent · approximate search</a:t>
+              <a:t>final evidence budget · cited passages</a:t>
             </a:r>
           </a:p>
         </p:txBody>
       </p:sp>
       <p:cxnSp>
         <p:nvCxnSpPr>
-          <p:cNvPr id="421" name=""/>
+          <p:cNvPr id="473" name=""/>
           <p:cNvCxnSpPr>
             <a:stCxn xmlns:a="http://schemas.openxmlformats.org/drawingml/2006/main" id="3" idx="3"/>
             <a:endCxn xmlns:a="http://schemas.openxmlformats.org/drawingml/2006/main" id="7" idx="1"/>
@@ -16315,7 +11646,7 @@
       </p:cxnSp>
       <p:cxnSp>
         <p:nvCxnSpPr>
-          <p:cNvPr id="422" name=""/>
+          <p:cNvPr id="474" name=""/>
           <p:cNvCxnSpPr>
             <a:stCxn xmlns:a="http://schemas.openxmlformats.org/drawingml/2006/main" id="7" idx="3"/>
             <a:endCxn xmlns:a="http://schemas.openxmlformats.org/drawingml/2006/main" id="11" idx="1"/>
@@ -16341,7 +11672,7 @@
       </p:cxnSp>
       <p:cxnSp>
         <p:nvCxnSpPr>
-          <p:cNvPr id="423" name=""/>
+          <p:cNvPr id="475" name=""/>
           <p:cNvCxnSpPr>
             <a:stCxn xmlns:a="http://schemas.openxmlformats.org/drawingml/2006/main" id="11" idx="3"/>
             <a:endCxn xmlns:a="http://schemas.openxmlformats.org/drawingml/2006/main" id="15" idx="1"/>
@@ -16367,7 +11698,7 @@
       </p:cxnSp>
       <p:cxnSp>
         <p:nvCxnSpPr>
-          <p:cNvPr id="424" name=""/>
+          <p:cNvPr id="476" name=""/>
           <p:cNvCxnSpPr>
             <a:stCxn xmlns:a="http://schemas.openxmlformats.org/drawingml/2006/main" id="15" idx="3"/>
             <a:endCxn xmlns:a="http://schemas.openxmlformats.org/drawingml/2006/main" id="19" idx="1"/>
@@ -16448,7 +11779,7 @@
                 <a:ea typeface="Calibri"/>
                 <a:cs typeface="Calibri"/>
               </a:rPr>
-              <a:t>IDs, filters and evaluation contracts stay unchanged.</a:t>
+              <a:t>Hybrid works because the stages are complementary—not interchangeable.</a:t>
             </a:r>
           </a:p>
         </p:txBody>
@@ -16510,7 +11841,7 @@
                 <a:ea typeface="Calibri"/>
                 <a:cs typeface="Calibri"/>
               </a:rPr>
-              <a:t>prototype · simple + inspectable</a:t>
+              <a:t>protect corpus precision</a:t>
             </a:r>
           </a:p>
         </p:txBody>
@@ -16572,7 +11903,7 @@
                 <a:ea typeface="Calibri"/>
                 <a:cs typeface="Calibri"/>
               </a:rPr>
-              <a:t>production · persistence + scale</a:t>
+              <a:t>protect answer evidence</a:t>
             </a:r>
           </a:p>
         </p:txBody>
@@ -16762,7 +12093,7 @@
                 <a:ea typeface="Calibri"/>
                 <a:cs typeface="Calibri"/>
               </a:rPr>
-              <a:t>STORAGE</a:t>
+              <a:t>BACKBONE</a:t>
             </a:r>
           </a:p>
         </p:txBody>
@@ -16915,7 +12246,7 @@
                 <a:ea typeface="Calibri"/>
                 <a:cs typeface="Calibri"/>
               </a:rPr>
-              <a:t>MEASUREMENT HANDOFF</a:t>
+              <a:t>30-MINUTE LAB</a:t>
             </a:r>
           </a:p>
         </p:txBody>
@@ -16950,7 +12281,7 @@
         </p:spPr>
         <p:txBody>
           <a:bodyPr xmlns:a="http://schemas.openxmlformats.org/drawingml/2006/main" wrap="none" lIns="0" tIns="0" rIns="0" bIns="0" anchor="ctr">
-            <a:normAutofit fontScale="100000"/>
+            <a:normAutofit fontScale="99834"/>
           </a:bodyPr>
           <a:lstStyle xmlns:a="http://schemas.openxmlformats.org/drawingml/2006/main"/>
           <a:p xmlns:a="http://schemas.openxmlformats.org/drawingml/2006/main">
@@ -16977,7 +12308,7 @@
                 <a:ea typeface="Calibri"/>
                 <a:cs typeface="Calibri"/>
               </a:rPr>
-              <a:t>Measure each retrieval stage before adding MLflow</a:t>
+              <a:t>The notebook proves each design choice—without busywork</a:t>
             </a:r>
           </a:p>
         </p:txBody>
@@ -17136,7 +12467,7 @@
                 <a:ea typeface="Calibri"/>
                 <a:cs typeface="Calibri"/>
               </a:rPr>
-              <a:t>Eligibility</a:t>
+              <a:t>Load evidence</a:t>
             </a:r>
           </a:p>
         </p:txBody>
@@ -17198,7 +12529,7 @@
                 <a:ea typeface="Calibri"/>
                 <a:cs typeface="Calibri"/>
               </a:rPr>
-              <a:t>0.00 ms · complete</a:t>
+              <a:t>7 manifest-derived passages</a:t>
             </a:r>
           </a:p>
         </p:txBody>
@@ -17357,7 +12688,7 @@
                 <a:ea typeface="Calibri"/>
                 <a:cs typeface="Calibri"/>
               </a:rPr>
-              <a:t>Keyword</a:t>
+              <a:t>Compare channels</a:t>
             </a:r>
           </a:p>
         </p:txBody>
@@ -17419,7 +12750,7 @@
                 <a:ea typeface="Calibri"/>
                 <a:cs typeface="Calibri"/>
               </a:rPr>
-              <a:t>1.04 ms · complete</a:t>
+              <a:t>BM25 versus dense</a:t>
             </a:r>
           </a:p>
         </p:txBody>
@@ -17578,7 +12909,7 @@
                 <a:ea typeface="Calibri"/>
                 <a:cs typeface="Calibri"/>
               </a:rPr>
-              <a:t>Dense</a:t>
+              <a:t>Filter first</a:t>
             </a:r>
           </a:p>
         </p:txBody>
@@ -17640,7 +12971,7 @@
                 <a:ea typeface="Calibri"/>
                 <a:cs typeface="Calibri"/>
               </a:rPr>
-              <a:t>0.03 ms · complete</a:t>
+              <a:t>block cross-company leakage</a:t>
             </a:r>
           </a:p>
         </p:txBody>
@@ -17799,7 +13130,7 @@
                 <a:ea typeface="Calibri"/>
                 <a:cs typeface="Calibri"/>
               </a:rPr>
-              <a:t>Fusion</a:t>
+              <a:t>Fuse + rerank</a:t>
             </a:r>
           </a:p>
         </p:txBody>
@@ -17861,7 +13192,7 @@
                 <a:ea typeface="Calibri"/>
                 <a:cs typeface="Calibri"/>
               </a:rPr>
-              <a:t>0.01 ms · complete</a:t>
+              <a:t>RRF contributions stay visible</a:t>
             </a:r>
           </a:p>
         </p:txBody>
@@ -18020,7 +13351,7 @@
                 <a:ea typeface="Calibri"/>
                 <a:cs typeface="Calibri"/>
               </a:rPr>
-              <a:t>Rerank</a:t>
+              <a:t>Score 4 queries</a:t>
             </a:r>
           </a:p>
         </p:txBody>
@@ -18082,14 +13413,14 @@
                 <a:ea typeface="Calibri"/>
                 <a:cs typeface="Calibri"/>
               </a:rPr>
-              <a:t>0.06 ms · complete</a:t>
+              <a:t>rank-1 evidence recovery</a:t>
             </a:r>
           </a:p>
         </p:txBody>
       </p:sp>
       <p:cxnSp>
         <p:nvCxnSpPr>
-          <p:cNvPr id="421" name=""/>
+          <p:cNvPr id="473" name=""/>
           <p:cNvCxnSpPr>
             <a:stCxn xmlns:a="http://schemas.openxmlformats.org/drawingml/2006/main" id="3" idx="3"/>
             <a:endCxn xmlns:a="http://schemas.openxmlformats.org/drawingml/2006/main" id="7" idx="1"/>
@@ -18115,7 +13446,7 @@
       </p:cxnSp>
       <p:cxnSp>
         <p:nvCxnSpPr>
-          <p:cNvPr id="422" name=""/>
+          <p:cNvPr id="474" name=""/>
           <p:cNvCxnSpPr>
             <a:stCxn xmlns:a="http://schemas.openxmlformats.org/drawingml/2006/main" id="7" idx="3"/>
             <a:endCxn xmlns:a="http://schemas.openxmlformats.org/drawingml/2006/main" id="11" idx="1"/>
@@ -18141,7 +13472,7 @@
       </p:cxnSp>
       <p:cxnSp>
         <p:nvCxnSpPr>
-          <p:cNvPr id="423" name=""/>
+          <p:cNvPr id="475" name=""/>
           <p:cNvCxnSpPr>
             <a:stCxn xmlns:a="http://schemas.openxmlformats.org/drawingml/2006/main" id="11" idx="3"/>
             <a:endCxn xmlns:a="http://schemas.openxmlformats.org/drawingml/2006/main" id="15" idx="1"/>
@@ -18167,7 +13498,7 @@
       </p:cxnSp>
       <p:cxnSp>
         <p:nvCxnSpPr>
-          <p:cNvPr id="424" name=""/>
+          <p:cNvPr id="476" name=""/>
           <p:cNvCxnSpPr>
             <a:stCxn xmlns:a="http://schemas.openxmlformats.org/drawingml/2006/main" id="15" idx="3"/>
             <a:endCxn xmlns:a="http://schemas.openxmlformats.org/drawingml/2006/main" id="19" idx="1"/>
@@ -18248,7 +13579,7 @@
                 <a:ea typeface="Calibri"/>
                 <a:cs typeface="Calibri"/>
               </a:rPr>
-              <a:t>Lesson 07 maps these stage objects to trace spans—no pipeline rewrite.</a:t>
+              <a:t>Six figures explain the complete retrieval argument.</a:t>
             </a:r>
           </a:p>
         </p:txBody>
@@ -18310,7 +13641,7 @@
                 <a:ea typeface="Calibri"/>
                 <a:cs typeface="Calibri"/>
               </a:rPr>
-              <a:t>offline example · timings vary by machine</a:t>
+              <a:t>16 cells · 8 code</a:t>
             </a:r>
           </a:p>
         </p:txBody>
@@ -18372,7 +13703,7 @@
                 <a:ea typeface="Calibri"/>
                 <a:cs typeface="Calibri"/>
               </a:rPr>
-              <a:t>future spans · inputs · outputs · duration</a:t>
+              <a:t>offline deterministic · live embeddings optional</a:t>
             </a:r>
           </a:p>
         </p:txBody>
@@ -18562,7 +13893,7 @@
                 <a:ea typeface="Calibri"/>
                 <a:cs typeface="Calibri"/>
               </a:rPr>
-              <a:t>OBSERVE</a:t>
+              <a:t>LAB</a:t>
             </a:r>
           </a:p>
         </p:txBody>
